--- a/docs/decks/sinopac-dmp-proposal-v0.1.pptx
+++ b/docs/decks/sinopac-dmp-proposal-v0.1.pptx
@@ -128,7 +128,7 @@
   <p:extLst>
     <p:ext uri="{521415D9-36F7-43E2-AB2F-B90AF26B5E84}">
       <p14:sectionLst xmlns:p14="http://schemas.microsoft.com/office/powerpoint/2010/main">
-        <p14:section name="提案簡報初稿" id="{cf54235b-0a9c-2482-5626-c399861731fb}">
+        <p14:section name="提案簡報初稿" id="{58d5e21b-88e6-60d9-f988-9c994b627623}">
           <p14:sldIdLst>
             <p14:sldId id="256"/>
             <p14:sldId id="257"/>
@@ -147,7 +147,7 @@
             <p14:sldId id="270"/>
           </p14:sldIdLst>
         </p14:section>
-        <p14:section name="報價初版（未稅）" id="{75e5d254-35ac-9641-3189-d32e9f7a621e}">
+        <p14:section name="報價初版（未稅）" id="{d1bda746-b987-a964-d01b-5c8cd217bed5}">
           <p14:sldIdLst>
             <p14:sldId id="271"/>
             <p14:sldId id="272"/>
@@ -156,7 +156,7 @@
             <p14:sldId id="275"/>
           </p14:sldIdLst>
         </p14:section>
-        <p14:section name="週一會前會" id="{42f13f24-5dde-3dba-445e-6e4a33b0f66e}">
+        <p14:section name="週一會前會" id="{ced92306-0343-fe29-4bef-529d27eaccc8}">
           <p14:sldIdLst>
             <p14:sldId id="276"/>
             <p14:sldId id="277"/>
@@ -8284,7 +8284,7 @@
                   <a:schemeClr val="tx1"/>
                 </a:solidFill>
               </a:rPr>
-              <a:t>七人共 1,715 人日，M0–M5 開發期全員全職</a:t>
+              <a:t>預估 1,020 人天：研發兩人各 200，其餘 100–150</a:t>
             </a:r>
             <a:endParaRPr lang="en-US" sz="2400" dirty="0"/>
           </a:p>
@@ -8305,7 +8305,7 @@
           </p:nvPr>
         </p:nvGraphicFramePr>
         <p:xfrm>
-          <a:off x="457200" y="1371600"/>
+          <a:off x="457200" y="1188720"/>
           <a:ext cx="8229600" cy="914400"/>
         </p:xfrm>
         <a:graphic>
@@ -8313,12 +8313,11 @@
             <a:tbl>
               <a:tblPr/>
               <a:tblGrid>
-                <a:gridCol w="2103120"/>
-                <a:gridCol w="2743200"/>
-                <a:gridCol w="914400"/>
-                <a:gridCol w="2468880"/>
+                <a:gridCol w="2377440"/>
+                <a:gridCol w="1188720"/>
+                <a:gridCol w="4663440"/>
               </a:tblGrid>
-              <a:tr h="548640">
+              <a:tr h="310896">
                 <a:tc>
                   <a:txBody>
                     <a:bodyPr/>
@@ -8328,14 +8327,14 @@
                         <a:buNone/>
                       </a:pPr>
                       <a:r>
-                        <a:rPr lang="en-US" sz="1400" b="1" dirty="0">
-                          <a:solidFill>
-                            <a:schemeClr val="tx1"/>
-                          </a:solidFill>
-                        </a:rPr>
-                        <a:t>階段</a:t>
-                      </a:r>
-                      <a:endParaRPr lang="en-US" sz="1400" dirty="0"/>
+                        <a:rPr lang="en-US" sz="1300" b="1" dirty="0">
+                          <a:solidFill>
+                            <a:schemeClr val="tx1"/>
+                          </a:solidFill>
+                        </a:rPr>
+                        <a:t>角色</a:t>
+                      </a:r>
+                      <a:endParaRPr lang="en-US" sz="1300" dirty="0"/>
                     </a:p>
                   </a:txBody>
                   <a:tcPr marL="76200" marR="76200" marT="38100" marB="38100" anchor="ctr">
@@ -8364,18 +8363,18 @@
                     <a:bodyPr/>
                     <a:lstStyle/>
                     <a:p>
-                      <a:pPr algn="l" indent="0" marL="0">
-                        <a:buNone/>
-                      </a:pPr>
-                      <a:r>
-                        <a:rPr lang="en-US" sz="1400" b="1" dirty="0">
-                          <a:solidFill>
-                            <a:schemeClr val="tx1"/>
-                          </a:solidFill>
-                        </a:rPr>
-                        <a:t>期間</a:t>
-                      </a:r>
-                      <a:endParaRPr lang="en-US" sz="1400" dirty="0"/>
+                      <a:pPr algn="r" indent="0" marL="0">
+                        <a:buNone/>
+                      </a:pPr>
+                      <a:r>
+                        <a:rPr lang="en-US" sz="1300" b="1" dirty="0">
+                          <a:solidFill>
+                            <a:schemeClr val="tx1"/>
+                          </a:solidFill>
+                        </a:rPr>
+                        <a:t>預估人天</a:t>
+                      </a:r>
+                      <a:endParaRPr lang="en-US" sz="1300" dirty="0"/>
                     </a:p>
                   </a:txBody>
                   <a:tcPr marL="76200" marR="76200" marT="38100" marB="38100" anchor="ctr">
@@ -8404,18 +8403,18 @@
                     <a:bodyPr/>
                     <a:lstStyle/>
                     <a:p>
-                      <a:pPr algn="r" indent="0" marL="0">
-                        <a:buNone/>
-                      </a:pPr>
-                      <a:r>
-                        <a:rPr lang="en-US" sz="1400" b="1" dirty="0">
-                          <a:solidFill>
-                            <a:schemeClr val="tx1"/>
-                          </a:solidFill>
-                        </a:rPr>
-                        <a:t>每人人日</a:t>
-                      </a:r>
-                      <a:endParaRPr lang="en-US" sz="1400" dirty="0"/>
+                      <a:pPr algn="l" indent="0" marL="0">
+                        <a:buNone/>
+                      </a:pPr>
+                      <a:r>
+                        <a:rPr lang="en-US" sz="1300" b="1" dirty="0">
+                          <a:solidFill>
+                            <a:schemeClr val="tx1"/>
+                          </a:solidFill>
+                        </a:rPr>
+                        <a:t>主要工作</a:t>
+                      </a:r>
+                      <a:endParaRPr lang="en-US" sz="1300" dirty="0"/>
                     </a:p>
                   </a:txBody>
                   <a:tcPr marL="76200" marR="76200" marT="38100" marB="38100" anchor="ctr">
@@ -8439,6 +8438,8 @@
                     </a:lnB>
                   </a:tcPr>
                 </a:tc>
+              </a:tr>
+              <a:tr h="310896">
                 <a:tc>
                   <a:txBody>
                     <a:bodyPr/>
@@ -8448,39 +8449,101 @@
                         <a:buNone/>
                       </a:pPr>
                       <a:r>
-                        <a:rPr lang="en-US" sz="1400" b="1" dirty="0">
-                          <a:solidFill>
-                            <a:schemeClr val="tx1"/>
-                          </a:solidFill>
-                        </a:rPr>
-                        <a:t>投入</a:t>
-                      </a:r>
-                      <a:endParaRPr lang="en-US" sz="1400" dirty="0"/>
-                    </a:p>
-                  </a:txBody>
-                  <a:tcPr marL="76200" marR="76200" marT="38100" marB="38100" anchor="ctr">
-                    <a:lnL w="0" cap="flat" cmpd="sng" algn="ctr">
-                      <a:noFill/>
-                    </a:lnL>
-                    <a:lnR w="0" cap="flat" cmpd="sng" algn="ctr">
-                      <a:noFill/>
-                    </a:lnR>
-                    <a:lnT w="0" cap="flat" cmpd="sng" algn="ctr">
-                      <a:noFill/>
-                    </a:lnT>
-                    <a:lnB w="15875" cap="flat" cmpd="sng" algn="ctr">
-                      <a:solidFill>
-                        <a:srgbClr val="C9D2D8"/>
-                      </a:solidFill>
-                      <a:prstDash val="solid"/>
-                      <a:round/>
-                      <a:headEnd type="none" w="med" len="med"/>
-                      <a:tailEnd type="none" w="med" len="med"/>
+                        <a:rPr lang="en-US" sz="1300" b="1" dirty="0">
+                          <a:solidFill>
+                            <a:schemeClr val="tx1"/>
+                          </a:solidFill>
+                        </a:rPr>
+                        <a:t>研發 R1（資料與查詢）</a:t>
+                      </a:r>
+                      <a:endParaRPr lang="en-US" sz="1300" dirty="0"/>
+                    </a:p>
+                  </a:txBody>
+                  <a:tcPr marL="76200" marR="76200" marT="38100" marB="38100" anchor="ctr">
+                    <a:lnL w="0" cap="flat" cmpd="sng" algn="ctr">
+                      <a:noFill/>
+                    </a:lnL>
+                    <a:lnR w="0" cap="flat" cmpd="sng" algn="ctr">
+                      <a:noFill/>
+                    </a:lnR>
+                    <a:lnT w="0" cap="flat" cmpd="sng" algn="ctr">
+                      <a:noFill/>
+                    </a:lnT>
+                    <a:lnB w="0" cap="flat" cmpd="sng" algn="ctr">
+                      <a:noFill/>
+                    </a:lnB>
+                  </a:tcPr>
+                </a:tc>
+                <a:tc>
+                  <a:txBody>
+                    <a:bodyPr/>
+                    <a:lstStyle/>
+                    <a:p>
+                      <a:pPr algn="r" indent="0" marL="0">
+                        <a:buNone/>
+                      </a:pPr>
+                      <a:r>
+                        <a:rPr lang="en-US" sz="1300" dirty="0">
+                          <a:solidFill>
+                            <a:schemeClr val="tx1"/>
+                          </a:solidFill>
+                        </a:rPr>
+                        <a:t>200</a:t>
+                      </a:r>
+                      <a:endParaRPr lang="en-US" sz="1300" dirty="0"/>
+                    </a:p>
+                  </a:txBody>
+                  <a:tcPr marL="76200" marR="76200" marT="38100" marB="38100" anchor="ctr">
+                    <a:lnL w="0" cap="flat" cmpd="sng" algn="ctr">
+                      <a:noFill/>
+                    </a:lnL>
+                    <a:lnR w="0" cap="flat" cmpd="sng" algn="ctr">
+                      <a:noFill/>
+                    </a:lnR>
+                    <a:lnT w="0" cap="flat" cmpd="sng" algn="ctr">
+                      <a:noFill/>
+                    </a:lnT>
+                    <a:lnB w="0" cap="flat" cmpd="sng" algn="ctr">
+                      <a:noFill/>
+                    </a:lnB>
+                  </a:tcPr>
+                </a:tc>
+                <a:tc>
+                  <a:txBody>
+                    <a:bodyPr/>
+                    <a:lstStyle/>
+                    <a:p>
+                      <a:pPr algn="l" indent="0" marL="0">
+                        <a:buNone/>
+                      </a:pPr>
+                      <a:r>
+                        <a:rPr lang="en-US" sz="1300" dirty="0">
+                          <a:solidFill>
+                            <a:schemeClr val="tx1"/>
+                          </a:solidFill>
+                        </a:rPr>
+                        <a:t>接入管線、語意編譯器、ClickHouse、遷移工具</a:t>
+                      </a:r>
+                      <a:endParaRPr lang="en-US" sz="1300" dirty="0"/>
+                    </a:p>
+                  </a:txBody>
+                  <a:tcPr marL="76200" marR="76200" marT="38100" marB="38100" anchor="ctr">
+                    <a:lnL w="0" cap="flat" cmpd="sng" algn="ctr">
+                      <a:noFill/>
+                    </a:lnL>
+                    <a:lnR w="0" cap="flat" cmpd="sng" algn="ctr">
+                      <a:noFill/>
+                    </a:lnR>
+                    <a:lnT w="0" cap="flat" cmpd="sng" algn="ctr">
+                      <a:noFill/>
+                    </a:lnT>
+                    <a:lnB w="0" cap="flat" cmpd="sng" algn="ctr">
+                      <a:noFill/>
                     </a:lnB>
                   </a:tcPr>
                 </a:tc>
               </a:tr>
-              <a:tr h="548640">
+              <a:tr h="310896">
                 <a:tc>
                   <a:txBody>
                     <a:bodyPr/>
@@ -8490,14 +8553,14 @@
                         <a:buNone/>
                       </a:pPr>
                       <a:r>
-                        <a:rPr lang="en-US" sz="1400" b="1" dirty="0">
-                          <a:solidFill>
-                            <a:schemeClr val="tx1"/>
-                          </a:solidFill>
-                        </a:rPr>
-                        <a:t>M0–M5 開發</a:t>
-                      </a:r>
-                      <a:endParaRPr lang="en-US" sz="1400" dirty="0"/>
+                        <a:rPr lang="en-US" sz="1300" b="1" dirty="0">
+                          <a:solidFill>
+                            <a:schemeClr val="tx1"/>
+                          </a:solidFill>
+                        </a:rPr>
+                        <a:t>研發 R2（應用與前端）</a:t>
+                      </a:r>
+                      <a:endParaRPr lang="en-US" sz="1300" dirty="0"/>
                     </a:p>
                   </a:txBody>
                   <a:tcPr marL="76200" marR="76200" marT="38100" marB="38100" anchor="ctr">
@@ -8520,18 +8583,52 @@
                     <a:bodyPr/>
                     <a:lstStyle/>
                     <a:p>
+                      <a:pPr algn="r" indent="0" marL="0">
+                        <a:buNone/>
+                      </a:pPr>
+                      <a:r>
+                        <a:rPr lang="en-US" sz="1300" dirty="0">
+                          <a:solidFill>
+                            <a:schemeClr val="tx1"/>
+                          </a:solidFill>
+                        </a:rPr>
+                        <a:t>200</a:t>
+                      </a:r>
+                      <a:endParaRPr lang="en-US" sz="1300" dirty="0"/>
+                    </a:p>
+                  </a:txBody>
+                  <a:tcPr marL="76200" marR="76200" marT="38100" marB="38100" anchor="ctr">
+                    <a:lnL w="0" cap="flat" cmpd="sng" algn="ctr">
+                      <a:noFill/>
+                    </a:lnL>
+                    <a:lnR w="0" cap="flat" cmpd="sng" algn="ctr">
+                      <a:noFill/>
+                    </a:lnR>
+                    <a:lnT w="0" cap="flat" cmpd="sng" algn="ctr">
+                      <a:noFill/>
+                    </a:lnT>
+                    <a:lnB w="0" cap="flat" cmpd="sng" algn="ctr">
+                      <a:noFill/>
+                    </a:lnB>
+                  </a:tcPr>
+                </a:tc>
+                <a:tc>
+                  <a:txBody>
+                    <a:bodyPr/>
+                    <a:lstStyle/>
+                    <a:p>
                       <a:pPr algn="l" indent="0" marL="0">
                         <a:buNone/>
                       </a:pPr>
                       <a:r>
-                        <a:rPr lang="en-US" sz="1400" dirty="0">
-                          <a:solidFill>
-                            <a:schemeClr val="tx1"/>
-                          </a:solidFill>
-                        </a:rPr>
-                        <a:t>2026-11-02 ～ 2027-03-26</a:t>
-                      </a:r>
-                      <a:endParaRPr lang="en-US" sz="1400" dirty="0"/>
+                        <a:rPr lang="en-US" sz="1300" dirty="0">
+                          <a:solidFill>
+                            <a:schemeClr val="tx1"/>
+                          </a:solidFill>
+                        </a:rPr>
+                        <a:t>API、前端各模組、權限與審計、推送</a:t>
+                      </a:r>
+                      <a:endParaRPr lang="en-US" sz="1300" dirty="0"/>
                     </a:p>
                   </a:txBody>
                   <a:tcPr marL="76200" marR="76200" marT="38100" marB="38100" anchor="ctr">
@@ -8549,6 +8646,42 @@
                     </a:lnB>
                   </a:tcPr>
                 </a:tc>
+              </a:tr>
+              <a:tr h="310896">
+                <a:tc>
+                  <a:txBody>
+                    <a:bodyPr/>
+                    <a:lstStyle/>
+                    <a:p>
+                      <a:pPr algn="l" indent="0" marL="0">
+                        <a:buNone/>
+                      </a:pPr>
+                      <a:r>
+                        <a:rPr lang="en-US" sz="1300" b="1" dirty="0">
+                          <a:solidFill>
+                            <a:schemeClr val="tx1"/>
+                          </a:solidFill>
+                        </a:rPr>
+                        <a:t>專案經理</a:t>
+                      </a:r>
+                      <a:endParaRPr lang="en-US" sz="1300" dirty="0"/>
+                    </a:p>
+                  </a:txBody>
+                  <a:tcPr marL="76200" marR="76200" marT="38100" marB="38100" anchor="ctr">
+                    <a:lnL w="0" cap="flat" cmpd="sng" algn="ctr">
+                      <a:noFill/>
+                    </a:lnL>
+                    <a:lnR w="0" cap="flat" cmpd="sng" algn="ctr">
+                      <a:noFill/>
+                    </a:lnR>
+                    <a:lnT w="0" cap="flat" cmpd="sng" algn="ctr">
+                      <a:noFill/>
+                    </a:lnT>
+                    <a:lnB w="0" cap="flat" cmpd="sng" algn="ctr">
+                      <a:noFill/>
+                    </a:lnB>
+                  </a:tcPr>
+                </a:tc>
                 <a:tc>
                   <a:txBody>
                     <a:bodyPr/>
@@ -8558,14 +8691,14 @@
                         <a:buNone/>
                       </a:pPr>
                       <a:r>
-                        <a:rPr lang="en-US" sz="1400" dirty="0">
-                          <a:solidFill>
-                            <a:schemeClr val="tx1"/>
-                          </a:solidFill>
-                        </a:rPr>
-                        <a:t>105</a:t>
-                      </a:r>
-                      <a:endParaRPr lang="en-US" sz="1400" dirty="0"/>
+                        <a:rPr lang="en-US" sz="1300" dirty="0">
+                          <a:solidFill>
+                            <a:schemeClr val="tx1"/>
+                          </a:solidFill>
+                        </a:rPr>
+                        <a:t>150</a:t>
+                      </a:r>
+                      <a:endParaRPr lang="en-US" sz="1300" dirty="0"/>
                     </a:p>
                   </a:txBody>
                   <a:tcPr marL="76200" marR="76200" marT="38100" marB="38100" anchor="ctr">
@@ -8592,14 +8725,14 @@
                         <a:buNone/>
                       </a:pPr>
                       <a:r>
-                        <a:rPr lang="en-US" sz="1400" dirty="0">
-                          <a:solidFill>
-                            <a:schemeClr val="tx1"/>
-                          </a:solidFill>
-                        </a:rPr>
-                        <a:t>七人全職</a:t>
-                      </a:r>
-                      <a:endParaRPr lang="en-US" sz="1400" dirty="0"/>
+                        <a:rPr lang="en-US" sz="1300" dirty="0">
+                          <a:solidFill>
+                            <a:schemeClr val="tx1"/>
+                          </a:solidFill>
+                        </a:rPr>
+                        <a:t>時程、三方窗口、週會與風險追蹤</a:t>
+                      </a:r>
+                      <a:endParaRPr lang="en-US" sz="1300" dirty="0"/>
                     </a:p>
                   </a:txBody>
                   <a:tcPr marL="76200" marR="76200" marT="38100" marB="38100" anchor="ctr">
@@ -8618,7 +8751,7 @@
                   </a:tcPr>
                 </a:tc>
               </a:tr>
-              <a:tr h="548640">
+              <a:tr h="310896">
                 <a:tc>
                   <a:txBody>
                     <a:bodyPr/>
@@ -8628,14 +8761,14 @@
                         <a:buNone/>
                       </a:pPr>
                       <a:r>
-                        <a:rPr lang="en-US" sz="1400" b="1" dirty="0">
-                          <a:solidFill>
-                            <a:schemeClr val="tx1"/>
-                          </a:solidFill>
-                        </a:rPr>
-                        <a:t>緩衝與 UAT 準備</a:t>
-                      </a:r>
-                      <a:endParaRPr lang="en-US" sz="1400" dirty="0"/>
+                        <a:rPr lang="en-US" sz="1300" b="1" dirty="0">
+                          <a:solidFill>
+                            <a:schemeClr val="tx1"/>
+                          </a:solidFill>
+                        </a:rPr>
+                        <a:t>數據分析師 A</a:t>
+                      </a:r>
+                      <a:endParaRPr lang="en-US" sz="1300" dirty="0"/>
                     </a:p>
                   </a:txBody>
                   <a:tcPr marL="76200" marR="76200" marT="38100" marB="38100" anchor="ctr">
@@ -8658,18 +8791,52 @@
                     <a:bodyPr/>
                     <a:lstStyle/>
                     <a:p>
+                      <a:pPr algn="r" indent="0" marL="0">
+                        <a:buNone/>
+                      </a:pPr>
+                      <a:r>
+                        <a:rPr lang="en-US" sz="1300" dirty="0">
+                          <a:solidFill>
+                            <a:schemeClr val="tx1"/>
+                          </a:solidFill>
+                        </a:rPr>
+                        <a:t>150</a:t>
+                      </a:r>
+                      <a:endParaRPr lang="en-US" sz="1300" dirty="0"/>
+                    </a:p>
+                  </a:txBody>
+                  <a:tcPr marL="76200" marR="76200" marT="38100" marB="38100" anchor="ctr">
+                    <a:lnL w="0" cap="flat" cmpd="sng" algn="ctr">
+                      <a:noFill/>
+                    </a:lnL>
+                    <a:lnR w="0" cap="flat" cmpd="sng" algn="ctr">
+                      <a:noFill/>
+                    </a:lnR>
+                    <a:lnT w="0" cap="flat" cmpd="sng" algn="ctr">
+                      <a:noFill/>
+                    </a:lnT>
+                    <a:lnB w="0" cap="flat" cmpd="sng" algn="ctr">
+                      <a:noFill/>
+                    </a:lnB>
+                  </a:tcPr>
+                </a:tc>
+                <a:tc>
+                  <a:txBody>
+                    <a:bodyPr/>
+                    <a:lstStyle/>
+                    <a:p>
                       <a:pPr algn="l" indent="0" marL="0">
                         <a:buNone/>
                       </a:pPr>
                       <a:r>
-                        <a:rPr lang="en-US" sz="1400" dirty="0">
-                          <a:solidFill>
-                            <a:schemeClr val="tx1"/>
-                          </a:solidFill>
-                        </a:rPr>
-                        <a:t>2027-03-29 ～ 06-29</a:t>
-                      </a:r>
-                      <a:endParaRPr lang="en-US" sz="1400" dirty="0"/>
+                        <a:rPr lang="en-US" sz="1300" dirty="0">
+                          <a:solidFill>
+                            <a:schemeClr val="tx1"/>
+                          </a:solidFill>
+                        </a:rPr>
+                        <a:t>神策盤點與導出、橋接表、並行期對帳</a:t>
+                      </a:r>
+                      <a:endParaRPr lang="en-US" sz="1300" dirty="0"/>
                     </a:p>
                   </a:txBody>
                   <a:tcPr marL="76200" marR="76200" marT="38100" marB="38100" anchor="ctr">
@@ -8687,6 +8854,42 @@
                     </a:lnB>
                   </a:tcPr>
                 </a:tc>
+              </a:tr>
+              <a:tr h="310896">
+                <a:tc>
+                  <a:txBody>
+                    <a:bodyPr/>
+                    <a:lstStyle/>
+                    <a:p>
+                      <a:pPr algn="l" indent="0" marL="0">
+                        <a:buNone/>
+                      </a:pPr>
+                      <a:r>
+                        <a:rPr lang="en-US" sz="1300" b="1" dirty="0">
+                          <a:solidFill>
+                            <a:schemeClr val="tx1"/>
+                          </a:solidFill>
+                        </a:rPr>
+                        <a:t>產品</a:t>
+                      </a:r>
+                      <a:endParaRPr lang="en-US" sz="1300" dirty="0"/>
+                    </a:p>
+                  </a:txBody>
+                  <a:tcPr marL="76200" marR="76200" marT="38100" marB="38100" anchor="ctr">
+                    <a:lnL w="0" cap="flat" cmpd="sng" algn="ctr">
+                      <a:noFill/>
+                    </a:lnL>
+                    <a:lnR w="0" cap="flat" cmpd="sng" algn="ctr">
+                      <a:noFill/>
+                    </a:lnR>
+                    <a:lnT w="0" cap="flat" cmpd="sng" algn="ctr">
+                      <a:noFill/>
+                    </a:lnT>
+                    <a:lnB w="0" cap="flat" cmpd="sng" algn="ctr">
+                      <a:noFill/>
+                    </a:lnB>
+                  </a:tcPr>
+                </a:tc>
                 <a:tc>
                   <a:txBody>
                     <a:bodyPr/>
@@ -8696,14 +8899,14 @@
                         <a:buNone/>
                       </a:pPr>
                       <a:r>
-                        <a:rPr lang="en-US" sz="1400" dirty="0">
-                          <a:solidFill>
-                            <a:schemeClr val="tx1"/>
-                          </a:solidFill>
-                        </a:rPr>
-                        <a:t>65</a:t>
-                      </a:r>
-                      <a:endParaRPr lang="en-US" sz="1400" dirty="0"/>
+                        <a:rPr lang="en-US" sz="1300" dirty="0">
+                          <a:solidFill>
+                            <a:schemeClr val="tx1"/>
+                          </a:solidFill>
+                        </a:rPr>
+                        <a:t>100</a:t>
+                      </a:r>
+                      <a:endParaRPr lang="en-US" sz="1300" dirty="0"/>
                     </a:p>
                   </a:txBody>
                   <a:tcPr marL="76200" marR="76200" marT="38100" marB="38100" anchor="ctr">
@@ -8730,14 +8933,14 @@
                         <a:buNone/>
                       </a:pPr>
                       <a:r>
-                        <a:rPr lang="en-US" sz="1400" dirty="0">
-                          <a:solidFill>
-                            <a:schemeClr val="tx1"/>
-                          </a:solidFill>
-                        </a:rPr>
-                        <a:t>運維 0.5，其餘全職</a:t>
-                      </a:r>
-                      <a:endParaRPr lang="en-US" sz="1400" dirty="0"/>
+                        <a:rPr lang="en-US" sz="1300" dirty="0">
+                          <a:solidFill>
+                            <a:schemeClr val="tx1"/>
+                          </a:solidFill>
+                        </a:rPr>
+                        <a:t>需求與規格、驗收標準、UAT 協調</a:t>
+                      </a:r>
+                      <a:endParaRPr lang="en-US" sz="1300" dirty="0"/>
                     </a:p>
                   </a:txBody>
                   <a:tcPr marL="76200" marR="76200" marT="38100" marB="38100" anchor="ctr">
@@ -8756,7 +8959,7 @@
                   </a:tcPr>
                 </a:tc>
               </a:tr>
-              <a:tr h="548640">
+              <a:tr h="310896">
                 <a:tc>
                   <a:txBody>
                     <a:bodyPr/>
@@ -8766,14 +8969,14 @@
                         <a:buNone/>
                       </a:pPr>
                       <a:r>
-                        <a:rPr lang="en-US" sz="1400" b="1" dirty="0">
-                          <a:solidFill>
-                            <a:schemeClr val="tx1"/>
-                          </a:solidFill>
-                        </a:rPr>
-                        <a:t>UAT 修正與正式環境</a:t>
-                      </a:r>
-                      <a:endParaRPr lang="en-US" sz="1400" dirty="0"/>
+                        <a:rPr lang="en-US" sz="1300" b="1" dirty="0">
+                          <a:solidFill>
+                            <a:schemeClr val="tx1"/>
+                          </a:solidFill>
+                        </a:rPr>
+                        <a:t>系統工程師（運維）</a:t>
+                      </a:r>
+                      <a:endParaRPr lang="en-US" sz="1300" dirty="0"/>
                     </a:p>
                   </a:txBody>
                   <a:tcPr marL="76200" marR="76200" marT="38100" marB="38100" anchor="ctr">
@@ -8796,18 +8999,52 @@
                     <a:bodyPr/>
                     <a:lstStyle/>
                     <a:p>
+                      <a:pPr algn="r" indent="0" marL="0">
+                        <a:buNone/>
+                      </a:pPr>
+                      <a:r>
+                        <a:rPr lang="en-US" sz="1300" dirty="0">
+                          <a:solidFill>
+                            <a:schemeClr val="tx1"/>
+                          </a:solidFill>
+                        </a:rPr>
+                        <a:t>100</a:t>
+                      </a:r>
+                      <a:endParaRPr lang="en-US" sz="1300" dirty="0"/>
+                    </a:p>
+                  </a:txBody>
+                  <a:tcPr marL="76200" marR="76200" marT="38100" marB="38100" anchor="ctr">
+                    <a:lnL w="0" cap="flat" cmpd="sng" algn="ctr">
+                      <a:noFill/>
+                    </a:lnL>
+                    <a:lnR w="0" cap="flat" cmpd="sng" algn="ctr">
+                      <a:noFill/>
+                    </a:lnR>
+                    <a:lnT w="0" cap="flat" cmpd="sng" algn="ctr">
+                      <a:noFill/>
+                    </a:lnT>
+                    <a:lnB w="0" cap="flat" cmpd="sng" algn="ctr">
+                      <a:noFill/>
+                    </a:lnB>
+                  </a:tcPr>
+                </a:tc>
+                <a:tc>
+                  <a:txBody>
+                    <a:bodyPr/>
+                    <a:lstStyle/>
+                    <a:p>
                       <a:pPr algn="l" indent="0" marL="0">
                         <a:buNone/>
                       </a:pPr>
                       <a:r>
-                        <a:rPr lang="en-US" sz="1400" dirty="0">
-                          <a:solidFill>
-                            <a:schemeClr val="tx1"/>
-                          </a:solidFill>
-                        </a:rPr>
-                        <a:t>2027-07-01 ～ 09-29</a:t>
-                      </a:r>
-                      <a:endParaRPr lang="en-US" sz="1400" dirty="0"/>
+                        <a:rPr lang="en-US" sz="1300" dirty="0">
+                          <a:solidFill>
+                            <a:schemeClr val="tx1"/>
+                          </a:solidFill>
+                        </a:rPr>
+                        <a:t>環境建置、監控告警、備份與 DR、上線</a:t>
+                      </a:r>
+                      <a:endParaRPr lang="en-US" sz="1300" dirty="0"/>
                     </a:p>
                   </a:txBody>
                   <a:tcPr marL="76200" marR="76200" marT="38100" marB="38100" anchor="ctr">
@@ -8825,6 +9062,42 @@
                     </a:lnB>
                   </a:tcPr>
                 </a:tc>
+              </a:tr>
+              <a:tr h="310896">
+                <a:tc>
+                  <a:txBody>
+                    <a:bodyPr/>
+                    <a:lstStyle/>
+                    <a:p>
+                      <a:pPr algn="l" indent="0" marL="0">
+                        <a:buNone/>
+                      </a:pPr>
+                      <a:r>
+                        <a:rPr lang="en-US" sz="1300" b="1" dirty="0">
+                          <a:solidFill>
+                            <a:schemeClr val="tx1"/>
+                          </a:solidFill>
+                        </a:rPr>
+                        <a:t>數據分析師 B</a:t>
+                      </a:r>
+                      <a:endParaRPr lang="en-US" sz="1300" dirty="0"/>
+                    </a:p>
+                  </a:txBody>
+                  <a:tcPr marL="76200" marR="76200" marT="38100" marB="38100" anchor="ctr">
+                    <a:lnL w="0" cap="flat" cmpd="sng" algn="ctr">
+                      <a:noFill/>
+                    </a:lnL>
+                    <a:lnR w="0" cap="flat" cmpd="sng" algn="ctr">
+                      <a:noFill/>
+                    </a:lnR>
+                    <a:lnT w="0" cap="flat" cmpd="sng" algn="ctr">
+                      <a:noFill/>
+                    </a:lnT>
+                    <a:lnB w="0" cap="flat" cmpd="sng" algn="ctr">
+                      <a:noFill/>
+                    </a:lnB>
+                  </a:tcPr>
+                </a:tc>
                 <a:tc>
                   <a:txBody>
                     <a:bodyPr/>
@@ -8834,14 +9107,14 @@
                         <a:buNone/>
                       </a:pPr>
                       <a:r>
-                        <a:rPr lang="en-US" sz="1400" dirty="0">
-                          <a:solidFill>
-                            <a:schemeClr val="tx1"/>
-                          </a:solidFill>
-                        </a:rPr>
-                        <a:t>65</a:t>
-                      </a:r>
-                      <a:endParaRPr lang="en-US" sz="1400" dirty="0"/>
+                        <a:rPr lang="en-US" sz="1300" dirty="0">
+                          <a:solidFill>
+                            <a:schemeClr val="tx1"/>
+                          </a:solidFill>
+                        </a:rPr>
+                        <a:t>100</a:t>
+                      </a:r>
+                      <a:endParaRPr lang="en-US" sz="1300" dirty="0"/>
                     </a:p>
                   </a:txBody>
                   <a:tcPr marL="76200" marR="76200" marT="38100" marB="38100" anchor="ctr">
@@ -8868,14 +9141,14 @@
                         <a:buNone/>
                       </a:pPr>
                       <a:r>
-                        <a:rPr lang="en-US" sz="1400" dirty="0">
-                          <a:solidFill>
-                            <a:schemeClr val="tx1"/>
-                          </a:solidFill>
-                        </a:rPr>
-                        <a:t>產品、分析師 A 0.5，其餘全職</a:t>
-                      </a:r>
-                      <a:endParaRPr lang="en-US" sz="1400" dirty="0"/>
+                        <a:rPr lang="en-US" sz="1300" dirty="0">
+                          <a:solidFill>
+                            <a:schemeClr val="tx1"/>
+                          </a:solidFill>
+                        </a:rPr>
+                        <a:t>看板、操作手冊、教育訓練、PD 後調優</a:t>
+                      </a:r>
+                      <a:endParaRPr lang="en-US" sz="1300" dirty="0"/>
                     </a:p>
                   </a:txBody>
                   <a:tcPr marL="76200" marR="76200" marT="38100" marB="38100" anchor="ctr">
@@ -8894,7 +9167,7 @@
                   </a:tcPr>
                 </a:tc>
               </a:tr>
-              <a:tr h="548640">
+              <a:tr h="310896">
                 <a:tc>
                   <a:txBody>
                     <a:bodyPr/>
@@ -8904,14 +9177,14 @@
                         <a:buNone/>
                       </a:pPr>
                       <a:r>
-                        <a:rPr lang="en-US" sz="1400" b="1" dirty="0">
-                          <a:solidFill>
-                            <a:schemeClr val="tx1"/>
-                          </a:solidFill>
-                        </a:rPr>
-                        <a:t>PD 後交付調優</a:t>
-                      </a:r>
-                      <a:endParaRPr lang="en-US" sz="1400" dirty="0"/>
+                        <a:rPr lang="en-US" sz="1300" b="1" dirty="0">
+                          <a:solidFill>
+                            <a:schemeClr val="tx1"/>
+                          </a:solidFill>
+                        </a:rPr>
+                        <a:t>ClickHouse 顧問</a:t>
+                      </a:r>
+                      <a:endParaRPr lang="en-US" sz="1300" dirty="0"/>
                     </a:p>
                   </a:txBody>
                   <a:tcPr marL="76200" marR="76200" marT="38100" marB="38100" anchor="ctr">
@@ -8934,86 +9207,52 @@
                     <a:bodyPr/>
                     <a:lstStyle/>
                     <a:p>
+                      <a:pPr algn="r" indent="0" marL="0">
+                        <a:buNone/>
+                      </a:pPr>
+                      <a:r>
+                        <a:rPr lang="en-US" sz="1300" dirty="0">
+                          <a:solidFill>
+                            <a:schemeClr val="tx1"/>
+                          </a:solidFill>
+                        </a:rPr>
+                        <a:t>20</a:t>
+                      </a:r>
+                      <a:endParaRPr lang="en-US" sz="1300" dirty="0"/>
+                    </a:p>
+                  </a:txBody>
+                  <a:tcPr marL="76200" marR="76200" marT="38100" marB="38100" anchor="ctr">
+                    <a:lnL w="0" cap="flat" cmpd="sng" algn="ctr">
+                      <a:noFill/>
+                    </a:lnL>
+                    <a:lnR w="0" cap="flat" cmpd="sng" algn="ctr">
+                      <a:noFill/>
+                    </a:lnR>
+                    <a:lnT w="0" cap="flat" cmpd="sng" algn="ctr">
+                      <a:noFill/>
+                    </a:lnT>
+                    <a:lnB w="0" cap="flat" cmpd="sng" algn="ctr">
+                      <a:noFill/>
+                    </a:lnB>
+                  </a:tcPr>
+                </a:tc>
+                <a:tc>
+                  <a:txBody>
+                    <a:bodyPr/>
+                    <a:lstStyle/>
+                    <a:p>
                       <a:pPr algn="l" indent="0" marL="0">
                         <a:buNone/>
                       </a:pPr>
                       <a:r>
-                        <a:rPr lang="en-US" sz="1400" dirty="0">
-                          <a:solidFill>
-                            <a:schemeClr val="tx1"/>
-                          </a:solidFill>
-                        </a:rPr>
-                        <a:t>2027-10-01 ～ 11-30</a:t>
-                      </a:r>
-                      <a:endParaRPr lang="en-US" sz="1400" dirty="0"/>
-                    </a:p>
-                  </a:txBody>
-                  <a:tcPr marL="76200" marR="76200" marT="38100" marB="38100" anchor="ctr">
-                    <a:lnL w="0" cap="flat" cmpd="sng" algn="ctr">
-                      <a:noFill/>
-                    </a:lnL>
-                    <a:lnR w="0" cap="flat" cmpd="sng" algn="ctr">
-                      <a:noFill/>
-                    </a:lnR>
-                    <a:lnT w="0" cap="flat" cmpd="sng" algn="ctr">
-                      <a:noFill/>
-                    </a:lnT>
-                    <a:lnB w="0" cap="flat" cmpd="sng" algn="ctr">
-                      <a:noFill/>
-                    </a:lnB>
-                  </a:tcPr>
-                </a:tc>
-                <a:tc>
-                  <a:txBody>
-                    <a:bodyPr/>
-                    <a:lstStyle/>
-                    <a:p>
-                      <a:pPr algn="r" indent="0" marL="0">
-                        <a:buNone/>
-                      </a:pPr>
-                      <a:r>
-                        <a:rPr lang="en-US" sz="1400" dirty="0">
-                          <a:solidFill>
-                            <a:schemeClr val="tx1"/>
-                          </a:solidFill>
-                        </a:rPr>
-                        <a:t>45</a:t>
-                      </a:r>
-                      <a:endParaRPr lang="en-US" sz="1400" dirty="0"/>
-                    </a:p>
-                  </a:txBody>
-                  <a:tcPr marL="76200" marR="76200" marT="38100" marB="38100" anchor="ctr">
-                    <a:lnL w="0" cap="flat" cmpd="sng" algn="ctr">
-                      <a:noFill/>
-                    </a:lnL>
-                    <a:lnR w="0" cap="flat" cmpd="sng" algn="ctr">
-                      <a:noFill/>
-                    </a:lnR>
-                    <a:lnT w="0" cap="flat" cmpd="sng" algn="ctr">
-                      <a:noFill/>
-                    </a:lnT>
-                    <a:lnB w="0" cap="flat" cmpd="sng" algn="ctr">
-                      <a:noFill/>
-                    </a:lnB>
-                  </a:tcPr>
-                </a:tc>
-                <a:tc>
-                  <a:txBody>
-                    <a:bodyPr/>
-                    <a:lstStyle/>
-                    <a:p>
-                      <a:pPr algn="l" indent="0" marL="0">
-                        <a:buNone/>
-                      </a:pPr>
-                      <a:r>
-                        <a:rPr lang="en-US" sz="1400" dirty="0">
-                          <a:solidFill>
-                            <a:schemeClr val="tx1"/>
-                          </a:solidFill>
-                        </a:rPr>
-                        <a:t>分析師 B 全職，產品 0.3，其餘 0.5</a:t>
-                      </a:r>
-                      <a:endParaRPr lang="en-US" sz="1400" dirty="0"/>
+                        <a:rPr lang="en-US" sz="1300" dirty="0">
+                          <a:solidFill>
+                            <a:schemeClr val="tx1"/>
+                          </a:solidFill>
+                        </a:rPr>
+                        <a:t>架構與效能審查</a:t>
+                      </a:r>
+                      <a:endParaRPr lang="en-US" sz="1300" dirty="0"/>
                     </a:p>
                   </a:txBody>
                   <a:tcPr marL="76200" marR="76200" marT="38100" marB="38100" anchor="ctr">
@@ -9066,7 +9305,7 @@
                   <a:srgbClr val="7C8992"/>
                 </a:solidFill>
               </a:rPr>
-              <a:t>每人人日以每週 5 個工作日計；FTE 依 docs/31 §2a 里程碑分工</a:t>
+              <a:t>計價＝人天單價 × 預估人天；超出部分另計或改固定總價加風險準備</a:t>
             </a:r>
             <a:endParaRPr lang="en-US" sz="1100" dirty="0"/>
           </a:p>
@@ -9174,7 +9413,7 @@
                   <a:schemeClr val="tx1"/>
                 </a:solidFill>
               </a:rPr>
-              <a:t>基本方案 36,334,000 元未稅，含 CSM 選配為 37,006,000 元</a:t>
+              <a:t>基本方案 21,900,000 元未稅，含 CSM 選配為 22,700,000 元</a:t>
             </a:r>
             <a:endParaRPr lang="en-US" sz="2400" dirty="0"/>
           </a:p>
@@ -9208,7 +9447,7 @@
                 <a:gridCol w="1554480"/>
                 <a:gridCol w="2286000"/>
               </a:tblGrid>
-              <a:tr h="274320">
+              <a:tr h="292608">
                 <a:tc>
                   <a:txBody>
                     <a:bodyPr/>
@@ -9263,7 +9502,7 @@
                             <a:schemeClr val="tx1"/>
                           </a:solidFill>
                         </a:rPr>
-                        <a:t>人日</a:t>
+                        <a:t>人天</a:t>
                       </a:r>
                       <a:endParaRPr lang="en-US" sz="1300" dirty="0"/>
                     </a:p>
@@ -9370,7 +9609,7 @@
                   </a:tcPr>
                 </a:tc>
               </a:tr>
-              <a:tr h="274320">
+              <a:tr h="292608">
                 <a:tc>
                   <a:txBody>
                     <a:bodyPr/>
@@ -9419,7 +9658,7 @@
                             <a:schemeClr val="tx1"/>
                           </a:solidFill>
                         </a:rPr>
-                        <a:t>216</a:t>
+                        <a:t>100</a:t>
                       </a:r>
                       <a:endParaRPr lang="en-US" sz="1300" dirty="0"/>
                     </a:p>
@@ -9487,7 +9726,7 @@
                             <a:schemeClr val="tx1"/>
                           </a:solidFill>
                         </a:rPr>
-                        <a:t>5,400,000</a:t>
+                        <a:t>2,500,000</a:t>
                       </a:r>
                       <a:endParaRPr lang="en-US" sz="1300" dirty="0"/>
                     </a:p>
@@ -9508,7 +9747,7 @@
                   </a:tcPr>
                 </a:tc>
               </a:tr>
-              <a:tr h="274320">
+              <a:tr h="292608">
                 <a:tc>
                   <a:txBody>
                     <a:bodyPr/>
@@ -9557,7 +9796,7 @@
                             <a:schemeClr val="tx1"/>
                           </a:solidFill>
                         </a:rPr>
-                        <a:t>257</a:t>
+                        <a:t>200</a:t>
                       </a:r>
                       <a:endParaRPr lang="en-US" sz="1300" dirty="0"/>
                     </a:p>
@@ -9625,7 +9864,7 @@
                             <a:schemeClr val="tx1"/>
                           </a:solidFill>
                         </a:rPr>
-                        <a:t>6,425,000</a:t>
+                        <a:t>5,000,000</a:t>
                       </a:r>
                       <a:endParaRPr lang="en-US" sz="1300" dirty="0"/>
                     </a:p>
@@ -9646,7 +9885,7 @@
                   </a:tcPr>
                 </a:tc>
               </a:tr>
-              <a:tr h="274320">
+              <a:tr h="292608">
                 <a:tc>
                   <a:txBody>
                     <a:bodyPr/>
@@ -9695,7 +9934,7 @@
                             <a:schemeClr val="tx1"/>
                           </a:solidFill>
                         </a:rPr>
-                        <a:t>257</a:t>
+                        <a:t>200</a:t>
                       </a:r>
                       <a:endParaRPr lang="en-US" sz="1300" dirty="0"/>
                     </a:p>
@@ -9763,7 +10002,7 @@
                             <a:schemeClr val="tx1"/>
                           </a:solidFill>
                         </a:rPr>
-                        <a:t>6,425,000</a:t>
+                        <a:t>5,000,000</a:t>
                       </a:r>
                       <a:endParaRPr lang="en-US" sz="1300" dirty="0"/>
                     </a:p>
@@ -9784,7 +10023,7 @@
                   </a:tcPr>
                 </a:tc>
               </a:tr>
-              <a:tr h="274320">
+              <a:tr h="292608">
                 <a:tc>
                   <a:txBody>
                     <a:bodyPr/>
@@ -9833,7 +10072,7 @@
                             <a:schemeClr val="tx1"/>
                           </a:solidFill>
                         </a:rPr>
-                        <a:t>257</a:t>
+                        <a:t>150</a:t>
                       </a:r>
                       <a:endParaRPr lang="en-US" sz="1300" dirty="0"/>
                     </a:p>
@@ -9901,7 +10140,7 @@
                             <a:schemeClr val="tx1"/>
                           </a:solidFill>
                         </a:rPr>
-                        <a:t>5,140,000</a:t>
+                        <a:t>3,000,000</a:t>
                       </a:r>
                       <a:endParaRPr lang="en-US" sz="1300" dirty="0"/>
                     </a:p>
@@ -9922,7 +10161,7 @@
                   </a:tcPr>
                 </a:tc>
               </a:tr>
-              <a:tr h="274320">
+              <a:tr h="292608">
                 <a:tc>
                   <a:txBody>
                     <a:bodyPr/>
@@ -9971,7 +10210,7 @@
                             <a:schemeClr val="tx1"/>
                           </a:solidFill>
                         </a:rPr>
-                        <a:t>224</a:t>
+                        <a:t>100</a:t>
                       </a:r>
                       <a:endParaRPr lang="en-US" sz="1300" dirty="0"/>
                     </a:p>
@@ -10039,7 +10278,7 @@
                             <a:schemeClr val="tx1"/>
                           </a:solidFill>
                         </a:rPr>
-                        <a:t>4,480,000</a:t>
+                        <a:t>2,000,000</a:t>
                       </a:r>
                       <a:endParaRPr lang="en-US" sz="1300" dirty="0"/>
                     </a:p>
@@ -10060,7 +10299,7 @@
                   </a:tcPr>
                 </a:tc>
               </a:tr>
-              <a:tr h="274320">
+              <a:tr h="292608">
                 <a:tc>
                   <a:txBody>
                     <a:bodyPr/>
@@ -10109,7 +10348,7 @@
                             <a:schemeClr val="tx1"/>
                           </a:solidFill>
                         </a:rPr>
-                        <a:t>224</a:t>
+                        <a:t>150</a:t>
                       </a:r>
                       <a:endParaRPr lang="en-US" sz="1300" dirty="0"/>
                     </a:p>
@@ -10177,7 +10416,7 @@
                             <a:schemeClr val="tx1"/>
                           </a:solidFill>
                         </a:rPr>
-                        <a:t>3,584,000</a:t>
+                        <a:t>2,400,000</a:t>
                       </a:r>
                       <a:endParaRPr lang="en-US" sz="1300" dirty="0"/>
                     </a:p>
@@ -10198,7 +10437,7 @@
                   </a:tcPr>
                 </a:tc>
               </a:tr>
-              <a:tr h="274320">
+              <a:tr h="292608">
                 <a:tc>
                   <a:txBody>
                     <a:bodyPr/>
@@ -10247,7 +10486,7 @@
                             <a:schemeClr val="tx1"/>
                           </a:solidFill>
                         </a:rPr>
-                        <a:t>280</a:t>
+                        <a:t>100</a:t>
                       </a:r>
                       <a:endParaRPr lang="en-US" sz="1300" dirty="0"/>
                     </a:p>
@@ -10315,7 +10554,7 @@
                             <a:schemeClr val="tx1"/>
                           </a:solidFill>
                         </a:rPr>
-                        <a:t>4,480,000</a:t>
+                        <a:t>1,600,000</a:t>
                       </a:r>
                       <a:endParaRPr lang="en-US" sz="1300" dirty="0"/>
                     </a:p>
@@ -10336,7 +10575,7 @@
                   </a:tcPr>
                 </a:tc>
               </a:tr>
-              <a:tr h="274320">
+              <a:tr h="292608">
                 <a:tc>
                   <a:txBody>
                     <a:bodyPr/>
@@ -10351,7 +10590,7 @@
                             <a:schemeClr val="tx1"/>
                           </a:solidFill>
                         </a:rPr>
-                        <a:t>七人小計</a:t>
+                        <a:t>ClickHouse 顧問</a:t>
                       </a:r>
                       <a:endParaRPr lang="en-US" sz="1300" dirty="0"/>
                     </a:p>
@@ -10385,7 +10624,7 @@
                             <a:schemeClr val="tx1"/>
                           </a:solidFill>
                         </a:rPr>
-                        <a:t>1,715</a:t>
+                        <a:t>20</a:t>
                       </a:r>
                       <a:endParaRPr lang="en-US" sz="1300" dirty="0"/>
                     </a:p>
@@ -10413,6 +10652,14 @@
                       <a:pPr algn="r" indent="0" marL="0">
                         <a:buNone/>
                       </a:pPr>
+                      <a:r>
+                        <a:rPr lang="en-US" sz="1300" dirty="0">
+                          <a:solidFill>
+                            <a:schemeClr val="tx1"/>
+                          </a:solidFill>
+                        </a:rPr>
+                        <a:t>20,000</a:t>
+                      </a:r>
                       <a:endParaRPr lang="en-US" sz="1300" dirty="0"/>
                     </a:p>
                   </a:txBody>
@@ -10445,7 +10692,7 @@
                             <a:schemeClr val="tx1"/>
                           </a:solidFill>
                         </a:rPr>
-                        <a:t>35,934,000</a:t>
+                        <a:t>400,000</a:t>
                       </a:r>
                       <a:endParaRPr lang="en-US" sz="1300" dirty="0"/>
                     </a:p>
@@ -10466,145 +10713,7 @@
                   </a:tcPr>
                 </a:tc>
               </a:tr>
-              <a:tr h="274320">
-                <a:tc>
-                  <a:txBody>
-                    <a:bodyPr/>
-                    <a:lstStyle/>
-                    <a:p>
-                      <a:pPr algn="l" indent="0" marL="0">
-                        <a:buNone/>
-                      </a:pPr>
-                      <a:r>
-                        <a:rPr lang="en-US" sz="1300" b="1" dirty="0">
-                          <a:solidFill>
-                            <a:schemeClr val="tx1"/>
-                          </a:solidFill>
-                        </a:rPr>
-                        <a:t>ClickHouse 顧問</a:t>
-                      </a:r>
-                      <a:endParaRPr lang="en-US" sz="1300" dirty="0"/>
-                    </a:p>
-                  </a:txBody>
-                  <a:tcPr marL="76200" marR="76200" marT="38100" marB="38100" anchor="ctr">
-                    <a:lnL w="0" cap="flat" cmpd="sng" algn="ctr">
-                      <a:noFill/>
-                    </a:lnL>
-                    <a:lnR w="0" cap="flat" cmpd="sng" algn="ctr">
-                      <a:noFill/>
-                    </a:lnR>
-                    <a:lnT w="0" cap="flat" cmpd="sng" algn="ctr">
-                      <a:noFill/>
-                    </a:lnT>
-                    <a:lnB w="0" cap="flat" cmpd="sng" algn="ctr">
-                      <a:noFill/>
-                    </a:lnB>
-                  </a:tcPr>
-                </a:tc>
-                <a:tc>
-                  <a:txBody>
-                    <a:bodyPr/>
-                    <a:lstStyle/>
-                    <a:p>
-                      <a:pPr algn="r" indent="0" marL="0">
-                        <a:buNone/>
-                      </a:pPr>
-                      <a:r>
-                        <a:rPr lang="en-US" sz="1300" dirty="0">
-                          <a:solidFill>
-                            <a:schemeClr val="tx1"/>
-                          </a:solidFill>
-                        </a:rPr>
-                        <a:t>20</a:t>
-                      </a:r>
-                      <a:endParaRPr lang="en-US" sz="1300" dirty="0"/>
-                    </a:p>
-                  </a:txBody>
-                  <a:tcPr marL="76200" marR="76200" marT="38100" marB="38100" anchor="ctr">
-                    <a:lnL w="0" cap="flat" cmpd="sng" algn="ctr">
-                      <a:noFill/>
-                    </a:lnL>
-                    <a:lnR w="0" cap="flat" cmpd="sng" algn="ctr">
-                      <a:noFill/>
-                    </a:lnR>
-                    <a:lnT w="0" cap="flat" cmpd="sng" algn="ctr">
-                      <a:noFill/>
-                    </a:lnT>
-                    <a:lnB w="0" cap="flat" cmpd="sng" algn="ctr">
-                      <a:noFill/>
-                    </a:lnB>
-                  </a:tcPr>
-                </a:tc>
-                <a:tc>
-                  <a:txBody>
-                    <a:bodyPr/>
-                    <a:lstStyle/>
-                    <a:p>
-                      <a:pPr algn="r" indent="0" marL="0">
-                        <a:buNone/>
-                      </a:pPr>
-                      <a:r>
-                        <a:rPr lang="en-US" sz="1300" dirty="0">
-                          <a:solidFill>
-                            <a:schemeClr val="tx1"/>
-                          </a:solidFill>
-                        </a:rPr>
-                        <a:t>20,000</a:t>
-                      </a:r>
-                      <a:endParaRPr lang="en-US" sz="1300" dirty="0"/>
-                    </a:p>
-                  </a:txBody>
-                  <a:tcPr marL="76200" marR="76200" marT="38100" marB="38100" anchor="ctr">
-                    <a:lnL w="0" cap="flat" cmpd="sng" algn="ctr">
-                      <a:noFill/>
-                    </a:lnL>
-                    <a:lnR w="0" cap="flat" cmpd="sng" algn="ctr">
-                      <a:noFill/>
-                    </a:lnR>
-                    <a:lnT w="0" cap="flat" cmpd="sng" algn="ctr">
-                      <a:noFill/>
-                    </a:lnT>
-                    <a:lnB w="0" cap="flat" cmpd="sng" algn="ctr">
-                      <a:noFill/>
-                    </a:lnB>
-                  </a:tcPr>
-                </a:tc>
-                <a:tc>
-                  <a:txBody>
-                    <a:bodyPr/>
-                    <a:lstStyle/>
-                    <a:p>
-                      <a:pPr algn="r" indent="0" marL="0">
-                        <a:buNone/>
-                      </a:pPr>
-                      <a:r>
-                        <a:rPr lang="en-US" sz="1300" dirty="0">
-                          <a:solidFill>
-                            <a:schemeClr val="tx1"/>
-                          </a:solidFill>
-                        </a:rPr>
-                        <a:t>400,000</a:t>
-                      </a:r>
-                      <a:endParaRPr lang="en-US" sz="1300" dirty="0"/>
-                    </a:p>
-                  </a:txBody>
-                  <a:tcPr marL="76200" marR="76200" marT="38100" marB="38100" anchor="ctr">
-                    <a:lnL w="0" cap="flat" cmpd="sng" algn="ctr">
-                      <a:noFill/>
-                    </a:lnL>
-                    <a:lnR w="0" cap="flat" cmpd="sng" algn="ctr">
-                      <a:noFill/>
-                    </a:lnR>
-                    <a:lnT w="0" cap="flat" cmpd="sng" algn="ctr">
-                      <a:noFill/>
-                    </a:lnT>
-                    <a:lnB w="0" cap="flat" cmpd="sng" algn="ctr">
-                      <a:noFill/>
-                    </a:lnB>
-                  </a:tcPr>
-                </a:tc>
-              </a:tr>
-              <a:tr h="274320">
+              <a:tr h="292608">
                 <a:tc>
                   <a:txBody>
                     <a:bodyPr/>
@@ -10650,6 +10759,14 @@
                       <a:pPr algn="r" indent="0" marL="0">
                         <a:buNone/>
                       </a:pPr>
+                      <a:r>
+                        <a:rPr lang="en-US" sz="1300" dirty="0">
+                          <a:solidFill>
+                            <a:schemeClr val="tx1"/>
+                          </a:solidFill>
+                        </a:rPr>
+                        <a:t>1,020</a:t>
+                      </a:r>
                       <a:endParaRPr lang="en-US" sz="1300" dirty="0"/>
                     </a:p>
                   </a:txBody>
@@ -10714,7 +10831,7 @@
                             <a:schemeClr val="tx1"/>
                           </a:solidFill>
                         </a:rPr>
-                        <a:t>36,334,000</a:t>
+                        <a:t>21,900,000</a:t>
                       </a:r>
                       <a:endParaRPr lang="en-US" sz="1300" dirty="0"/>
                     </a:p>
@@ -11397,7 +11514,7 @@
                   <a:schemeClr val="tx1"/>
                 </a:solidFill>
               </a:rPr>
-              <a:t>風險加成：本表未含，固定總價慣例加 10–15%</a:t>
+              <a:t>計價方式：人天實報（超出另計）或固定總價（加 10–15% 風險準備）</a:t>
             </a:r>
             <a:endParaRPr lang="en-US" sz="1500" dirty="0"/>
           </a:p>
@@ -11567,7 +11684,7 @@
                   <a:schemeClr val="tx1"/>
                 </a:solidFill>
               </a:rPr>
-              <a:t>672,000（42 人日）</a:t>
+              <a:t>800,000（50 人天）</a:t>
             </a:r>
             <a:endParaRPr lang="en-US" sz="1400" dirty="0"/>
           </a:p>
@@ -11598,7 +11715,7 @@
                   <a:schemeClr val="tx1"/>
                 </a:solidFill>
               </a:rPr>
-              <a:t>約 850,000／月</a:t>
+              <a:t>約 770,000／月（40 人天）</a:t>
             </a:r>
             <a:endParaRPr lang="en-US" sz="1400" dirty="0"/>
           </a:p>
@@ -11626,7 +11743,7 @@
                   <a:schemeClr val="tx1"/>
                 </a:solidFill>
               </a:rPr>
-              <a:t>約 280,000／月</a:t>
+              <a:t>約 300,000／月（15 人天）</a:t>
             </a:r>
             <a:endParaRPr lang="en-US" sz="1400" dirty="0"/>
           </a:p>

--- a/docs/decks/sinopac-dmp-proposal-v0.1.pptx
+++ b/docs/decks/sinopac-dmp-proposal-v0.1.pptx
@@ -128,7 +128,7 @@
   <p:extLst>
     <p:ext uri="{521415D9-36F7-43E2-AB2F-B90AF26B5E84}">
       <p14:sectionLst xmlns:p14="http://schemas.microsoft.com/office/powerpoint/2010/main">
-        <p14:section name="提案簡報初稿" id="{58d5e21b-88e6-60d9-f988-9c994b627623}">
+        <p14:section name="提案簡報初稿" id="{13a36b4b-0d73-c440-dab2-9090b06751f7}">
           <p14:sldIdLst>
             <p14:sldId id="256"/>
             <p14:sldId id="257"/>
@@ -147,7 +147,7 @@
             <p14:sldId id="270"/>
           </p14:sldIdLst>
         </p14:section>
-        <p14:section name="報價初版（未稅）" id="{d1bda746-b987-a964-d01b-5c8cd217bed5}">
+        <p14:section name="報價初版（未稅）" id="{c7ba45b8-456a-1f6c-ada9-d178d36acb25}">
           <p14:sldIdLst>
             <p14:sldId id="271"/>
             <p14:sldId id="272"/>
@@ -156,7 +156,7 @@
             <p14:sldId id="275"/>
           </p14:sldIdLst>
         </p14:section>
-        <p14:section name="週一會前會" id="{ced92306-0343-fe29-4bef-529d27eaccc8}">
+        <p14:section name="週一會前會" id="{5e304be4-37a9-ac8a-e28a-adc4fdc18a07}">
           <p14:sldIdLst>
             <p14:sldId id="276"/>
             <p14:sldId id="277"/>
@@ -8284,1007 +8284,161 @@
                   <a:schemeClr val="tx1"/>
                 </a:solidFill>
               </a:rPr>
-              <a:t>預估 1,020 人天：研發兩人各 200，其餘 100–150</a:t>
+              <a:t>分階段：第一階段只做取代神策所必需的</a:t>
             </a:r>
             <a:endParaRPr lang="en-US" sz="2400" dirty="0"/>
           </a:p>
         </p:txBody>
       </p:sp>
-      <p:graphicFrame>
-        <p:nvGraphicFramePr>
-          <p:cNvPr id="19" name="Table 0"/>
-          <p:cNvGraphicFramePr>
-            <a:graphicFrameLocks noGrp="1"/>
-          </p:cNvGraphicFramePr>
-          <p:nvPr>
-            <p:extLst>
-              <p:ext uri="{D42A27DB-BD31-4B8C-83A1-F6EECF244321}">
-                <p14:modId xmlns:p14="http://schemas.microsoft.com/office/powerpoint/2010/main" val="1579011935"/>
-              </p:ext>
-            </p:extLst>
-          </p:nvPr>
-        </p:nvGraphicFramePr>
-        <p:xfrm>
-          <a:off x="457200" y="1188720"/>
-          <a:ext cx="8229600" cy="914400"/>
-        </p:xfrm>
-        <a:graphic>
-          <a:graphicData uri="http://schemas.openxmlformats.org/drawingml/2006/table">
-            <a:tbl>
-              <a:tblPr/>
-              <a:tblGrid>
-                <a:gridCol w="2377440"/>
-                <a:gridCol w="1188720"/>
-                <a:gridCol w="4663440"/>
-              </a:tblGrid>
-              <a:tr h="310896">
-                <a:tc>
-                  <a:txBody>
-                    <a:bodyPr/>
-                    <a:lstStyle/>
-                    <a:p>
-                      <a:pPr algn="l" indent="0" marL="0">
-                        <a:buNone/>
-                      </a:pPr>
-                      <a:r>
-                        <a:rPr lang="en-US" sz="1300" b="1" dirty="0">
-                          <a:solidFill>
-                            <a:schemeClr val="tx1"/>
-                          </a:solidFill>
-                        </a:rPr>
-                        <a:t>角色</a:t>
-                      </a:r>
-                      <a:endParaRPr lang="en-US" sz="1300" dirty="0"/>
-                    </a:p>
-                  </a:txBody>
-                  <a:tcPr marL="76200" marR="76200" marT="38100" marB="38100" anchor="ctr">
-                    <a:lnL w="0" cap="flat" cmpd="sng" algn="ctr">
-                      <a:noFill/>
-                    </a:lnL>
-                    <a:lnR w="0" cap="flat" cmpd="sng" algn="ctr">
-                      <a:noFill/>
-                    </a:lnR>
-                    <a:lnT w="0" cap="flat" cmpd="sng" algn="ctr">
-                      <a:noFill/>
-                    </a:lnT>
-                    <a:lnB w="15875" cap="flat" cmpd="sng" algn="ctr">
-                      <a:solidFill>
-                        <a:srgbClr val="C9D2D8"/>
-                      </a:solidFill>
-                      <a:prstDash val="solid"/>
-                      <a:round/>
-                      <a:headEnd type="none" w="med" len="med"/>
-                      <a:tailEnd type="none" w="med" len="med"/>
-                    </a:lnB>
-                  </a:tcPr>
-                </a:tc>
-                <a:tc>
-                  <a:txBody>
-                    <a:bodyPr/>
-                    <a:lstStyle/>
-                    <a:p>
-                      <a:pPr algn="r" indent="0" marL="0">
-                        <a:buNone/>
-                      </a:pPr>
-                      <a:r>
-                        <a:rPr lang="en-US" sz="1300" b="1" dirty="0">
-                          <a:solidFill>
-                            <a:schemeClr val="tx1"/>
-                          </a:solidFill>
-                        </a:rPr>
-                        <a:t>預估人天</a:t>
-                      </a:r>
-                      <a:endParaRPr lang="en-US" sz="1300" dirty="0"/>
-                    </a:p>
-                  </a:txBody>
-                  <a:tcPr marL="76200" marR="76200" marT="38100" marB="38100" anchor="ctr">
-                    <a:lnL w="0" cap="flat" cmpd="sng" algn="ctr">
-                      <a:noFill/>
-                    </a:lnL>
-                    <a:lnR w="0" cap="flat" cmpd="sng" algn="ctr">
-                      <a:noFill/>
-                    </a:lnR>
-                    <a:lnT w="0" cap="flat" cmpd="sng" algn="ctr">
-                      <a:noFill/>
-                    </a:lnT>
-                    <a:lnB w="15875" cap="flat" cmpd="sng" algn="ctr">
-                      <a:solidFill>
-                        <a:srgbClr val="C9D2D8"/>
-                      </a:solidFill>
-                      <a:prstDash val="solid"/>
-                      <a:round/>
-                      <a:headEnd type="none" w="med" len="med"/>
-                      <a:tailEnd type="none" w="med" len="med"/>
-                    </a:lnB>
-                  </a:tcPr>
-                </a:tc>
-                <a:tc>
-                  <a:txBody>
-                    <a:bodyPr/>
-                    <a:lstStyle/>
-                    <a:p>
-                      <a:pPr algn="l" indent="0" marL="0">
-                        <a:buNone/>
-                      </a:pPr>
-                      <a:r>
-                        <a:rPr lang="en-US" sz="1300" b="1" dirty="0">
-                          <a:solidFill>
-                            <a:schemeClr val="tx1"/>
-                          </a:solidFill>
-                        </a:rPr>
-                        <a:t>主要工作</a:t>
-                      </a:r>
-                      <a:endParaRPr lang="en-US" sz="1300" dirty="0"/>
-                    </a:p>
-                  </a:txBody>
-                  <a:tcPr marL="76200" marR="76200" marT="38100" marB="38100" anchor="ctr">
-                    <a:lnL w="0" cap="flat" cmpd="sng" algn="ctr">
-                      <a:noFill/>
-                    </a:lnL>
-                    <a:lnR w="0" cap="flat" cmpd="sng" algn="ctr">
-                      <a:noFill/>
-                    </a:lnR>
-                    <a:lnT w="0" cap="flat" cmpd="sng" algn="ctr">
-                      <a:noFill/>
-                    </a:lnT>
-                    <a:lnB w="15875" cap="flat" cmpd="sng" algn="ctr">
-                      <a:solidFill>
-                        <a:srgbClr val="C9D2D8"/>
-                      </a:solidFill>
-                      <a:prstDash val="solid"/>
-                      <a:round/>
-                      <a:headEnd type="none" w="med" len="med"/>
-                      <a:tailEnd type="none" w="med" len="med"/>
-                    </a:lnB>
-                  </a:tcPr>
-                </a:tc>
-              </a:tr>
-              <a:tr h="310896">
-                <a:tc>
-                  <a:txBody>
-                    <a:bodyPr/>
-                    <a:lstStyle/>
-                    <a:p>
-                      <a:pPr algn="l" indent="0" marL="0">
-                        <a:buNone/>
-                      </a:pPr>
-                      <a:r>
-                        <a:rPr lang="en-US" sz="1300" b="1" dirty="0">
-                          <a:solidFill>
-                            <a:schemeClr val="tx1"/>
-                          </a:solidFill>
-                        </a:rPr>
-                        <a:t>研發 R1（資料與查詢）</a:t>
-                      </a:r>
-                      <a:endParaRPr lang="en-US" sz="1300" dirty="0"/>
-                    </a:p>
-                  </a:txBody>
-                  <a:tcPr marL="76200" marR="76200" marT="38100" marB="38100" anchor="ctr">
-                    <a:lnL w="0" cap="flat" cmpd="sng" algn="ctr">
-                      <a:noFill/>
-                    </a:lnL>
-                    <a:lnR w="0" cap="flat" cmpd="sng" algn="ctr">
-                      <a:noFill/>
-                    </a:lnR>
-                    <a:lnT w="0" cap="flat" cmpd="sng" algn="ctr">
-                      <a:noFill/>
-                    </a:lnT>
-                    <a:lnB w="0" cap="flat" cmpd="sng" algn="ctr">
-                      <a:noFill/>
-                    </a:lnB>
-                  </a:tcPr>
-                </a:tc>
-                <a:tc>
-                  <a:txBody>
-                    <a:bodyPr/>
-                    <a:lstStyle/>
-                    <a:p>
-                      <a:pPr algn="r" indent="0" marL="0">
-                        <a:buNone/>
-                      </a:pPr>
-                      <a:r>
-                        <a:rPr lang="en-US" sz="1300" dirty="0">
-                          <a:solidFill>
-                            <a:schemeClr val="tx1"/>
-                          </a:solidFill>
-                        </a:rPr>
-                        <a:t>200</a:t>
-                      </a:r>
-                      <a:endParaRPr lang="en-US" sz="1300" dirty="0"/>
-                    </a:p>
-                  </a:txBody>
-                  <a:tcPr marL="76200" marR="76200" marT="38100" marB="38100" anchor="ctr">
-                    <a:lnL w="0" cap="flat" cmpd="sng" algn="ctr">
-                      <a:noFill/>
-                    </a:lnL>
-                    <a:lnR w="0" cap="flat" cmpd="sng" algn="ctr">
-                      <a:noFill/>
-                    </a:lnR>
-                    <a:lnT w="0" cap="flat" cmpd="sng" algn="ctr">
-                      <a:noFill/>
-                    </a:lnT>
-                    <a:lnB w="0" cap="flat" cmpd="sng" algn="ctr">
-                      <a:noFill/>
-                    </a:lnB>
-                  </a:tcPr>
-                </a:tc>
-                <a:tc>
-                  <a:txBody>
-                    <a:bodyPr/>
-                    <a:lstStyle/>
-                    <a:p>
-                      <a:pPr algn="l" indent="0" marL="0">
-                        <a:buNone/>
-                      </a:pPr>
-                      <a:r>
-                        <a:rPr lang="en-US" sz="1300" dirty="0">
-                          <a:solidFill>
-                            <a:schemeClr val="tx1"/>
-                          </a:solidFill>
-                        </a:rPr>
-                        <a:t>接入管線、語意編譯器、ClickHouse、遷移工具</a:t>
-                      </a:r>
-                      <a:endParaRPr lang="en-US" sz="1300" dirty="0"/>
-                    </a:p>
-                  </a:txBody>
-                  <a:tcPr marL="76200" marR="76200" marT="38100" marB="38100" anchor="ctr">
-                    <a:lnL w="0" cap="flat" cmpd="sng" algn="ctr">
-                      <a:noFill/>
-                    </a:lnL>
-                    <a:lnR w="0" cap="flat" cmpd="sng" algn="ctr">
-                      <a:noFill/>
-                    </a:lnR>
-                    <a:lnT w="0" cap="flat" cmpd="sng" algn="ctr">
-                      <a:noFill/>
-                    </a:lnT>
-                    <a:lnB w="0" cap="flat" cmpd="sng" algn="ctr">
-                      <a:noFill/>
-                    </a:lnB>
-                  </a:tcPr>
-                </a:tc>
-              </a:tr>
-              <a:tr h="310896">
-                <a:tc>
-                  <a:txBody>
-                    <a:bodyPr/>
-                    <a:lstStyle/>
-                    <a:p>
-                      <a:pPr algn="l" indent="0" marL="0">
-                        <a:buNone/>
-                      </a:pPr>
-                      <a:r>
-                        <a:rPr lang="en-US" sz="1300" b="1" dirty="0">
-                          <a:solidFill>
-                            <a:schemeClr val="tx1"/>
-                          </a:solidFill>
-                        </a:rPr>
-                        <a:t>研發 R2（應用與前端）</a:t>
-                      </a:r>
-                      <a:endParaRPr lang="en-US" sz="1300" dirty="0"/>
-                    </a:p>
-                  </a:txBody>
-                  <a:tcPr marL="76200" marR="76200" marT="38100" marB="38100" anchor="ctr">
-                    <a:lnL w="0" cap="flat" cmpd="sng" algn="ctr">
-                      <a:noFill/>
-                    </a:lnL>
-                    <a:lnR w="0" cap="flat" cmpd="sng" algn="ctr">
-                      <a:noFill/>
-                    </a:lnR>
-                    <a:lnT w="0" cap="flat" cmpd="sng" algn="ctr">
-                      <a:noFill/>
-                    </a:lnT>
-                    <a:lnB w="0" cap="flat" cmpd="sng" algn="ctr">
-                      <a:noFill/>
-                    </a:lnB>
-                  </a:tcPr>
-                </a:tc>
-                <a:tc>
-                  <a:txBody>
-                    <a:bodyPr/>
-                    <a:lstStyle/>
-                    <a:p>
-                      <a:pPr algn="r" indent="0" marL="0">
-                        <a:buNone/>
-                      </a:pPr>
-                      <a:r>
-                        <a:rPr lang="en-US" sz="1300" dirty="0">
-                          <a:solidFill>
-                            <a:schemeClr val="tx1"/>
-                          </a:solidFill>
-                        </a:rPr>
-                        <a:t>200</a:t>
-                      </a:r>
-                      <a:endParaRPr lang="en-US" sz="1300" dirty="0"/>
-                    </a:p>
-                  </a:txBody>
-                  <a:tcPr marL="76200" marR="76200" marT="38100" marB="38100" anchor="ctr">
-                    <a:lnL w="0" cap="flat" cmpd="sng" algn="ctr">
-                      <a:noFill/>
-                    </a:lnL>
-                    <a:lnR w="0" cap="flat" cmpd="sng" algn="ctr">
-                      <a:noFill/>
-                    </a:lnR>
-                    <a:lnT w="0" cap="flat" cmpd="sng" algn="ctr">
-                      <a:noFill/>
-                    </a:lnT>
-                    <a:lnB w="0" cap="flat" cmpd="sng" algn="ctr">
-                      <a:noFill/>
-                    </a:lnB>
-                  </a:tcPr>
-                </a:tc>
-                <a:tc>
-                  <a:txBody>
-                    <a:bodyPr/>
-                    <a:lstStyle/>
-                    <a:p>
-                      <a:pPr algn="l" indent="0" marL="0">
-                        <a:buNone/>
-                      </a:pPr>
-                      <a:r>
-                        <a:rPr lang="en-US" sz="1300" dirty="0">
-                          <a:solidFill>
-                            <a:schemeClr val="tx1"/>
-                          </a:solidFill>
-                        </a:rPr>
-                        <a:t>API、前端各模組、權限與審計、推送</a:t>
-                      </a:r>
-                      <a:endParaRPr lang="en-US" sz="1300" dirty="0"/>
-                    </a:p>
-                  </a:txBody>
-                  <a:tcPr marL="76200" marR="76200" marT="38100" marB="38100" anchor="ctr">
-                    <a:lnL w="0" cap="flat" cmpd="sng" algn="ctr">
-                      <a:noFill/>
-                    </a:lnL>
-                    <a:lnR w="0" cap="flat" cmpd="sng" algn="ctr">
-                      <a:noFill/>
-                    </a:lnR>
-                    <a:lnT w="0" cap="flat" cmpd="sng" algn="ctr">
-                      <a:noFill/>
-                    </a:lnT>
-                    <a:lnB w="0" cap="flat" cmpd="sng" algn="ctr">
-                      <a:noFill/>
-                    </a:lnB>
-                  </a:tcPr>
-                </a:tc>
-              </a:tr>
-              <a:tr h="310896">
-                <a:tc>
-                  <a:txBody>
-                    <a:bodyPr/>
-                    <a:lstStyle/>
-                    <a:p>
-                      <a:pPr algn="l" indent="0" marL="0">
-                        <a:buNone/>
-                      </a:pPr>
-                      <a:r>
-                        <a:rPr lang="en-US" sz="1300" b="1" dirty="0">
-                          <a:solidFill>
-                            <a:schemeClr val="tx1"/>
-                          </a:solidFill>
-                        </a:rPr>
-                        <a:t>專案經理</a:t>
-                      </a:r>
-                      <a:endParaRPr lang="en-US" sz="1300" dirty="0"/>
-                    </a:p>
-                  </a:txBody>
-                  <a:tcPr marL="76200" marR="76200" marT="38100" marB="38100" anchor="ctr">
-                    <a:lnL w="0" cap="flat" cmpd="sng" algn="ctr">
-                      <a:noFill/>
-                    </a:lnL>
-                    <a:lnR w="0" cap="flat" cmpd="sng" algn="ctr">
-                      <a:noFill/>
-                    </a:lnR>
-                    <a:lnT w="0" cap="flat" cmpd="sng" algn="ctr">
-                      <a:noFill/>
-                    </a:lnT>
-                    <a:lnB w="0" cap="flat" cmpd="sng" algn="ctr">
-                      <a:noFill/>
-                    </a:lnB>
-                  </a:tcPr>
-                </a:tc>
-                <a:tc>
-                  <a:txBody>
-                    <a:bodyPr/>
-                    <a:lstStyle/>
-                    <a:p>
-                      <a:pPr algn="r" indent="0" marL="0">
-                        <a:buNone/>
-                      </a:pPr>
-                      <a:r>
-                        <a:rPr lang="en-US" sz="1300" dirty="0">
-                          <a:solidFill>
-                            <a:schemeClr val="tx1"/>
-                          </a:solidFill>
-                        </a:rPr>
-                        <a:t>150</a:t>
-                      </a:r>
-                      <a:endParaRPr lang="en-US" sz="1300" dirty="0"/>
-                    </a:p>
-                  </a:txBody>
-                  <a:tcPr marL="76200" marR="76200" marT="38100" marB="38100" anchor="ctr">
-                    <a:lnL w="0" cap="flat" cmpd="sng" algn="ctr">
-                      <a:noFill/>
-                    </a:lnL>
-                    <a:lnR w="0" cap="flat" cmpd="sng" algn="ctr">
-                      <a:noFill/>
-                    </a:lnR>
-                    <a:lnT w="0" cap="flat" cmpd="sng" algn="ctr">
-                      <a:noFill/>
-                    </a:lnT>
-                    <a:lnB w="0" cap="flat" cmpd="sng" algn="ctr">
-                      <a:noFill/>
-                    </a:lnB>
-                  </a:tcPr>
-                </a:tc>
-                <a:tc>
-                  <a:txBody>
-                    <a:bodyPr/>
-                    <a:lstStyle/>
-                    <a:p>
-                      <a:pPr algn="l" indent="0" marL="0">
-                        <a:buNone/>
-                      </a:pPr>
-                      <a:r>
-                        <a:rPr lang="en-US" sz="1300" dirty="0">
-                          <a:solidFill>
-                            <a:schemeClr val="tx1"/>
-                          </a:solidFill>
-                        </a:rPr>
-                        <a:t>時程、三方窗口、週會與風險追蹤</a:t>
-                      </a:r>
-                      <a:endParaRPr lang="en-US" sz="1300" dirty="0"/>
-                    </a:p>
-                  </a:txBody>
-                  <a:tcPr marL="76200" marR="76200" marT="38100" marB="38100" anchor="ctr">
-                    <a:lnL w="0" cap="flat" cmpd="sng" algn="ctr">
-                      <a:noFill/>
-                    </a:lnL>
-                    <a:lnR w="0" cap="flat" cmpd="sng" algn="ctr">
-                      <a:noFill/>
-                    </a:lnR>
-                    <a:lnT w="0" cap="flat" cmpd="sng" algn="ctr">
-                      <a:noFill/>
-                    </a:lnT>
-                    <a:lnB w="0" cap="flat" cmpd="sng" algn="ctr">
-                      <a:noFill/>
-                    </a:lnB>
-                  </a:tcPr>
-                </a:tc>
-              </a:tr>
-              <a:tr h="310896">
-                <a:tc>
-                  <a:txBody>
-                    <a:bodyPr/>
-                    <a:lstStyle/>
-                    <a:p>
-                      <a:pPr algn="l" indent="0" marL="0">
-                        <a:buNone/>
-                      </a:pPr>
-                      <a:r>
-                        <a:rPr lang="en-US" sz="1300" b="1" dirty="0">
-                          <a:solidFill>
-                            <a:schemeClr val="tx1"/>
-                          </a:solidFill>
-                        </a:rPr>
-                        <a:t>數據分析師 A</a:t>
-                      </a:r>
-                      <a:endParaRPr lang="en-US" sz="1300" dirty="0"/>
-                    </a:p>
-                  </a:txBody>
-                  <a:tcPr marL="76200" marR="76200" marT="38100" marB="38100" anchor="ctr">
-                    <a:lnL w="0" cap="flat" cmpd="sng" algn="ctr">
-                      <a:noFill/>
-                    </a:lnL>
-                    <a:lnR w="0" cap="flat" cmpd="sng" algn="ctr">
-                      <a:noFill/>
-                    </a:lnR>
-                    <a:lnT w="0" cap="flat" cmpd="sng" algn="ctr">
-                      <a:noFill/>
-                    </a:lnT>
-                    <a:lnB w="0" cap="flat" cmpd="sng" algn="ctr">
-                      <a:noFill/>
-                    </a:lnB>
-                  </a:tcPr>
-                </a:tc>
-                <a:tc>
-                  <a:txBody>
-                    <a:bodyPr/>
-                    <a:lstStyle/>
-                    <a:p>
-                      <a:pPr algn="r" indent="0" marL="0">
-                        <a:buNone/>
-                      </a:pPr>
-                      <a:r>
-                        <a:rPr lang="en-US" sz="1300" dirty="0">
-                          <a:solidFill>
-                            <a:schemeClr val="tx1"/>
-                          </a:solidFill>
-                        </a:rPr>
-                        <a:t>150</a:t>
-                      </a:r>
-                      <a:endParaRPr lang="en-US" sz="1300" dirty="0"/>
-                    </a:p>
-                  </a:txBody>
-                  <a:tcPr marL="76200" marR="76200" marT="38100" marB="38100" anchor="ctr">
-                    <a:lnL w="0" cap="flat" cmpd="sng" algn="ctr">
-                      <a:noFill/>
-                    </a:lnL>
-                    <a:lnR w="0" cap="flat" cmpd="sng" algn="ctr">
-                      <a:noFill/>
-                    </a:lnR>
-                    <a:lnT w="0" cap="flat" cmpd="sng" algn="ctr">
-                      <a:noFill/>
-                    </a:lnT>
-                    <a:lnB w="0" cap="flat" cmpd="sng" algn="ctr">
-                      <a:noFill/>
-                    </a:lnB>
-                  </a:tcPr>
-                </a:tc>
-                <a:tc>
-                  <a:txBody>
-                    <a:bodyPr/>
-                    <a:lstStyle/>
-                    <a:p>
-                      <a:pPr algn="l" indent="0" marL="0">
-                        <a:buNone/>
-                      </a:pPr>
-                      <a:r>
-                        <a:rPr lang="en-US" sz="1300" dirty="0">
-                          <a:solidFill>
-                            <a:schemeClr val="tx1"/>
-                          </a:solidFill>
-                        </a:rPr>
-                        <a:t>神策盤點與導出、橋接表、並行期對帳</a:t>
-                      </a:r>
-                      <a:endParaRPr lang="en-US" sz="1300" dirty="0"/>
-                    </a:p>
-                  </a:txBody>
-                  <a:tcPr marL="76200" marR="76200" marT="38100" marB="38100" anchor="ctr">
-                    <a:lnL w="0" cap="flat" cmpd="sng" algn="ctr">
-                      <a:noFill/>
-                    </a:lnL>
-                    <a:lnR w="0" cap="flat" cmpd="sng" algn="ctr">
-                      <a:noFill/>
-                    </a:lnR>
-                    <a:lnT w="0" cap="flat" cmpd="sng" algn="ctr">
-                      <a:noFill/>
-                    </a:lnT>
-                    <a:lnB w="0" cap="flat" cmpd="sng" algn="ctr">
-                      <a:noFill/>
-                    </a:lnB>
-                  </a:tcPr>
-                </a:tc>
-              </a:tr>
-              <a:tr h="310896">
-                <a:tc>
-                  <a:txBody>
-                    <a:bodyPr/>
-                    <a:lstStyle/>
-                    <a:p>
-                      <a:pPr algn="l" indent="0" marL="0">
-                        <a:buNone/>
-                      </a:pPr>
-                      <a:r>
-                        <a:rPr lang="en-US" sz="1300" b="1" dirty="0">
-                          <a:solidFill>
-                            <a:schemeClr val="tx1"/>
-                          </a:solidFill>
-                        </a:rPr>
-                        <a:t>產品</a:t>
-                      </a:r>
-                      <a:endParaRPr lang="en-US" sz="1300" dirty="0"/>
-                    </a:p>
-                  </a:txBody>
-                  <a:tcPr marL="76200" marR="76200" marT="38100" marB="38100" anchor="ctr">
-                    <a:lnL w="0" cap="flat" cmpd="sng" algn="ctr">
-                      <a:noFill/>
-                    </a:lnL>
-                    <a:lnR w="0" cap="flat" cmpd="sng" algn="ctr">
-                      <a:noFill/>
-                    </a:lnR>
-                    <a:lnT w="0" cap="flat" cmpd="sng" algn="ctr">
-                      <a:noFill/>
-                    </a:lnT>
-                    <a:lnB w="0" cap="flat" cmpd="sng" algn="ctr">
-                      <a:noFill/>
-                    </a:lnB>
-                  </a:tcPr>
-                </a:tc>
-                <a:tc>
-                  <a:txBody>
-                    <a:bodyPr/>
-                    <a:lstStyle/>
-                    <a:p>
-                      <a:pPr algn="r" indent="0" marL="0">
-                        <a:buNone/>
-                      </a:pPr>
-                      <a:r>
-                        <a:rPr lang="en-US" sz="1300" dirty="0">
-                          <a:solidFill>
-                            <a:schemeClr val="tx1"/>
-                          </a:solidFill>
-                        </a:rPr>
-                        <a:t>100</a:t>
-                      </a:r>
-                      <a:endParaRPr lang="en-US" sz="1300" dirty="0"/>
-                    </a:p>
-                  </a:txBody>
-                  <a:tcPr marL="76200" marR="76200" marT="38100" marB="38100" anchor="ctr">
-                    <a:lnL w="0" cap="flat" cmpd="sng" algn="ctr">
-                      <a:noFill/>
-                    </a:lnL>
-                    <a:lnR w="0" cap="flat" cmpd="sng" algn="ctr">
-                      <a:noFill/>
-                    </a:lnR>
-                    <a:lnT w="0" cap="flat" cmpd="sng" algn="ctr">
-                      <a:noFill/>
-                    </a:lnT>
-                    <a:lnB w="0" cap="flat" cmpd="sng" algn="ctr">
-                      <a:noFill/>
-                    </a:lnB>
-                  </a:tcPr>
-                </a:tc>
-                <a:tc>
-                  <a:txBody>
-                    <a:bodyPr/>
-                    <a:lstStyle/>
-                    <a:p>
-                      <a:pPr algn="l" indent="0" marL="0">
-                        <a:buNone/>
-                      </a:pPr>
-                      <a:r>
-                        <a:rPr lang="en-US" sz="1300" dirty="0">
-                          <a:solidFill>
-                            <a:schemeClr val="tx1"/>
-                          </a:solidFill>
-                        </a:rPr>
-                        <a:t>需求與規格、驗收標準、UAT 協調</a:t>
-                      </a:r>
-                      <a:endParaRPr lang="en-US" sz="1300" dirty="0"/>
-                    </a:p>
-                  </a:txBody>
-                  <a:tcPr marL="76200" marR="76200" marT="38100" marB="38100" anchor="ctr">
-                    <a:lnL w="0" cap="flat" cmpd="sng" algn="ctr">
-                      <a:noFill/>
-                    </a:lnL>
-                    <a:lnR w="0" cap="flat" cmpd="sng" algn="ctr">
-                      <a:noFill/>
-                    </a:lnR>
-                    <a:lnT w="0" cap="flat" cmpd="sng" algn="ctr">
-                      <a:noFill/>
-                    </a:lnT>
-                    <a:lnB w="0" cap="flat" cmpd="sng" algn="ctr">
-                      <a:noFill/>
-                    </a:lnB>
-                  </a:tcPr>
-                </a:tc>
-              </a:tr>
-              <a:tr h="310896">
-                <a:tc>
-                  <a:txBody>
-                    <a:bodyPr/>
-                    <a:lstStyle/>
-                    <a:p>
-                      <a:pPr algn="l" indent="0" marL="0">
-                        <a:buNone/>
-                      </a:pPr>
-                      <a:r>
-                        <a:rPr lang="en-US" sz="1300" b="1" dirty="0">
-                          <a:solidFill>
-                            <a:schemeClr val="tx1"/>
-                          </a:solidFill>
-                        </a:rPr>
-                        <a:t>系統工程師（運維）</a:t>
-                      </a:r>
-                      <a:endParaRPr lang="en-US" sz="1300" dirty="0"/>
-                    </a:p>
-                  </a:txBody>
-                  <a:tcPr marL="76200" marR="76200" marT="38100" marB="38100" anchor="ctr">
-                    <a:lnL w="0" cap="flat" cmpd="sng" algn="ctr">
-                      <a:noFill/>
-                    </a:lnL>
-                    <a:lnR w="0" cap="flat" cmpd="sng" algn="ctr">
-                      <a:noFill/>
-                    </a:lnR>
-                    <a:lnT w="0" cap="flat" cmpd="sng" algn="ctr">
-                      <a:noFill/>
-                    </a:lnT>
-                    <a:lnB w="0" cap="flat" cmpd="sng" algn="ctr">
-                      <a:noFill/>
-                    </a:lnB>
-                  </a:tcPr>
-                </a:tc>
-                <a:tc>
-                  <a:txBody>
-                    <a:bodyPr/>
-                    <a:lstStyle/>
-                    <a:p>
-                      <a:pPr algn="r" indent="0" marL="0">
-                        <a:buNone/>
-                      </a:pPr>
-                      <a:r>
-                        <a:rPr lang="en-US" sz="1300" dirty="0">
-                          <a:solidFill>
-                            <a:schemeClr val="tx1"/>
-                          </a:solidFill>
-                        </a:rPr>
-                        <a:t>100</a:t>
-                      </a:r>
-                      <a:endParaRPr lang="en-US" sz="1300" dirty="0"/>
-                    </a:p>
-                  </a:txBody>
-                  <a:tcPr marL="76200" marR="76200" marT="38100" marB="38100" anchor="ctr">
-                    <a:lnL w="0" cap="flat" cmpd="sng" algn="ctr">
-                      <a:noFill/>
-                    </a:lnL>
-                    <a:lnR w="0" cap="flat" cmpd="sng" algn="ctr">
-                      <a:noFill/>
-                    </a:lnR>
-                    <a:lnT w="0" cap="flat" cmpd="sng" algn="ctr">
-                      <a:noFill/>
-                    </a:lnT>
-                    <a:lnB w="0" cap="flat" cmpd="sng" algn="ctr">
-                      <a:noFill/>
-                    </a:lnB>
-                  </a:tcPr>
-                </a:tc>
-                <a:tc>
-                  <a:txBody>
-                    <a:bodyPr/>
-                    <a:lstStyle/>
-                    <a:p>
-                      <a:pPr algn="l" indent="0" marL="0">
-                        <a:buNone/>
-                      </a:pPr>
-                      <a:r>
-                        <a:rPr lang="en-US" sz="1300" dirty="0">
-                          <a:solidFill>
-                            <a:schemeClr val="tx1"/>
-                          </a:solidFill>
-                        </a:rPr>
-                        <a:t>環境建置、監控告警、備份與 DR、上線</a:t>
-                      </a:r>
-                      <a:endParaRPr lang="en-US" sz="1300" dirty="0"/>
-                    </a:p>
-                  </a:txBody>
-                  <a:tcPr marL="76200" marR="76200" marT="38100" marB="38100" anchor="ctr">
-                    <a:lnL w="0" cap="flat" cmpd="sng" algn="ctr">
-                      <a:noFill/>
-                    </a:lnL>
-                    <a:lnR w="0" cap="flat" cmpd="sng" algn="ctr">
-                      <a:noFill/>
-                    </a:lnR>
-                    <a:lnT w="0" cap="flat" cmpd="sng" algn="ctr">
-                      <a:noFill/>
-                    </a:lnT>
-                    <a:lnB w="0" cap="flat" cmpd="sng" algn="ctr">
-                      <a:noFill/>
-                    </a:lnB>
-                  </a:tcPr>
-                </a:tc>
-              </a:tr>
-              <a:tr h="310896">
-                <a:tc>
-                  <a:txBody>
-                    <a:bodyPr/>
-                    <a:lstStyle/>
-                    <a:p>
-                      <a:pPr algn="l" indent="0" marL="0">
-                        <a:buNone/>
-                      </a:pPr>
-                      <a:r>
-                        <a:rPr lang="en-US" sz="1300" b="1" dirty="0">
-                          <a:solidFill>
-                            <a:schemeClr val="tx1"/>
-                          </a:solidFill>
-                        </a:rPr>
-                        <a:t>數據分析師 B</a:t>
-                      </a:r>
-                      <a:endParaRPr lang="en-US" sz="1300" dirty="0"/>
-                    </a:p>
-                  </a:txBody>
-                  <a:tcPr marL="76200" marR="76200" marT="38100" marB="38100" anchor="ctr">
-                    <a:lnL w="0" cap="flat" cmpd="sng" algn="ctr">
-                      <a:noFill/>
-                    </a:lnL>
-                    <a:lnR w="0" cap="flat" cmpd="sng" algn="ctr">
-                      <a:noFill/>
-                    </a:lnR>
-                    <a:lnT w="0" cap="flat" cmpd="sng" algn="ctr">
-                      <a:noFill/>
-                    </a:lnT>
-                    <a:lnB w="0" cap="flat" cmpd="sng" algn="ctr">
-                      <a:noFill/>
-                    </a:lnB>
-                  </a:tcPr>
-                </a:tc>
-                <a:tc>
-                  <a:txBody>
-                    <a:bodyPr/>
-                    <a:lstStyle/>
-                    <a:p>
-                      <a:pPr algn="r" indent="0" marL="0">
-                        <a:buNone/>
-                      </a:pPr>
-                      <a:r>
-                        <a:rPr lang="en-US" sz="1300" dirty="0">
-                          <a:solidFill>
-                            <a:schemeClr val="tx1"/>
-                          </a:solidFill>
-                        </a:rPr>
-                        <a:t>100</a:t>
-                      </a:r>
-                      <a:endParaRPr lang="en-US" sz="1300" dirty="0"/>
-                    </a:p>
-                  </a:txBody>
-                  <a:tcPr marL="76200" marR="76200" marT="38100" marB="38100" anchor="ctr">
-                    <a:lnL w="0" cap="flat" cmpd="sng" algn="ctr">
-                      <a:noFill/>
-                    </a:lnL>
-                    <a:lnR w="0" cap="flat" cmpd="sng" algn="ctr">
-                      <a:noFill/>
-                    </a:lnR>
-                    <a:lnT w="0" cap="flat" cmpd="sng" algn="ctr">
-                      <a:noFill/>
-                    </a:lnT>
-                    <a:lnB w="0" cap="flat" cmpd="sng" algn="ctr">
-                      <a:noFill/>
-                    </a:lnB>
-                  </a:tcPr>
-                </a:tc>
-                <a:tc>
-                  <a:txBody>
-                    <a:bodyPr/>
-                    <a:lstStyle/>
-                    <a:p>
-                      <a:pPr algn="l" indent="0" marL="0">
-                        <a:buNone/>
-                      </a:pPr>
-                      <a:r>
-                        <a:rPr lang="en-US" sz="1300" dirty="0">
-                          <a:solidFill>
-                            <a:schemeClr val="tx1"/>
-                          </a:solidFill>
-                        </a:rPr>
-                        <a:t>看板、操作手冊、教育訓練、PD 後調優</a:t>
-                      </a:r>
-                      <a:endParaRPr lang="en-US" sz="1300" dirty="0"/>
-                    </a:p>
-                  </a:txBody>
-                  <a:tcPr marL="76200" marR="76200" marT="38100" marB="38100" anchor="ctr">
-                    <a:lnL w="0" cap="flat" cmpd="sng" algn="ctr">
-                      <a:noFill/>
-                    </a:lnL>
-                    <a:lnR w="0" cap="flat" cmpd="sng" algn="ctr">
-                      <a:noFill/>
-                    </a:lnR>
-                    <a:lnT w="0" cap="flat" cmpd="sng" algn="ctr">
-                      <a:noFill/>
-                    </a:lnT>
-                    <a:lnB w="0" cap="flat" cmpd="sng" algn="ctr">
-                      <a:noFill/>
-                    </a:lnB>
-                  </a:tcPr>
-                </a:tc>
-              </a:tr>
-              <a:tr h="310896">
-                <a:tc>
-                  <a:txBody>
-                    <a:bodyPr/>
-                    <a:lstStyle/>
-                    <a:p>
-                      <a:pPr algn="l" indent="0" marL="0">
-                        <a:buNone/>
-                      </a:pPr>
-                      <a:r>
-                        <a:rPr lang="en-US" sz="1300" b="1" dirty="0">
-                          <a:solidFill>
-                            <a:schemeClr val="tx1"/>
-                          </a:solidFill>
-                        </a:rPr>
-                        <a:t>ClickHouse 顧問</a:t>
-                      </a:r>
-                      <a:endParaRPr lang="en-US" sz="1300" dirty="0"/>
-                    </a:p>
-                  </a:txBody>
-                  <a:tcPr marL="76200" marR="76200" marT="38100" marB="38100" anchor="ctr">
-                    <a:lnL w="0" cap="flat" cmpd="sng" algn="ctr">
-                      <a:noFill/>
-                    </a:lnL>
-                    <a:lnR w="0" cap="flat" cmpd="sng" algn="ctr">
-                      <a:noFill/>
-                    </a:lnR>
-                    <a:lnT w="0" cap="flat" cmpd="sng" algn="ctr">
-                      <a:noFill/>
-                    </a:lnT>
-                    <a:lnB w="0" cap="flat" cmpd="sng" algn="ctr">
-                      <a:noFill/>
-                    </a:lnB>
-                  </a:tcPr>
-                </a:tc>
-                <a:tc>
-                  <a:txBody>
-                    <a:bodyPr/>
-                    <a:lstStyle/>
-                    <a:p>
-                      <a:pPr algn="r" indent="0" marL="0">
-                        <a:buNone/>
-                      </a:pPr>
-                      <a:r>
-                        <a:rPr lang="en-US" sz="1300" dirty="0">
-                          <a:solidFill>
-                            <a:schemeClr val="tx1"/>
-                          </a:solidFill>
-                        </a:rPr>
-                        <a:t>20</a:t>
-                      </a:r>
-                      <a:endParaRPr lang="en-US" sz="1300" dirty="0"/>
-                    </a:p>
-                  </a:txBody>
-                  <a:tcPr marL="76200" marR="76200" marT="38100" marB="38100" anchor="ctr">
-                    <a:lnL w="0" cap="flat" cmpd="sng" algn="ctr">
-                      <a:noFill/>
-                    </a:lnL>
-                    <a:lnR w="0" cap="flat" cmpd="sng" algn="ctr">
-                      <a:noFill/>
-                    </a:lnR>
-                    <a:lnT w="0" cap="flat" cmpd="sng" algn="ctr">
-                      <a:noFill/>
-                    </a:lnT>
-                    <a:lnB w="0" cap="flat" cmpd="sng" algn="ctr">
-                      <a:noFill/>
-                    </a:lnB>
-                  </a:tcPr>
-                </a:tc>
-                <a:tc>
-                  <a:txBody>
-                    <a:bodyPr/>
-                    <a:lstStyle/>
-                    <a:p>
-                      <a:pPr algn="l" indent="0" marL="0">
-                        <a:buNone/>
-                      </a:pPr>
-                      <a:r>
-                        <a:rPr lang="en-US" sz="1300" dirty="0">
-                          <a:solidFill>
-                            <a:schemeClr val="tx1"/>
-                          </a:solidFill>
-                        </a:rPr>
-                        <a:t>架構與效能審查</a:t>
-                      </a:r>
-                      <a:endParaRPr lang="en-US" sz="1300" dirty="0"/>
-                    </a:p>
-                  </a:txBody>
-                  <a:tcPr marL="76200" marR="76200" marT="38100" marB="38100" anchor="ctr">
-                    <a:lnL w="0" cap="flat" cmpd="sng" algn="ctr">
-                      <a:noFill/>
-                    </a:lnL>
-                    <a:lnR w="0" cap="flat" cmpd="sng" algn="ctr">
-                      <a:noFill/>
-                    </a:lnR>
-                    <a:lnT w="0" cap="flat" cmpd="sng" algn="ctr">
-                      <a:noFill/>
-                    </a:lnT>
-                    <a:lnB w="0" cap="flat" cmpd="sng" algn="ctr">
-                      <a:noFill/>
-                    </a:lnB>
-                  </a:tcPr>
-                </a:tc>
-              </a:tr>
-            </a:tbl>
-          </a:graphicData>
-        </a:graphic>
-      </p:graphicFrame>
-      <p:sp>
-        <p:nvSpPr>
-          <p:cNvPr id="4" name="Text 1"/>
+      <p:sp>
+        <p:nvSpPr>
+          <p:cNvPr id="3" name="Text 1"/>
           <p:cNvSpPr txBox="1"/>
           <p:nvPr/>
         </p:nvSpPr>
         <p:spPr>
           <a:xfrm>
-            <a:off x="457200" y="4480560"/>
-            <a:ext cx="7863840" cy="274320"/>
+            <a:off x="457200" y="1325880"/>
+            <a:ext cx="5120640" cy="3017520"/>
+          </a:xfrm>
+          <a:prstGeom prst="rect">
+            <a:avLst/>
+          </a:prstGeom>
+          <a:noFill/>
+          <a:ln/>
+        </p:spPr>
+        <p:txBody>
+          <a:bodyPr wrap="square" lIns="0" tIns="0" rIns="0" bIns="0" rtlCol="0" anchor="t"/>
+          <a:lstStyle/>
+          <a:p>
+            <a:pPr marL="342900" indent="-342900">
+              <a:spcAft>
+                <a:spcPts val="800"/>
+              </a:spcAft>
+              <a:buSzPct val="100000"/>
+              <a:buChar char="•"/>
+            </a:pPr>
+            <a:r>
+              <a:rPr lang="en-US" sz="1500" dirty="0">
+                <a:solidFill>
+                  <a:schemeClr val="tx1"/>
+                </a:solidFill>
+              </a:rPr>
+              <a:t>部署安裝（測試＋正式）、SSO 與權限</a:t>
+            </a:r>
+            <a:endParaRPr lang="en-US" sz="1500" dirty="0"/>
+          </a:p>
+          <a:p>
+            <a:pPr marL="342900" indent="-342900">
+              <a:spcAft>
+                <a:spcPts val="800"/>
+              </a:spcAft>
+              <a:buSzPct val="100000"/>
+              <a:buChar char="•"/>
+            </a:pPr>
+            <a:r>
+              <a:rPr lang="en-US" sz="1500" dirty="0">
+                <a:solidFill>
+                  <a:schemeClr val="tx1"/>
+                </a:solidFill>
+              </a:rPr>
+              <a:t>GA360 BigQuery 匯出接入、數據中台交易批次</a:t>
+            </a:r>
+            <a:endParaRPr lang="en-US" sz="1500" dirty="0"/>
+          </a:p>
+          <a:p>
+            <a:pPr marL="342900" indent="-342900">
+              <a:spcAft>
+                <a:spcPts val="800"/>
+              </a:spcAft>
+              <a:buSzPct val="100000"/>
+              <a:buChar char="•"/>
+            </a:pPr>
+            <a:r>
+              <a:rPr lang="en-US" sz="1500" dirty="0">
+                <a:solidFill>
+                  <a:schemeClr val="tx1"/>
+                </a:solidFill>
+              </a:rPr>
+              <a:t>神策近 13 個月歷史導入與並行期對帳</a:t>
+            </a:r>
+            <a:endParaRPr lang="en-US" sz="1500" dirty="0"/>
+          </a:p>
+          <a:p>
+            <a:pPr marL="342900" indent="-342900">
+              <a:spcAft>
+                <a:spcPts val="800"/>
+              </a:spcAft>
+              <a:buSzPct val="100000"/>
+              <a:buChar char="•"/>
+            </a:pPr>
+            <a:r>
+              <a:rPr lang="en-US" sz="1500" dirty="0">
+                <a:solidFill>
+                  <a:schemeClr val="tx1"/>
+                </a:solidFill>
+              </a:rPr>
+              <a:t>六個分析模組、分群、標籤、名單推送（Webhook）</a:t>
+            </a:r>
+            <a:endParaRPr lang="en-US" sz="1500" dirty="0"/>
+          </a:p>
+          <a:p>
+            <a:pPr marL="342900" indent="-342900">
+              <a:spcAft>
+                <a:spcPts val="800"/>
+              </a:spcAft>
+              <a:buSzPct val="100000"/>
+              <a:buChar char="•"/>
+            </a:pPr>
+            <a:r>
+              <a:rPr lang="en-US" sz="1500" dirty="0">
+                <a:solidFill>
+                  <a:schemeClr val="tx1"/>
+                </a:solidFill>
+              </a:rPr>
+              <a:t>審批與審計、四個情境看板、一輪教育訓練</a:t>
+            </a:r>
+            <a:endParaRPr lang="en-US" sz="1500" dirty="0"/>
+          </a:p>
+        </p:txBody>
+      </p:sp>
+      <p:sp>
+        <p:nvSpPr>
+          <p:cNvPr id="4" name="s18_phase"/>
+          <p:cNvSpPr/>
+          <p:nvPr/>
+        </p:nvSpPr>
+        <p:spPr>
+          <a:xfrm>
+            <a:off x="5760720" y="1325880"/>
+            <a:ext cx="2926080" cy="3017520"/>
+          </a:xfrm>
+          <a:prstGeom prst="roundRect">
+            <a:avLst>
+              <a:gd name="adj" fmla="val 2500"/>
+            </a:avLst>
+          </a:prstGeom>
+          <a:solidFill>
+            <a:schemeClr val="accent6"/>
+          </a:solidFill>
+          <a:ln w="9525">
+            <a:solidFill>
+              <a:srgbClr val="E2E8EC"/>
+            </a:solidFill>
+            <a:prstDash val="solid"/>
+          </a:ln>
+        </p:spPr>
+      </p:sp>
+      <p:sp>
+        <p:nvSpPr>
+          <p:cNvPr id="5" name="Text 3"/>
+          <p:cNvSpPr txBox="1"/>
+          <p:nvPr/>
+        </p:nvSpPr>
+        <p:spPr>
+          <a:xfrm>
+            <a:off x="5943600" y="1508760"/>
+            <a:ext cx="2560320" cy="2651760"/>
           </a:xfrm>
           <a:prstGeom prst="rect">
             <a:avLst/>
@@ -9300,12 +8454,93 @@
               <a:buNone/>
             </a:pPr>
             <a:r>
+              <a:rPr lang="en-US" sz="1400" b="1" dirty="0">
+                <a:solidFill>
+                  <a:schemeClr val="tx1"/>
+                </a:solidFill>
+              </a:rPr>
+              <a:t>第一階段</a:t>
+            </a:r>
+            <a:endParaRPr lang="en-US" sz="1400" dirty="0"/>
+          </a:p>
+          <a:p>
+            <a:pPr indent="0" marL="0">
+              <a:spcAft>
+                <a:spcPts val="1000"/>
+              </a:spcAft>
+              <a:buNone/>
+            </a:pPr>
+            <a:r>
+              <a:rPr lang="en-US" sz="2600" b="1" dirty="0">
+                <a:solidFill>
+                  <a:schemeClr val="tx1"/>
+                </a:solidFill>
+              </a:rPr>
+              <a:t>290 人天</a:t>
+            </a:r>
+            <a:endParaRPr lang="en-US" sz="1400" dirty="0"/>
+          </a:p>
+          <a:p>
+            <a:pPr indent="0" marL="0">
+              <a:buNone/>
+            </a:pPr>
+            <a:r>
+              <a:rPr lang="en-US" sz="1400" b="1" dirty="0">
+                <a:solidFill>
+                  <a:schemeClr val="tx1"/>
+                </a:solidFill>
+              </a:rPr>
+              <a:t>規格外</a:t>
+            </a:r>
+            <a:endParaRPr lang="en-US" sz="1400" dirty="0"/>
+          </a:p>
+          <a:p>
+            <a:pPr indent="0" marL="0">
+              <a:buNone/>
+            </a:pPr>
+            <a:r>
+              <a:rPr lang="en-US" sz="1400" dirty="0">
+                <a:solidFill>
+                  <a:schemeClr val="tx1"/>
+                </a:solidFill>
+              </a:rPr>
+              <a:t>後續模組，需要時再加；一律人天單價 × 人天</a:t>
+            </a:r>
+            <a:endParaRPr lang="en-US" sz="1400" dirty="0"/>
+          </a:p>
+        </p:txBody>
+      </p:sp>
+      <p:sp>
+        <p:nvSpPr>
+          <p:cNvPr id="6" name="Text 4"/>
+          <p:cNvSpPr txBox="1"/>
+          <p:nvPr/>
+        </p:nvSpPr>
+        <p:spPr>
+          <a:xfrm>
+            <a:off x="457200" y="4480560"/>
+            <a:ext cx="7863840" cy="274320"/>
+          </a:xfrm>
+          <a:prstGeom prst="rect">
+            <a:avLst/>
+          </a:prstGeom>
+          <a:noFill/>
+          <a:ln/>
+        </p:spPr>
+        <p:txBody>
+          <a:bodyPr wrap="square" lIns="0" tIns="0" rIns="0" bIns="0" rtlCol="0" anchor="t"/>
+          <a:lstStyle/>
+          <a:p>
+            <a:pPr indent="0" marL="0">
+              <a:buNone/>
+            </a:pPr>
+            <a:r>
               <a:rPr lang="en-US" sz="1100" dirty="0">
                 <a:solidFill>
                   <a:srgbClr val="7C8992"/>
                 </a:solidFill>
               </a:rPr>
-              <a:t>計價＝人天單價 × 預估人天；超出部分另計或改固定總價加風險準備</a:t>
+              <a:t>平台功能已大致完成，只計導入、接入、遷移、對帳與驗收；比較基準：神策年費約 6,000,000</a:t>
             </a:r>
             <a:endParaRPr lang="en-US" sz="1100" dirty="0"/>
           </a:p>
@@ -9413,7 +8648,7 @@
                   <a:schemeClr val="tx1"/>
                 </a:solidFill>
               </a:rPr>
-              <a:t>基本方案 21,900,000 元未稅，含 CSM 選配為 22,700,000 元</a:t>
+              <a:t>第一階段 6,180,000 元未稅，維運約 194 萬／年</a:t>
             </a:r>
             <a:endParaRPr lang="en-US" sz="2400" dirty="0"/>
           </a:p>
@@ -9447,7 +8682,7 @@
                 <a:gridCol w="1554480"/>
                 <a:gridCol w="2286000"/>
               </a:tblGrid>
-              <a:tr h="292608">
+              <a:tr h="310896">
                 <a:tc>
                   <a:txBody>
                     <a:bodyPr/>
@@ -9609,7 +8844,7 @@
                   </a:tcPr>
                 </a:tc>
               </a:tr>
-              <a:tr h="292608">
+              <a:tr h="310896">
                 <a:tc>
                   <a:txBody>
                     <a:bodyPr/>
@@ -9624,6 +8859,834 @@
                             <a:schemeClr val="tx1"/>
                           </a:solidFill>
                         </a:rPr>
+                        <a:t>研發 R1</a:t>
+                      </a:r>
+                      <a:endParaRPr lang="en-US" sz="1300" dirty="0"/>
+                    </a:p>
+                  </a:txBody>
+                  <a:tcPr marL="76200" marR="76200" marT="38100" marB="38100" anchor="ctr">
+                    <a:lnL w="0" cap="flat" cmpd="sng" algn="ctr">
+                      <a:noFill/>
+                    </a:lnL>
+                    <a:lnR w="0" cap="flat" cmpd="sng" algn="ctr">
+                      <a:noFill/>
+                    </a:lnR>
+                    <a:lnT w="0" cap="flat" cmpd="sng" algn="ctr">
+                      <a:noFill/>
+                    </a:lnT>
+                    <a:lnB w="0" cap="flat" cmpd="sng" algn="ctr">
+                      <a:noFill/>
+                    </a:lnB>
+                  </a:tcPr>
+                </a:tc>
+                <a:tc>
+                  <a:txBody>
+                    <a:bodyPr/>
+                    <a:lstStyle/>
+                    <a:p>
+                      <a:pPr algn="r" indent="0" marL="0">
+                        <a:buNone/>
+                      </a:pPr>
+                      <a:r>
+                        <a:rPr lang="en-US" sz="1300" dirty="0">
+                          <a:solidFill>
+                            <a:schemeClr val="tx1"/>
+                          </a:solidFill>
+                        </a:rPr>
+                        <a:t>70</a:t>
+                      </a:r>
+                      <a:endParaRPr lang="en-US" sz="1300" dirty="0"/>
+                    </a:p>
+                  </a:txBody>
+                  <a:tcPr marL="76200" marR="76200" marT="38100" marB="38100" anchor="ctr">
+                    <a:lnL w="0" cap="flat" cmpd="sng" algn="ctr">
+                      <a:noFill/>
+                    </a:lnL>
+                    <a:lnR w="0" cap="flat" cmpd="sng" algn="ctr">
+                      <a:noFill/>
+                    </a:lnR>
+                    <a:lnT w="0" cap="flat" cmpd="sng" algn="ctr">
+                      <a:noFill/>
+                    </a:lnT>
+                    <a:lnB w="0" cap="flat" cmpd="sng" algn="ctr">
+                      <a:noFill/>
+                    </a:lnB>
+                  </a:tcPr>
+                </a:tc>
+                <a:tc>
+                  <a:txBody>
+                    <a:bodyPr/>
+                    <a:lstStyle/>
+                    <a:p>
+                      <a:pPr algn="r" indent="0" marL="0">
+                        <a:buNone/>
+                      </a:pPr>
+                      <a:r>
+                        <a:rPr lang="en-US" sz="1300" dirty="0">
+                          <a:solidFill>
+                            <a:schemeClr val="tx1"/>
+                          </a:solidFill>
+                        </a:rPr>
+                        <a:t>25,000</a:t>
+                      </a:r>
+                      <a:endParaRPr lang="en-US" sz="1300" dirty="0"/>
+                    </a:p>
+                  </a:txBody>
+                  <a:tcPr marL="76200" marR="76200" marT="38100" marB="38100" anchor="ctr">
+                    <a:lnL w="0" cap="flat" cmpd="sng" algn="ctr">
+                      <a:noFill/>
+                    </a:lnL>
+                    <a:lnR w="0" cap="flat" cmpd="sng" algn="ctr">
+                      <a:noFill/>
+                    </a:lnR>
+                    <a:lnT w="0" cap="flat" cmpd="sng" algn="ctr">
+                      <a:noFill/>
+                    </a:lnT>
+                    <a:lnB w="0" cap="flat" cmpd="sng" algn="ctr">
+                      <a:noFill/>
+                    </a:lnB>
+                  </a:tcPr>
+                </a:tc>
+                <a:tc>
+                  <a:txBody>
+                    <a:bodyPr/>
+                    <a:lstStyle/>
+                    <a:p>
+                      <a:pPr algn="r" indent="0" marL="0">
+                        <a:buNone/>
+                      </a:pPr>
+                      <a:r>
+                        <a:rPr lang="en-US" sz="1300" dirty="0">
+                          <a:solidFill>
+                            <a:schemeClr val="tx1"/>
+                          </a:solidFill>
+                        </a:rPr>
+                        <a:t>1,750,000</a:t>
+                      </a:r>
+                      <a:endParaRPr lang="en-US" sz="1300" dirty="0"/>
+                    </a:p>
+                  </a:txBody>
+                  <a:tcPr marL="76200" marR="76200" marT="38100" marB="38100" anchor="ctr">
+                    <a:lnL w="0" cap="flat" cmpd="sng" algn="ctr">
+                      <a:noFill/>
+                    </a:lnL>
+                    <a:lnR w="0" cap="flat" cmpd="sng" algn="ctr">
+                      <a:noFill/>
+                    </a:lnR>
+                    <a:lnT w="0" cap="flat" cmpd="sng" algn="ctr">
+                      <a:noFill/>
+                    </a:lnT>
+                    <a:lnB w="0" cap="flat" cmpd="sng" algn="ctr">
+                      <a:noFill/>
+                    </a:lnB>
+                  </a:tcPr>
+                </a:tc>
+              </a:tr>
+              <a:tr h="310896">
+                <a:tc>
+                  <a:txBody>
+                    <a:bodyPr/>
+                    <a:lstStyle/>
+                    <a:p>
+                      <a:pPr algn="l" indent="0" marL="0">
+                        <a:buNone/>
+                      </a:pPr>
+                      <a:r>
+                        <a:rPr lang="en-US" sz="1300" b="1" dirty="0">
+                          <a:solidFill>
+                            <a:schemeClr val="tx1"/>
+                          </a:solidFill>
+                        </a:rPr>
+                        <a:t>研發 R2</a:t>
+                      </a:r>
+                      <a:endParaRPr lang="en-US" sz="1300" dirty="0"/>
+                    </a:p>
+                  </a:txBody>
+                  <a:tcPr marL="76200" marR="76200" marT="38100" marB="38100" anchor="ctr">
+                    <a:lnL w="0" cap="flat" cmpd="sng" algn="ctr">
+                      <a:noFill/>
+                    </a:lnL>
+                    <a:lnR w="0" cap="flat" cmpd="sng" algn="ctr">
+                      <a:noFill/>
+                    </a:lnR>
+                    <a:lnT w="0" cap="flat" cmpd="sng" algn="ctr">
+                      <a:noFill/>
+                    </a:lnT>
+                    <a:lnB w="0" cap="flat" cmpd="sng" algn="ctr">
+                      <a:noFill/>
+                    </a:lnB>
+                  </a:tcPr>
+                </a:tc>
+                <a:tc>
+                  <a:txBody>
+                    <a:bodyPr/>
+                    <a:lstStyle/>
+                    <a:p>
+                      <a:pPr algn="r" indent="0" marL="0">
+                        <a:buNone/>
+                      </a:pPr>
+                      <a:r>
+                        <a:rPr lang="en-US" sz="1300" dirty="0">
+                          <a:solidFill>
+                            <a:schemeClr val="tx1"/>
+                          </a:solidFill>
+                        </a:rPr>
+                        <a:t>50</a:t>
+                      </a:r>
+                      <a:endParaRPr lang="en-US" sz="1300" dirty="0"/>
+                    </a:p>
+                  </a:txBody>
+                  <a:tcPr marL="76200" marR="76200" marT="38100" marB="38100" anchor="ctr">
+                    <a:lnL w="0" cap="flat" cmpd="sng" algn="ctr">
+                      <a:noFill/>
+                    </a:lnL>
+                    <a:lnR w="0" cap="flat" cmpd="sng" algn="ctr">
+                      <a:noFill/>
+                    </a:lnR>
+                    <a:lnT w="0" cap="flat" cmpd="sng" algn="ctr">
+                      <a:noFill/>
+                    </a:lnT>
+                    <a:lnB w="0" cap="flat" cmpd="sng" algn="ctr">
+                      <a:noFill/>
+                    </a:lnB>
+                  </a:tcPr>
+                </a:tc>
+                <a:tc>
+                  <a:txBody>
+                    <a:bodyPr/>
+                    <a:lstStyle/>
+                    <a:p>
+                      <a:pPr algn="r" indent="0" marL="0">
+                        <a:buNone/>
+                      </a:pPr>
+                      <a:r>
+                        <a:rPr lang="en-US" sz="1300" dirty="0">
+                          <a:solidFill>
+                            <a:schemeClr val="tx1"/>
+                          </a:solidFill>
+                        </a:rPr>
+                        <a:t>25,000</a:t>
+                      </a:r>
+                      <a:endParaRPr lang="en-US" sz="1300" dirty="0"/>
+                    </a:p>
+                  </a:txBody>
+                  <a:tcPr marL="76200" marR="76200" marT="38100" marB="38100" anchor="ctr">
+                    <a:lnL w="0" cap="flat" cmpd="sng" algn="ctr">
+                      <a:noFill/>
+                    </a:lnL>
+                    <a:lnR w="0" cap="flat" cmpd="sng" algn="ctr">
+                      <a:noFill/>
+                    </a:lnR>
+                    <a:lnT w="0" cap="flat" cmpd="sng" algn="ctr">
+                      <a:noFill/>
+                    </a:lnT>
+                    <a:lnB w="0" cap="flat" cmpd="sng" algn="ctr">
+                      <a:noFill/>
+                    </a:lnB>
+                  </a:tcPr>
+                </a:tc>
+                <a:tc>
+                  <a:txBody>
+                    <a:bodyPr/>
+                    <a:lstStyle/>
+                    <a:p>
+                      <a:pPr algn="r" indent="0" marL="0">
+                        <a:buNone/>
+                      </a:pPr>
+                      <a:r>
+                        <a:rPr lang="en-US" sz="1300" dirty="0">
+                          <a:solidFill>
+                            <a:schemeClr val="tx1"/>
+                          </a:solidFill>
+                        </a:rPr>
+                        <a:t>1,250,000</a:t>
+                      </a:r>
+                      <a:endParaRPr lang="en-US" sz="1300" dirty="0"/>
+                    </a:p>
+                  </a:txBody>
+                  <a:tcPr marL="76200" marR="76200" marT="38100" marB="38100" anchor="ctr">
+                    <a:lnL w="0" cap="flat" cmpd="sng" algn="ctr">
+                      <a:noFill/>
+                    </a:lnL>
+                    <a:lnR w="0" cap="flat" cmpd="sng" algn="ctr">
+                      <a:noFill/>
+                    </a:lnR>
+                    <a:lnT w="0" cap="flat" cmpd="sng" algn="ctr">
+                      <a:noFill/>
+                    </a:lnT>
+                    <a:lnB w="0" cap="flat" cmpd="sng" algn="ctr">
+                      <a:noFill/>
+                    </a:lnB>
+                  </a:tcPr>
+                </a:tc>
+              </a:tr>
+              <a:tr h="310896">
+                <a:tc>
+                  <a:txBody>
+                    <a:bodyPr/>
+                    <a:lstStyle/>
+                    <a:p>
+                      <a:pPr algn="l" indent="0" marL="0">
+                        <a:buNone/>
+                      </a:pPr>
+                      <a:r>
+                        <a:rPr lang="en-US" sz="1300" b="1" dirty="0">
+                          <a:solidFill>
+                            <a:schemeClr val="tx1"/>
+                          </a:solidFill>
+                        </a:rPr>
+                        <a:t>數據分析師 A</a:t>
+                      </a:r>
+                      <a:endParaRPr lang="en-US" sz="1300" dirty="0"/>
+                    </a:p>
+                  </a:txBody>
+                  <a:tcPr marL="76200" marR="76200" marT="38100" marB="38100" anchor="ctr">
+                    <a:lnL w="0" cap="flat" cmpd="sng" algn="ctr">
+                      <a:noFill/>
+                    </a:lnL>
+                    <a:lnR w="0" cap="flat" cmpd="sng" algn="ctr">
+                      <a:noFill/>
+                    </a:lnR>
+                    <a:lnT w="0" cap="flat" cmpd="sng" algn="ctr">
+                      <a:noFill/>
+                    </a:lnT>
+                    <a:lnB w="0" cap="flat" cmpd="sng" algn="ctr">
+                      <a:noFill/>
+                    </a:lnB>
+                  </a:tcPr>
+                </a:tc>
+                <a:tc>
+                  <a:txBody>
+                    <a:bodyPr/>
+                    <a:lstStyle/>
+                    <a:p>
+                      <a:pPr algn="r" indent="0" marL="0">
+                        <a:buNone/>
+                      </a:pPr>
+                      <a:r>
+                        <a:rPr lang="en-US" sz="1300" dirty="0">
+                          <a:solidFill>
+                            <a:schemeClr val="tx1"/>
+                          </a:solidFill>
+                        </a:rPr>
+                        <a:t>50</a:t>
+                      </a:r>
+                      <a:endParaRPr lang="en-US" sz="1300" dirty="0"/>
+                    </a:p>
+                  </a:txBody>
+                  <a:tcPr marL="76200" marR="76200" marT="38100" marB="38100" anchor="ctr">
+                    <a:lnL w="0" cap="flat" cmpd="sng" algn="ctr">
+                      <a:noFill/>
+                    </a:lnL>
+                    <a:lnR w="0" cap="flat" cmpd="sng" algn="ctr">
+                      <a:noFill/>
+                    </a:lnR>
+                    <a:lnT w="0" cap="flat" cmpd="sng" algn="ctr">
+                      <a:noFill/>
+                    </a:lnT>
+                    <a:lnB w="0" cap="flat" cmpd="sng" algn="ctr">
+                      <a:noFill/>
+                    </a:lnB>
+                  </a:tcPr>
+                </a:tc>
+                <a:tc>
+                  <a:txBody>
+                    <a:bodyPr/>
+                    <a:lstStyle/>
+                    <a:p>
+                      <a:pPr algn="r" indent="0" marL="0">
+                        <a:buNone/>
+                      </a:pPr>
+                      <a:r>
+                        <a:rPr lang="en-US" sz="1300" dirty="0">
+                          <a:solidFill>
+                            <a:schemeClr val="tx1"/>
+                          </a:solidFill>
+                        </a:rPr>
+                        <a:t>16,000</a:t>
+                      </a:r>
+                      <a:endParaRPr lang="en-US" sz="1300" dirty="0"/>
+                    </a:p>
+                  </a:txBody>
+                  <a:tcPr marL="76200" marR="76200" marT="38100" marB="38100" anchor="ctr">
+                    <a:lnL w="0" cap="flat" cmpd="sng" algn="ctr">
+                      <a:noFill/>
+                    </a:lnL>
+                    <a:lnR w="0" cap="flat" cmpd="sng" algn="ctr">
+                      <a:noFill/>
+                    </a:lnR>
+                    <a:lnT w="0" cap="flat" cmpd="sng" algn="ctr">
+                      <a:noFill/>
+                    </a:lnT>
+                    <a:lnB w="0" cap="flat" cmpd="sng" algn="ctr">
+                      <a:noFill/>
+                    </a:lnB>
+                  </a:tcPr>
+                </a:tc>
+                <a:tc>
+                  <a:txBody>
+                    <a:bodyPr/>
+                    <a:lstStyle/>
+                    <a:p>
+                      <a:pPr algn="r" indent="0" marL="0">
+                        <a:buNone/>
+                      </a:pPr>
+                      <a:r>
+                        <a:rPr lang="en-US" sz="1300" dirty="0">
+                          <a:solidFill>
+                            <a:schemeClr val="tx1"/>
+                          </a:solidFill>
+                        </a:rPr>
+                        <a:t>800,000</a:t>
+                      </a:r>
+                      <a:endParaRPr lang="en-US" sz="1300" dirty="0"/>
+                    </a:p>
+                  </a:txBody>
+                  <a:tcPr marL="76200" marR="76200" marT="38100" marB="38100" anchor="ctr">
+                    <a:lnL w="0" cap="flat" cmpd="sng" algn="ctr">
+                      <a:noFill/>
+                    </a:lnL>
+                    <a:lnR w="0" cap="flat" cmpd="sng" algn="ctr">
+                      <a:noFill/>
+                    </a:lnR>
+                    <a:lnT w="0" cap="flat" cmpd="sng" algn="ctr">
+                      <a:noFill/>
+                    </a:lnT>
+                    <a:lnB w="0" cap="flat" cmpd="sng" algn="ctr">
+                      <a:noFill/>
+                    </a:lnB>
+                  </a:tcPr>
+                </a:tc>
+              </a:tr>
+              <a:tr h="310896">
+                <a:tc>
+                  <a:txBody>
+                    <a:bodyPr/>
+                    <a:lstStyle/>
+                    <a:p>
+                      <a:pPr algn="l" indent="0" marL="0">
+                        <a:buNone/>
+                      </a:pPr>
+                      <a:r>
+                        <a:rPr lang="en-US" sz="1300" b="1" dirty="0">
+                          <a:solidFill>
+                            <a:schemeClr val="tx1"/>
+                          </a:solidFill>
+                        </a:rPr>
+                        <a:t>專案經理</a:t>
+                      </a:r>
+                      <a:endParaRPr lang="en-US" sz="1300" dirty="0"/>
+                    </a:p>
+                  </a:txBody>
+                  <a:tcPr marL="76200" marR="76200" marT="38100" marB="38100" anchor="ctr">
+                    <a:lnL w="0" cap="flat" cmpd="sng" algn="ctr">
+                      <a:noFill/>
+                    </a:lnL>
+                    <a:lnR w="0" cap="flat" cmpd="sng" algn="ctr">
+                      <a:noFill/>
+                    </a:lnR>
+                    <a:lnT w="0" cap="flat" cmpd="sng" algn="ctr">
+                      <a:noFill/>
+                    </a:lnT>
+                    <a:lnB w="0" cap="flat" cmpd="sng" algn="ctr">
+                      <a:noFill/>
+                    </a:lnB>
+                  </a:tcPr>
+                </a:tc>
+                <a:tc>
+                  <a:txBody>
+                    <a:bodyPr/>
+                    <a:lstStyle/>
+                    <a:p>
+                      <a:pPr algn="r" indent="0" marL="0">
+                        <a:buNone/>
+                      </a:pPr>
+                      <a:r>
+                        <a:rPr lang="en-US" sz="1300" dirty="0">
+                          <a:solidFill>
+                            <a:schemeClr val="tx1"/>
+                          </a:solidFill>
+                        </a:rPr>
+                        <a:t>40</a:t>
+                      </a:r>
+                      <a:endParaRPr lang="en-US" sz="1300" dirty="0"/>
+                    </a:p>
+                  </a:txBody>
+                  <a:tcPr marL="76200" marR="76200" marT="38100" marB="38100" anchor="ctr">
+                    <a:lnL w="0" cap="flat" cmpd="sng" algn="ctr">
+                      <a:noFill/>
+                    </a:lnL>
+                    <a:lnR w="0" cap="flat" cmpd="sng" algn="ctr">
+                      <a:noFill/>
+                    </a:lnR>
+                    <a:lnT w="0" cap="flat" cmpd="sng" algn="ctr">
+                      <a:noFill/>
+                    </a:lnT>
+                    <a:lnB w="0" cap="flat" cmpd="sng" algn="ctr">
+                      <a:noFill/>
+                    </a:lnB>
+                  </a:tcPr>
+                </a:tc>
+                <a:tc>
+                  <a:txBody>
+                    <a:bodyPr/>
+                    <a:lstStyle/>
+                    <a:p>
+                      <a:pPr algn="r" indent="0" marL="0">
+                        <a:buNone/>
+                      </a:pPr>
+                      <a:r>
+                        <a:rPr lang="en-US" sz="1300" dirty="0">
+                          <a:solidFill>
+                            <a:schemeClr val="tx1"/>
+                          </a:solidFill>
+                        </a:rPr>
+                        <a:t>20,000</a:t>
+                      </a:r>
+                      <a:endParaRPr lang="en-US" sz="1300" dirty="0"/>
+                    </a:p>
+                  </a:txBody>
+                  <a:tcPr marL="76200" marR="76200" marT="38100" marB="38100" anchor="ctr">
+                    <a:lnL w="0" cap="flat" cmpd="sng" algn="ctr">
+                      <a:noFill/>
+                    </a:lnL>
+                    <a:lnR w="0" cap="flat" cmpd="sng" algn="ctr">
+                      <a:noFill/>
+                    </a:lnR>
+                    <a:lnT w="0" cap="flat" cmpd="sng" algn="ctr">
+                      <a:noFill/>
+                    </a:lnT>
+                    <a:lnB w="0" cap="flat" cmpd="sng" algn="ctr">
+                      <a:noFill/>
+                    </a:lnB>
+                  </a:tcPr>
+                </a:tc>
+                <a:tc>
+                  <a:txBody>
+                    <a:bodyPr/>
+                    <a:lstStyle/>
+                    <a:p>
+                      <a:pPr algn="r" indent="0" marL="0">
+                        <a:buNone/>
+                      </a:pPr>
+                      <a:r>
+                        <a:rPr lang="en-US" sz="1300" dirty="0">
+                          <a:solidFill>
+                            <a:schemeClr val="tx1"/>
+                          </a:solidFill>
+                        </a:rPr>
+                        <a:t>800,000</a:t>
+                      </a:r>
+                      <a:endParaRPr lang="en-US" sz="1300" dirty="0"/>
+                    </a:p>
+                  </a:txBody>
+                  <a:tcPr marL="76200" marR="76200" marT="38100" marB="38100" anchor="ctr">
+                    <a:lnL w="0" cap="flat" cmpd="sng" algn="ctr">
+                      <a:noFill/>
+                    </a:lnL>
+                    <a:lnR w="0" cap="flat" cmpd="sng" algn="ctr">
+                      <a:noFill/>
+                    </a:lnR>
+                    <a:lnT w="0" cap="flat" cmpd="sng" algn="ctr">
+                      <a:noFill/>
+                    </a:lnT>
+                    <a:lnB w="0" cap="flat" cmpd="sng" algn="ctr">
+                      <a:noFill/>
+                    </a:lnB>
+                  </a:tcPr>
+                </a:tc>
+              </a:tr>
+              <a:tr h="310896">
+                <a:tc>
+                  <a:txBody>
+                    <a:bodyPr/>
+                    <a:lstStyle/>
+                    <a:p>
+                      <a:pPr algn="l" indent="0" marL="0">
+                        <a:buNone/>
+                      </a:pPr>
+                      <a:r>
+                        <a:rPr lang="en-US" sz="1300" b="1" dirty="0">
+                          <a:solidFill>
+                            <a:schemeClr val="tx1"/>
+                          </a:solidFill>
+                        </a:rPr>
+                        <a:t>數據分析師 B</a:t>
+                      </a:r>
+                      <a:endParaRPr lang="en-US" sz="1300" dirty="0"/>
+                    </a:p>
+                  </a:txBody>
+                  <a:tcPr marL="76200" marR="76200" marT="38100" marB="38100" anchor="ctr">
+                    <a:lnL w="0" cap="flat" cmpd="sng" algn="ctr">
+                      <a:noFill/>
+                    </a:lnL>
+                    <a:lnR w="0" cap="flat" cmpd="sng" algn="ctr">
+                      <a:noFill/>
+                    </a:lnR>
+                    <a:lnT w="0" cap="flat" cmpd="sng" algn="ctr">
+                      <a:noFill/>
+                    </a:lnT>
+                    <a:lnB w="0" cap="flat" cmpd="sng" algn="ctr">
+                      <a:noFill/>
+                    </a:lnB>
+                  </a:tcPr>
+                </a:tc>
+                <a:tc>
+                  <a:txBody>
+                    <a:bodyPr/>
+                    <a:lstStyle/>
+                    <a:p>
+                      <a:pPr algn="r" indent="0" marL="0">
+                        <a:buNone/>
+                      </a:pPr>
+                      <a:r>
+                        <a:rPr lang="en-US" sz="1300" dirty="0">
+                          <a:solidFill>
+                            <a:schemeClr val="tx1"/>
+                          </a:solidFill>
+                        </a:rPr>
+                        <a:t>30</a:t>
+                      </a:r>
+                      <a:endParaRPr lang="en-US" sz="1300" dirty="0"/>
+                    </a:p>
+                  </a:txBody>
+                  <a:tcPr marL="76200" marR="76200" marT="38100" marB="38100" anchor="ctr">
+                    <a:lnL w="0" cap="flat" cmpd="sng" algn="ctr">
+                      <a:noFill/>
+                    </a:lnL>
+                    <a:lnR w="0" cap="flat" cmpd="sng" algn="ctr">
+                      <a:noFill/>
+                    </a:lnR>
+                    <a:lnT w="0" cap="flat" cmpd="sng" algn="ctr">
+                      <a:noFill/>
+                    </a:lnT>
+                    <a:lnB w="0" cap="flat" cmpd="sng" algn="ctr">
+                      <a:noFill/>
+                    </a:lnB>
+                  </a:tcPr>
+                </a:tc>
+                <a:tc>
+                  <a:txBody>
+                    <a:bodyPr/>
+                    <a:lstStyle/>
+                    <a:p>
+                      <a:pPr algn="r" indent="0" marL="0">
+                        <a:buNone/>
+                      </a:pPr>
+                      <a:r>
+                        <a:rPr lang="en-US" sz="1300" dirty="0">
+                          <a:solidFill>
+                            <a:schemeClr val="tx1"/>
+                          </a:solidFill>
+                        </a:rPr>
+                        <a:t>16,000</a:t>
+                      </a:r>
+                      <a:endParaRPr lang="en-US" sz="1300" dirty="0"/>
+                    </a:p>
+                  </a:txBody>
+                  <a:tcPr marL="76200" marR="76200" marT="38100" marB="38100" anchor="ctr">
+                    <a:lnL w="0" cap="flat" cmpd="sng" algn="ctr">
+                      <a:noFill/>
+                    </a:lnL>
+                    <a:lnR w="0" cap="flat" cmpd="sng" algn="ctr">
+                      <a:noFill/>
+                    </a:lnR>
+                    <a:lnT w="0" cap="flat" cmpd="sng" algn="ctr">
+                      <a:noFill/>
+                    </a:lnT>
+                    <a:lnB w="0" cap="flat" cmpd="sng" algn="ctr">
+                      <a:noFill/>
+                    </a:lnB>
+                  </a:tcPr>
+                </a:tc>
+                <a:tc>
+                  <a:txBody>
+                    <a:bodyPr/>
+                    <a:lstStyle/>
+                    <a:p>
+                      <a:pPr algn="r" indent="0" marL="0">
+                        <a:buNone/>
+                      </a:pPr>
+                      <a:r>
+                        <a:rPr lang="en-US" sz="1300" dirty="0">
+                          <a:solidFill>
+                            <a:schemeClr val="tx1"/>
+                          </a:solidFill>
+                        </a:rPr>
+                        <a:t>480,000</a:t>
+                      </a:r>
+                      <a:endParaRPr lang="en-US" sz="1300" dirty="0"/>
+                    </a:p>
+                  </a:txBody>
+                  <a:tcPr marL="76200" marR="76200" marT="38100" marB="38100" anchor="ctr">
+                    <a:lnL w="0" cap="flat" cmpd="sng" algn="ctr">
+                      <a:noFill/>
+                    </a:lnL>
+                    <a:lnR w="0" cap="flat" cmpd="sng" algn="ctr">
+                      <a:noFill/>
+                    </a:lnR>
+                    <a:lnT w="0" cap="flat" cmpd="sng" algn="ctr">
+                      <a:noFill/>
+                    </a:lnT>
+                    <a:lnB w="0" cap="flat" cmpd="sng" algn="ctr">
+                      <a:noFill/>
+                    </a:lnB>
+                  </a:tcPr>
+                </a:tc>
+              </a:tr>
+              <a:tr h="310896">
+                <a:tc>
+                  <a:txBody>
+                    <a:bodyPr/>
+                    <a:lstStyle/>
+                    <a:p>
+                      <a:pPr algn="l" indent="0" marL="0">
+                        <a:buNone/>
+                      </a:pPr>
+                      <a:r>
+                        <a:rPr lang="en-US" sz="1300" b="1" dirty="0">
+                          <a:solidFill>
+                            <a:schemeClr val="tx1"/>
+                          </a:solidFill>
+                        </a:rPr>
+                        <a:t>系統工程師（運維）</a:t>
+                      </a:r>
+                      <a:endParaRPr lang="en-US" sz="1300" dirty="0"/>
+                    </a:p>
+                  </a:txBody>
+                  <a:tcPr marL="76200" marR="76200" marT="38100" marB="38100" anchor="ctr">
+                    <a:lnL w="0" cap="flat" cmpd="sng" algn="ctr">
+                      <a:noFill/>
+                    </a:lnL>
+                    <a:lnR w="0" cap="flat" cmpd="sng" algn="ctr">
+                      <a:noFill/>
+                    </a:lnR>
+                    <a:lnT w="0" cap="flat" cmpd="sng" algn="ctr">
+                      <a:noFill/>
+                    </a:lnT>
+                    <a:lnB w="0" cap="flat" cmpd="sng" algn="ctr">
+                      <a:noFill/>
+                    </a:lnB>
+                  </a:tcPr>
+                </a:tc>
+                <a:tc>
+                  <a:txBody>
+                    <a:bodyPr/>
+                    <a:lstStyle/>
+                    <a:p>
+                      <a:pPr algn="r" indent="0" marL="0">
+                        <a:buNone/>
+                      </a:pPr>
+                      <a:r>
+                        <a:rPr lang="en-US" sz="1300" dirty="0">
+                          <a:solidFill>
+                            <a:schemeClr val="tx1"/>
+                          </a:solidFill>
+                        </a:rPr>
+                        <a:t>30</a:t>
+                      </a:r>
+                      <a:endParaRPr lang="en-US" sz="1300" dirty="0"/>
+                    </a:p>
+                  </a:txBody>
+                  <a:tcPr marL="76200" marR="76200" marT="38100" marB="38100" anchor="ctr">
+                    <a:lnL w="0" cap="flat" cmpd="sng" algn="ctr">
+                      <a:noFill/>
+                    </a:lnL>
+                    <a:lnR w="0" cap="flat" cmpd="sng" algn="ctr">
+                      <a:noFill/>
+                    </a:lnR>
+                    <a:lnT w="0" cap="flat" cmpd="sng" algn="ctr">
+                      <a:noFill/>
+                    </a:lnT>
+                    <a:lnB w="0" cap="flat" cmpd="sng" algn="ctr">
+                      <a:noFill/>
+                    </a:lnB>
+                  </a:tcPr>
+                </a:tc>
+                <a:tc>
+                  <a:txBody>
+                    <a:bodyPr/>
+                    <a:lstStyle/>
+                    <a:p>
+                      <a:pPr algn="r" indent="0" marL="0">
+                        <a:buNone/>
+                      </a:pPr>
+                      <a:r>
+                        <a:rPr lang="en-US" sz="1300" dirty="0">
+                          <a:solidFill>
+                            <a:schemeClr val="tx1"/>
+                          </a:solidFill>
+                        </a:rPr>
+                        <a:t>20,000</a:t>
+                      </a:r>
+                      <a:endParaRPr lang="en-US" sz="1300" dirty="0"/>
+                    </a:p>
+                  </a:txBody>
+                  <a:tcPr marL="76200" marR="76200" marT="38100" marB="38100" anchor="ctr">
+                    <a:lnL w="0" cap="flat" cmpd="sng" algn="ctr">
+                      <a:noFill/>
+                    </a:lnL>
+                    <a:lnR w="0" cap="flat" cmpd="sng" algn="ctr">
+                      <a:noFill/>
+                    </a:lnR>
+                    <a:lnT w="0" cap="flat" cmpd="sng" algn="ctr">
+                      <a:noFill/>
+                    </a:lnT>
+                    <a:lnB w="0" cap="flat" cmpd="sng" algn="ctr">
+                      <a:noFill/>
+                    </a:lnB>
+                  </a:tcPr>
+                </a:tc>
+                <a:tc>
+                  <a:txBody>
+                    <a:bodyPr/>
+                    <a:lstStyle/>
+                    <a:p>
+                      <a:pPr algn="r" indent="0" marL="0">
+                        <a:buNone/>
+                      </a:pPr>
+                      <a:r>
+                        <a:rPr lang="en-US" sz="1300" dirty="0">
+                          <a:solidFill>
+                            <a:schemeClr val="tx1"/>
+                          </a:solidFill>
+                        </a:rPr>
+                        <a:t>600,000</a:t>
+                      </a:r>
+                      <a:endParaRPr lang="en-US" sz="1300" dirty="0"/>
+                    </a:p>
+                  </a:txBody>
+                  <a:tcPr marL="76200" marR="76200" marT="38100" marB="38100" anchor="ctr">
+                    <a:lnL w="0" cap="flat" cmpd="sng" algn="ctr">
+                      <a:noFill/>
+                    </a:lnL>
+                    <a:lnR w="0" cap="flat" cmpd="sng" algn="ctr">
+                      <a:noFill/>
+                    </a:lnR>
+                    <a:lnT w="0" cap="flat" cmpd="sng" algn="ctr">
+                      <a:noFill/>
+                    </a:lnT>
+                    <a:lnB w="0" cap="flat" cmpd="sng" algn="ctr">
+                      <a:noFill/>
+                    </a:lnB>
+                  </a:tcPr>
+                </a:tc>
+              </a:tr>
+              <a:tr h="310896">
+                <a:tc>
+                  <a:txBody>
+                    <a:bodyPr/>
+                    <a:lstStyle/>
+                    <a:p>
+                      <a:pPr algn="l" indent="0" marL="0">
+                        <a:buNone/>
+                      </a:pPr>
+                      <a:r>
+                        <a:rPr lang="en-US" sz="1300" b="1" dirty="0">
+                          <a:solidFill>
+                            <a:schemeClr val="tx1"/>
+                          </a:solidFill>
+                        </a:rPr>
                         <a:t>產品</a:t>
                       </a:r>
                       <a:endParaRPr lang="en-US" sz="1300" dirty="0"/>
@@ -9658,7 +9721,7 @@
                             <a:schemeClr val="tx1"/>
                           </a:solidFill>
                         </a:rPr>
-                        <a:t>100</a:t>
+                        <a:t>20</a:t>
                       </a:r>
                       <a:endParaRPr lang="en-US" sz="1300" dirty="0"/>
                     </a:p>
@@ -9726,7 +9789,7 @@
                             <a:schemeClr val="tx1"/>
                           </a:solidFill>
                         </a:rPr>
-                        <a:t>2,500,000</a:t>
+                        <a:t>500,000</a:t>
                       </a:r>
                       <a:endParaRPr lang="en-US" sz="1300" dirty="0"/>
                     </a:p>
@@ -9747,7 +9810,7 @@
                   </a:tcPr>
                 </a:tc>
               </a:tr>
-              <a:tr h="292608">
+              <a:tr h="310896">
                 <a:tc>
                   <a:txBody>
                     <a:bodyPr/>
@@ -9762,973 +9825,7 @@
                             <a:schemeClr val="tx1"/>
                           </a:solidFill>
                         </a:rPr>
-                        <a:t>研發 R1</a:t>
-                      </a:r>
-                      <a:endParaRPr lang="en-US" sz="1300" dirty="0"/>
-                    </a:p>
-                  </a:txBody>
-                  <a:tcPr marL="76200" marR="76200" marT="38100" marB="38100" anchor="ctr">
-                    <a:lnL w="0" cap="flat" cmpd="sng" algn="ctr">
-                      <a:noFill/>
-                    </a:lnL>
-                    <a:lnR w="0" cap="flat" cmpd="sng" algn="ctr">
-                      <a:noFill/>
-                    </a:lnR>
-                    <a:lnT w="0" cap="flat" cmpd="sng" algn="ctr">
-                      <a:noFill/>
-                    </a:lnT>
-                    <a:lnB w="0" cap="flat" cmpd="sng" algn="ctr">
-                      <a:noFill/>
-                    </a:lnB>
-                  </a:tcPr>
-                </a:tc>
-                <a:tc>
-                  <a:txBody>
-                    <a:bodyPr/>
-                    <a:lstStyle/>
-                    <a:p>
-                      <a:pPr algn="r" indent="0" marL="0">
-                        <a:buNone/>
-                      </a:pPr>
-                      <a:r>
-                        <a:rPr lang="en-US" sz="1300" dirty="0">
-                          <a:solidFill>
-                            <a:schemeClr val="tx1"/>
-                          </a:solidFill>
-                        </a:rPr>
-                        <a:t>200</a:t>
-                      </a:r>
-                      <a:endParaRPr lang="en-US" sz="1300" dirty="0"/>
-                    </a:p>
-                  </a:txBody>
-                  <a:tcPr marL="76200" marR="76200" marT="38100" marB="38100" anchor="ctr">
-                    <a:lnL w="0" cap="flat" cmpd="sng" algn="ctr">
-                      <a:noFill/>
-                    </a:lnL>
-                    <a:lnR w="0" cap="flat" cmpd="sng" algn="ctr">
-                      <a:noFill/>
-                    </a:lnR>
-                    <a:lnT w="0" cap="flat" cmpd="sng" algn="ctr">
-                      <a:noFill/>
-                    </a:lnT>
-                    <a:lnB w="0" cap="flat" cmpd="sng" algn="ctr">
-                      <a:noFill/>
-                    </a:lnB>
-                  </a:tcPr>
-                </a:tc>
-                <a:tc>
-                  <a:txBody>
-                    <a:bodyPr/>
-                    <a:lstStyle/>
-                    <a:p>
-                      <a:pPr algn="r" indent="0" marL="0">
-                        <a:buNone/>
-                      </a:pPr>
-                      <a:r>
-                        <a:rPr lang="en-US" sz="1300" dirty="0">
-                          <a:solidFill>
-                            <a:schemeClr val="tx1"/>
-                          </a:solidFill>
-                        </a:rPr>
-                        <a:t>25,000</a:t>
-                      </a:r>
-                      <a:endParaRPr lang="en-US" sz="1300" dirty="0"/>
-                    </a:p>
-                  </a:txBody>
-                  <a:tcPr marL="76200" marR="76200" marT="38100" marB="38100" anchor="ctr">
-                    <a:lnL w="0" cap="flat" cmpd="sng" algn="ctr">
-                      <a:noFill/>
-                    </a:lnL>
-                    <a:lnR w="0" cap="flat" cmpd="sng" algn="ctr">
-                      <a:noFill/>
-                    </a:lnR>
-                    <a:lnT w="0" cap="flat" cmpd="sng" algn="ctr">
-                      <a:noFill/>
-                    </a:lnT>
-                    <a:lnB w="0" cap="flat" cmpd="sng" algn="ctr">
-                      <a:noFill/>
-                    </a:lnB>
-                  </a:tcPr>
-                </a:tc>
-                <a:tc>
-                  <a:txBody>
-                    <a:bodyPr/>
-                    <a:lstStyle/>
-                    <a:p>
-                      <a:pPr algn="r" indent="0" marL="0">
-                        <a:buNone/>
-                      </a:pPr>
-                      <a:r>
-                        <a:rPr lang="en-US" sz="1300" dirty="0">
-                          <a:solidFill>
-                            <a:schemeClr val="tx1"/>
-                          </a:solidFill>
-                        </a:rPr>
-                        <a:t>5,000,000</a:t>
-                      </a:r>
-                      <a:endParaRPr lang="en-US" sz="1300" dirty="0"/>
-                    </a:p>
-                  </a:txBody>
-                  <a:tcPr marL="76200" marR="76200" marT="38100" marB="38100" anchor="ctr">
-                    <a:lnL w="0" cap="flat" cmpd="sng" algn="ctr">
-                      <a:noFill/>
-                    </a:lnL>
-                    <a:lnR w="0" cap="flat" cmpd="sng" algn="ctr">
-                      <a:noFill/>
-                    </a:lnR>
-                    <a:lnT w="0" cap="flat" cmpd="sng" algn="ctr">
-                      <a:noFill/>
-                    </a:lnT>
-                    <a:lnB w="0" cap="flat" cmpd="sng" algn="ctr">
-                      <a:noFill/>
-                    </a:lnB>
-                  </a:tcPr>
-                </a:tc>
-              </a:tr>
-              <a:tr h="292608">
-                <a:tc>
-                  <a:txBody>
-                    <a:bodyPr/>
-                    <a:lstStyle/>
-                    <a:p>
-                      <a:pPr algn="l" indent="0" marL="0">
-                        <a:buNone/>
-                      </a:pPr>
-                      <a:r>
-                        <a:rPr lang="en-US" sz="1300" b="1" dirty="0">
-                          <a:solidFill>
-                            <a:schemeClr val="tx1"/>
-                          </a:solidFill>
-                        </a:rPr>
-                        <a:t>研發 R2</a:t>
-                      </a:r>
-                      <a:endParaRPr lang="en-US" sz="1300" dirty="0"/>
-                    </a:p>
-                  </a:txBody>
-                  <a:tcPr marL="76200" marR="76200" marT="38100" marB="38100" anchor="ctr">
-                    <a:lnL w="0" cap="flat" cmpd="sng" algn="ctr">
-                      <a:noFill/>
-                    </a:lnL>
-                    <a:lnR w="0" cap="flat" cmpd="sng" algn="ctr">
-                      <a:noFill/>
-                    </a:lnR>
-                    <a:lnT w="0" cap="flat" cmpd="sng" algn="ctr">
-                      <a:noFill/>
-                    </a:lnT>
-                    <a:lnB w="0" cap="flat" cmpd="sng" algn="ctr">
-                      <a:noFill/>
-                    </a:lnB>
-                  </a:tcPr>
-                </a:tc>
-                <a:tc>
-                  <a:txBody>
-                    <a:bodyPr/>
-                    <a:lstStyle/>
-                    <a:p>
-                      <a:pPr algn="r" indent="0" marL="0">
-                        <a:buNone/>
-                      </a:pPr>
-                      <a:r>
-                        <a:rPr lang="en-US" sz="1300" dirty="0">
-                          <a:solidFill>
-                            <a:schemeClr val="tx1"/>
-                          </a:solidFill>
-                        </a:rPr>
-                        <a:t>200</a:t>
-                      </a:r>
-                      <a:endParaRPr lang="en-US" sz="1300" dirty="0"/>
-                    </a:p>
-                  </a:txBody>
-                  <a:tcPr marL="76200" marR="76200" marT="38100" marB="38100" anchor="ctr">
-                    <a:lnL w="0" cap="flat" cmpd="sng" algn="ctr">
-                      <a:noFill/>
-                    </a:lnL>
-                    <a:lnR w="0" cap="flat" cmpd="sng" algn="ctr">
-                      <a:noFill/>
-                    </a:lnR>
-                    <a:lnT w="0" cap="flat" cmpd="sng" algn="ctr">
-                      <a:noFill/>
-                    </a:lnT>
-                    <a:lnB w="0" cap="flat" cmpd="sng" algn="ctr">
-                      <a:noFill/>
-                    </a:lnB>
-                  </a:tcPr>
-                </a:tc>
-                <a:tc>
-                  <a:txBody>
-                    <a:bodyPr/>
-                    <a:lstStyle/>
-                    <a:p>
-                      <a:pPr algn="r" indent="0" marL="0">
-                        <a:buNone/>
-                      </a:pPr>
-                      <a:r>
-                        <a:rPr lang="en-US" sz="1300" dirty="0">
-                          <a:solidFill>
-                            <a:schemeClr val="tx1"/>
-                          </a:solidFill>
-                        </a:rPr>
-                        <a:t>25,000</a:t>
-                      </a:r>
-                      <a:endParaRPr lang="en-US" sz="1300" dirty="0"/>
-                    </a:p>
-                  </a:txBody>
-                  <a:tcPr marL="76200" marR="76200" marT="38100" marB="38100" anchor="ctr">
-                    <a:lnL w="0" cap="flat" cmpd="sng" algn="ctr">
-                      <a:noFill/>
-                    </a:lnL>
-                    <a:lnR w="0" cap="flat" cmpd="sng" algn="ctr">
-                      <a:noFill/>
-                    </a:lnR>
-                    <a:lnT w="0" cap="flat" cmpd="sng" algn="ctr">
-                      <a:noFill/>
-                    </a:lnT>
-                    <a:lnB w="0" cap="flat" cmpd="sng" algn="ctr">
-                      <a:noFill/>
-                    </a:lnB>
-                  </a:tcPr>
-                </a:tc>
-                <a:tc>
-                  <a:txBody>
-                    <a:bodyPr/>
-                    <a:lstStyle/>
-                    <a:p>
-                      <a:pPr algn="r" indent="0" marL="0">
-                        <a:buNone/>
-                      </a:pPr>
-                      <a:r>
-                        <a:rPr lang="en-US" sz="1300" dirty="0">
-                          <a:solidFill>
-                            <a:schemeClr val="tx1"/>
-                          </a:solidFill>
-                        </a:rPr>
-                        <a:t>5,000,000</a:t>
-                      </a:r>
-                      <a:endParaRPr lang="en-US" sz="1300" dirty="0"/>
-                    </a:p>
-                  </a:txBody>
-                  <a:tcPr marL="76200" marR="76200" marT="38100" marB="38100" anchor="ctr">
-                    <a:lnL w="0" cap="flat" cmpd="sng" algn="ctr">
-                      <a:noFill/>
-                    </a:lnL>
-                    <a:lnR w="0" cap="flat" cmpd="sng" algn="ctr">
-                      <a:noFill/>
-                    </a:lnR>
-                    <a:lnT w="0" cap="flat" cmpd="sng" algn="ctr">
-                      <a:noFill/>
-                    </a:lnT>
-                    <a:lnB w="0" cap="flat" cmpd="sng" algn="ctr">
-                      <a:noFill/>
-                    </a:lnB>
-                  </a:tcPr>
-                </a:tc>
-              </a:tr>
-              <a:tr h="292608">
-                <a:tc>
-                  <a:txBody>
-                    <a:bodyPr/>
-                    <a:lstStyle/>
-                    <a:p>
-                      <a:pPr algn="l" indent="0" marL="0">
-                        <a:buNone/>
-                      </a:pPr>
-                      <a:r>
-                        <a:rPr lang="en-US" sz="1300" b="1" dirty="0">
-                          <a:solidFill>
-                            <a:schemeClr val="tx1"/>
-                          </a:solidFill>
-                        </a:rPr>
-                        <a:t>專案經理</a:t>
-                      </a:r>
-                      <a:endParaRPr lang="en-US" sz="1300" dirty="0"/>
-                    </a:p>
-                  </a:txBody>
-                  <a:tcPr marL="76200" marR="76200" marT="38100" marB="38100" anchor="ctr">
-                    <a:lnL w="0" cap="flat" cmpd="sng" algn="ctr">
-                      <a:noFill/>
-                    </a:lnL>
-                    <a:lnR w="0" cap="flat" cmpd="sng" algn="ctr">
-                      <a:noFill/>
-                    </a:lnR>
-                    <a:lnT w="0" cap="flat" cmpd="sng" algn="ctr">
-                      <a:noFill/>
-                    </a:lnT>
-                    <a:lnB w="0" cap="flat" cmpd="sng" algn="ctr">
-                      <a:noFill/>
-                    </a:lnB>
-                  </a:tcPr>
-                </a:tc>
-                <a:tc>
-                  <a:txBody>
-                    <a:bodyPr/>
-                    <a:lstStyle/>
-                    <a:p>
-                      <a:pPr algn="r" indent="0" marL="0">
-                        <a:buNone/>
-                      </a:pPr>
-                      <a:r>
-                        <a:rPr lang="en-US" sz="1300" dirty="0">
-                          <a:solidFill>
-                            <a:schemeClr val="tx1"/>
-                          </a:solidFill>
-                        </a:rPr>
-                        <a:t>150</a:t>
-                      </a:r>
-                      <a:endParaRPr lang="en-US" sz="1300" dirty="0"/>
-                    </a:p>
-                  </a:txBody>
-                  <a:tcPr marL="76200" marR="76200" marT="38100" marB="38100" anchor="ctr">
-                    <a:lnL w="0" cap="flat" cmpd="sng" algn="ctr">
-                      <a:noFill/>
-                    </a:lnL>
-                    <a:lnR w="0" cap="flat" cmpd="sng" algn="ctr">
-                      <a:noFill/>
-                    </a:lnR>
-                    <a:lnT w="0" cap="flat" cmpd="sng" algn="ctr">
-                      <a:noFill/>
-                    </a:lnT>
-                    <a:lnB w="0" cap="flat" cmpd="sng" algn="ctr">
-                      <a:noFill/>
-                    </a:lnB>
-                  </a:tcPr>
-                </a:tc>
-                <a:tc>
-                  <a:txBody>
-                    <a:bodyPr/>
-                    <a:lstStyle/>
-                    <a:p>
-                      <a:pPr algn="r" indent="0" marL="0">
-                        <a:buNone/>
-                      </a:pPr>
-                      <a:r>
-                        <a:rPr lang="en-US" sz="1300" dirty="0">
-                          <a:solidFill>
-                            <a:schemeClr val="tx1"/>
-                          </a:solidFill>
-                        </a:rPr>
-                        <a:t>20,000</a:t>
-                      </a:r>
-                      <a:endParaRPr lang="en-US" sz="1300" dirty="0"/>
-                    </a:p>
-                  </a:txBody>
-                  <a:tcPr marL="76200" marR="76200" marT="38100" marB="38100" anchor="ctr">
-                    <a:lnL w="0" cap="flat" cmpd="sng" algn="ctr">
-                      <a:noFill/>
-                    </a:lnL>
-                    <a:lnR w="0" cap="flat" cmpd="sng" algn="ctr">
-                      <a:noFill/>
-                    </a:lnR>
-                    <a:lnT w="0" cap="flat" cmpd="sng" algn="ctr">
-                      <a:noFill/>
-                    </a:lnT>
-                    <a:lnB w="0" cap="flat" cmpd="sng" algn="ctr">
-                      <a:noFill/>
-                    </a:lnB>
-                  </a:tcPr>
-                </a:tc>
-                <a:tc>
-                  <a:txBody>
-                    <a:bodyPr/>
-                    <a:lstStyle/>
-                    <a:p>
-                      <a:pPr algn="r" indent="0" marL="0">
-                        <a:buNone/>
-                      </a:pPr>
-                      <a:r>
-                        <a:rPr lang="en-US" sz="1300" dirty="0">
-                          <a:solidFill>
-                            <a:schemeClr val="tx1"/>
-                          </a:solidFill>
-                        </a:rPr>
-                        <a:t>3,000,000</a:t>
-                      </a:r>
-                      <a:endParaRPr lang="en-US" sz="1300" dirty="0"/>
-                    </a:p>
-                  </a:txBody>
-                  <a:tcPr marL="76200" marR="76200" marT="38100" marB="38100" anchor="ctr">
-                    <a:lnL w="0" cap="flat" cmpd="sng" algn="ctr">
-                      <a:noFill/>
-                    </a:lnL>
-                    <a:lnR w="0" cap="flat" cmpd="sng" algn="ctr">
-                      <a:noFill/>
-                    </a:lnR>
-                    <a:lnT w="0" cap="flat" cmpd="sng" algn="ctr">
-                      <a:noFill/>
-                    </a:lnT>
-                    <a:lnB w="0" cap="flat" cmpd="sng" algn="ctr">
-                      <a:noFill/>
-                    </a:lnB>
-                  </a:tcPr>
-                </a:tc>
-              </a:tr>
-              <a:tr h="292608">
-                <a:tc>
-                  <a:txBody>
-                    <a:bodyPr/>
-                    <a:lstStyle/>
-                    <a:p>
-                      <a:pPr algn="l" indent="0" marL="0">
-                        <a:buNone/>
-                      </a:pPr>
-                      <a:r>
-                        <a:rPr lang="en-US" sz="1300" b="1" dirty="0">
-                          <a:solidFill>
-                            <a:schemeClr val="tx1"/>
-                          </a:solidFill>
-                        </a:rPr>
-                        <a:t>系統工程師（運維）</a:t>
-                      </a:r>
-                      <a:endParaRPr lang="en-US" sz="1300" dirty="0"/>
-                    </a:p>
-                  </a:txBody>
-                  <a:tcPr marL="76200" marR="76200" marT="38100" marB="38100" anchor="ctr">
-                    <a:lnL w="0" cap="flat" cmpd="sng" algn="ctr">
-                      <a:noFill/>
-                    </a:lnL>
-                    <a:lnR w="0" cap="flat" cmpd="sng" algn="ctr">
-                      <a:noFill/>
-                    </a:lnR>
-                    <a:lnT w="0" cap="flat" cmpd="sng" algn="ctr">
-                      <a:noFill/>
-                    </a:lnT>
-                    <a:lnB w="0" cap="flat" cmpd="sng" algn="ctr">
-                      <a:noFill/>
-                    </a:lnB>
-                  </a:tcPr>
-                </a:tc>
-                <a:tc>
-                  <a:txBody>
-                    <a:bodyPr/>
-                    <a:lstStyle/>
-                    <a:p>
-                      <a:pPr algn="r" indent="0" marL="0">
-                        <a:buNone/>
-                      </a:pPr>
-                      <a:r>
-                        <a:rPr lang="en-US" sz="1300" dirty="0">
-                          <a:solidFill>
-                            <a:schemeClr val="tx1"/>
-                          </a:solidFill>
-                        </a:rPr>
-                        <a:t>100</a:t>
-                      </a:r>
-                      <a:endParaRPr lang="en-US" sz="1300" dirty="0"/>
-                    </a:p>
-                  </a:txBody>
-                  <a:tcPr marL="76200" marR="76200" marT="38100" marB="38100" anchor="ctr">
-                    <a:lnL w="0" cap="flat" cmpd="sng" algn="ctr">
-                      <a:noFill/>
-                    </a:lnL>
-                    <a:lnR w="0" cap="flat" cmpd="sng" algn="ctr">
-                      <a:noFill/>
-                    </a:lnR>
-                    <a:lnT w="0" cap="flat" cmpd="sng" algn="ctr">
-                      <a:noFill/>
-                    </a:lnT>
-                    <a:lnB w="0" cap="flat" cmpd="sng" algn="ctr">
-                      <a:noFill/>
-                    </a:lnB>
-                  </a:tcPr>
-                </a:tc>
-                <a:tc>
-                  <a:txBody>
-                    <a:bodyPr/>
-                    <a:lstStyle/>
-                    <a:p>
-                      <a:pPr algn="r" indent="0" marL="0">
-                        <a:buNone/>
-                      </a:pPr>
-                      <a:r>
-                        <a:rPr lang="en-US" sz="1300" dirty="0">
-                          <a:solidFill>
-                            <a:schemeClr val="tx1"/>
-                          </a:solidFill>
-                        </a:rPr>
-                        <a:t>20,000</a:t>
-                      </a:r>
-                      <a:endParaRPr lang="en-US" sz="1300" dirty="0"/>
-                    </a:p>
-                  </a:txBody>
-                  <a:tcPr marL="76200" marR="76200" marT="38100" marB="38100" anchor="ctr">
-                    <a:lnL w="0" cap="flat" cmpd="sng" algn="ctr">
-                      <a:noFill/>
-                    </a:lnL>
-                    <a:lnR w="0" cap="flat" cmpd="sng" algn="ctr">
-                      <a:noFill/>
-                    </a:lnR>
-                    <a:lnT w="0" cap="flat" cmpd="sng" algn="ctr">
-                      <a:noFill/>
-                    </a:lnT>
-                    <a:lnB w="0" cap="flat" cmpd="sng" algn="ctr">
-                      <a:noFill/>
-                    </a:lnB>
-                  </a:tcPr>
-                </a:tc>
-                <a:tc>
-                  <a:txBody>
-                    <a:bodyPr/>
-                    <a:lstStyle/>
-                    <a:p>
-                      <a:pPr algn="r" indent="0" marL="0">
-                        <a:buNone/>
-                      </a:pPr>
-                      <a:r>
-                        <a:rPr lang="en-US" sz="1300" dirty="0">
-                          <a:solidFill>
-                            <a:schemeClr val="tx1"/>
-                          </a:solidFill>
-                        </a:rPr>
-                        <a:t>2,000,000</a:t>
-                      </a:r>
-                      <a:endParaRPr lang="en-US" sz="1300" dirty="0"/>
-                    </a:p>
-                  </a:txBody>
-                  <a:tcPr marL="76200" marR="76200" marT="38100" marB="38100" anchor="ctr">
-                    <a:lnL w="0" cap="flat" cmpd="sng" algn="ctr">
-                      <a:noFill/>
-                    </a:lnL>
-                    <a:lnR w="0" cap="flat" cmpd="sng" algn="ctr">
-                      <a:noFill/>
-                    </a:lnR>
-                    <a:lnT w="0" cap="flat" cmpd="sng" algn="ctr">
-                      <a:noFill/>
-                    </a:lnT>
-                    <a:lnB w="0" cap="flat" cmpd="sng" algn="ctr">
-                      <a:noFill/>
-                    </a:lnB>
-                  </a:tcPr>
-                </a:tc>
-              </a:tr>
-              <a:tr h="292608">
-                <a:tc>
-                  <a:txBody>
-                    <a:bodyPr/>
-                    <a:lstStyle/>
-                    <a:p>
-                      <a:pPr algn="l" indent="0" marL="0">
-                        <a:buNone/>
-                      </a:pPr>
-                      <a:r>
-                        <a:rPr lang="en-US" sz="1300" b="1" dirty="0">
-                          <a:solidFill>
-                            <a:schemeClr val="tx1"/>
-                          </a:solidFill>
-                        </a:rPr>
-                        <a:t>數據分析師 A</a:t>
-                      </a:r>
-                      <a:endParaRPr lang="en-US" sz="1300" dirty="0"/>
-                    </a:p>
-                  </a:txBody>
-                  <a:tcPr marL="76200" marR="76200" marT="38100" marB="38100" anchor="ctr">
-                    <a:lnL w="0" cap="flat" cmpd="sng" algn="ctr">
-                      <a:noFill/>
-                    </a:lnL>
-                    <a:lnR w="0" cap="flat" cmpd="sng" algn="ctr">
-                      <a:noFill/>
-                    </a:lnR>
-                    <a:lnT w="0" cap="flat" cmpd="sng" algn="ctr">
-                      <a:noFill/>
-                    </a:lnT>
-                    <a:lnB w="0" cap="flat" cmpd="sng" algn="ctr">
-                      <a:noFill/>
-                    </a:lnB>
-                  </a:tcPr>
-                </a:tc>
-                <a:tc>
-                  <a:txBody>
-                    <a:bodyPr/>
-                    <a:lstStyle/>
-                    <a:p>
-                      <a:pPr algn="r" indent="0" marL="0">
-                        <a:buNone/>
-                      </a:pPr>
-                      <a:r>
-                        <a:rPr lang="en-US" sz="1300" dirty="0">
-                          <a:solidFill>
-                            <a:schemeClr val="tx1"/>
-                          </a:solidFill>
-                        </a:rPr>
-                        <a:t>150</a:t>
-                      </a:r>
-                      <a:endParaRPr lang="en-US" sz="1300" dirty="0"/>
-                    </a:p>
-                  </a:txBody>
-                  <a:tcPr marL="76200" marR="76200" marT="38100" marB="38100" anchor="ctr">
-                    <a:lnL w="0" cap="flat" cmpd="sng" algn="ctr">
-                      <a:noFill/>
-                    </a:lnL>
-                    <a:lnR w="0" cap="flat" cmpd="sng" algn="ctr">
-                      <a:noFill/>
-                    </a:lnR>
-                    <a:lnT w="0" cap="flat" cmpd="sng" algn="ctr">
-                      <a:noFill/>
-                    </a:lnT>
-                    <a:lnB w="0" cap="flat" cmpd="sng" algn="ctr">
-                      <a:noFill/>
-                    </a:lnB>
-                  </a:tcPr>
-                </a:tc>
-                <a:tc>
-                  <a:txBody>
-                    <a:bodyPr/>
-                    <a:lstStyle/>
-                    <a:p>
-                      <a:pPr algn="r" indent="0" marL="0">
-                        <a:buNone/>
-                      </a:pPr>
-                      <a:r>
-                        <a:rPr lang="en-US" sz="1300" dirty="0">
-                          <a:solidFill>
-                            <a:schemeClr val="tx1"/>
-                          </a:solidFill>
-                        </a:rPr>
-                        <a:t>16,000</a:t>
-                      </a:r>
-                      <a:endParaRPr lang="en-US" sz="1300" dirty="0"/>
-                    </a:p>
-                  </a:txBody>
-                  <a:tcPr marL="76200" marR="76200" marT="38100" marB="38100" anchor="ctr">
-                    <a:lnL w="0" cap="flat" cmpd="sng" algn="ctr">
-                      <a:noFill/>
-                    </a:lnL>
-                    <a:lnR w="0" cap="flat" cmpd="sng" algn="ctr">
-                      <a:noFill/>
-                    </a:lnR>
-                    <a:lnT w="0" cap="flat" cmpd="sng" algn="ctr">
-                      <a:noFill/>
-                    </a:lnT>
-                    <a:lnB w="0" cap="flat" cmpd="sng" algn="ctr">
-                      <a:noFill/>
-                    </a:lnB>
-                  </a:tcPr>
-                </a:tc>
-                <a:tc>
-                  <a:txBody>
-                    <a:bodyPr/>
-                    <a:lstStyle/>
-                    <a:p>
-                      <a:pPr algn="r" indent="0" marL="0">
-                        <a:buNone/>
-                      </a:pPr>
-                      <a:r>
-                        <a:rPr lang="en-US" sz="1300" dirty="0">
-                          <a:solidFill>
-                            <a:schemeClr val="tx1"/>
-                          </a:solidFill>
-                        </a:rPr>
-                        <a:t>2,400,000</a:t>
-                      </a:r>
-                      <a:endParaRPr lang="en-US" sz="1300" dirty="0"/>
-                    </a:p>
-                  </a:txBody>
-                  <a:tcPr marL="76200" marR="76200" marT="38100" marB="38100" anchor="ctr">
-                    <a:lnL w="0" cap="flat" cmpd="sng" algn="ctr">
-                      <a:noFill/>
-                    </a:lnL>
-                    <a:lnR w="0" cap="flat" cmpd="sng" algn="ctr">
-                      <a:noFill/>
-                    </a:lnR>
-                    <a:lnT w="0" cap="flat" cmpd="sng" algn="ctr">
-                      <a:noFill/>
-                    </a:lnT>
-                    <a:lnB w="0" cap="flat" cmpd="sng" algn="ctr">
-                      <a:noFill/>
-                    </a:lnB>
-                  </a:tcPr>
-                </a:tc>
-              </a:tr>
-              <a:tr h="292608">
-                <a:tc>
-                  <a:txBody>
-                    <a:bodyPr/>
-                    <a:lstStyle/>
-                    <a:p>
-                      <a:pPr algn="l" indent="0" marL="0">
-                        <a:buNone/>
-                      </a:pPr>
-                      <a:r>
-                        <a:rPr lang="en-US" sz="1300" b="1" dirty="0">
-                          <a:solidFill>
-                            <a:schemeClr val="tx1"/>
-                          </a:solidFill>
-                        </a:rPr>
-                        <a:t>數據分析師 B</a:t>
-                      </a:r>
-                      <a:endParaRPr lang="en-US" sz="1300" dirty="0"/>
-                    </a:p>
-                  </a:txBody>
-                  <a:tcPr marL="76200" marR="76200" marT="38100" marB="38100" anchor="ctr">
-                    <a:lnL w="0" cap="flat" cmpd="sng" algn="ctr">
-                      <a:noFill/>
-                    </a:lnL>
-                    <a:lnR w="0" cap="flat" cmpd="sng" algn="ctr">
-                      <a:noFill/>
-                    </a:lnR>
-                    <a:lnT w="0" cap="flat" cmpd="sng" algn="ctr">
-                      <a:noFill/>
-                    </a:lnT>
-                    <a:lnB w="0" cap="flat" cmpd="sng" algn="ctr">
-                      <a:noFill/>
-                    </a:lnB>
-                  </a:tcPr>
-                </a:tc>
-                <a:tc>
-                  <a:txBody>
-                    <a:bodyPr/>
-                    <a:lstStyle/>
-                    <a:p>
-                      <a:pPr algn="r" indent="0" marL="0">
-                        <a:buNone/>
-                      </a:pPr>
-                      <a:r>
-                        <a:rPr lang="en-US" sz="1300" dirty="0">
-                          <a:solidFill>
-                            <a:schemeClr val="tx1"/>
-                          </a:solidFill>
-                        </a:rPr>
-                        <a:t>100</a:t>
-                      </a:r>
-                      <a:endParaRPr lang="en-US" sz="1300" dirty="0"/>
-                    </a:p>
-                  </a:txBody>
-                  <a:tcPr marL="76200" marR="76200" marT="38100" marB="38100" anchor="ctr">
-                    <a:lnL w="0" cap="flat" cmpd="sng" algn="ctr">
-                      <a:noFill/>
-                    </a:lnL>
-                    <a:lnR w="0" cap="flat" cmpd="sng" algn="ctr">
-                      <a:noFill/>
-                    </a:lnR>
-                    <a:lnT w="0" cap="flat" cmpd="sng" algn="ctr">
-                      <a:noFill/>
-                    </a:lnT>
-                    <a:lnB w="0" cap="flat" cmpd="sng" algn="ctr">
-                      <a:noFill/>
-                    </a:lnB>
-                  </a:tcPr>
-                </a:tc>
-                <a:tc>
-                  <a:txBody>
-                    <a:bodyPr/>
-                    <a:lstStyle/>
-                    <a:p>
-                      <a:pPr algn="r" indent="0" marL="0">
-                        <a:buNone/>
-                      </a:pPr>
-                      <a:r>
-                        <a:rPr lang="en-US" sz="1300" dirty="0">
-                          <a:solidFill>
-                            <a:schemeClr val="tx1"/>
-                          </a:solidFill>
-                        </a:rPr>
-                        <a:t>16,000</a:t>
-                      </a:r>
-                      <a:endParaRPr lang="en-US" sz="1300" dirty="0"/>
-                    </a:p>
-                  </a:txBody>
-                  <a:tcPr marL="76200" marR="76200" marT="38100" marB="38100" anchor="ctr">
-                    <a:lnL w="0" cap="flat" cmpd="sng" algn="ctr">
-                      <a:noFill/>
-                    </a:lnL>
-                    <a:lnR w="0" cap="flat" cmpd="sng" algn="ctr">
-                      <a:noFill/>
-                    </a:lnR>
-                    <a:lnT w="0" cap="flat" cmpd="sng" algn="ctr">
-                      <a:noFill/>
-                    </a:lnT>
-                    <a:lnB w="0" cap="flat" cmpd="sng" algn="ctr">
-                      <a:noFill/>
-                    </a:lnB>
-                  </a:tcPr>
-                </a:tc>
-                <a:tc>
-                  <a:txBody>
-                    <a:bodyPr/>
-                    <a:lstStyle/>
-                    <a:p>
-                      <a:pPr algn="r" indent="0" marL="0">
-                        <a:buNone/>
-                      </a:pPr>
-                      <a:r>
-                        <a:rPr lang="en-US" sz="1300" dirty="0">
-                          <a:solidFill>
-                            <a:schemeClr val="tx1"/>
-                          </a:solidFill>
-                        </a:rPr>
-                        <a:t>1,600,000</a:t>
-                      </a:r>
-                      <a:endParaRPr lang="en-US" sz="1300" dirty="0"/>
-                    </a:p>
-                  </a:txBody>
-                  <a:tcPr marL="76200" marR="76200" marT="38100" marB="38100" anchor="ctr">
-                    <a:lnL w="0" cap="flat" cmpd="sng" algn="ctr">
-                      <a:noFill/>
-                    </a:lnL>
-                    <a:lnR w="0" cap="flat" cmpd="sng" algn="ctr">
-                      <a:noFill/>
-                    </a:lnR>
-                    <a:lnT w="0" cap="flat" cmpd="sng" algn="ctr">
-                      <a:noFill/>
-                    </a:lnT>
-                    <a:lnB w="0" cap="flat" cmpd="sng" algn="ctr">
-                      <a:noFill/>
-                    </a:lnB>
-                  </a:tcPr>
-                </a:tc>
-              </a:tr>
-              <a:tr h="292608">
-                <a:tc>
-                  <a:txBody>
-                    <a:bodyPr/>
-                    <a:lstStyle/>
-                    <a:p>
-                      <a:pPr algn="l" indent="0" marL="0">
-                        <a:buNone/>
-                      </a:pPr>
-                      <a:r>
-                        <a:rPr lang="en-US" sz="1300" b="1" dirty="0">
-                          <a:solidFill>
-                            <a:schemeClr val="tx1"/>
-                          </a:solidFill>
-                        </a:rPr>
-                        <a:t>ClickHouse 顧問</a:t>
-                      </a:r>
-                      <a:endParaRPr lang="en-US" sz="1300" dirty="0"/>
-                    </a:p>
-                  </a:txBody>
-                  <a:tcPr marL="76200" marR="76200" marT="38100" marB="38100" anchor="ctr">
-                    <a:lnL w="0" cap="flat" cmpd="sng" algn="ctr">
-                      <a:noFill/>
-                    </a:lnL>
-                    <a:lnR w="0" cap="flat" cmpd="sng" algn="ctr">
-                      <a:noFill/>
-                    </a:lnR>
-                    <a:lnT w="0" cap="flat" cmpd="sng" algn="ctr">
-                      <a:noFill/>
-                    </a:lnT>
-                    <a:lnB w="0" cap="flat" cmpd="sng" algn="ctr">
-                      <a:noFill/>
-                    </a:lnB>
-                  </a:tcPr>
-                </a:tc>
-                <a:tc>
-                  <a:txBody>
-                    <a:bodyPr/>
-                    <a:lstStyle/>
-                    <a:p>
-                      <a:pPr algn="r" indent="0" marL="0">
-                        <a:buNone/>
-                      </a:pPr>
-                      <a:r>
-                        <a:rPr lang="en-US" sz="1300" dirty="0">
-                          <a:solidFill>
-                            <a:schemeClr val="tx1"/>
-                          </a:solidFill>
-                        </a:rPr>
-                        <a:t>20</a:t>
-                      </a:r>
-                      <a:endParaRPr lang="en-US" sz="1300" dirty="0"/>
-                    </a:p>
-                  </a:txBody>
-                  <a:tcPr marL="76200" marR="76200" marT="38100" marB="38100" anchor="ctr">
-                    <a:lnL w="0" cap="flat" cmpd="sng" algn="ctr">
-                      <a:noFill/>
-                    </a:lnL>
-                    <a:lnR w="0" cap="flat" cmpd="sng" algn="ctr">
-                      <a:noFill/>
-                    </a:lnR>
-                    <a:lnT w="0" cap="flat" cmpd="sng" algn="ctr">
-                      <a:noFill/>
-                    </a:lnT>
-                    <a:lnB w="0" cap="flat" cmpd="sng" algn="ctr">
-                      <a:noFill/>
-                    </a:lnB>
-                  </a:tcPr>
-                </a:tc>
-                <a:tc>
-                  <a:txBody>
-                    <a:bodyPr/>
-                    <a:lstStyle/>
-                    <a:p>
-                      <a:pPr algn="r" indent="0" marL="0">
-                        <a:buNone/>
-                      </a:pPr>
-                      <a:r>
-                        <a:rPr lang="en-US" sz="1300" dirty="0">
-                          <a:solidFill>
-                            <a:schemeClr val="tx1"/>
-                          </a:solidFill>
-                        </a:rPr>
-                        <a:t>20,000</a:t>
-                      </a:r>
-                      <a:endParaRPr lang="en-US" sz="1300" dirty="0"/>
-                    </a:p>
-                  </a:txBody>
-                  <a:tcPr marL="76200" marR="76200" marT="38100" marB="38100" anchor="ctr">
-                    <a:lnL w="0" cap="flat" cmpd="sng" algn="ctr">
-                      <a:noFill/>
-                    </a:lnL>
-                    <a:lnR w="0" cap="flat" cmpd="sng" algn="ctr">
-                      <a:noFill/>
-                    </a:lnR>
-                    <a:lnT w="0" cap="flat" cmpd="sng" algn="ctr">
-                      <a:noFill/>
-                    </a:lnT>
-                    <a:lnB w="0" cap="flat" cmpd="sng" algn="ctr">
-                      <a:noFill/>
-                    </a:lnB>
-                  </a:tcPr>
-                </a:tc>
-                <a:tc>
-                  <a:txBody>
-                    <a:bodyPr/>
-                    <a:lstStyle/>
-                    <a:p>
-                      <a:pPr algn="r" indent="0" marL="0">
-                        <a:buNone/>
-                      </a:pPr>
-                      <a:r>
-                        <a:rPr lang="en-US" sz="1300" dirty="0">
-                          <a:solidFill>
-                            <a:schemeClr val="tx1"/>
-                          </a:solidFill>
-                        </a:rPr>
-                        <a:t>400,000</a:t>
-                      </a:r>
-                      <a:endParaRPr lang="en-US" sz="1300" dirty="0"/>
-                    </a:p>
-                  </a:txBody>
-                  <a:tcPr marL="76200" marR="76200" marT="38100" marB="38100" anchor="ctr">
-                    <a:lnL w="0" cap="flat" cmpd="sng" algn="ctr">
-                      <a:noFill/>
-                    </a:lnL>
-                    <a:lnR w="0" cap="flat" cmpd="sng" algn="ctr">
-                      <a:noFill/>
-                    </a:lnR>
-                    <a:lnT w="0" cap="flat" cmpd="sng" algn="ctr">
-                      <a:noFill/>
-                    </a:lnT>
-                    <a:lnB w="0" cap="flat" cmpd="sng" algn="ctr">
-                      <a:noFill/>
-                    </a:lnB>
-                  </a:tcPr>
-                </a:tc>
-              </a:tr>
-              <a:tr h="292608">
-                <a:tc>
-                  <a:txBody>
-                    <a:bodyPr/>
-                    <a:lstStyle/>
-                    <a:p>
-                      <a:pPr algn="l" indent="0" marL="0">
-                        <a:buNone/>
-                      </a:pPr>
-                      <a:r>
-                        <a:rPr lang="en-US" sz="1300" b="1" dirty="0">
-                          <a:solidFill>
-                            <a:schemeClr val="tx1"/>
-                          </a:solidFill>
-                        </a:rPr>
-                        <a:t>基本方案合計</a:t>
+                        <a:t>第一階段合計</a:t>
                       </a:r>
                       <a:endParaRPr lang="en-US" sz="1300" dirty="0"/>
                     </a:p>
@@ -10765,7 +9862,7 @@
                             <a:schemeClr val="tx1"/>
                           </a:solidFill>
                         </a:rPr>
-                        <a:t>1,020</a:t>
+                        <a:t>290</a:t>
                       </a:r>
                       <a:endParaRPr lang="en-US" sz="1300" dirty="0"/>
                     </a:p>
@@ -10831,7 +9928,7 @@
                             <a:schemeClr val="tx1"/>
                           </a:solidFill>
                         </a:rPr>
-                        <a:t>21,900,000</a:t>
+                        <a:t>6,180,000</a:t>
                       </a:r>
                       <a:endParaRPr lang="en-US" sz="1300" dirty="0"/>
                     </a:p>
@@ -10859,6 +9956,42 @@
           </a:graphicData>
         </a:graphic>
       </p:graphicFrame>
+      <p:sp>
+        <p:nvSpPr>
+          <p:cNvPr id="4" name="Text 1"/>
+          <p:cNvSpPr txBox="1"/>
+          <p:nvPr/>
+        </p:nvSpPr>
+        <p:spPr>
+          <a:xfrm>
+            <a:off x="457200" y="4480560"/>
+            <a:ext cx="7863840" cy="274320"/>
+          </a:xfrm>
+          <a:prstGeom prst="rect">
+            <a:avLst/>
+          </a:prstGeom>
+          <a:noFill/>
+          <a:ln/>
+        </p:spPr>
+        <p:txBody>
+          <a:bodyPr wrap="square" lIns="0" tIns="0" rIns="0" bIns="0" rtlCol="0" anchor="t"/>
+          <a:lstStyle/>
+          <a:p>
+            <a:pPr indent="0" marL="0">
+              <a:buNone/>
+            </a:pPr>
+            <a:r>
+              <a:rPr lang="en-US" sz="1100" dirty="0">
+                <a:solidFill>
+                  <a:srgbClr val="7C8992"/>
+                </a:solidFill>
+              </a:rPr>
+              <a:t>兩年約 10,100,000，低於兩年神策 12,000,000；第三年起每年約神策的三分之一</a:t>
+            </a:r>
+            <a:endParaRPr lang="en-US" sz="1100" dirty="0"/>
+          </a:p>
+        </p:txBody>
+      </p:sp>
       <p:sp>
         <p:nvSpPr>
           <p:cNvPr id="25" name="Slide Number Placeholder 0"/>
@@ -11474,106 +10607,789 @@
                   <a:schemeClr val="tx1"/>
                 </a:solidFill>
               </a:rPr>
-              <a:t>出客戶版前還要定四件事</a:t>
+              <a:t>規格外的放後續模組，需要時再加</a:t>
             </a:r>
             <a:endParaRPr lang="en-US" sz="2400" dirty="0"/>
           </a:p>
         </p:txBody>
       </p:sp>
-      <p:sp>
-        <p:nvSpPr>
-          <p:cNvPr id="3" name="Text 1"/>
-          <p:cNvSpPr txBox="1"/>
-          <p:nvPr/>
-        </p:nvSpPr>
-        <p:spPr>
-          <a:xfrm>
-            <a:off x="457200" y="1325880"/>
-            <a:ext cx="4846320" cy="3200400"/>
-          </a:xfrm>
-          <a:prstGeom prst="rect">
-            <a:avLst/>
-          </a:prstGeom>
-          <a:noFill/>
-          <a:ln/>
-        </p:spPr>
-        <p:txBody>
-          <a:bodyPr wrap="square" lIns="0" tIns="0" rIns="0" bIns="0" rtlCol="0" anchor="t"/>
-          <a:lstStyle/>
-          <a:p>
-            <a:pPr marL="342900" indent="-342900">
-              <a:spcAft>
-                <a:spcPts val="800"/>
-              </a:spcAft>
-              <a:buSzPct val="100000"/>
-              <a:buChar char="•"/>
-            </a:pPr>
-            <a:r>
-              <a:rPr lang="en-US" sz="1500" dirty="0">
-                <a:solidFill>
-                  <a:schemeClr val="tx1"/>
-                </a:solidFill>
-              </a:rPr>
-              <a:t>計價方式：人天實報（超出另計）或固定總價（加 10–15% 風險準備）</a:t>
-            </a:r>
-            <a:endParaRPr lang="en-US" sz="1500" dirty="0"/>
-          </a:p>
-          <a:p>
-            <a:pPr marL="342900" indent="-342900">
-              <a:spcAft>
-                <a:spcPts val="800"/>
-              </a:spcAft>
-              <a:buSzPct val="100000"/>
-              <a:buChar char="•"/>
-            </a:pPr>
-            <a:r>
-              <a:rPr lang="en-US" sz="1500" dirty="0">
-                <a:solidFill>
-                  <a:schemeClr val="tx1"/>
-                </a:solidFill>
-              </a:rPr>
-              <a:t>付款節點建議：簽約 20%、M2 20%、M5 20%、UAT 20%、PD 15%、簽結 5%</a:t>
-            </a:r>
-            <a:endParaRPr lang="en-US" sz="1500" dirty="0"/>
-          </a:p>
-          <a:p>
-            <a:pPr marL="342900" indent="-342900">
-              <a:spcAft>
-                <a:spcPts val="800"/>
-              </a:spcAft>
-              <a:buSzPct val="100000"/>
-              <a:buChar char="•"/>
-            </a:pPr>
-            <a:r>
-              <a:rPr lang="en-US" sz="1500" dirty="0">
-                <a:solidFill>
-                  <a:schemeClr val="tx1"/>
-                </a:solidFill>
-              </a:rPr>
-              <a:t>客戶自備：GA360、BigQuery 用量、GCP 或機房、LINE 訊息方案、內部人力</a:t>
-            </a:r>
-            <a:endParaRPr lang="en-US" sz="1500" dirty="0"/>
-          </a:p>
-          <a:p>
-            <a:pPr marL="342900" indent="-342900">
-              <a:spcAft>
-                <a:spcPts val="800"/>
-              </a:spcAft>
-              <a:buSzPct val="100000"/>
-              <a:buChar char="•"/>
-            </a:pPr>
-            <a:r>
-              <a:rPr lang="en-US" sz="1500" dirty="0">
-                <a:solidFill>
-                  <a:schemeClr val="tx1"/>
-                </a:solidFill>
-              </a:rPr>
-              <a:t>與 Merkle 的分工線：目前不含埋點與 GA360 設定工時</a:t>
-            </a:r>
-            <a:endParaRPr lang="en-US" sz="1500" dirty="0"/>
-          </a:p>
-        </p:txBody>
-      </p:sp>
+      <p:graphicFrame>
+        <p:nvGraphicFramePr>
+          <p:cNvPr id="21" name="Table 0"/>
+          <p:cNvGraphicFramePr>
+            <a:graphicFrameLocks noGrp="1"/>
+          </p:cNvGraphicFramePr>
+          <p:nvPr>
+            <p:extLst>
+              <p:ext uri="{D42A27DB-BD31-4B8C-83A1-F6EECF244321}">
+                <p14:modId xmlns:p14="http://schemas.microsoft.com/office/powerpoint/2010/main" val="1579011935"/>
+              </p:ext>
+            </p:extLst>
+          </p:nvPr>
+        </p:nvGraphicFramePr>
+        <p:xfrm>
+          <a:off x="457200" y="1188720"/>
+          <a:ext cx="5120640" cy="914400"/>
+        </p:xfrm>
+        <a:graphic>
+          <a:graphicData uri="http://schemas.openxmlformats.org/drawingml/2006/table">
+            <a:tbl>
+              <a:tblPr/>
+              <a:tblGrid>
+                <a:gridCol w="2926080"/>
+                <a:gridCol w="822960"/>
+                <a:gridCol w="1371600"/>
+              </a:tblGrid>
+              <a:tr h="329184">
+                <a:tc>
+                  <a:txBody>
+                    <a:bodyPr/>
+                    <a:lstStyle/>
+                    <a:p>
+                      <a:pPr algn="l" indent="0" marL="0">
+                        <a:buNone/>
+                      </a:pPr>
+                      <a:r>
+                        <a:rPr lang="en-US" sz="1200" b="1" dirty="0">
+                          <a:solidFill>
+                            <a:schemeClr val="tx1"/>
+                          </a:solidFill>
+                        </a:rPr>
+                        <a:t>後續模組</a:t>
+                      </a:r>
+                      <a:endParaRPr lang="en-US" sz="1200" dirty="0"/>
+                    </a:p>
+                  </a:txBody>
+                  <a:tcPr marL="76200" marR="76200" marT="38100" marB="38100" anchor="ctr">
+                    <a:lnL w="0" cap="flat" cmpd="sng" algn="ctr">
+                      <a:noFill/>
+                    </a:lnL>
+                    <a:lnR w="0" cap="flat" cmpd="sng" algn="ctr">
+                      <a:noFill/>
+                    </a:lnR>
+                    <a:lnT w="0" cap="flat" cmpd="sng" algn="ctr">
+                      <a:noFill/>
+                    </a:lnT>
+                    <a:lnB w="15875" cap="flat" cmpd="sng" algn="ctr">
+                      <a:solidFill>
+                        <a:srgbClr val="C9D2D8"/>
+                      </a:solidFill>
+                      <a:prstDash val="solid"/>
+                      <a:round/>
+                      <a:headEnd type="none" w="med" len="med"/>
+                      <a:tailEnd type="none" w="med" len="med"/>
+                    </a:lnB>
+                  </a:tcPr>
+                </a:tc>
+                <a:tc>
+                  <a:txBody>
+                    <a:bodyPr/>
+                    <a:lstStyle/>
+                    <a:p>
+                      <a:pPr algn="r" indent="0" marL="0">
+                        <a:buNone/>
+                      </a:pPr>
+                      <a:r>
+                        <a:rPr lang="en-US" sz="1200" b="1" dirty="0">
+                          <a:solidFill>
+                            <a:schemeClr val="tx1"/>
+                          </a:solidFill>
+                        </a:rPr>
+                        <a:t>人天</a:t>
+                      </a:r>
+                      <a:endParaRPr lang="en-US" sz="1200" dirty="0"/>
+                    </a:p>
+                  </a:txBody>
+                  <a:tcPr marL="76200" marR="76200" marT="38100" marB="38100" anchor="ctr">
+                    <a:lnL w="0" cap="flat" cmpd="sng" algn="ctr">
+                      <a:noFill/>
+                    </a:lnL>
+                    <a:lnR w="0" cap="flat" cmpd="sng" algn="ctr">
+                      <a:noFill/>
+                    </a:lnR>
+                    <a:lnT w="0" cap="flat" cmpd="sng" algn="ctr">
+                      <a:noFill/>
+                    </a:lnT>
+                    <a:lnB w="15875" cap="flat" cmpd="sng" algn="ctr">
+                      <a:solidFill>
+                        <a:srgbClr val="C9D2D8"/>
+                      </a:solidFill>
+                      <a:prstDash val="solid"/>
+                      <a:round/>
+                      <a:headEnd type="none" w="med" len="med"/>
+                      <a:tailEnd type="none" w="med" len="med"/>
+                    </a:lnB>
+                  </a:tcPr>
+                </a:tc>
+                <a:tc>
+                  <a:txBody>
+                    <a:bodyPr/>
+                    <a:lstStyle/>
+                    <a:p>
+                      <a:pPr algn="r" indent="0" marL="0">
+                        <a:buNone/>
+                      </a:pPr>
+                      <a:r>
+                        <a:rPr lang="en-US" sz="1200" b="1" dirty="0">
+                          <a:solidFill>
+                            <a:schemeClr val="tx1"/>
+                          </a:solidFill>
+                        </a:rPr>
+                        <a:t>金額（未稅）</a:t>
+                      </a:r>
+                      <a:endParaRPr lang="en-US" sz="1200" dirty="0"/>
+                    </a:p>
+                  </a:txBody>
+                  <a:tcPr marL="76200" marR="76200" marT="38100" marB="38100" anchor="ctr">
+                    <a:lnL w="0" cap="flat" cmpd="sng" algn="ctr">
+                      <a:noFill/>
+                    </a:lnL>
+                    <a:lnR w="0" cap="flat" cmpd="sng" algn="ctr">
+                      <a:noFill/>
+                    </a:lnR>
+                    <a:lnT w="0" cap="flat" cmpd="sng" algn="ctr">
+                      <a:noFill/>
+                    </a:lnT>
+                    <a:lnB w="15875" cap="flat" cmpd="sng" algn="ctr">
+                      <a:solidFill>
+                        <a:srgbClr val="C9D2D8"/>
+                      </a:solidFill>
+                      <a:prstDash val="solid"/>
+                      <a:round/>
+                      <a:headEnd type="none" w="med" len="med"/>
+                      <a:tailEnd type="none" w="med" len="med"/>
+                    </a:lnB>
+                  </a:tcPr>
+                </a:tc>
+              </a:tr>
+              <a:tr h="329184">
+                <a:tc>
+                  <a:txBody>
+                    <a:bodyPr/>
+                    <a:lstStyle/>
+                    <a:p>
+                      <a:pPr algn="l" indent="0" marL="0">
+                        <a:buNone/>
+                      </a:pPr>
+                      <a:r>
+                        <a:rPr lang="en-US" sz="1200" b="1" dirty="0">
+                          <a:solidFill>
+                            <a:schemeClr val="tx1"/>
+                          </a:solidFill>
+                        </a:rPr>
+                        <a:t>間隔／分佈／Session／LTV 分析</a:t>
+                      </a:r>
+                      <a:endParaRPr lang="en-US" sz="1200" dirty="0"/>
+                    </a:p>
+                  </a:txBody>
+                  <a:tcPr marL="76200" marR="76200" marT="38100" marB="38100" anchor="ctr">
+                    <a:lnL w="0" cap="flat" cmpd="sng" algn="ctr">
+                      <a:noFill/>
+                    </a:lnL>
+                    <a:lnR w="0" cap="flat" cmpd="sng" algn="ctr">
+                      <a:noFill/>
+                    </a:lnR>
+                    <a:lnT w="0" cap="flat" cmpd="sng" algn="ctr">
+                      <a:noFill/>
+                    </a:lnT>
+                    <a:lnB w="0" cap="flat" cmpd="sng" algn="ctr">
+                      <a:noFill/>
+                    </a:lnB>
+                  </a:tcPr>
+                </a:tc>
+                <a:tc>
+                  <a:txBody>
+                    <a:bodyPr/>
+                    <a:lstStyle/>
+                    <a:p>
+                      <a:pPr algn="r" indent="0" marL="0">
+                        <a:buNone/>
+                      </a:pPr>
+                      <a:r>
+                        <a:rPr lang="en-US" sz="1200" dirty="0">
+                          <a:solidFill>
+                            <a:schemeClr val="tx1"/>
+                          </a:solidFill>
+                        </a:rPr>
+                        <a:t>50</a:t>
+                      </a:r>
+                      <a:endParaRPr lang="en-US" sz="1200" dirty="0"/>
+                    </a:p>
+                  </a:txBody>
+                  <a:tcPr marL="76200" marR="76200" marT="38100" marB="38100" anchor="ctr">
+                    <a:lnL w="0" cap="flat" cmpd="sng" algn="ctr">
+                      <a:noFill/>
+                    </a:lnL>
+                    <a:lnR w="0" cap="flat" cmpd="sng" algn="ctr">
+                      <a:noFill/>
+                    </a:lnR>
+                    <a:lnT w="0" cap="flat" cmpd="sng" algn="ctr">
+                      <a:noFill/>
+                    </a:lnT>
+                    <a:lnB w="0" cap="flat" cmpd="sng" algn="ctr">
+                      <a:noFill/>
+                    </a:lnB>
+                  </a:tcPr>
+                </a:tc>
+                <a:tc>
+                  <a:txBody>
+                    <a:bodyPr/>
+                    <a:lstStyle/>
+                    <a:p>
+                      <a:pPr algn="r" indent="0" marL="0">
+                        <a:buNone/>
+                      </a:pPr>
+                      <a:r>
+                        <a:rPr lang="en-US" sz="1200" dirty="0">
+                          <a:solidFill>
+                            <a:schemeClr val="tx1"/>
+                          </a:solidFill>
+                        </a:rPr>
+                        <a:t>1,160,000</a:t>
+                      </a:r>
+                      <a:endParaRPr lang="en-US" sz="1200" dirty="0"/>
+                    </a:p>
+                  </a:txBody>
+                  <a:tcPr marL="76200" marR="76200" marT="38100" marB="38100" anchor="ctr">
+                    <a:lnL w="0" cap="flat" cmpd="sng" algn="ctr">
+                      <a:noFill/>
+                    </a:lnL>
+                    <a:lnR w="0" cap="flat" cmpd="sng" algn="ctr">
+                      <a:noFill/>
+                    </a:lnR>
+                    <a:lnT w="0" cap="flat" cmpd="sng" algn="ctr">
+                      <a:noFill/>
+                    </a:lnT>
+                    <a:lnB w="0" cap="flat" cmpd="sng" algn="ctr">
+                      <a:noFill/>
+                    </a:lnB>
+                  </a:tcPr>
+                </a:tc>
+              </a:tr>
+              <a:tr h="329184">
+                <a:tc>
+                  <a:txBody>
+                    <a:bodyPr/>
+                    <a:lstStyle/>
+                    <a:p>
+                      <a:pPr algn="l" indent="0" marL="0">
+                        <a:buNone/>
+                      </a:pPr>
+                      <a:r>
+                        <a:rPr lang="en-US" sz="1200" b="1" dirty="0">
+                          <a:solidFill>
+                            <a:schemeClr val="tx1"/>
+                          </a:solidFill>
+                        </a:rPr>
+                        <a:t>CDP 標籤同步＋推送排除名單</a:t>
+                      </a:r>
+                      <a:endParaRPr lang="en-US" sz="1200" dirty="0"/>
+                    </a:p>
+                  </a:txBody>
+                  <a:tcPr marL="76200" marR="76200" marT="38100" marB="38100" anchor="ctr">
+                    <a:lnL w="0" cap="flat" cmpd="sng" algn="ctr">
+                      <a:noFill/>
+                    </a:lnL>
+                    <a:lnR w="0" cap="flat" cmpd="sng" algn="ctr">
+                      <a:noFill/>
+                    </a:lnR>
+                    <a:lnT w="0" cap="flat" cmpd="sng" algn="ctr">
+                      <a:noFill/>
+                    </a:lnT>
+                    <a:lnB w="0" cap="flat" cmpd="sng" algn="ctr">
+                      <a:noFill/>
+                    </a:lnB>
+                  </a:tcPr>
+                </a:tc>
+                <a:tc>
+                  <a:txBody>
+                    <a:bodyPr/>
+                    <a:lstStyle/>
+                    <a:p>
+                      <a:pPr algn="r" indent="0" marL="0">
+                        <a:buNone/>
+                      </a:pPr>
+                      <a:r>
+                        <a:rPr lang="en-US" sz="1200" dirty="0">
+                          <a:solidFill>
+                            <a:schemeClr val="tx1"/>
+                          </a:solidFill>
+                        </a:rPr>
+                        <a:t>40</a:t>
+                      </a:r>
+                      <a:endParaRPr lang="en-US" sz="1200" dirty="0"/>
+                    </a:p>
+                  </a:txBody>
+                  <a:tcPr marL="76200" marR="76200" marT="38100" marB="38100" anchor="ctr">
+                    <a:lnL w="0" cap="flat" cmpd="sng" algn="ctr">
+                      <a:noFill/>
+                    </a:lnL>
+                    <a:lnR w="0" cap="flat" cmpd="sng" algn="ctr">
+                      <a:noFill/>
+                    </a:lnR>
+                    <a:lnT w="0" cap="flat" cmpd="sng" algn="ctr">
+                      <a:noFill/>
+                    </a:lnT>
+                    <a:lnB w="0" cap="flat" cmpd="sng" algn="ctr">
+                      <a:noFill/>
+                    </a:lnB>
+                  </a:tcPr>
+                </a:tc>
+                <a:tc>
+                  <a:txBody>
+                    <a:bodyPr/>
+                    <a:lstStyle/>
+                    <a:p>
+                      <a:pPr algn="r" indent="0" marL="0">
+                        <a:buNone/>
+                      </a:pPr>
+                      <a:r>
+                        <a:rPr lang="en-US" sz="1200" dirty="0">
+                          <a:solidFill>
+                            <a:schemeClr val="tx1"/>
+                          </a:solidFill>
+                        </a:rPr>
+                        <a:t>950,000</a:t>
+                      </a:r>
+                      <a:endParaRPr lang="en-US" sz="1200" dirty="0"/>
+                    </a:p>
+                  </a:txBody>
+                  <a:tcPr marL="76200" marR="76200" marT="38100" marB="38100" anchor="ctr">
+                    <a:lnL w="0" cap="flat" cmpd="sng" algn="ctr">
+                      <a:noFill/>
+                    </a:lnL>
+                    <a:lnR w="0" cap="flat" cmpd="sng" algn="ctr">
+                      <a:noFill/>
+                    </a:lnR>
+                    <a:lnT w="0" cap="flat" cmpd="sng" algn="ctr">
+                      <a:noFill/>
+                    </a:lnT>
+                    <a:lnB w="0" cap="flat" cmpd="sng" algn="ctr">
+                      <a:noFill/>
+                    </a:lnB>
+                  </a:tcPr>
+                </a:tc>
+              </a:tr>
+              <a:tr h="329184">
+                <a:tc>
+                  <a:txBody>
+                    <a:bodyPr/>
+                    <a:lstStyle/>
+                    <a:p>
+                      <a:pPr algn="l" indent="0" marL="0">
+                        <a:buNone/>
+                      </a:pPr>
+                      <a:r>
+                        <a:rPr lang="en-US" sz="1200" b="1" dirty="0">
+                          <a:solidFill>
+                            <a:schemeClr val="tx1"/>
+                          </a:solidFill>
+                        </a:rPr>
+                        <a:t>AI 問數與洞察（接 LLM）</a:t>
+                      </a:r>
+                      <a:endParaRPr lang="en-US" sz="1200" dirty="0"/>
+                    </a:p>
+                  </a:txBody>
+                  <a:tcPr marL="76200" marR="76200" marT="38100" marB="38100" anchor="ctr">
+                    <a:lnL w="0" cap="flat" cmpd="sng" algn="ctr">
+                      <a:noFill/>
+                    </a:lnL>
+                    <a:lnR w="0" cap="flat" cmpd="sng" algn="ctr">
+                      <a:noFill/>
+                    </a:lnR>
+                    <a:lnT w="0" cap="flat" cmpd="sng" algn="ctr">
+                      <a:noFill/>
+                    </a:lnT>
+                    <a:lnB w="0" cap="flat" cmpd="sng" algn="ctr">
+                      <a:noFill/>
+                    </a:lnB>
+                  </a:tcPr>
+                </a:tc>
+                <a:tc>
+                  <a:txBody>
+                    <a:bodyPr/>
+                    <a:lstStyle/>
+                    <a:p>
+                      <a:pPr algn="r" indent="0" marL="0">
+                        <a:buNone/>
+                      </a:pPr>
+                      <a:r>
+                        <a:rPr lang="en-US" sz="1200" dirty="0">
+                          <a:solidFill>
+                            <a:schemeClr val="tx1"/>
+                          </a:solidFill>
+                        </a:rPr>
+                        <a:t>50</a:t>
+                      </a:r>
+                      <a:endParaRPr lang="en-US" sz="1200" dirty="0"/>
+                    </a:p>
+                  </a:txBody>
+                  <a:tcPr marL="76200" marR="76200" marT="38100" marB="38100" anchor="ctr">
+                    <a:lnL w="0" cap="flat" cmpd="sng" algn="ctr">
+                      <a:noFill/>
+                    </a:lnL>
+                    <a:lnR w="0" cap="flat" cmpd="sng" algn="ctr">
+                      <a:noFill/>
+                    </a:lnR>
+                    <a:lnT w="0" cap="flat" cmpd="sng" algn="ctr">
+                      <a:noFill/>
+                    </a:lnT>
+                    <a:lnB w="0" cap="flat" cmpd="sng" algn="ctr">
+                      <a:noFill/>
+                    </a:lnB>
+                  </a:tcPr>
+                </a:tc>
+                <a:tc>
+                  <a:txBody>
+                    <a:bodyPr/>
+                    <a:lstStyle/>
+                    <a:p>
+                      <a:pPr algn="r" indent="0" marL="0">
+                        <a:buNone/>
+                      </a:pPr>
+                      <a:r>
+                        <a:rPr lang="en-US" sz="1200" dirty="0">
+                          <a:solidFill>
+                            <a:schemeClr val="tx1"/>
+                          </a:solidFill>
+                        </a:rPr>
+                        <a:t>1,250,000</a:t>
+                      </a:r>
+                      <a:endParaRPr lang="en-US" sz="1200" dirty="0"/>
+                    </a:p>
+                  </a:txBody>
+                  <a:tcPr marL="76200" marR="76200" marT="38100" marB="38100" anchor="ctr">
+                    <a:lnL w="0" cap="flat" cmpd="sng" algn="ctr">
+                      <a:noFill/>
+                    </a:lnL>
+                    <a:lnR w="0" cap="flat" cmpd="sng" algn="ctr">
+                      <a:noFill/>
+                    </a:lnR>
+                    <a:lnT w="0" cap="flat" cmpd="sng" algn="ctr">
+                      <a:noFill/>
+                    </a:lnT>
+                    <a:lnB w="0" cap="flat" cmpd="sng" algn="ctr">
+                      <a:noFill/>
+                    </a:lnB>
+                  </a:tcPr>
+                </a:tc>
+              </a:tr>
+              <a:tr h="329184">
+                <a:tc>
+                  <a:txBody>
+                    <a:bodyPr/>
+                    <a:lstStyle/>
+                    <a:p>
+                      <a:pPr algn="l" indent="0" marL="0">
+                        <a:buNone/>
+                      </a:pPr>
+                      <a:r>
+                        <a:rPr lang="en-US" sz="1200" b="1" dirty="0">
+                          <a:solidFill>
+                            <a:schemeClr val="tx1"/>
+                          </a:solidFill>
+                        </a:rPr>
+                        <a:t>即時觸發（Flink 規則引擎）</a:t>
+                      </a:r>
+                      <a:endParaRPr lang="en-US" sz="1200" dirty="0"/>
+                    </a:p>
+                  </a:txBody>
+                  <a:tcPr marL="76200" marR="76200" marT="38100" marB="38100" anchor="ctr">
+                    <a:lnL w="0" cap="flat" cmpd="sng" algn="ctr">
+                      <a:noFill/>
+                    </a:lnL>
+                    <a:lnR w="0" cap="flat" cmpd="sng" algn="ctr">
+                      <a:noFill/>
+                    </a:lnR>
+                    <a:lnT w="0" cap="flat" cmpd="sng" algn="ctr">
+                      <a:noFill/>
+                    </a:lnT>
+                    <a:lnB w="0" cap="flat" cmpd="sng" algn="ctr">
+                      <a:noFill/>
+                    </a:lnB>
+                  </a:tcPr>
+                </a:tc>
+                <a:tc>
+                  <a:txBody>
+                    <a:bodyPr/>
+                    <a:lstStyle/>
+                    <a:p>
+                      <a:pPr algn="r" indent="0" marL="0">
+                        <a:buNone/>
+                      </a:pPr>
+                      <a:r>
+                        <a:rPr lang="en-US" sz="1200" dirty="0">
+                          <a:solidFill>
+                            <a:schemeClr val="tx1"/>
+                          </a:solidFill>
+                        </a:rPr>
+                        <a:t>80</a:t>
+                      </a:r>
+                      <a:endParaRPr lang="en-US" sz="1200" dirty="0"/>
+                    </a:p>
+                  </a:txBody>
+                  <a:tcPr marL="76200" marR="76200" marT="38100" marB="38100" anchor="ctr">
+                    <a:lnL w="0" cap="flat" cmpd="sng" algn="ctr">
+                      <a:noFill/>
+                    </a:lnL>
+                    <a:lnR w="0" cap="flat" cmpd="sng" algn="ctr">
+                      <a:noFill/>
+                    </a:lnR>
+                    <a:lnT w="0" cap="flat" cmpd="sng" algn="ctr">
+                      <a:noFill/>
+                    </a:lnT>
+                    <a:lnB w="0" cap="flat" cmpd="sng" algn="ctr">
+                      <a:noFill/>
+                    </a:lnB>
+                  </a:tcPr>
+                </a:tc>
+                <a:tc>
+                  <a:txBody>
+                    <a:bodyPr/>
+                    <a:lstStyle/>
+                    <a:p>
+                      <a:pPr algn="r" indent="0" marL="0">
+                        <a:buNone/>
+                      </a:pPr>
+                      <a:r>
+                        <a:rPr lang="en-US" sz="1200" dirty="0">
+                          <a:solidFill>
+                            <a:schemeClr val="tx1"/>
+                          </a:solidFill>
+                        </a:rPr>
+                        <a:t>1,900,000</a:t>
+                      </a:r>
+                      <a:endParaRPr lang="en-US" sz="1200" dirty="0"/>
+                    </a:p>
+                  </a:txBody>
+                  <a:tcPr marL="76200" marR="76200" marT="38100" marB="38100" anchor="ctr">
+                    <a:lnL w="0" cap="flat" cmpd="sng" algn="ctr">
+                      <a:noFill/>
+                    </a:lnL>
+                    <a:lnR w="0" cap="flat" cmpd="sng" algn="ctr">
+                      <a:noFill/>
+                    </a:lnR>
+                    <a:lnT w="0" cap="flat" cmpd="sng" algn="ctr">
+                      <a:noFill/>
+                    </a:lnT>
+                    <a:lnB w="0" cap="flat" cmpd="sng" algn="ctr">
+                      <a:noFill/>
+                    </a:lnB>
+                  </a:tcPr>
+                </a:tc>
+              </a:tr>
+              <a:tr h="329184">
+                <a:tc>
+                  <a:txBody>
+                    <a:bodyPr/>
+                    <a:lstStyle/>
+                    <a:p>
+                      <a:pPr algn="l" indent="0" marL="0">
+                        <a:buNone/>
+                      </a:pPr>
+                      <a:r>
+                        <a:rPr lang="en-US" sz="1200" b="1" dirty="0">
+                          <a:solidFill>
+                            <a:schemeClr val="tx1"/>
+                          </a:solidFill>
+                        </a:rPr>
+                        <a:t>神策歷史超過 13 個月</a:t>
+                      </a:r>
+                      <a:endParaRPr lang="en-US" sz="1200" dirty="0"/>
+                    </a:p>
+                  </a:txBody>
+                  <a:tcPr marL="76200" marR="76200" marT="38100" marB="38100" anchor="ctr">
+                    <a:lnL w="0" cap="flat" cmpd="sng" algn="ctr">
+                      <a:noFill/>
+                    </a:lnL>
+                    <a:lnR w="0" cap="flat" cmpd="sng" algn="ctr">
+                      <a:noFill/>
+                    </a:lnR>
+                    <a:lnT w="0" cap="flat" cmpd="sng" algn="ctr">
+                      <a:noFill/>
+                    </a:lnT>
+                    <a:lnB w="0" cap="flat" cmpd="sng" algn="ctr">
+                      <a:noFill/>
+                    </a:lnB>
+                  </a:tcPr>
+                </a:tc>
+                <a:tc>
+                  <a:txBody>
+                    <a:bodyPr/>
+                    <a:lstStyle/>
+                    <a:p>
+                      <a:pPr algn="r" indent="0" marL="0">
+                        <a:buNone/>
+                      </a:pPr>
+                      <a:r>
+                        <a:rPr lang="en-US" sz="1200" dirty="0">
+                          <a:solidFill>
+                            <a:schemeClr val="tx1"/>
+                          </a:solidFill>
+                        </a:rPr>
+                        <a:t>40</a:t>
+                      </a:r>
+                      <a:endParaRPr lang="en-US" sz="1200" dirty="0"/>
+                    </a:p>
+                  </a:txBody>
+                  <a:tcPr marL="76200" marR="76200" marT="38100" marB="38100" anchor="ctr">
+                    <a:lnL w="0" cap="flat" cmpd="sng" algn="ctr">
+                      <a:noFill/>
+                    </a:lnL>
+                    <a:lnR w="0" cap="flat" cmpd="sng" algn="ctr">
+                      <a:noFill/>
+                    </a:lnR>
+                    <a:lnT w="0" cap="flat" cmpd="sng" algn="ctr">
+                      <a:noFill/>
+                    </a:lnT>
+                    <a:lnB w="0" cap="flat" cmpd="sng" algn="ctr">
+                      <a:noFill/>
+                    </a:lnB>
+                  </a:tcPr>
+                </a:tc>
+                <a:tc>
+                  <a:txBody>
+                    <a:bodyPr/>
+                    <a:lstStyle/>
+                    <a:p>
+                      <a:pPr algn="r" indent="0" marL="0">
+                        <a:buNone/>
+                      </a:pPr>
+                      <a:r>
+                        <a:rPr lang="en-US" sz="1200" dirty="0">
+                          <a:solidFill>
+                            <a:schemeClr val="tx1"/>
+                          </a:solidFill>
+                        </a:rPr>
+                        <a:t>730,000</a:t>
+                      </a:r>
+                      <a:endParaRPr lang="en-US" sz="1200" dirty="0"/>
+                    </a:p>
+                  </a:txBody>
+                  <a:tcPr marL="76200" marR="76200" marT="38100" marB="38100" anchor="ctr">
+                    <a:lnL w="0" cap="flat" cmpd="sng" algn="ctr">
+                      <a:noFill/>
+                    </a:lnL>
+                    <a:lnR w="0" cap="flat" cmpd="sng" algn="ctr">
+                      <a:noFill/>
+                    </a:lnR>
+                    <a:lnT w="0" cap="flat" cmpd="sng" algn="ctr">
+                      <a:noFill/>
+                    </a:lnT>
+                    <a:lnB w="0" cap="flat" cmpd="sng" algn="ctr">
+                      <a:noFill/>
+                    </a:lnB>
+                  </a:tcPr>
+                </a:tc>
+              </a:tr>
+              <a:tr h="329184">
+                <a:tc>
+                  <a:txBody>
+                    <a:bodyPr/>
+                    <a:lstStyle/>
+                    <a:p>
+                      <a:pPr algn="l" indent="0" marL="0">
+                        <a:buNone/>
+                      </a:pPr>
+                      <a:r>
+                        <a:rPr lang="en-US" sz="1200" b="1" dirty="0">
+                          <a:solidFill>
+                            <a:schemeClr val="tx1"/>
+                          </a:solidFill>
+                        </a:rPr>
+                        <a:t>CSM 客戶成功</a:t>
+                      </a:r>
+                      <a:endParaRPr lang="en-US" sz="1200" dirty="0"/>
+                    </a:p>
+                  </a:txBody>
+                  <a:tcPr marL="76200" marR="76200" marT="38100" marB="38100" anchor="ctr">
+                    <a:lnL w="0" cap="flat" cmpd="sng" algn="ctr">
+                      <a:noFill/>
+                    </a:lnL>
+                    <a:lnR w="0" cap="flat" cmpd="sng" algn="ctr">
+                      <a:noFill/>
+                    </a:lnR>
+                    <a:lnT w="0" cap="flat" cmpd="sng" algn="ctr">
+                      <a:noFill/>
+                    </a:lnT>
+                    <a:lnB w="0" cap="flat" cmpd="sng" algn="ctr">
+                      <a:noFill/>
+                    </a:lnB>
+                  </a:tcPr>
+                </a:tc>
+                <a:tc>
+                  <a:txBody>
+                    <a:bodyPr/>
+                    <a:lstStyle/>
+                    <a:p>
+                      <a:pPr algn="r" indent="0" marL="0">
+                        <a:buNone/>
+                      </a:pPr>
+                      <a:r>
+                        <a:rPr lang="en-US" sz="1200" dirty="0">
+                          <a:solidFill>
+                            <a:schemeClr val="tx1"/>
+                          </a:solidFill>
+                        </a:rPr>
+                        <a:t>50</a:t>
+                      </a:r>
+                      <a:endParaRPr lang="en-US" sz="1200" dirty="0"/>
+                    </a:p>
+                  </a:txBody>
+                  <a:tcPr marL="76200" marR="76200" marT="38100" marB="38100" anchor="ctr">
+                    <a:lnL w="0" cap="flat" cmpd="sng" algn="ctr">
+                      <a:noFill/>
+                    </a:lnL>
+                    <a:lnR w="0" cap="flat" cmpd="sng" algn="ctr">
+                      <a:noFill/>
+                    </a:lnR>
+                    <a:lnT w="0" cap="flat" cmpd="sng" algn="ctr">
+                      <a:noFill/>
+                    </a:lnT>
+                    <a:lnB w="0" cap="flat" cmpd="sng" algn="ctr">
+                      <a:noFill/>
+                    </a:lnB>
+                  </a:tcPr>
+                </a:tc>
+                <a:tc>
+                  <a:txBody>
+                    <a:bodyPr/>
+                    <a:lstStyle/>
+                    <a:p>
+                      <a:pPr algn="r" indent="0" marL="0">
+                        <a:buNone/>
+                      </a:pPr>
+                      <a:r>
+                        <a:rPr lang="en-US" sz="1200" dirty="0">
+                          <a:solidFill>
+                            <a:schemeClr val="tx1"/>
+                          </a:solidFill>
+                        </a:rPr>
+                        <a:t>800,000</a:t>
+                      </a:r>
+                      <a:endParaRPr lang="en-US" sz="1200" dirty="0"/>
+                    </a:p>
+                  </a:txBody>
+                  <a:tcPr marL="76200" marR="76200" marT="38100" marB="38100" anchor="ctr">
+                    <a:lnL w="0" cap="flat" cmpd="sng" algn="ctr">
+                      <a:noFill/>
+                    </a:lnL>
+                    <a:lnR w="0" cap="flat" cmpd="sng" algn="ctr">
+                      <a:noFill/>
+                    </a:lnR>
+                    <a:lnT w="0" cap="flat" cmpd="sng" algn="ctr">
+                      <a:noFill/>
+                    </a:lnT>
+                    <a:lnB w="0" cap="flat" cmpd="sng" algn="ctr">
+                      <a:noFill/>
+                    </a:lnB>
+                  </a:tcPr>
+                </a:tc>
+              </a:tr>
+            </a:tbl>
+          </a:graphicData>
+        </a:graphic>
+      </p:graphicFrame>
       <p:sp>
         <p:nvSpPr>
           <p:cNvPr id="4" name="s20_opt"/>
@@ -11582,12 +11398,12 @@
         </p:nvSpPr>
         <p:spPr>
           <a:xfrm>
-            <a:off x="5577840" y="1325880"/>
-            <a:ext cx="3108960" cy="3108960"/>
+            <a:off x="5760720" y="1188720"/>
+            <a:ext cx="2926080" cy="3200400"/>
           </a:xfrm>
           <a:prstGeom prst="roundRect">
             <a:avLst>
-              <a:gd name="adj" fmla="val 2353"/>
+              <a:gd name="adj" fmla="val 2500"/>
             </a:avLst>
           </a:prstGeom>
           <a:solidFill>
@@ -11603,14 +11419,14 @@
       </p:sp>
       <p:sp>
         <p:nvSpPr>
-          <p:cNvPr id="5" name="Text 3"/>
+          <p:cNvPr id="5" name="Text 2"/>
           <p:cNvSpPr txBox="1"/>
           <p:nvPr/>
         </p:nvSpPr>
         <p:spPr>
           <a:xfrm>
-            <a:off x="5806440" y="1508760"/>
-            <a:ext cx="2651760" cy="365760"/>
+            <a:off x="5943600" y="1371600"/>
+            <a:ext cx="2560320" cy="2834640"/>
           </a:xfrm>
           <a:prstGeom prst="rect">
             <a:avLst/>
@@ -11621,131 +11437,78 @@
         <p:txBody>
           <a:bodyPr wrap="square" lIns="0" tIns="0" rIns="0" bIns="0" rtlCol="0" anchor="t"/>
           <a:lstStyle/>
+          <a:p>
+            <a:pPr indent="0" marL="0">
+              <a:spcAft>
+                <a:spcPts val="600"/>
+              </a:spcAft>
+              <a:buNone/>
+            </a:pPr>
+            <a:r>
+              <a:rPr lang="en-US" sz="1300" b="1" dirty="0">
+                <a:solidFill>
+                  <a:schemeClr val="tx1"/>
+                </a:solidFill>
+              </a:rPr>
+              <a:t>出客戶版前要定</a:t>
+            </a:r>
+            <a:endParaRPr lang="en-US" sz="1300" dirty="0"/>
+          </a:p>
           <a:p>
             <a:pPr indent="0" marL="0">
               <a:buNone/>
             </a:pPr>
             <a:r>
-              <a:rPr lang="en-US" sz="1600" b="1" dirty="0">
+              <a:rPr lang="en-US" sz="1300" dirty="0">
                 <a:solidFill>
                   <a:schemeClr val="tx1"/>
                 </a:solidFill>
               </a:rPr>
-              <a:t>選配與後續</a:t>
-            </a:r>
-            <a:endParaRPr lang="en-US" sz="1600" dirty="0"/>
-          </a:p>
-        </p:txBody>
-      </p:sp>
-      <p:sp>
-        <p:nvSpPr>
-          <p:cNvPr id="6" name="Text 4"/>
-          <p:cNvSpPr txBox="1"/>
-          <p:nvPr/>
-        </p:nvSpPr>
-        <p:spPr>
-          <a:xfrm>
-            <a:off x="5806440" y="1965960"/>
-            <a:ext cx="2651760" cy="2331720"/>
-          </a:xfrm>
-          <a:prstGeom prst="rect">
-            <a:avLst/>
-          </a:prstGeom>
-          <a:noFill/>
-          <a:ln/>
-        </p:spPr>
-        <p:txBody>
-          <a:bodyPr wrap="square" lIns="0" tIns="0" rIns="0" bIns="0" rtlCol="0" anchor="t"/>
-          <a:lstStyle/>
+              <a:t>1. 固定總價或人天實報</a:t>
+            </a:r>
+            <a:endParaRPr lang="en-US" sz="1300" dirty="0"/>
+          </a:p>
           <a:p>
             <a:pPr indent="0" marL="0">
               <a:buNone/>
             </a:pPr>
             <a:r>
-              <a:rPr lang="en-US" sz="1400" b="1" dirty="0">
+              <a:rPr lang="en-US" sz="1300" dirty="0">
                 <a:solidFill>
                   <a:schemeClr val="tx1"/>
                 </a:solidFill>
               </a:rPr>
-              <a:t>CSM 客戶成功</a:t>
-            </a:r>
-            <a:endParaRPr lang="en-US" sz="1400" dirty="0"/>
-          </a:p>
-          <a:p>
-            <a:pPr indent="0" marL="0">
-              <a:spcAft>
-                <a:spcPts val="800"/>
-              </a:spcAft>
-              <a:buNone/>
-            </a:pPr>
-            <a:r>
-              <a:rPr lang="en-US" sz="1400" dirty="0">
-                <a:solidFill>
-                  <a:schemeClr val="tx1"/>
-                </a:solidFill>
-              </a:rPr>
-              <a:t>800,000（50 人天）</a:t>
-            </a:r>
-            <a:endParaRPr lang="en-US" sz="1400" dirty="0"/>
+              <a:t>2. 付款：簽約 30%、UAT 30%、上線 30%、驗收 10%</a:t>
+            </a:r>
+            <a:endParaRPr lang="en-US" sz="1300" dirty="0"/>
           </a:p>
           <a:p>
             <a:pPr indent="0" marL="0">
               <a:buNone/>
             </a:pPr>
             <a:r>
-              <a:rPr lang="en-US" sz="1400" b="1" dirty="0">
+              <a:rPr lang="en-US" sz="1300" dirty="0">
                 <a:solidFill>
                   <a:schemeClr val="tx1"/>
                 </a:solidFill>
               </a:rPr>
-              <a:t>PD 後延長調優</a:t>
-            </a:r>
-            <a:endParaRPr lang="en-US" sz="1400" dirty="0"/>
-          </a:p>
-          <a:p>
-            <a:pPr indent="0" marL="0">
-              <a:spcAft>
-                <a:spcPts val="800"/>
-              </a:spcAft>
-              <a:buNone/>
-            </a:pPr>
-            <a:r>
-              <a:rPr lang="en-US" sz="1400" dirty="0">
-                <a:solidFill>
-                  <a:schemeClr val="tx1"/>
-                </a:solidFill>
-              </a:rPr>
-              <a:t>約 770,000／月（40 人天）</a:t>
-            </a:r>
-            <a:endParaRPr lang="en-US" sz="1400" dirty="0"/>
+              <a:t>3. 客戶自備：GA360、BigQuery、GCP 或機房、LINE</a:t>
+            </a:r>
+            <a:endParaRPr lang="en-US" sz="1300" dirty="0"/>
           </a:p>
           <a:p>
             <a:pPr indent="0" marL="0">
               <a:buNone/>
             </a:pPr>
             <a:r>
-              <a:rPr lang="en-US" sz="1400" b="1" dirty="0">
+              <a:rPr lang="en-US" sz="1300" dirty="0">
                 <a:solidFill>
                   <a:schemeClr val="tx1"/>
                 </a:solidFill>
               </a:rPr>
-              <a:t>維運合約</a:t>
-            </a:r>
-            <a:endParaRPr lang="en-US" sz="1400" dirty="0"/>
-          </a:p>
-          <a:p>
-            <a:pPr indent="0" marL="0">
-              <a:buNone/>
-            </a:pPr>
-            <a:r>
-              <a:rPr lang="en-US" sz="1400" dirty="0">
-                <a:solidFill>
-                  <a:schemeClr val="tx1"/>
-                </a:solidFill>
-              </a:rPr>
-              <a:t>約 300,000／月（15 人天）</a:t>
-            </a:r>
-            <a:endParaRPr lang="en-US" sz="1400" dirty="0"/>
+              <a:t>4. Merkle 分工：不含埋點與 GA360 設定</a:t>
+            </a:r>
+            <a:endParaRPr lang="en-US" sz="1300" dirty="0"/>
           </a:p>
         </p:txBody>
       </p:sp>

--- a/docs/decks/sinopac-dmp-proposal-v0.1.pptx
+++ b/docs/decks/sinopac-dmp-proposal-v0.1.pptx
@@ -128,7 +128,7 @@
   <p:extLst>
     <p:ext uri="{521415D9-36F7-43E2-AB2F-B90AF26B5E84}">
       <p14:sectionLst xmlns:p14="http://schemas.microsoft.com/office/powerpoint/2010/main">
-        <p14:section name="提案簡報初稿" id="{13a36b4b-0d73-c440-dab2-9090b06751f7}">
+        <p14:section name="提案簡報初稿" id="{9278290d-5bb5-75b8-efe6-519d3b79b751}">
           <p14:sldIdLst>
             <p14:sldId id="256"/>
             <p14:sldId id="257"/>
@@ -147,7 +147,7 @@
             <p14:sldId id="270"/>
           </p14:sldIdLst>
         </p14:section>
-        <p14:section name="報價初版（未稅）" id="{c7ba45b8-456a-1f6c-ada9-d178d36acb25}">
+        <p14:section name="報價初版（未稅）" id="{0e6c6003-a473-a0df-6a34-9008d0a4a04f}">
           <p14:sldIdLst>
             <p14:sldId id="271"/>
             <p14:sldId id="272"/>
@@ -156,7 +156,7 @@
             <p14:sldId id="275"/>
           </p14:sldIdLst>
         </p14:section>
-        <p14:section name="週一會前會" id="{5e304be4-37a9-ac8a-e28a-adc4fdc18a07}">
+        <p14:section name="週一會前會" id="{2157167a-7c2d-d3a5-6bc9-2daef2834c53}">
           <p14:sldIdLst>
             <p14:sldId id="276"/>
             <p14:sldId id="277"/>
@@ -8648,7 +8648,7 @@
                   <a:schemeClr val="tx1"/>
                 </a:solidFill>
               </a:rPr>
-              <a:t>第一階段 6,180,000 元未稅，維運約 194 萬／年</a:t>
+              <a:t>第一階段 6,180,000 元未稅；保固一年，次年維運 20%</a:t>
             </a:r>
             <a:endParaRPr lang="en-US" sz="2400" dirty="0"/>
           </a:p>
@@ -9986,7 +9986,7 @@
                   <a:srgbClr val="7C8992"/>
                 </a:solidFill>
               </a:rPr>
-              <a:t>兩年約 10,100,000，低於兩年神策 12,000,000；第三年起每年約神策的三分之一</a:t>
+              <a:t>上線保固一年；次年起維運費＝合約 20%（1,236,000／年）。頭兩年約 7,416,000，低於兩年神策 12,000,000</a:t>
             </a:r>
             <a:endParaRPr lang="en-US" sz="1100" dirty="0"/>
           </a:p>
@@ -11478,7 +11478,7 @@
                   <a:schemeClr val="tx1"/>
                 </a:solidFill>
               </a:rPr>
-              <a:t>2. 付款：簽約 30%、UAT 30%、上線 30%、驗收 10%</a:t>
+              <a:t>2. 保固一年；次年維運＝合約 20%</a:t>
             </a:r>
             <a:endParaRPr lang="en-US" sz="1300" dirty="0"/>
           </a:p>
@@ -11492,7 +11492,7 @@
                   <a:schemeClr val="tx1"/>
                 </a:solidFill>
               </a:rPr>
-              <a:t>3. 客戶自備：GA360、BigQuery、GCP 或機房、LINE</a:t>
+              <a:t>3. 付款：簽約 30%、UAT 30%、上線 30%、驗收 10%</a:t>
             </a:r>
             <a:endParaRPr lang="en-US" sz="1300" dirty="0"/>
           </a:p>
@@ -11506,7 +11506,35 @@
                   <a:schemeClr val="tx1"/>
                 </a:solidFill>
               </a:rPr>
-              <a:t>4. Merkle 分工：不含埋點與 GA360 設定</a:t>
+              <a:t>4. 規格更改只走 CR，人天另計</a:t>
+            </a:r>
+            <a:endParaRPr lang="en-US" sz="1300" dirty="0"/>
+          </a:p>
+          <a:p>
+            <a:pPr indent="0" marL="0">
+              <a:buNone/>
+            </a:pPr>
+            <a:r>
+              <a:rPr lang="en-US" sz="1300" dirty="0">
+                <a:solidFill>
+                  <a:schemeClr val="tx1"/>
+                </a:solidFill>
+              </a:rPr>
+              <a:t>5. 客戶自備：GA360、BigQuery、GCP 或機房、LINE</a:t>
+            </a:r>
+            <a:endParaRPr lang="en-US" sz="1300" dirty="0"/>
+          </a:p>
+          <a:p>
+            <a:pPr indent="0" marL="0">
+              <a:buNone/>
+            </a:pPr>
+            <a:r>
+              <a:rPr lang="en-US" sz="1300" dirty="0">
+                <a:solidFill>
+                  <a:schemeClr val="tx1"/>
+                </a:solidFill>
+              </a:rPr>
+              <a:t>6. Merkle 分工：不含埋點與 GA360 設定</a:t>
             </a:r>
             <a:endParaRPr lang="en-US" sz="1300" dirty="0"/>
           </a:p>

--- a/docs/decks/sinopac-dmp-proposal-v0.1.pptx
+++ b/docs/decks/sinopac-dmp-proposal-v0.1.pptx
@@ -128,7 +128,7 @@
   <p:extLst>
     <p:ext uri="{521415D9-36F7-43E2-AB2F-B90AF26B5E84}">
       <p14:sectionLst xmlns:p14="http://schemas.microsoft.com/office/powerpoint/2010/main">
-        <p14:section name="提案簡報初稿" id="{9278290d-5bb5-75b8-efe6-519d3b79b751}">
+        <p14:section name="提案簡報初稿" id="{bca32563-db50-6003-0e31-d9f8ee55fdd7}">
           <p14:sldIdLst>
             <p14:sldId id="256"/>
             <p14:sldId id="257"/>
@@ -147,7 +147,7 @@
             <p14:sldId id="270"/>
           </p14:sldIdLst>
         </p14:section>
-        <p14:section name="報價初版（未稅）" id="{0e6c6003-a473-a0df-6a34-9008d0a4a04f}">
+        <p14:section name="報價初版（未稅）" id="{818de00a-7529-9aa5-4069-8e1102acafd6}">
           <p14:sldIdLst>
             <p14:sldId id="271"/>
             <p14:sldId id="272"/>
@@ -156,7 +156,7 @@
             <p14:sldId id="275"/>
           </p14:sldIdLst>
         </p14:section>
-        <p14:section name="週一會前會" id="{2157167a-7c2d-d3a5-6bc9-2daef2834c53}">
+        <p14:section name="週一會前會" id="{cf62b0eb-dfb9-f47c-d92d-06ba0fde9ad5}">
           <p14:sldIdLst>
             <p14:sldId id="276"/>
             <p14:sldId id="277"/>
@@ -3268,7 +3268,7 @@
                   <a:schemeClr val="bg1"/>
                 </a:solidFill>
               </a:rPr>
-              <a:t>永豐金證券行為數據平台：神策 → GA360 遷移與 DMP 提案</a:t>
+              <a:t>永豐金證券行為數據平台：舊平台 → GA360 遷移與 DMP 提案</a:t>
             </a:r>
             <a:endParaRPr lang="en-US" sz="3400" dirty="0"/>
           </a:p>
@@ -3383,7 +3383,7 @@
                   <a:schemeClr val="tx1"/>
                 </a:solidFill>
               </a:rPr>
-              <a:t>UAT 2027-06-30、正式上線 2027-09-30，比神策到期早 31 天</a:t>
+              <a:t>UAT 2027-06-30、正式上線 2027-09-30，比舊平台到期早 31 天</a:t>
             </a:r>
             <a:endParaRPr lang="en-US" sz="2400" dirty="0"/>
           </a:p>
@@ -4037,7 +4037,7 @@
                             <a:schemeClr val="tx1"/>
                           </a:solidFill>
                         </a:rPr>
-                        <a:t>交易真資料、結合分析、神策分群標籤重建</a:t>
+                        <a:t>交易真資料、結合分析、舊平台分群標籤重建</a:t>
                       </a:r>
                       <a:endParaRPr lang="en-US" sz="1400" dirty="0"/>
                     </a:p>
@@ -4251,7 +4251,7 @@
                             <a:schemeClr val="tx1"/>
                           </a:solidFill>
                         </a:rPr>
-                        <a:t>客戶驗收 T1–T9；正式上線、神策停寫</a:t>
+                        <a:t>客戶驗收 T1–T9；正式上線、舊平台停寫</a:t>
                       </a:r>
                       <a:endParaRPr lang="en-US" sz="1400" dirty="0"/>
                     </a:p>
@@ -4381,7 +4381,7 @@
                   <a:schemeClr val="tx1"/>
                 </a:solidFill>
               </a:rPr>
-              <a:t>AltaTech 七人加 ClickHouse 顧問 20 天，三位服務過本客戶神策系統</a:t>
+              <a:t>AltaTech 七人加 ClickHouse 顧問 20 天，三位服務過本客戶舊平台系統</a:t>
             </a:r>
             <a:endParaRPr lang="en-US" sz="2400" dirty="0"/>
           </a:p>
@@ -4863,7 +4863,7 @@
                             <a:schemeClr val="tx1"/>
                           </a:solidFill>
                         </a:rPr>
-                        <a:t>PM（服務過神策）</a:t>
+                        <a:t>PM（服務過舊平台）</a:t>
                       </a:r>
                       <a:endParaRPr lang="en-US" sz="1400" dirty="0"/>
                     </a:p>
@@ -4967,7 +4967,7 @@
                             <a:schemeClr val="tx1"/>
                           </a:solidFill>
                         </a:rPr>
-                        <a:t>分析師 A（服務過神策）</a:t>
+                        <a:t>分析師 A（服務過舊平台）</a:t>
                       </a:r>
                       <a:endParaRPr lang="en-US" sz="1400" dirty="0"/>
                     </a:p>
@@ -5035,7 +5035,7 @@
                             <a:schemeClr val="tx1"/>
                           </a:solidFill>
                         </a:rPr>
-                        <a:t>神策盤點、必留清單、T1–T9 對帳</a:t>
+                        <a:t>舊平台盤點、必留清單、T1–T9 對帳</a:t>
                       </a:r>
                       <a:endParaRPr lang="en-US" sz="1400" dirty="0"/>
                     </a:p>
@@ -5175,7 +5175,7 @@
                             <a:schemeClr val="tx1"/>
                           </a:solidFill>
                         </a:rPr>
-                        <a:t>運維（服務過神策）</a:t>
+                        <a:t>運維（服務過舊平台）</a:t>
                       </a:r>
                       <a:endParaRPr lang="en-US" sz="1400" dirty="0"/>
                     </a:p>
@@ -5243,7 +5243,7 @@
                             <a:schemeClr val="tx1"/>
                           </a:solidFill>
                         </a:rPr>
-                        <a:t>神策導出、環境建置、監控與備份</a:t>
+                        <a:t>舊平台導出、環境建置、監控與備份</a:t>
                       </a:r>
                       <a:endParaRPr lang="en-US" sz="1400" dirty="0"/>
                     </a:p>
@@ -6899,7 +6899,7 @@
                   <a:schemeClr val="tx1"/>
                 </a:solidFill>
               </a:rPr>
-              <a:t>4. 神策歷史導出方式與並行期長度</a:t>
+              <a:t>4. 舊平台歷史導出方式與並行期長度</a:t>
             </a:r>
             <a:endParaRPr lang="en-US" sz="1400" dirty="0"/>
           </a:p>
@@ -8284,7 +8284,7 @@
                   <a:schemeClr val="tx1"/>
                 </a:solidFill>
               </a:rPr>
-              <a:t>分階段：第一階段只做取代神策所必需的</a:t>
+              <a:t>分階段：第一階段只做取代舊平台所必需的</a:t>
             </a:r>
             <a:endParaRPr lang="en-US" sz="2400" dirty="0"/>
           </a:p>
@@ -8360,7 +8360,7 @@
                   <a:schemeClr val="tx1"/>
                 </a:solidFill>
               </a:rPr>
-              <a:t>神策近 13 個月歷史導入與並行期對帳</a:t>
+              <a:t>舊平台近 13 個月歷史導入與並行期對帳</a:t>
             </a:r>
             <a:endParaRPr lang="en-US" sz="1500" dirty="0"/>
           </a:p>
@@ -8540,7 +8540,7 @@
                   <a:srgbClr val="7C8992"/>
                 </a:solidFill>
               </a:rPr>
-              <a:t>平台功能已大致完成，只計導入、接入、遷移、對帳與驗收；比較基準：神策年費約 6,000,000</a:t>
+              <a:t>平台功能已大致完成，只計導入、接入、遷移、對帳與驗收；比較基準：舊平台年費約 6,000,000</a:t>
             </a:r>
             <a:endParaRPr lang="en-US" sz="1100" dirty="0"/>
           </a:p>
@@ -9986,7 +9986,7 @@
                   <a:srgbClr val="7C8992"/>
                 </a:solidFill>
               </a:rPr>
-              <a:t>上線保固一年；次年起維運費＝合約 20%（1,236,000／年）。頭兩年約 7,416,000，低於兩年神策 12,000,000</a:t>
+              <a:t>上線保固一年；次年起維運費＝合約 20%（1,236,000／年）。頭兩年約 7,416,000，低於兩年舊平台 12,000,000</a:t>
             </a:r>
             <a:endParaRPr lang="en-US" sz="1100" dirty="0"/>
           </a:p>
@@ -10193,7 +10193,7 @@
                   <a:schemeClr val="tx1"/>
                 </a:solidFill>
               </a:rPr>
-              <a:t>神策到期前可以安全換掉</a:t>
+              <a:t>舊平台到期前可以安全換掉</a:t>
             </a:r>
             <a:endParaRPr lang="en-US" sz="1700" dirty="0"/>
           </a:p>
@@ -11193,7 +11193,7 @@
                             <a:schemeClr val="tx1"/>
                           </a:solidFill>
                         </a:rPr>
-                        <a:t>神策歷史超過 13 個月</a:t>
+                        <a:t>舊平台歷史超過 13 個月</a:t>
                       </a:r>
                       <a:endParaRPr lang="en-US" sz="1200" dirty="0"/>
                     </a:p>
@@ -13487,7 +13487,7 @@
                   <a:schemeClr val="tx1"/>
                 </a:solidFill>
               </a:rPr>
-              <a:t>神策 2027-10-31 到期，70 億筆歷史與每天在用的營運流程都要接得住</a:t>
+              <a:t>舊平台 2027-10-31 到期，70 億筆歷史與每天在用的營運流程都要接得住</a:t>
             </a:r>
             <a:endParaRPr lang="en-US" sz="2400" dirty="0"/>
           </a:p>
@@ -13586,7 +13586,7 @@
                   <a:schemeClr val="tx1"/>
                 </a:solidFill>
               </a:rPr>
-              <a:t>神策授權到期日</a:t>
+              <a:t>舊平台授權到期日</a:t>
             </a:r>
             <a:endParaRPr lang="en-US" sz="1400" dirty="0"/>
           </a:p>
@@ -13685,7 +13685,7 @@
                   <a:schemeClr val="tx1"/>
                 </a:solidFill>
               </a:rPr>
-              <a:t>神策歷史行為事件</a:t>
+              <a:t>舊平台歷史行為事件</a:t>
             </a:r>
             <a:endParaRPr lang="en-US" sz="1400" dirty="0"/>
           </a:p>
@@ -13725,7 +13725,7 @@
                   <a:schemeClr val="tx1"/>
                 </a:solidFill>
               </a:rPr>
-              <a:t>行銷、數據分析、數位經營每天在用神策的報表、分群、標籤與名單推送</a:t>
+              <a:t>行銷、數據分析、數位經營每天在用舊平台的報表、分群、標籤與名單推送</a:t>
             </a:r>
             <a:endParaRPr lang="en-US" sz="1600" dirty="0"/>
           </a:p>
@@ -13779,7 +13779,7 @@
                   <a:schemeClr val="tx1"/>
                 </a:solidFill>
               </a:rPr>
-              <a:t>切換前要有並行期對帳，數字對得上才停寫神策</a:t>
+              <a:t>切換前要有並行期對帳，數字對得上才停寫舊平台</a:t>
             </a:r>
             <a:endParaRPr lang="en-US" sz="1600" dirty="0"/>
           </a:p>
@@ -14581,7 +14581,7 @@
                   <a:schemeClr val="tx1"/>
                 </a:solidFill>
               </a:rPr>
-              <a:t>神策歷史</a:t>
+              <a:t>舊平台歷史</a:t>
             </a:r>
             <a:endParaRPr lang="en-US" sz="1400" dirty="0"/>
           </a:p>
@@ -16127,7 +16127,7 @@
                   <a:schemeClr val="tx1"/>
                 </a:solidFill>
               </a:rPr>
-              <a:t>現場操作三段各 4 分鐘：先講神策怎麼做，再操作，最後回到需求表編號</a:t>
+              <a:t>現場操作三段各 4 分鐘：先講舊平台怎麼做，再操作，最後回到需求表編號</a:t>
             </a:r>
             <a:endParaRPr lang="en-US" sz="2400" dirty="0"/>
           </a:p>
@@ -16440,7 +16440,7 @@
                             <a:schemeClr val="tx1"/>
                           </a:solidFill>
                         </a:rPr>
-                        <a:t>口徑與神策一致</a:t>
+                        <a:t>口徑與舊平台一致</a:t>
                       </a:r>
                       <a:endParaRPr lang="en-US" sz="1400" dirty="0"/>
                     </a:p>
@@ -17840,7 +17840,7 @@
                   <a:schemeClr val="tx1"/>
                 </a:solidFill>
               </a:rPr>
-              <a:t>神策事件名 → GA4 事件名的橋接表由我們產，Merkle 依此埋點</a:t>
+              <a:t>舊平台事件名 → GA4 事件名的橋接表由我們產，Merkle 依此埋點</a:t>
             </a:r>
             <a:endParaRPr lang="en-US" sz="1300" dirty="0"/>
           </a:p>
@@ -18150,7 +18150,7 @@
                   <a:schemeClr val="tx1"/>
                 </a:solidFill>
               </a:rPr>
-              <a:t>登入後 user_id = 客戶代碼（HMAC），與神策登入 ID 同一把金鑰</a:t>
+              <a:t>登入後 user_id = 客戶代碼（HMAC），與舊平台登入 ID 同一把金鑰</a:t>
             </a:r>
             <a:endParaRPr lang="en-US" sz="1300" dirty="0"/>
           </a:p>

--- a/docs/decks/sinopac-dmp-proposal-v0.1.pptx
+++ b/docs/decks/sinopac-dmp-proposal-v0.1.pptx
@@ -27,9 +27,12 @@
     <p:sldId id="275" r:id="rId21"/>
     <p:sldId id="276" r:id="rId22"/>
     <p:sldId id="277" r:id="rId23"/>
+    <p:sldId id="278" r:id="rId24"/>
+    <p:sldId id="279" r:id="rId25"/>
+    <p:sldId id="280" r:id="rId26"/>
   </p:sldIdLst>
   <p:notesMasterIdLst>
-    <p:notesMasterId r:id="rId24"/>
+    <p:notesMasterId r:id="rId27"/>
   </p:notesMasterIdLst>
   <p:sldSz cx="9144000" cy="5143500"/>
   <p:notesSz cx="5143500" cy="9144000"/>
@@ -128,7 +131,7 @@
   <p:extLst>
     <p:ext uri="{521415D9-36F7-43E2-AB2F-B90AF26B5E84}">
       <p14:sectionLst xmlns:p14="http://schemas.microsoft.com/office/powerpoint/2010/main">
-        <p14:section name="提案簡報初稿" id="{bca32563-db50-6003-0e31-d9f8ee55fdd7}">
+        <p14:section name="提案簡報初稿" id="{875d0275-aac5-7ff3-29e7-ca33bcaaed98}">
           <p14:sldIdLst>
             <p14:sldId id="256"/>
             <p14:sldId id="257"/>
@@ -145,21 +148,24 @@
             <p14:sldId id="268"/>
             <p14:sldId id="269"/>
             <p14:sldId id="270"/>
-          </p14:sldIdLst>
-        </p14:section>
-        <p14:section name="報價初版（未稅）" id="{818de00a-7529-9aa5-4069-8e1102acafd6}">
-          <p14:sldIdLst>
             <p14:sldId id="271"/>
             <p14:sldId id="272"/>
             <p14:sldId id="273"/>
+          </p14:sldIdLst>
+        </p14:section>
+        <p14:section name="報價初版（未稅）" id="{c0eeae4c-f458-840e-fce3-e597662e6506}">
+          <p14:sldIdLst>
             <p14:sldId id="274"/>
             <p14:sldId id="275"/>
+            <p14:sldId id="276"/>
+            <p14:sldId id="277"/>
+            <p14:sldId id="278"/>
           </p14:sldIdLst>
         </p14:section>
-        <p14:section name="週一會前會" id="{cf62b0eb-dfb9-f47c-d92d-06ba0fde9ad5}">
+        <p14:section name="週一會前會" id="{965c5e05-f6f4-c9ac-32de-010c0d4163a2}">
           <p14:sldIdLst>
-            <p14:sldId id="276"/>
-            <p14:sldId id="277"/>
+            <p14:sldId id="279"/>
+            <p14:sldId id="280"/>
           </p14:sldIdLst>
         </p14:section>
       </p14:sectionLst>
@@ -1822,6 +1828,270 @@
             <a:fld id="{F7021451-1387-4CA6-816F-3879F97B5CBC}" type="slidenum">
               <a:rPr lang="en-US"/>
               <a:t>22</a:t>
+            </a:fld>
+            <a:endParaRPr lang="en-US"/>
+          </a:p>
+        </p:txBody>
+      </p:sp>
+    </p:spTree>
+    <p:extLst>
+      <p:ext uri="{BB962C8B-B14F-4D97-AF65-F5344CB8AC3E}">
+        <p14:creationId xmlns:p14="http://schemas.microsoft.com/office/powerpoint/2010/main" val="1024086991"/>
+      </p:ext>
+    </p:extLst>
+  </p:cSld>
+  <p:clrMapOvr>
+    <a:masterClrMapping/>
+  </p:clrMapOvr>
+</p:notes>
+</file>
+
+<file path=ppt/notesSlides/notesSlide23.xml><?xml version="1.0" encoding="utf-8"?>
+<p:notes xmlns:a="http://schemas.openxmlformats.org/drawingml/2006/main" xmlns:r="http://schemas.openxmlformats.org/officeDocument/2006/relationships" xmlns:p="http://schemas.openxmlformats.org/presentationml/2006/main">
+  <p:cSld>
+    <p:spTree>
+      <p:nvGrpSpPr>
+        <p:cNvPr id="1" name=""/>
+        <p:cNvGrpSpPr/>
+        <p:nvPr/>
+      </p:nvGrpSpPr>
+      <p:grpSpPr>
+        <a:xfrm>
+          <a:off x="0" y="0"/>
+          <a:ext cx="0" cy="0"/>
+          <a:chOff x="0" y="0"/>
+          <a:chExt cx="0" cy="0"/>
+        </a:xfrm>
+      </p:grpSpPr>
+      <p:sp>
+        <p:nvSpPr>
+          <p:cNvPr id="2" name="Slide Image Placeholder 1"/>
+          <p:cNvSpPr>
+            <a:spLocks noGrp="1" noRot="1" noChangeAspect="1"/>
+          </p:cNvSpPr>
+          <p:nvPr>
+            <p:ph type="sldImg"/>
+          </p:nvPr>
+        </p:nvSpPr>
+        <p:spPr/>
+      </p:sp>
+      <p:sp>
+        <p:nvSpPr>
+          <p:cNvPr id="3" name="Notes Placeholder 2"/>
+          <p:cNvSpPr>
+            <a:spLocks noGrp="1"/>
+          </p:cNvSpPr>
+          <p:nvPr>
+            <p:ph type="body" idx="1"/>
+          </p:nvPr>
+        </p:nvSpPr>
+        <p:spPr/>
+        <p:txBody>
+          <a:bodyPr/>
+          <a:lstStyle/>
+          <a:p>
+            <a:r>
+              <a:rPr lang="en-US" dirty="0"/>
+              <a:t/>
+            </a:r>
+            <a:endParaRPr lang="en-US" dirty="0"/>
+          </a:p>
+        </p:txBody>
+      </p:sp>
+      <p:sp>
+        <p:nvSpPr>
+          <p:cNvPr id="4" name="Slide Number Placeholder 3"/>
+          <p:cNvSpPr>
+            <a:spLocks noGrp="1"/>
+          </p:cNvSpPr>
+          <p:nvPr>
+            <p:ph type="sldNum" sz="quarter" idx="10"/>
+          </p:nvPr>
+        </p:nvSpPr>
+        <p:spPr/>
+        <p:txBody>
+          <a:bodyPr/>
+          <a:lstStyle/>
+          <a:p>
+            <a:fld id="{F7021451-1387-4CA6-816F-3879F97B5CBC}" type="slidenum">
+              <a:rPr lang="en-US"/>
+              <a:t>23</a:t>
+            </a:fld>
+            <a:endParaRPr lang="en-US"/>
+          </a:p>
+        </p:txBody>
+      </p:sp>
+    </p:spTree>
+    <p:extLst>
+      <p:ext uri="{BB962C8B-B14F-4D97-AF65-F5344CB8AC3E}">
+        <p14:creationId xmlns:p14="http://schemas.microsoft.com/office/powerpoint/2010/main" val="1024086991"/>
+      </p:ext>
+    </p:extLst>
+  </p:cSld>
+  <p:clrMapOvr>
+    <a:masterClrMapping/>
+  </p:clrMapOvr>
+</p:notes>
+</file>
+
+<file path=ppt/notesSlides/notesSlide24.xml><?xml version="1.0" encoding="utf-8"?>
+<p:notes xmlns:a="http://schemas.openxmlformats.org/drawingml/2006/main" xmlns:r="http://schemas.openxmlformats.org/officeDocument/2006/relationships" xmlns:p="http://schemas.openxmlformats.org/presentationml/2006/main">
+  <p:cSld>
+    <p:spTree>
+      <p:nvGrpSpPr>
+        <p:cNvPr id="1" name=""/>
+        <p:cNvGrpSpPr/>
+        <p:nvPr/>
+      </p:nvGrpSpPr>
+      <p:grpSpPr>
+        <a:xfrm>
+          <a:off x="0" y="0"/>
+          <a:ext cx="0" cy="0"/>
+          <a:chOff x="0" y="0"/>
+          <a:chExt cx="0" cy="0"/>
+        </a:xfrm>
+      </p:grpSpPr>
+      <p:sp>
+        <p:nvSpPr>
+          <p:cNvPr id="2" name="Slide Image Placeholder 1"/>
+          <p:cNvSpPr>
+            <a:spLocks noGrp="1" noRot="1" noChangeAspect="1"/>
+          </p:cNvSpPr>
+          <p:nvPr>
+            <p:ph type="sldImg"/>
+          </p:nvPr>
+        </p:nvSpPr>
+        <p:spPr/>
+      </p:sp>
+      <p:sp>
+        <p:nvSpPr>
+          <p:cNvPr id="3" name="Notes Placeholder 2"/>
+          <p:cNvSpPr>
+            <a:spLocks noGrp="1"/>
+          </p:cNvSpPr>
+          <p:nvPr>
+            <p:ph type="body" idx="1"/>
+          </p:nvPr>
+        </p:nvSpPr>
+        <p:spPr/>
+        <p:txBody>
+          <a:bodyPr/>
+          <a:lstStyle/>
+          <a:p>
+            <a:r>
+              <a:rPr lang="en-US" dirty="0"/>
+              <a:t/>
+            </a:r>
+            <a:endParaRPr lang="en-US" dirty="0"/>
+          </a:p>
+        </p:txBody>
+      </p:sp>
+      <p:sp>
+        <p:nvSpPr>
+          <p:cNvPr id="4" name="Slide Number Placeholder 3"/>
+          <p:cNvSpPr>
+            <a:spLocks noGrp="1"/>
+          </p:cNvSpPr>
+          <p:nvPr>
+            <p:ph type="sldNum" sz="quarter" idx="10"/>
+          </p:nvPr>
+        </p:nvSpPr>
+        <p:spPr/>
+        <p:txBody>
+          <a:bodyPr/>
+          <a:lstStyle/>
+          <a:p>
+            <a:fld id="{F7021451-1387-4CA6-816F-3879F97B5CBC}" type="slidenum">
+              <a:rPr lang="en-US"/>
+              <a:t>24</a:t>
+            </a:fld>
+            <a:endParaRPr lang="en-US"/>
+          </a:p>
+        </p:txBody>
+      </p:sp>
+    </p:spTree>
+    <p:extLst>
+      <p:ext uri="{BB962C8B-B14F-4D97-AF65-F5344CB8AC3E}">
+        <p14:creationId xmlns:p14="http://schemas.microsoft.com/office/powerpoint/2010/main" val="1024086991"/>
+      </p:ext>
+    </p:extLst>
+  </p:cSld>
+  <p:clrMapOvr>
+    <a:masterClrMapping/>
+  </p:clrMapOvr>
+</p:notes>
+</file>
+
+<file path=ppt/notesSlides/notesSlide25.xml><?xml version="1.0" encoding="utf-8"?>
+<p:notes xmlns:a="http://schemas.openxmlformats.org/drawingml/2006/main" xmlns:r="http://schemas.openxmlformats.org/officeDocument/2006/relationships" xmlns:p="http://schemas.openxmlformats.org/presentationml/2006/main">
+  <p:cSld>
+    <p:spTree>
+      <p:nvGrpSpPr>
+        <p:cNvPr id="1" name=""/>
+        <p:cNvGrpSpPr/>
+        <p:nvPr/>
+      </p:nvGrpSpPr>
+      <p:grpSpPr>
+        <a:xfrm>
+          <a:off x="0" y="0"/>
+          <a:ext cx="0" cy="0"/>
+          <a:chOff x="0" y="0"/>
+          <a:chExt cx="0" cy="0"/>
+        </a:xfrm>
+      </p:grpSpPr>
+      <p:sp>
+        <p:nvSpPr>
+          <p:cNvPr id="2" name="Slide Image Placeholder 1"/>
+          <p:cNvSpPr>
+            <a:spLocks noGrp="1" noRot="1" noChangeAspect="1"/>
+          </p:cNvSpPr>
+          <p:nvPr>
+            <p:ph type="sldImg"/>
+          </p:nvPr>
+        </p:nvSpPr>
+        <p:spPr/>
+      </p:sp>
+      <p:sp>
+        <p:nvSpPr>
+          <p:cNvPr id="3" name="Notes Placeholder 2"/>
+          <p:cNvSpPr>
+            <a:spLocks noGrp="1"/>
+          </p:cNvSpPr>
+          <p:nvPr>
+            <p:ph type="body" idx="1"/>
+          </p:nvPr>
+        </p:nvSpPr>
+        <p:spPr/>
+        <p:txBody>
+          <a:bodyPr/>
+          <a:lstStyle/>
+          <a:p>
+            <a:r>
+              <a:rPr lang="en-US" dirty="0"/>
+              <a:t/>
+            </a:r>
+            <a:endParaRPr lang="en-US" dirty="0"/>
+          </a:p>
+        </p:txBody>
+      </p:sp>
+      <p:sp>
+        <p:nvSpPr>
+          <p:cNvPr id="4" name="Slide Number Placeholder 3"/>
+          <p:cNvSpPr>
+            <a:spLocks noGrp="1"/>
+          </p:cNvSpPr>
+          <p:nvPr>
+            <p:ph type="sldNum" sz="quarter" idx="10"/>
+          </p:nvPr>
+        </p:nvSpPr>
+        <p:spPr/>
+        <p:txBody>
+          <a:bodyPr/>
+          <a:lstStyle/>
+          <a:p>
+            <a:fld id="{F7021451-1387-4CA6-816F-3879F97B5CBC}" type="slidenum">
+              <a:rPr lang="en-US"/>
+              <a:t>25</a:t>
             </a:fld>
             <a:endParaRPr lang="en-US"/>
           </a:p>
@@ -6782,7 +7052,7 @@
                   <a:schemeClr val="tx1"/>
                 </a:solidFill>
               </a:rPr>
-              <a:t>M0 要客戶拍板十項，11-13 前決定</a:t>
+              <a:t>機房部署：Kubernetes 上只有五個有狀態服務，其餘全是無狀態應用</a:t>
             </a:r>
             <a:endParaRPr lang="en-US" sz="2400" dirty="0"/>
           </a:p>
@@ -6790,18 +7060,18 @@
       </p:sp>
       <p:sp>
         <p:nvSpPr>
-          <p:cNvPr id="3" name="s15_col0"/>
+          <p:cNvPr id="3" name="s14b_app"/>
           <p:cNvSpPr/>
           <p:nvPr/>
         </p:nvSpPr>
         <p:spPr>
           <a:xfrm>
-            <a:off x="457200" y="1280160"/>
-            <a:ext cx="4023360" cy="3246120"/>
+            <a:off x="457200" y="1188720"/>
+            <a:ext cx="8229600" cy="841248"/>
           </a:xfrm>
           <a:prstGeom prst="roundRect">
             <a:avLst>
-              <a:gd name="adj" fmla="val 2254"/>
+              <a:gd name="adj" fmla="val 8696"/>
             </a:avLst>
           </a:prstGeom>
           <a:solidFill>
@@ -6823,8 +7093,8 @@
         </p:nvSpPr>
         <p:spPr>
           <a:xfrm>
-            <a:off x="685800" y="1463040"/>
-            <a:ext cx="3611880" cy="2926080"/>
+            <a:off x="594360" y="1243584"/>
+            <a:ext cx="7955280" cy="237744"/>
           </a:xfrm>
           <a:prstGeom prst="rect">
             <a:avLst/>
@@ -6837,105 +7107,519 @@
           <a:lstStyle/>
           <a:p>
             <a:pPr indent="0" marL="0">
-              <a:spcAft>
-                <a:spcPts val="1000"/>
-              </a:spcAft>
               <a:buNone/>
             </a:pPr>
             <a:r>
-              <a:rPr lang="en-US" sz="1400" dirty="0">
+              <a:rPr lang="en-US" sz="1100" b="1" dirty="0">
+                <a:solidFill>
+                  <a:schemeClr val="accent1"/>
+                </a:solidFill>
+              </a:rPr>
+              <a:t>平台應用（無狀態 Deployment，映像 6 個：core／ingest／batch／agent／flink-jobs／web）</a:t>
+            </a:r>
+            <a:endParaRPr lang="en-US" sz="1100" dirty="0"/>
+          </a:p>
+        </p:txBody>
+      </p:sp>
+      <p:sp>
+        <p:nvSpPr>
+          <p:cNvPr id="5" name="Shape 3"/>
+          <p:cNvSpPr/>
+          <p:nvPr/>
+        </p:nvSpPr>
+        <p:spPr>
+          <a:xfrm>
+            <a:off x="594360" y="1481328"/>
+            <a:ext cx="1532534" cy="457200"/>
+          </a:xfrm>
+          <a:prstGeom prst="roundRect">
+            <a:avLst>
+              <a:gd name="adj" fmla="val 10000"/>
+            </a:avLst>
+          </a:prstGeom>
+          <a:solidFill>
+            <a:srgbClr val="E9F0FD"/>
+          </a:solidFill>
+          <a:ln w="9525">
+            <a:solidFill>
+              <a:schemeClr val="accent1"/>
+            </a:solidFill>
+            <a:prstDash val="solid"/>
+          </a:ln>
+        </p:spPr>
+      </p:sp>
+      <p:sp>
+        <p:nvSpPr>
+          <p:cNvPr id="6" name="Shape 4"/>
+          <p:cNvSpPr/>
+          <p:nvPr/>
+        </p:nvSpPr>
+        <p:spPr>
+          <a:xfrm>
+            <a:off x="594360" y="1536192"/>
+            <a:ext cx="45720" cy="347472"/>
+          </a:xfrm>
+          <a:prstGeom prst="rect">
+            <a:avLst/>
+          </a:prstGeom>
+          <a:solidFill>
+            <a:schemeClr val="accent1"/>
+          </a:solidFill>
+          <a:ln/>
+        </p:spPr>
+      </p:sp>
+      <p:sp>
+        <p:nvSpPr>
+          <p:cNvPr id="7" name="Text 5"/>
+          <p:cNvSpPr txBox="1"/>
+          <p:nvPr/>
+        </p:nvSpPr>
+        <p:spPr>
+          <a:xfrm>
+            <a:off x="704088" y="1517904"/>
+            <a:ext cx="1386230" cy="384048"/>
+          </a:xfrm>
+          <a:prstGeom prst="rect">
+            <a:avLst/>
+          </a:prstGeom>
+          <a:noFill/>
+          <a:ln/>
+        </p:spPr>
+        <p:txBody>
+          <a:bodyPr wrap="square" lIns="0" tIns="0" rIns="0" bIns="0" rtlCol="0" anchor="ctr"/>
+          <a:lstStyle/>
+          <a:p>
+            <a:pPr indent="0" marL="0">
+              <a:buNone/>
+            </a:pPr>
+            <a:r>
+              <a:rPr lang="en-US" sz="1050" b="1" dirty="0">
                 <a:solidFill>
                   <a:schemeClr val="tx1"/>
                 </a:solidFill>
               </a:rPr>
-              <a:t>1. 部署環境：GCP 或機房、機器檔位</a:t>
+              <a:t>dmp-web</a:t>
             </a:r>
-            <a:endParaRPr lang="en-US" sz="1400" dirty="0"/>
+            <a:endParaRPr lang="en-US" sz="1050" dirty="0"/>
           </a:p>
           <a:p>
             <a:pPr indent="0" marL="0">
-              <a:spcAft>
-                <a:spcPts val="1000"/>
-              </a:spcAft>
               <a:buNone/>
             </a:pPr>
             <a:r>
-              <a:rPr lang="en-US" sz="1400" dirty="0">
+              <a:rPr lang="en-US" sz="850" dirty="0">
+                <a:solidFill>
+                  <a:srgbClr val="7C8992"/>
+                </a:solidFill>
+              </a:rPr>
+              <a:t>前端靜態檔</a:t>
+            </a:r>
+            <a:endParaRPr lang="en-US" sz="1050" dirty="0"/>
+          </a:p>
+        </p:txBody>
+      </p:sp>
+      <p:sp>
+        <p:nvSpPr>
+          <p:cNvPr id="8" name="Shape 6"/>
+          <p:cNvSpPr/>
+          <p:nvPr/>
+        </p:nvSpPr>
+        <p:spPr>
+          <a:xfrm>
+            <a:off x="2200046" y="1481328"/>
+            <a:ext cx="1532534" cy="457200"/>
+          </a:xfrm>
+          <a:prstGeom prst="roundRect">
+            <a:avLst>
+              <a:gd name="adj" fmla="val 10000"/>
+            </a:avLst>
+          </a:prstGeom>
+          <a:solidFill>
+            <a:srgbClr val="E9F0FD"/>
+          </a:solidFill>
+          <a:ln w="9525">
+            <a:solidFill>
+              <a:schemeClr val="accent1"/>
+            </a:solidFill>
+            <a:prstDash val="solid"/>
+          </a:ln>
+        </p:spPr>
+      </p:sp>
+      <p:sp>
+        <p:nvSpPr>
+          <p:cNvPr id="9" name="Shape 7"/>
+          <p:cNvSpPr/>
+          <p:nvPr/>
+        </p:nvSpPr>
+        <p:spPr>
+          <a:xfrm>
+            <a:off x="2200046" y="1536192"/>
+            <a:ext cx="45720" cy="347472"/>
+          </a:xfrm>
+          <a:prstGeom prst="rect">
+            <a:avLst/>
+          </a:prstGeom>
+          <a:solidFill>
+            <a:schemeClr val="accent1"/>
+          </a:solidFill>
+          <a:ln/>
+        </p:spPr>
+      </p:sp>
+      <p:sp>
+        <p:nvSpPr>
+          <p:cNvPr id="10" name="Text 8"/>
+          <p:cNvSpPr txBox="1"/>
+          <p:nvPr/>
+        </p:nvSpPr>
+        <p:spPr>
+          <a:xfrm>
+            <a:off x="2309774" y="1517904"/>
+            <a:ext cx="1386230" cy="384048"/>
+          </a:xfrm>
+          <a:prstGeom prst="rect">
+            <a:avLst/>
+          </a:prstGeom>
+          <a:noFill/>
+          <a:ln/>
+        </p:spPr>
+        <p:txBody>
+          <a:bodyPr wrap="square" lIns="0" tIns="0" rIns="0" bIns="0" rtlCol="0" anchor="ctr"/>
+          <a:lstStyle/>
+          <a:p>
+            <a:pPr indent="0" marL="0">
+              <a:buNone/>
+            </a:pPr>
+            <a:r>
+              <a:rPr lang="en-US" sz="1050" b="1" dirty="0">
                 <a:solidFill>
                   <a:schemeClr val="tx1"/>
                 </a:solidFill>
               </a:rPr>
-              <a:t>2. 交易資料提供方式：批次或 Kafka</a:t>
+              <a:t>dmp-core</a:t>
             </a:r>
-            <a:endParaRPr lang="en-US" sz="1400" dirty="0"/>
+            <a:endParaRPr lang="en-US" sz="1050" dirty="0"/>
           </a:p>
           <a:p>
             <a:pPr indent="0" marL="0">
-              <a:spcAft>
-                <a:spcPts val="1000"/>
-              </a:spcAft>
               <a:buNone/>
             </a:pPr>
             <a:r>
-              <a:rPr lang="en-US" sz="1400" dirty="0">
+              <a:rPr lang="en-US" sz="850" dirty="0">
+                <a:solidFill>
+                  <a:srgbClr val="7C8992"/>
+                </a:solidFill>
+              </a:rPr>
+              <a:t>API、語意層、分群、OneID、同步、推送</a:t>
+            </a:r>
+            <a:endParaRPr lang="en-US" sz="1050" dirty="0"/>
+          </a:p>
+        </p:txBody>
+      </p:sp>
+      <p:sp>
+        <p:nvSpPr>
+          <p:cNvPr id="11" name="Shape 9"/>
+          <p:cNvSpPr/>
+          <p:nvPr/>
+        </p:nvSpPr>
+        <p:spPr>
+          <a:xfrm>
+            <a:off x="3805733" y="1481328"/>
+            <a:ext cx="1532534" cy="457200"/>
+          </a:xfrm>
+          <a:prstGeom prst="roundRect">
+            <a:avLst>
+              <a:gd name="adj" fmla="val 10000"/>
+            </a:avLst>
+          </a:prstGeom>
+          <a:solidFill>
+            <a:srgbClr val="E9F0FD"/>
+          </a:solidFill>
+          <a:ln w="9525">
+            <a:solidFill>
+              <a:schemeClr val="accent1"/>
+            </a:solidFill>
+            <a:prstDash val="solid"/>
+          </a:ln>
+        </p:spPr>
+      </p:sp>
+      <p:sp>
+        <p:nvSpPr>
+          <p:cNvPr id="12" name="Shape 10"/>
+          <p:cNvSpPr/>
+          <p:nvPr/>
+        </p:nvSpPr>
+        <p:spPr>
+          <a:xfrm>
+            <a:off x="3805733" y="1536192"/>
+            <a:ext cx="45720" cy="347472"/>
+          </a:xfrm>
+          <a:prstGeom prst="rect">
+            <a:avLst/>
+          </a:prstGeom>
+          <a:solidFill>
+            <a:schemeClr val="accent1"/>
+          </a:solidFill>
+          <a:ln/>
+        </p:spPr>
+      </p:sp>
+      <p:sp>
+        <p:nvSpPr>
+          <p:cNvPr id="13" name="Text 11"/>
+          <p:cNvSpPr txBox="1"/>
+          <p:nvPr/>
+        </p:nvSpPr>
+        <p:spPr>
+          <a:xfrm>
+            <a:off x="3915461" y="1517904"/>
+            <a:ext cx="1386230" cy="384048"/>
+          </a:xfrm>
+          <a:prstGeom prst="rect">
+            <a:avLst/>
+          </a:prstGeom>
+          <a:noFill/>
+          <a:ln/>
+        </p:spPr>
+        <p:txBody>
+          <a:bodyPr wrap="square" lIns="0" tIns="0" rIns="0" bIns="0" rtlCol="0" anchor="ctr"/>
+          <a:lstStyle/>
+          <a:p>
+            <a:pPr indent="0" marL="0">
+              <a:buNone/>
+            </a:pPr>
+            <a:r>
+              <a:rPr lang="en-US" sz="1050" b="1" dirty="0">
                 <a:solidFill>
                   <a:schemeClr val="tx1"/>
                 </a:solidFill>
               </a:rPr>
-              <a:t>3. 身分：Entra ID／AD／Keycloak 與角色對照</a:t>
+              <a:t>dmp-ingest</a:t>
             </a:r>
-            <a:endParaRPr lang="en-US" sz="1400" dirty="0"/>
+            <a:endParaRPr lang="en-US" sz="1050" dirty="0"/>
           </a:p>
           <a:p>
             <a:pPr indent="0" marL="0">
-              <a:spcAft>
-                <a:spcPts val="1000"/>
-              </a:spcAft>
               <a:buNone/>
             </a:pPr>
             <a:r>
-              <a:rPr lang="en-US" sz="1400" dirty="0">
+              <a:rPr lang="en-US" sz="850" dirty="0">
+                <a:solidFill>
+                  <a:srgbClr val="7C8992"/>
+                </a:solidFill>
+              </a:rPr>
+              <a:t>Collector：直送 /v1/events</a:t>
+            </a:r>
+            <a:endParaRPr lang="en-US" sz="1050" dirty="0"/>
+          </a:p>
+        </p:txBody>
+      </p:sp>
+      <p:sp>
+        <p:nvSpPr>
+          <p:cNvPr id="14" name="Shape 12"/>
+          <p:cNvSpPr/>
+          <p:nvPr/>
+        </p:nvSpPr>
+        <p:spPr>
+          <a:xfrm>
+            <a:off x="5411419" y="1481328"/>
+            <a:ext cx="1532534" cy="457200"/>
+          </a:xfrm>
+          <a:prstGeom prst="roundRect">
+            <a:avLst>
+              <a:gd name="adj" fmla="val 10000"/>
+            </a:avLst>
+          </a:prstGeom>
+          <a:solidFill>
+            <a:srgbClr val="E9F0FD"/>
+          </a:solidFill>
+          <a:ln w="9525">
+            <a:solidFill>
+              <a:schemeClr val="accent1"/>
+            </a:solidFill>
+            <a:prstDash val="solid"/>
+          </a:ln>
+        </p:spPr>
+      </p:sp>
+      <p:sp>
+        <p:nvSpPr>
+          <p:cNvPr id="15" name="Shape 13"/>
+          <p:cNvSpPr/>
+          <p:nvPr/>
+        </p:nvSpPr>
+        <p:spPr>
+          <a:xfrm>
+            <a:off x="5411419" y="1536192"/>
+            <a:ext cx="45720" cy="347472"/>
+          </a:xfrm>
+          <a:prstGeom prst="rect">
+            <a:avLst/>
+          </a:prstGeom>
+          <a:solidFill>
+            <a:schemeClr val="accent1"/>
+          </a:solidFill>
+          <a:ln/>
+        </p:spPr>
+      </p:sp>
+      <p:sp>
+        <p:nvSpPr>
+          <p:cNvPr id="16" name="Text 14"/>
+          <p:cNvSpPr txBox="1"/>
+          <p:nvPr/>
+        </p:nvSpPr>
+        <p:spPr>
+          <a:xfrm>
+            <a:off x="5521147" y="1517904"/>
+            <a:ext cx="1386230" cy="384048"/>
+          </a:xfrm>
+          <a:prstGeom prst="rect">
+            <a:avLst/>
+          </a:prstGeom>
+          <a:noFill/>
+          <a:ln/>
+        </p:spPr>
+        <p:txBody>
+          <a:bodyPr wrap="square" lIns="0" tIns="0" rIns="0" bIns="0" rtlCol="0" anchor="ctr"/>
+          <a:lstStyle/>
+          <a:p>
+            <a:pPr indent="0" marL="0">
+              <a:buNone/>
+            </a:pPr>
+            <a:r>
+              <a:rPr lang="en-US" sz="1050" b="1" dirty="0">
                 <a:solidFill>
                   <a:schemeClr val="tx1"/>
                 </a:solidFill>
               </a:rPr>
-              <a:t>4. 舊平台歷史導出方式與並行期長度</a:t>
+              <a:t>dmp-batch</a:t>
             </a:r>
-            <a:endParaRPr lang="en-US" sz="1400" dirty="0"/>
+            <a:endParaRPr lang="en-US" sz="1050" dirty="0"/>
           </a:p>
           <a:p>
             <a:pPr indent="0" marL="0">
-              <a:spcAft>
-                <a:spcPts val="1000"/>
-              </a:spcAft>
               <a:buNone/>
             </a:pPr>
             <a:r>
-              <a:rPr lang="en-US" sz="1400" dirty="0">
+              <a:rPr lang="en-US" sz="850" dirty="0">
+                <a:solidFill>
+                  <a:srgbClr val="7C8992"/>
+                </a:solidFill>
+              </a:rPr>
+              <a:t>Airflow ＋ dbt 日批</a:t>
+            </a:r>
+            <a:endParaRPr lang="en-US" sz="1050" dirty="0"/>
+          </a:p>
+        </p:txBody>
+      </p:sp>
+      <p:sp>
+        <p:nvSpPr>
+          <p:cNvPr id="17" name="Shape 15"/>
+          <p:cNvSpPr/>
+          <p:nvPr/>
+        </p:nvSpPr>
+        <p:spPr>
+          <a:xfrm>
+            <a:off x="7017106" y="1481328"/>
+            <a:ext cx="1532534" cy="457200"/>
+          </a:xfrm>
+          <a:prstGeom prst="roundRect">
+            <a:avLst>
+              <a:gd name="adj" fmla="val 10000"/>
+            </a:avLst>
+          </a:prstGeom>
+          <a:solidFill>
+            <a:srgbClr val="E9F0FD"/>
+          </a:solidFill>
+          <a:ln w="9525">
+            <a:solidFill>
+              <a:schemeClr val="accent1"/>
+            </a:solidFill>
+            <a:prstDash val="solid"/>
+          </a:ln>
+        </p:spPr>
+      </p:sp>
+      <p:sp>
+        <p:nvSpPr>
+          <p:cNvPr id="18" name="Shape 16"/>
+          <p:cNvSpPr/>
+          <p:nvPr/>
+        </p:nvSpPr>
+        <p:spPr>
+          <a:xfrm>
+            <a:off x="7017106" y="1536192"/>
+            <a:ext cx="45720" cy="347472"/>
+          </a:xfrm>
+          <a:prstGeom prst="rect">
+            <a:avLst/>
+          </a:prstGeom>
+          <a:solidFill>
+            <a:schemeClr val="accent1"/>
+          </a:solidFill>
+          <a:ln/>
+        </p:spPr>
+      </p:sp>
+      <p:sp>
+        <p:nvSpPr>
+          <p:cNvPr id="19" name="Text 17"/>
+          <p:cNvSpPr txBox="1"/>
+          <p:nvPr/>
+        </p:nvSpPr>
+        <p:spPr>
+          <a:xfrm>
+            <a:off x="7126834" y="1517904"/>
+            <a:ext cx="1386230" cy="384048"/>
+          </a:xfrm>
+          <a:prstGeom prst="rect">
+            <a:avLst/>
+          </a:prstGeom>
+          <a:noFill/>
+          <a:ln/>
+        </p:spPr>
+        <p:txBody>
+          <a:bodyPr wrap="square" lIns="0" tIns="0" rIns="0" bIns="0" rtlCol="0" anchor="ctr"/>
+          <a:lstStyle/>
+          <a:p>
+            <a:pPr indent="0" marL="0">
+              <a:buNone/>
+            </a:pPr>
+            <a:r>
+              <a:rPr lang="en-US" sz="1050" b="1" dirty="0">
                 <a:solidFill>
                   <a:schemeClr val="tx1"/>
                 </a:solidFill>
               </a:rPr>
-              <a:t>5. 隱私門檻：K 值、匯出上限、審計保存年限</a:t>
+              <a:t>dmp-agent</a:t>
             </a:r>
-            <a:endParaRPr lang="en-US" sz="1400" dirty="0"/>
+            <a:endParaRPr lang="en-US" sz="1050" dirty="0"/>
+          </a:p>
+          <a:p>
+            <a:pPr indent="0" marL="0">
+              <a:buNone/>
+            </a:pPr>
+            <a:r>
+              <a:rPr lang="en-US" sz="850" dirty="0">
+                <a:solidFill>
+                  <a:srgbClr val="7C8992"/>
+                </a:solidFill>
+              </a:rPr>
+              <a:t>MCP 閘道（第二階段）</a:t>
+            </a:r>
+            <a:endParaRPr lang="en-US" sz="1050" dirty="0"/>
           </a:p>
         </p:txBody>
       </p:sp>
       <p:sp>
         <p:nvSpPr>
-          <p:cNvPr id="5" name="s15_col1"/>
+          <p:cNvPr id="20" name="s14b_k8s"/>
           <p:cNvSpPr/>
           <p:nvPr/>
         </p:nvSpPr>
         <p:spPr>
           <a:xfrm>
-            <a:off x="4663440" y="1280160"/>
-            <a:ext cx="4023360" cy="3246120"/>
+            <a:off x="457200" y="2103120"/>
+            <a:ext cx="8229600" cy="1572768"/>
           </a:xfrm>
           <a:prstGeom prst="roundRect">
             <a:avLst>
-              <a:gd name="adj" fmla="val 2254"/>
+              <a:gd name="adj" fmla="val 4651"/>
             </a:avLst>
           </a:prstGeom>
           <a:solidFill>
@@ -6951,14 +7635,14 @@
       </p:sp>
       <p:sp>
         <p:nvSpPr>
-          <p:cNvPr id="6" name="Text 4"/>
+          <p:cNvPr id="21" name="Text 19"/>
           <p:cNvSpPr txBox="1"/>
           <p:nvPr/>
         </p:nvSpPr>
         <p:spPr>
           <a:xfrm>
-            <a:off x="4892040" y="1463040"/>
-            <a:ext cx="3611880" cy="2926080"/>
+            <a:off x="594360" y="2157984"/>
+            <a:ext cx="7955280" cy="237744"/>
           </a:xfrm>
           <a:prstGeom prst="rect">
             <a:avLst/>
@@ -6971,88 +7655,1643 @@
           <a:lstStyle/>
           <a:p>
             <a:pPr indent="0" marL="0">
-              <a:spcAft>
-                <a:spcPts val="1000"/>
-              </a:spcAft>
               <a:buNone/>
             </a:pPr>
             <a:r>
-              <a:rPr lang="en-US" sz="1400" dirty="0">
+              <a:rPr lang="en-US" sz="1100" b="1" dirty="0">
+                <a:solidFill>
+                  <a:schemeClr val="accent2"/>
+                </a:solidFill>
+              </a:rPr>
+              <a:t>Kubernetes（RKE2 1.30+，3 個 control-plane 與 worker 共存於 3–6 台）</a:t>
+            </a:r>
+            <a:endParaRPr lang="en-US" sz="1100" dirty="0"/>
+          </a:p>
+        </p:txBody>
+      </p:sp>
+      <p:sp>
+        <p:nvSpPr>
+          <p:cNvPr id="22" name="Text 20"/>
+          <p:cNvSpPr txBox="1"/>
+          <p:nvPr/>
+        </p:nvSpPr>
+        <p:spPr>
+          <a:xfrm>
+            <a:off x="594360" y="2359152"/>
+            <a:ext cx="7955280" cy="182880"/>
+          </a:xfrm>
+          <a:prstGeom prst="rect">
+            <a:avLst/>
+          </a:prstGeom>
+          <a:noFill/>
+          <a:ln/>
+        </p:spPr>
+        <p:txBody>
+          <a:bodyPr wrap="square" lIns="0" tIns="0" rIns="0" bIns="0" rtlCol="0" anchor="t"/>
+          <a:lstStyle/>
+          <a:p>
+            <a:pPr indent="0" marL="0">
+              <a:buNone/>
+            </a:pPr>
+            <a:r>
+              <a:rPr lang="en-US" sz="900" dirty="0">
+                <a:solidFill>
+                  <a:srgbClr val="7C8992"/>
+                </a:solidFill>
+              </a:rPr>
+              <a:t>資料層：有狀態、Operator 管理、本地 NVMe</a:t>
+            </a:r>
+            <a:endParaRPr lang="en-US" sz="900" dirty="0"/>
+          </a:p>
+        </p:txBody>
+      </p:sp>
+      <p:sp>
+        <p:nvSpPr>
+          <p:cNvPr id="23" name="Shape 21"/>
+          <p:cNvSpPr/>
+          <p:nvPr/>
+        </p:nvSpPr>
+        <p:spPr>
+          <a:xfrm>
+            <a:off x="594360" y="2542032"/>
+            <a:ext cx="1532534" cy="457200"/>
+          </a:xfrm>
+          <a:prstGeom prst="roundRect">
+            <a:avLst>
+              <a:gd name="adj" fmla="val 10000"/>
+            </a:avLst>
+          </a:prstGeom>
+          <a:solidFill>
+            <a:srgbClr val="E9F0FD"/>
+          </a:solidFill>
+          <a:ln w="9525">
+            <a:solidFill>
+              <a:schemeClr val="accent3"/>
+            </a:solidFill>
+            <a:prstDash val="solid"/>
+          </a:ln>
+        </p:spPr>
+      </p:sp>
+      <p:sp>
+        <p:nvSpPr>
+          <p:cNvPr id="24" name="Shape 22"/>
+          <p:cNvSpPr/>
+          <p:nvPr/>
+        </p:nvSpPr>
+        <p:spPr>
+          <a:xfrm>
+            <a:off x="594360" y="2596896"/>
+            <a:ext cx="45720" cy="347472"/>
+          </a:xfrm>
+          <a:prstGeom prst="rect">
+            <a:avLst/>
+          </a:prstGeom>
+          <a:solidFill>
+            <a:schemeClr val="accent3"/>
+          </a:solidFill>
+          <a:ln/>
+        </p:spPr>
+      </p:sp>
+      <p:sp>
+        <p:nvSpPr>
+          <p:cNvPr id="25" name="Text 23"/>
+          <p:cNvSpPr txBox="1"/>
+          <p:nvPr/>
+        </p:nvSpPr>
+        <p:spPr>
+          <a:xfrm>
+            <a:off x="704088" y="2578608"/>
+            <a:ext cx="1386230" cy="384048"/>
+          </a:xfrm>
+          <a:prstGeom prst="rect">
+            <a:avLst/>
+          </a:prstGeom>
+          <a:noFill/>
+          <a:ln/>
+        </p:spPr>
+        <p:txBody>
+          <a:bodyPr wrap="square" lIns="0" tIns="0" rIns="0" bIns="0" rtlCol="0" anchor="ctr"/>
+          <a:lstStyle/>
+          <a:p>
+            <a:pPr indent="0" marL="0">
+              <a:buNone/>
+            </a:pPr>
+            <a:r>
+              <a:rPr lang="en-US" sz="1050" b="1" dirty="0">
                 <a:solidFill>
                   <a:schemeClr val="tx1"/>
                 </a:solidFill>
               </a:rPr>
-              <a:t>6. 推送接收端規格與增量延遲</a:t>
+              <a:t>ClickHouse 2×2 ＋ Keeper ×3</a:t>
             </a:r>
-            <a:endParaRPr lang="en-US" sz="1400" dirty="0"/>
+            <a:endParaRPr lang="en-US" sz="1050" dirty="0"/>
           </a:p>
           <a:p>
             <a:pPr indent="0" marL="0">
-              <a:spcAft>
-                <a:spcPts val="1000"/>
-              </a:spcAft>
               <a:buNone/>
             </a:pPr>
             <a:r>
-              <a:rPr lang="en-US" sz="1400" dirty="0">
+              <a:rPr lang="en-US" sz="850" dirty="0">
+                <a:solidFill>
+                  <a:srgbClr val="7C8992"/>
+                </a:solidFill>
+              </a:rPr>
+              <a:t>事件倉、MV、Bitmap</a:t>
+            </a:r>
+            <a:endParaRPr lang="en-US" sz="1050" dirty="0"/>
+          </a:p>
+        </p:txBody>
+      </p:sp>
+      <p:sp>
+        <p:nvSpPr>
+          <p:cNvPr id="26" name="Shape 24"/>
+          <p:cNvSpPr/>
+          <p:nvPr/>
+        </p:nvSpPr>
+        <p:spPr>
+          <a:xfrm>
+            <a:off x="2200046" y="2542032"/>
+            <a:ext cx="1532534" cy="457200"/>
+          </a:xfrm>
+          <a:prstGeom prst="roundRect">
+            <a:avLst>
+              <a:gd name="adj" fmla="val 10000"/>
+            </a:avLst>
+          </a:prstGeom>
+          <a:solidFill>
+            <a:srgbClr val="E9F0FD"/>
+          </a:solidFill>
+          <a:ln w="9525">
+            <a:solidFill>
+              <a:schemeClr val="accent3"/>
+            </a:solidFill>
+            <a:prstDash val="solid"/>
+          </a:ln>
+        </p:spPr>
+      </p:sp>
+      <p:sp>
+        <p:nvSpPr>
+          <p:cNvPr id="27" name="Shape 25"/>
+          <p:cNvSpPr/>
+          <p:nvPr/>
+        </p:nvSpPr>
+        <p:spPr>
+          <a:xfrm>
+            <a:off x="2200046" y="2596896"/>
+            <a:ext cx="45720" cy="347472"/>
+          </a:xfrm>
+          <a:prstGeom prst="rect">
+            <a:avLst/>
+          </a:prstGeom>
+          <a:solidFill>
+            <a:schemeClr val="accent3"/>
+          </a:solidFill>
+          <a:ln/>
+        </p:spPr>
+      </p:sp>
+      <p:sp>
+        <p:nvSpPr>
+          <p:cNvPr id="28" name="Text 26"/>
+          <p:cNvSpPr txBox="1"/>
+          <p:nvPr/>
+        </p:nvSpPr>
+        <p:spPr>
+          <a:xfrm>
+            <a:off x="2309774" y="2578608"/>
+            <a:ext cx="1386230" cy="384048"/>
+          </a:xfrm>
+          <a:prstGeom prst="rect">
+            <a:avLst/>
+          </a:prstGeom>
+          <a:noFill/>
+          <a:ln/>
+        </p:spPr>
+        <p:txBody>
+          <a:bodyPr wrap="square" lIns="0" tIns="0" rIns="0" bIns="0" rtlCol="0" anchor="ctr"/>
+          <a:lstStyle/>
+          <a:p>
+            <a:pPr indent="0" marL="0">
+              <a:buNone/>
+            </a:pPr>
+            <a:r>
+              <a:rPr lang="en-US" sz="1050" b="1" dirty="0">
                 <a:solidFill>
                   <a:schemeClr val="tx1"/>
                 </a:solidFill>
               </a:rPr>
-              <a:t>7. 自定義 SQL 開放對象與下載上限</a:t>
+              <a:t>PostgreSQL 16 ×2</a:t>
             </a:r>
-            <a:endParaRPr lang="en-US" sz="1400" dirty="0"/>
+            <a:endParaRPr lang="en-US" sz="1050" dirty="0"/>
           </a:p>
           <a:p>
             <a:pPr indent="0" marL="0">
-              <a:spcAft>
-                <a:spcPts val="1000"/>
-              </a:spcAft>
               <a:buNone/>
             </a:pPr>
             <a:r>
-              <a:rPr lang="en-US" sz="1400" dirty="0">
+              <a:rPr lang="en-US" sz="850" dirty="0">
+                <a:solidFill>
+                  <a:srgbClr val="7C8992"/>
+                </a:solidFill>
+              </a:rPr>
+              <a:t>CloudNativePG；控制面</a:t>
+            </a:r>
+            <a:endParaRPr lang="en-US" sz="1050" dirty="0"/>
+          </a:p>
+        </p:txBody>
+      </p:sp>
+      <p:sp>
+        <p:nvSpPr>
+          <p:cNvPr id="29" name="Shape 27"/>
+          <p:cNvSpPr/>
+          <p:nvPr/>
+        </p:nvSpPr>
+        <p:spPr>
+          <a:xfrm>
+            <a:off x="3805733" y="2542032"/>
+            <a:ext cx="1532534" cy="457200"/>
+          </a:xfrm>
+          <a:prstGeom prst="roundRect">
+            <a:avLst>
+              <a:gd name="adj" fmla="val 10000"/>
+            </a:avLst>
+          </a:prstGeom>
+          <a:solidFill>
+            <a:srgbClr val="E9F0FD"/>
+          </a:solidFill>
+          <a:ln w="9525">
+            <a:solidFill>
+              <a:schemeClr val="accent3"/>
+            </a:solidFill>
+            <a:prstDash val="solid"/>
+          </a:ln>
+        </p:spPr>
+      </p:sp>
+      <p:sp>
+        <p:nvSpPr>
+          <p:cNvPr id="30" name="Shape 28"/>
+          <p:cNvSpPr/>
+          <p:nvPr/>
+        </p:nvSpPr>
+        <p:spPr>
+          <a:xfrm>
+            <a:off x="3805733" y="2596896"/>
+            <a:ext cx="45720" cy="347472"/>
+          </a:xfrm>
+          <a:prstGeom prst="rect">
+            <a:avLst/>
+          </a:prstGeom>
+          <a:solidFill>
+            <a:schemeClr val="accent3"/>
+          </a:solidFill>
+          <a:ln/>
+        </p:spPr>
+      </p:sp>
+      <p:sp>
+        <p:nvSpPr>
+          <p:cNvPr id="31" name="Text 29"/>
+          <p:cNvSpPr txBox="1"/>
+          <p:nvPr/>
+        </p:nvSpPr>
+        <p:spPr>
+          <a:xfrm>
+            <a:off x="3915461" y="2578608"/>
+            <a:ext cx="1386230" cy="384048"/>
+          </a:xfrm>
+          <a:prstGeom prst="rect">
+            <a:avLst/>
+          </a:prstGeom>
+          <a:noFill/>
+          <a:ln/>
+        </p:spPr>
+        <p:txBody>
+          <a:bodyPr wrap="square" lIns="0" tIns="0" rIns="0" bIns="0" rtlCol="0" anchor="ctr"/>
+          <a:lstStyle/>
+          <a:p>
+            <a:pPr indent="0" marL="0">
+              <a:buNone/>
+            </a:pPr>
+            <a:r>
+              <a:rPr lang="en-US" sz="1050" b="1" dirty="0">
                 <a:solidFill>
                   <a:schemeClr val="tx1"/>
                 </a:solidFill>
               </a:rPr>
-              <a:t>8. AI 洞察的 LLM 供應方式與預算（二期）</a:t>
+              <a:t>Valkey 8 ×3</a:t>
             </a:r>
-            <a:endParaRPr lang="en-US" sz="1400" dirty="0"/>
+            <a:endParaRPr lang="en-US" sz="1050" dirty="0"/>
           </a:p>
           <a:p>
             <a:pPr indent="0" marL="0">
-              <a:spcAft>
-                <a:spcPts val="1000"/>
-              </a:spcAft>
               <a:buNone/>
             </a:pPr>
             <a:r>
-              <a:rPr lang="en-US" sz="1400" dirty="0">
+              <a:rPr lang="en-US" sz="850" dirty="0">
+                <a:solidFill>
+                  <a:srgbClr val="7C8992"/>
+                </a:solidFill>
+              </a:rPr>
+              <a:t>快取、佇列、即時標籤</a:t>
+            </a:r>
+            <a:endParaRPr lang="en-US" sz="1050" dirty="0"/>
+          </a:p>
+        </p:txBody>
+      </p:sp>
+      <p:sp>
+        <p:nvSpPr>
+          <p:cNvPr id="32" name="Shape 30"/>
+          <p:cNvSpPr/>
+          <p:nvPr/>
+        </p:nvSpPr>
+        <p:spPr>
+          <a:xfrm>
+            <a:off x="5411419" y="2542032"/>
+            <a:ext cx="1532534" cy="457200"/>
+          </a:xfrm>
+          <a:prstGeom prst="roundRect">
+            <a:avLst>
+              <a:gd name="adj" fmla="val 10000"/>
+            </a:avLst>
+          </a:prstGeom>
+          <a:solidFill>
+            <a:srgbClr val="E9F0FD"/>
+          </a:solidFill>
+          <a:ln w="9525">
+            <a:solidFill>
+              <a:schemeClr val="accent3"/>
+            </a:solidFill>
+            <a:prstDash val="solid"/>
+          </a:ln>
+        </p:spPr>
+      </p:sp>
+      <p:sp>
+        <p:nvSpPr>
+          <p:cNvPr id="33" name="Shape 31"/>
+          <p:cNvSpPr/>
+          <p:nvPr/>
+        </p:nvSpPr>
+        <p:spPr>
+          <a:xfrm>
+            <a:off x="5411419" y="2596896"/>
+            <a:ext cx="45720" cy="347472"/>
+          </a:xfrm>
+          <a:prstGeom prst="rect">
+            <a:avLst/>
+          </a:prstGeom>
+          <a:solidFill>
+            <a:schemeClr val="accent3"/>
+          </a:solidFill>
+          <a:ln/>
+        </p:spPr>
+      </p:sp>
+      <p:sp>
+        <p:nvSpPr>
+          <p:cNvPr id="34" name="Text 32"/>
+          <p:cNvSpPr txBox="1"/>
+          <p:nvPr/>
+        </p:nvSpPr>
+        <p:spPr>
+          <a:xfrm>
+            <a:off x="5521147" y="2578608"/>
+            <a:ext cx="1386230" cy="384048"/>
+          </a:xfrm>
+          <a:prstGeom prst="rect">
+            <a:avLst/>
+          </a:prstGeom>
+          <a:noFill/>
+          <a:ln/>
+        </p:spPr>
+        <p:txBody>
+          <a:bodyPr wrap="square" lIns="0" tIns="0" rIns="0" bIns="0" rtlCol="0" anchor="ctr"/>
+          <a:lstStyle/>
+          <a:p>
+            <a:pPr indent="0" marL="0">
+              <a:buNone/>
+            </a:pPr>
+            <a:r>
+              <a:rPr lang="en-US" sz="1050" b="1" dirty="0">
                 <a:solidFill>
                   <a:schemeClr val="tx1"/>
                 </a:solidFill>
               </a:rPr>
-              <a:t>9. 效能 SLA 在客戶規模實測</a:t>
+              <a:t>Kafka 3.8 KRaft ×3</a:t>
             </a:r>
-            <a:endParaRPr lang="en-US" sz="1400" dirty="0"/>
+            <a:endParaRPr lang="en-US" sz="1050" dirty="0"/>
           </a:p>
           <a:p>
             <a:pPr indent="0" marL="0">
-              <a:spcAft>
-                <a:spcPts val="1000"/>
-              </a:spcAft>
               <a:buNone/>
             </a:pPr>
             <a:r>
-              <a:rPr lang="en-US" sz="1400" dirty="0">
+              <a:rPr lang="en-US" sz="850" dirty="0">
+                <a:solidFill>
+                  <a:srgbClr val="7C8992"/>
+                </a:solidFill>
+              </a:rPr>
+              <a:t>Strimzi；推送、原始事件</a:t>
+            </a:r>
+            <a:endParaRPr lang="en-US" sz="1050" dirty="0"/>
+          </a:p>
+        </p:txBody>
+      </p:sp>
+      <p:sp>
+        <p:nvSpPr>
+          <p:cNvPr id="35" name="Shape 33"/>
+          <p:cNvSpPr/>
+          <p:nvPr/>
+        </p:nvSpPr>
+        <p:spPr>
+          <a:xfrm>
+            <a:off x="7017106" y="2542032"/>
+            <a:ext cx="1532534" cy="457200"/>
+          </a:xfrm>
+          <a:prstGeom prst="roundRect">
+            <a:avLst>
+              <a:gd name="adj" fmla="val 10000"/>
+            </a:avLst>
+          </a:prstGeom>
+          <a:solidFill>
+            <a:srgbClr val="E9F0FD"/>
+          </a:solidFill>
+          <a:ln w="9525">
+            <a:solidFill>
+              <a:schemeClr val="accent3"/>
+            </a:solidFill>
+            <a:prstDash val="solid"/>
+          </a:ln>
+        </p:spPr>
+      </p:sp>
+      <p:sp>
+        <p:nvSpPr>
+          <p:cNvPr id="36" name="Shape 34"/>
+          <p:cNvSpPr/>
+          <p:nvPr/>
+        </p:nvSpPr>
+        <p:spPr>
+          <a:xfrm>
+            <a:off x="7017106" y="2596896"/>
+            <a:ext cx="45720" cy="347472"/>
+          </a:xfrm>
+          <a:prstGeom prst="rect">
+            <a:avLst/>
+          </a:prstGeom>
+          <a:solidFill>
+            <a:schemeClr val="accent3"/>
+          </a:solidFill>
+          <a:ln/>
+        </p:spPr>
+      </p:sp>
+      <p:sp>
+        <p:nvSpPr>
+          <p:cNvPr id="37" name="Text 35"/>
+          <p:cNvSpPr txBox="1"/>
+          <p:nvPr/>
+        </p:nvSpPr>
+        <p:spPr>
+          <a:xfrm>
+            <a:off x="7126834" y="2578608"/>
+            <a:ext cx="1386230" cy="384048"/>
+          </a:xfrm>
+          <a:prstGeom prst="rect">
+            <a:avLst/>
+          </a:prstGeom>
+          <a:noFill/>
+          <a:ln/>
+        </p:spPr>
+        <p:txBody>
+          <a:bodyPr wrap="square" lIns="0" tIns="0" rIns="0" bIns="0" rtlCol="0" anchor="ctr"/>
+          <a:lstStyle/>
+          <a:p>
+            <a:pPr indent="0" marL="0">
+              <a:buNone/>
+            </a:pPr>
+            <a:r>
+              <a:rPr lang="en-US" sz="1050" b="1" dirty="0">
                 <a:solidFill>
                   <a:schemeClr val="tx1"/>
                 </a:solidFill>
               </a:rPr>
-              <a:t>10. GA360 BigQuery 匯出區域與費用</a:t>
+              <a:t>SeaweedFS（S3）</a:t>
             </a:r>
-            <a:endParaRPr lang="en-US" sz="1400" dirty="0"/>
+            <a:endParaRPr lang="en-US" sz="1050" dirty="0"/>
+          </a:p>
+          <a:p>
+            <a:pPr indent="0" marL="0">
+              <a:buNone/>
+            </a:pPr>
+            <a:r>
+              <a:rPr lang="en-US" sz="850" dirty="0">
+                <a:solidFill>
+                  <a:srgbClr val="7C8992"/>
+                </a:solidFill>
+              </a:rPr>
+              <a:t>冷層、備份、同步輸出</a:t>
+            </a:r>
+            <a:endParaRPr lang="en-US" sz="1050" dirty="0"/>
+          </a:p>
+        </p:txBody>
+      </p:sp>
+      <p:sp>
+        <p:nvSpPr>
+          <p:cNvPr id="38" name="Text 36"/>
+          <p:cNvSpPr txBox="1"/>
+          <p:nvPr/>
+        </p:nvSpPr>
+        <p:spPr>
+          <a:xfrm>
+            <a:off x="594360" y="3044952"/>
+            <a:ext cx="7955280" cy="182880"/>
+          </a:xfrm>
+          <a:prstGeom prst="rect">
+            <a:avLst/>
+          </a:prstGeom>
+          <a:noFill/>
+          <a:ln/>
+        </p:spPr>
+        <p:txBody>
+          <a:bodyPr wrap="square" lIns="0" tIns="0" rIns="0" bIns="0" rtlCol="0" anchor="t"/>
+          <a:lstStyle/>
+          <a:p>
+            <a:pPr indent="0" marL="0">
+              <a:buNone/>
+            </a:pPr>
+            <a:r>
+              <a:rPr lang="en-US" sz="900" dirty="0">
+                <a:solidFill>
+                  <a:srgbClr val="7C8992"/>
+                </a:solidFill>
+              </a:rPr>
+              <a:t>平台層</a:t>
+            </a:r>
+            <a:endParaRPr lang="en-US" sz="900" dirty="0"/>
+          </a:p>
+        </p:txBody>
+      </p:sp>
+      <p:sp>
+        <p:nvSpPr>
+          <p:cNvPr id="39" name="Shape 37"/>
+          <p:cNvSpPr/>
+          <p:nvPr/>
+        </p:nvSpPr>
+        <p:spPr>
+          <a:xfrm>
+            <a:off x="594360" y="3218688"/>
+            <a:ext cx="1264920" cy="384048"/>
+          </a:xfrm>
+          <a:prstGeom prst="roundRect">
+            <a:avLst>
+              <a:gd name="adj" fmla="val 11905"/>
+            </a:avLst>
+          </a:prstGeom>
+          <a:solidFill>
+            <a:srgbClr val="E9F0FD"/>
+          </a:solidFill>
+          <a:ln w="9525">
+            <a:solidFill>
+              <a:schemeClr val="accent4"/>
+            </a:solidFill>
+            <a:prstDash val="solid"/>
+          </a:ln>
+        </p:spPr>
+      </p:sp>
+      <p:sp>
+        <p:nvSpPr>
+          <p:cNvPr id="40" name="Shape 38"/>
+          <p:cNvSpPr/>
+          <p:nvPr/>
+        </p:nvSpPr>
+        <p:spPr>
+          <a:xfrm>
+            <a:off x="594360" y="3273552"/>
+            <a:ext cx="45720" cy="274320"/>
+          </a:xfrm>
+          <a:prstGeom prst="rect">
+            <a:avLst/>
+          </a:prstGeom>
+          <a:solidFill>
+            <a:schemeClr val="accent4"/>
+          </a:solidFill>
+          <a:ln/>
+        </p:spPr>
+      </p:sp>
+      <p:sp>
+        <p:nvSpPr>
+          <p:cNvPr id="41" name="Text 39"/>
+          <p:cNvSpPr txBox="1"/>
+          <p:nvPr/>
+        </p:nvSpPr>
+        <p:spPr>
+          <a:xfrm>
+            <a:off x="704088" y="3255264"/>
+            <a:ext cx="1118616" cy="310896"/>
+          </a:xfrm>
+          <a:prstGeom prst="rect">
+            <a:avLst/>
+          </a:prstGeom>
+          <a:noFill/>
+          <a:ln/>
+        </p:spPr>
+        <p:txBody>
+          <a:bodyPr wrap="square" lIns="0" tIns="0" rIns="0" bIns="0" rtlCol="0" anchor="ctr"/>
+          <a:lstStyle/>
+          <a:p>
+            <a:pPr indent="0" marL="0">
+              <a:buNone/>
+            </a:pPr>
+            <a:r>
+              <a:rPr lang="en-US" sz="1050" b="1" dirty="0">
+                <a:solidFill>
+                  <a:schemeClr val="tx1"/>
+                </a:solidFill>
+              </a:rPr>
+              <a:t>Keycloak</a:t>
+            </a:r>
+            <a:endParaRPr lang="en-US" sz="1050" dirty="0"/>
+          </a:p>
+          <a:p>
+            <a:pPr indent="0" marL="0">
+              <a:buNone/>
+            </a:pPr>
+            <a:r>
+              <a:rPr lang="en-US" sz="850" dirty="0">
+                <a:solidFill>
+                  <a:srgbClr val="7C8992"/>
+                </a:solidFill>
+              </a:rPr>
+              <a:t>SSO／OIDC</a:t>
+            </a:r>
+            <a:endParaRPr lang="en-US" sz="1050" dirty="0"/>
+          </a:p>
+        </p:txBody>
+      </p:sp>
+      <p:sp>
+        <p:nvSpPr>
+          <p:cNvPr id="42" name="Shape 40"/>
+          <p:cNvSpPr/>
+          <p:nvPr/>
+        </p:nvSpPr>
+        <p:spPr>
+          <a:xfrm>
+            <a:off x="1932432" y="3218688"/>
+            <a:ext cx="1264920" cy="384048"/>
+          </a:xfrm>
+          <a:prstGeom prst="roundRect">
+            <a:avLst>
+              <a:gd name="adj" fmla="val 11905"/>
+            </a:avLst>
+          </a:prstGeom>
+          <a:solidFill>
+            <a:srgbClr val="E9F0FD"/>
+          </a:solidFill>
+          <a:ln w="9525">
+            <a:solidFill>
+              <a:schemeClr val="accent4"/>
+            </a:solidFill>
+            <a:prstDash val="solid"/>
+          </a:ln>
+        </p:spPr>
+      </p:sp>
+      <p:sp>
+        <p:nvSpPr>
+          <p:cNvPr id="43" name="Shape 41"/>
+          <p:cNvSpPr/>
+          <p:nvPr/>
+        </p:nvSpPr>
+        <p:spPr>
+          <a:xfrm>
+            <a:off x="1932432" y="3273552"/>
+            <a:ext cx="45720" cy="274320"/>
+          </a:xfrm>
+          <a:prstGeom prst="rect">
+            <a:avLst/>
+          </a:prstGeom>
+          <a:solidFill>
+            <a:schemeClr val="accent4"/>
+          </a:solidFill>
+          <a:ln/>
+        </p:spPr>
+      </p:sp>
+      <p:sp>
+        <p:nvSpPr>
+          <p:cNvPr id="44" name="Text 42"/>
+          <p:cNvSpPr txBox="1"/>
+          <p:nvPr/>
+        </p:nvSpPr>
+        <p:spPr>
+          <a:xfrm>
+            <a:off x="2042160" y="3255264"/>
+            <a:ext cx="1118616" cy="310896"/>
+          </a:xfrm>
+          <a:prstGeom prst="rect">
+            <a:avLst/>
+          </a:prstGeom>
+          <a:noFill/>
+          <a:ln/>
+        </p:spPr>
+        <p:txBody>
+          <a:bodyPr wrap="square" lIns="0" tIns="0" rIns="0" bIns="0" rtlCol="0" anchor="ctr"/>
+          <a:lstStyle/>
+          <a:p>
+            <a:pPr indent="0" marL="0">
+              <a:buNone/>
+            </a:pPr>
+            <a:r>
+              <a:rPr lang="en-US" sz="1050" b="1" dirty="0">
+                <a:solidFill>
+                  <a:schemeClr val="tx1"/>
+                </a:solidFill>
+              </a:rPr>
+              <a:t>OpenBao ＋ HSM</a:t>
+            </a:r>
+            <a:endParaRPr lang="en-US" sz="1050" dirty="0"/>
+          </a:p>
+          <a:p>
+            <a:pPr indent="0" marL="0">
+              <a:buNone/>
+            </a:pPr>
+            <a:r>
+              <a:rPr lang="en-US" sz="850" dirty="0">
+                <a:solidFill>
+                  <a:srgbClr val="7C8992"/>
+                </a:solidFill>
+              </a:rPr>
+              <a:t>密鑰只存參照</a:t>
+            </a:r>
+            <a:endParaRPr lang="en-US" sz="1050" dirty="0"/>
+          </a:p>
+        </p:txBody>
+      </p:sp>
+      <p:sp>
+        <p:nvSpPr>
+          <p:cNvPr id="45" name="Shape 43"/>
+          <p:cNvSpPr/>
+          <p:nvPr/>
+        </p:nvSpPr>
+        <p:spPr>
+          <a:xfrm>
+            <a:off x="3270504" y="3218688"/>
+            <a:ext cx="1264920" cy="384048"/>
+          </a:xfrm>
+          <a:prstGeom prst="roundRect">
+            <a:avLst>
+              <a:gd name="adj" fmla="val 11905"/>
+            </a:avLst>
+          </a:prstGeom>
+          <a:solidFill>
+            <a:srgbClr val="E9F0FD"/>
+          </a:solidFill>
+          <a:ln w="9525">
+            <a:solidFill>
+              <a:schemeClr val="accent4"/>
+            </a:solidFill>
+            <a:prstDash val="solid"/>
+          </a:ln>
+        </p:spPr>
+      </p:sp>
+      <p:sp>
+        <p:nvSpPr>
+          <p:cNvPr id="46" name="Shape 44"/>
+          <p:cNvSpPr/>
+          <p:nvPr/>
+        </p:nvSpPr>
+        <p:spPr>
+          <a:xfrm>
+            <a:off x="3270504" y="3273552"/>
+            <a:ext cx="45720" cy="274320"/>
+          </a:xfrm>
+          <a:prstGeom prst="rect">
+            <a:avLst/>
+          </a:prstGeom>
+          <a:solidFill>
+            <a:schemeClr val="accent4"/>
+          </a:solidFill>
+          <a:ln/>
+        </p:spPr>
+      </p:sp>
+      <p:sp>
+        <p:nvSpPr>
+          <p:cNvPr id="47" name="Text 45"/>
+          <p:cNvSpPr txBox="1"/>
+          <p:nvPr/>
+        </p:nvSpPr>
+        <p:spPr>
+          <a:xfrm>
+            <a:off x="3380232" y="3255264"/>
+            <a:ext cx="1118616" cy="310896"/>
+          </a:xfrm>
+          <a:prstGeom prst="rect">
+            <a:avLst/>
+          </a:prstGeom>
+          <a:noFill/>
+          <a:ln/>
+        </p:spPr>
+        <p:txBody>
+          <a:bodyPr wrap="square" lIns="0" tIns="0" rIns="0" bIns="0" rtlCol="0" anchor="ctr"/>
+          <a:lstStyle/>
+          <a:p>
+            <a:pPr indent="0" marL="0">
+              <a:buNone/>
+            </a:pPr>
+            <a:r>
+              <a:rPr lang="en-US" sz="1050" b="1" dirty="0">
+                <a:solidFill>
+                  <a:schemeClr val="tx1"/>
+                </a:solidFill>
+              </a:rPr>
+              <a:t>Prometheus ＋ Grafana</a:t>
+            </a:r>
+            <a:endParaRPr lang="en-US" sz="1050" dirty="0"/>
+          </a:p>
+          <a:p>
+            <a:pPr indent="0" marL="0">
+              <a:buNone/>
+            </a:pPr>
+            <a:r>
+              <a:rPr lang="en-US" sz="850" dirty="0">
+                <a:solidFill>
+                  <a:srgbClr val="7C8992"/>
+                </a:solidFill>
+              </a:rPr>
+              <a:t>指標、告警</a:t>
+            </a:r>
+            <a:endParaRPr lang="en-US" sz="1050" dirty="0"/>
+          </a:p>
+        </p:txBody>
+      </p:sp>
+      <p:sp>
+        <p:nvSpPr>
+          <p:cNvPr id="48" name="Shape 46"/>
+          <p:cNvSpPr/>
+          <p:nvPr/>
+        </p:nvSpPr>
+        <p:spPr>
+          <a:xfrm>
+            <a:off x="4608576" y="3218688"/>
+            <a:ext cx="1264920" cy="384048"/>
+          </a:xfrm>
+          <a:prstGeom prst="roundRect">
+            <a:avLst>
+              <a:gd name="adj" fmla="val 11905"/>
+            </a:avLst>
+          </a:prstGeom>
+          <a:solidFill>
+            <a:srgbClr val="E9F0FD"/>
+          </a:solidFill>
+          <a:ln w="9525">
+            <a:solidFill>
+              <a:schemeClr val="accent4"/>
+            </a:solidFill>
+            <a:prstDash val="solid"/>
+          </a:ln>
+        </p:spPr>
+      </p:sp>
+      <p:sp>
+        <p:nvSpPr>
+          <p:cNvPr id="49" name="Shape 47"/>
+          <p:cNvSpPr/>
+          <p:nvPr/>
+        </p:nvSpPr>
+        <p:spPr>
+          <a:xfrm>
+            <a:off x="4608576" y="3273552"/>
+            <a:ext cx="45720" cy="274320"/>
+          </a:xfrm>
+          <a:prstGeom prst="rect">
+            <a:avLst/>
+          </a:prstGeom>
+          <a:solidFill>
+            <a:schemeClr val="accent4"/>
+          </a:solidFill>
+          <a:ln/>
+        </p:spPr>
+      </p:sp>
+      <p:sp>
+        <p:nvSpPr>
+          <p:cNvPr id="50" name="Text 48"/>
+          <p:cNvSpPr txBox="1"/>
+          <p:nvPr/>
+        </p:nvSpPr>
+        <p:spPr>
+          <a:xfrm>
+            <a:off x="4718304" y="3255264"/>
+            <a:ext cx="1118616" cy="310896"/>
+          </a:xfrm>
+          <a:prstGeom prst="rect">
+            <a:avLst/>
+          </a:prstGeom>
+          <a:noFill/>
+          <a:ln/>
+        </p:spPr>
+        <p:txBody>
+          <a:bodyPr wrap="square" lIns="0" tIns="0" rIns="0" bIns="0" rtlCol="0" anchor="ctr"/>
+          <a:lstStyle/>
+          <a:p>
+            <a:pPr indent="0" marL="0">
+              <a:buNone/>
+            </a:pPr>
+            <a:r>
+              <a:rPr lang="en-US" sz="1050" b="1" dirty="0">
+                <a:solidFill>
+                  <a:schemeClr val="tx1"/>
+                </a:solidFill>
+              </a:rPr>
+              <a:t>VictoriaLogs</a:t>
+            </a:r>
+            <a:endParaRPr lang="en-US" sz="1050" dirty="0"/>
+          </a:p>
+          <a:p>
+            <a:pPr indent="0" marL="0">
+              <a:buNone/>
+            </a:pPr>
+            <a:r>
+              <a:rPr lang="en-US" sz="850" dirty="0">
+                <a:solidFill>
+                  <a:srgbClr val="7C8992"/>
+                </a:solidFill>
+              </a:rPr>
+              <a:t>日誌</a:t>
+            </a:r>
+            <a:endParaRPr lang="en-US" sz="1050" dirty="0"/>
+          </a:p>
+        </p:txBody>
+      </p:sp>
+      <p:sp>
+        <p:nvSpPr>
+          <p:cNvPr id="51" name="Shape 49"/>
+          <p:cNvSpPr/>
+          <p:nvPr/>
+        </p:nvSpPr>
+        <p:spPr>
+          <a:xfrm>
+            <a:off x="5946648" y="3218688"/>
+            <a:ext cx="1264920" cy="384048"/>
+          </a:xfrm>
+          <a:prstGeom prst="roundRect">
+            <a:avLst>
+              <a:gd name="adj" fmla="val 11905"/>
+            </a:avLst>
+          </a:prstGeom>
+          <a:solidFill>
+            <a:srgbClr val="E9F0FD"/>
+          </a:solidFill>
+          <a:ln w="9525">
+            <a:solidFill>
+              <a:schemeClr val="accent4"/>
+            </a:solidFill>
+            <a:prstDash val="solid"/>
+          </a:ln>
+        </p:spPr>
+      </p:sp>
+      <p:sp>
+        <p:nvSpPr>
+          <p:cNvPr id="52" name="Shape 50"/>
+          <p:cNvSpPr/>
+          <p:nvPr/>
+        </p:nvSpPr>
+        <p:spPr>
+          <a:xfrm>
+            <a:off x="5946648" y="3273552"/>
+            <a:ext cx="45720" cy="274320"/>
+          </a:xfrm>
+          <a:prstGeom prst="rect">
+            <a:avLst/>
+          </a:prstGeom>
+          <a:solidFill>
+            <a:schemeClr val="accent4"/>
+          </a:solidFill>
+          <a:ln/>
+        </p:spPr>
+      </p:sp>
+      <p:sp>
+        <p:nvSpPr>
+          <p:cNvPr id="53" name="Text 51"/>
+          <p:cNvSpPr txBox="1"/>
+          <p:nvPr/>
+        </p:nvSpPr>
+        <p:spPr>
+          <a:xfrm>
+            <a:off x="6056376" y="3255264"/>
+            <a:ext cx="1118616" cy="310896"/>
+          </a:xfrm>
+          <a:prstGeom prst="rect">
+            <a:avLst/>
+          </a:prstGeom>
+          <a:noFill/>
+          <a:ln/>
+        </p:spPr>
+        <p:txBody>
+          <a:bodyPr wrap="square" lIns="0" tIns="0" rIns="0" bIns="0" rtlCol="0" anchor="ctr"/>
+          <a:lstStyle/>
+          <a:p>
+            <a:pPr indent="0" marL="0">
+              <a:buNone/>
+            </a:pPr>
+            <a:r>
+              <a:rPr lang="en-US" sz="1050" b="1" dirty="0">
+                <a:solidFill>
+                  <a:schemeClr val="tx1"/>
+                </a:solidFill>
+              </a:rPr>
+              <a:t>Harbor</a:t>
+            </a:r>
+            <a:endParaRPr lang="en-US" sz="1050" dirty="0"/>
+          </a:p>
+          <a:p>
+            <a:pPr indent="0" marL="0">
+              <a:buNone/>
+            </a:pPr>
+            <a:r>
+              <a:rPr lang="en-US" sz="850" dirty="0">
+                <a:solidFill>
+                  <a:srgbClr val="7C8992"/>
+                </a:solidFill>
+              </a:rPr>
+              <a:t>映像倉 ＋ Trivy</a:t>
+            </a:r>
+            <a:endParaRPr lang="en-US" sz="1050" dirty="0"/>
+          </a:p>
+        </p:txBody>
+      </p:sp>
+      <p:sp>
+        <p:nvSpPr>
+          <p:cNvPr id="54" name="Shape 52"/>
+          <p:cNvSpPr/>
+          <p:nvPr/>
+        </p:nvSpPr>
+        <p:spPr>
+          <a:xfrm>
+            <a:off x="7284720" y="3218688"/>
+            <a:ext cx="1264920" cy="384048"/>
+          </a:xfrm>
+          <a:prstGeom prst="roundRect">
+            <a:avLst>
+              <a:gd name="adj" fmla="val 11905"/>
+            </a:avLst>
+          </a:prstGeom>
+          <a:solidFill>
+            <a:srgbClr val="E9F0FD"/>
+          </a:solidFill>
+          <a:ln w="9525">
+            <a:solidFill>
+              <a:schemeClr val="accent4"/>
+            </a:solidFill>
+            <a:prstDash val="solid"/>
+          </a:ln>
+        </p:spPr>
+      </p:sp>
+      <p:sp>
+        <p:nvSpPr>
+          <p:cNvPr id="55" name="Shape 53"/>
+          <p:cNvSpPr/>
+          <p:nvPr/>
+        </p:nvSpPr>
+        <p:spPr>
+          <a:xfrm>
+            <a:off x="7284720" y="3273552"/>
+            <a:ext cx="45720" cy="274320"/>
+          </a:xfrm>
+          <a:prstGeom prst="rect">
+            <a:avLst/>
+          </a:prstGeom>
+          <a:solidFill>
+            <a:schemeClr val="accent4"/>
+          </a:solidFill>
+          <a:ln/>
+        </p:spPr>
+      </p:sp>
+      <p:sp>
+        <p:nvSpPr>
+          <p:cNvPr id="56" name="Text 54"/>
+          <p:cNvSpPr txBox="1"/>
+          <p:nvPr/>
+        </p:nvSpPr>
+        <p:spPr>
+          <a:xfrm>
+            <a:off x="7394448" y="3255264"/>
+            <a:ext cx="1118616" cy="310896"/>
+          </a:xfrm>
+          <a:prstGeom prst="rect">
+            <a:avLst/>
+          </a:prstGeom>
+          <a:noFill/>
+          <a:ln/>
+        </p:spPr>
+        <p:txBody>
+          <a:bodyPr wrap="square" lIns="0" tIns="0" rIns="0" bIns="0" rtlCol="0" anchor="ctr"/>
+          <a:lstStyle/>
+          <a:p>
+            <a:pPr indent="0" marL="0">
+              <a:buNone/>
+            </a:pPr>
+            <a:r>
+              <a:rPr lang="en-US" sz="1050" b="1" dirty="0">
+                <a:solidFill>
+                  <a:schemeClr val="tx1"/>
+                </a:solidFill>
+              </a:rPr>
+              <a:t>Ingress ＋ MetalLB</a:t>
+            </a:r>
+            <a:endParaRPr lang="en-US" sz="1050" dirty="0"/>
+          </a:p>
+          <a:p>
+            <a:pPr indent="0" marL="0">
+              <a:buNone/>
+            </a:pPr>
+            <a:r>
+              <a:rPr lang="en-US" sz="850" dirty="0">
+                <a:solidFill>
+                  <a:srgbClr val="7C8992"/>
+                </a:solidFill>
+              </a:rPr>
+              <a:t>入口與 VIP</a:t>
+            </a:r>
+            <a:endParaRPr lang="en-US" sz="1050" dirty="0"/>
+          </a:p>
+        </p:txBody>
+      </p:sp>
+      <p:sp>
+        <p:nvSpPr>
+          <p:cNvPr id="57" name="s14b_node"/>
+          <p:cNvSpPr/>
+          <p:nvPr/>
+        </p:nvSpPr>
+        <p:spPr>
+          <a:xfrm>
+            <a:off x="457200" y="3767328"/>
+            <a:ext cx="8229600" cy="585216"/>
+          </a:xfrm>
+          <a:prstGeom prst="roundRect">
+            <a:avLst>
+              <a:gd name="adj" fmla="val 12500"/>
+            </a:avLst>
+          </a:prstGeom>
+          <a:solidFill>
+            <a:schemeClr val="bg1"/>
+          </a:solidFill>
+          <a:ln w="9525">
+            <a:solidFill>
+              <a:srgbClr val="E2E8EC"/>
+            </a:solidFill>
+            <a:prstDash val="solid"/>
+          </a:ln>
+        </p:spPr>
+      </p:sp>
+      <p:sp>
+        <p:nvSpPr>
+          <p:cNvPr id="58" name="Text 56"/>
+          <p:cNvSpPr txBox="1"/>
+          <p:nvPr/>
+        </p:nvSpPr>
+        <p:spPr>
+          <a:xfrm>
+            <a:off x="594360" y="3822192"/>
+            <a:ext cx="7955280" cy="237744"/>
+          </a:xfrm>
+          <a:prstGeom prst="rect">
+            <a:avLst/>
+          </a:prstGeom>
+          <a:noFill/>
+          <a:ln/>
+        </p:spPr>
+        <p:txBody>
+          <a:bodyPr wrap="square" lIns="0" tIns="0" rIns="0" bIns="0" rtlCol="0" anchor="t"/>
+          <a:lstStyle/>
+          <a:p>
+            <a:pPr indent="0" marL="0">
+              <a:buNone/>
+            </a:pPr>
+            <a:r>
+              <a:rPr lang="en-US" sz="1100" b="1" dirty="0">
+                <a:solidFill>
+                  <a:srgbClr val="7C8992"/>
+                </a:solidFill>
+              </a:rPr>
+              <a:t>每個節點（DaemonSet）</a:t>
+            </a:r>
+            <a:endParaRPr lang="en-US" sz="1100" dirty="0"/>
+          </a:p>
+        </p:txBody>
+      </p:sp>
+      <p:sp>
+        <p:nvSpPr>
+          <p:cNvPr id="59" name="Shape 57"/>
+          <p:cNvSpPr/>
+          <p:nvPr/>
+        </p:nvSpPr>
+        <p:spPr>
+          <a:xfrm>
+            <a:off x="594360" y="4023360"/>
+            <a:ext cx="1933956" cy="274320"/>
+          </a:xfrm>
+          <a:prstGeom prst="roundRect">
+            <a:avLst>
+              <a:gd name="adj" fmla="val 16667"/>
+            </a:avLst>
+          </a:prstGeom>
+          <a:solidFill>
+            <a:srgbClr val="E9F0FD"/>
+          </a:solidFill>
+          <a:ln w="9525">
+            <a:solidFill>
+              <a:srgbClr val="7C8992"/>
+            </a:solidFill>
+            <a:prstDash val="solid"/>
+          </a:ln>
+        </p:spPr>
+      </p:sp>
+      <p:sp>
+        <p:nvSpPr>
+          <p:cNvPr id="60" name="Shape 58"/>
+          <p:cNvSpPr/>
+          <p:nvPr/>
+        </p:nvSpPr>
+        <p:spPr>
+          <a:xfrm>
+            <a:off x="594360" y="4078224"/>
+            <a:ext cx="45720" cy="164592"/>
+          </a:xfrm>
+          <a:prstGeom prst="rect">
+            <a:avLst/>
+          </a:prstGeom>
+          <a:solidFill>
+            <a:srgbClr val="7C8992"/>
+          </a:solidFill>
+          <a:ln/>
+        </p:spPr>
+      </p:sp>
+      <p:sp>
+        <p:nvSpPr>
+          <p:cNvPr id="61" name="Text 59"/>
+          <p:cNvSpPr txBox="1"/>
+          <p:nvPr/>
+        </p:nvSpPr>
+        <p:spPr>
+          <a:xfrm>
+            <a:off x="704088" y="4059936"/>
+            <a:ext cx="1787652" cy="201168"/>
+          </a:xfrm>
+          <a:prstGeom prst="rect">
+            <a:avLst/>
+          </a:prstGeom>
+          <a:noFill/>
+          <a:ln/>
+        </p:spPr>
+        <p:txBody>
+          <a:bodyPr wrap="square" lIns="0" tIns="0" rIns="0" bIns="0" rtlCol="0" anchor="ctr"/>
+          <a:lstStyle/>
+          <a:p>
+            <a:pPr indent="0" marL="0">
+              <a:buNone/>
+            </a:pPr>
+            <a:r>
+              <a:rPr lang="en-US" sz="1050" b="1" dirty="0">
+                <a:solidFill>
+                  <a:schemeClr val="tx1"/>
+                </a:solidFill>
+              </a:rPr>
+              <a:t>node-exporter</a:t>
+            </a:r>
+            <a:endParaRPr lang="en-US" sz="1050" dirty="0"/>
+          </a:p>
+          <a:p>
+            <a:pPr indent="0" marL="0">
+              <a:buNone/>
+            </a:pPr>
+            <a:r>
+              <a:rPr lang="en-US" sz="850" dirty="0">
+                <a:solidFill>
+                  <a:srgbClr val="7C8992"/>
+                </a:solidFill>
+              </a:rPr>
+              <a:t>主機指標</a:t>
+            </a:r>
+            <a:endParaRPr lang="en-US" sz="1050" dirty="0"/>
+          </a:p>
+        </p:txBody>
+      </p:sp>
+      <p:sp>
+        <p:nvSpPr>
+          <p:cNvPr id="62" name="Shape 60"/>
+          <p:cNvSpPr/>
+          <p:nvPr/>
+        </p:nvSpPr>
+        <p:spPr>
+          <a:xfrm>
+            <a:off x="2601468" y="4023360"/>
+            <a:ext cx="1933956" cy="274320"/>
+          </a:xfrm>
+          <a:prstGeom prst="roundRect">
+            <a:avLst>
+              <a:gd name="adj" fmla="val 16667"/>
+            </a:avLst>
+          </a:prstGeom>
+          <a:solidFill>
+            <a:srgbClr val="E9F0FD"/>
+          </a:solidFill>
+          <a:ln w="9525">
+            <a:solidFill>
+              <a:srgbClr val="7C8992"/>
+            </a:solidFill>
+            <a:prstDash val="solid"/>
+          </a:ln>
+        </p:spPr>
+      </p:sp>
+      <p:sp>
+        <p:nvSpPr>
+          <p:cNvPr id="63" name="Shape 61"/>
+          <p:cNvSpPr/>
+          <p:nvPr/>
+        </p:nvSpPr>
+        <p:spPr>
+          <a:xfrm>
+            <a:off x="2601468" y="4078224"/>
+            <a:ext cx="45720" cy="164592"/>
+          </a:xfrm>
+          <a:prstGeom prst="rect">
+            <a:avLst/>
+          </a:prstGeom>
+          <a:solidFill>
+            <a:srgbClr val="7C8992"/>
+          </a:solidFill>
+          <a:ln/>
+        </p:spPr>
+      </p:sp>
+      <p:sp>
+        <p:nvSpPr>
+          <p:cNvPr id="64" name="Text 62"/>
+          <p:cNvSpPr txBox="1"/>
+          <p:nvPr/>
+        </p:nvSpPr>
+        <p:spPr>
+          <a:xfrm>
+            <a:off x="2711196" y="4059936"/>
+            <a:ext cx="1787652" cy="201168"/>
+          </a:xfrm>
+          <a:prstGeom prst="rect">
+            <a:avLst/>
+          </a:prstGeom>
+          <a:noFill/>
+          <a:ln/>
+        </p:spPr>
+        <p:txBody>
+          <a:bodyPr wrap="square" lIns="0" tIns="0" rIns="0" bIns="0" rtlCol="0" anchor="ctr"/>
+          <a:lstStyle/>
+          <a:p>
+            <a:pPr indent="0" marL="0">
+              <a:buNone/>
+            </a:pPr>
+            <a:r>
+              <a:rPr lang="en-US" sz="1050" b="1" dirty="0">
+                <a:solidFill>
+                  <a:schemeClr val="tx1"/>
+                </a:solidFill>
+              </a:rPr>
+              <a:t>OTel Collector</a:t>
+            </a:r>
+            <a:endParaRPr lang="en-US" sz="1050" dirty="0"/>
+          </a:p>
+          <a:p>
+            <a:pPr indent="0" marL="0">
+              <a:buNone/>
+            </a:pPr>
+            <a:r>
+              <a:rPr lang="en-US" sz="850" dirty="0">
+                <a:solidFill>
+                  <a:srgbClr val="7C8992"/>
+                </a:solidFill>
+              </a:rPr>
+              <a:t>日誌與追蹤</a:t>
+            </a:r>
+            <a:endParaRPr lang="en-US" sz="1050" dirty="0"/>
+          </a:p>
+        </p:txBody>
+      </p:sp>
+      <p:sp>
+        <p:nvSpPr>
+          <p:cNvPr id="65" name="Shape 63"/>
+          <p:cNvSpPr/>
+          <p:nvPr/>
+        </p:nvSpPr>
+        <p:spPr>
+          <a:xfrm>
+            <a:off x="4608576" y="4023360"/>
+            <a:ext cx="1933956" cy="274320"/>
+          </a:xfrm>
+          <a:prstGeom prst="roundRect">
+            <a:avLst>
+              <a:gd name="adj" fmla="val 16667"/>
+            </a:avLst>
+          </a:prstGeom>
+          <a:solidFill>
+            <a:srgbClr val="E9F0FD"/>
+          </a:solidFill>
+          <a:ln w="9525">
+            <a:solidFill>
+              <a:srgbClr val="7C8992"/>
+            </a:solidFill>
+            <a:prstDash val="solid"/>
+          </a:ln>
+        </p:spPr>
+      </p:sp>
+      <p:sp>
+        <p:nvSpPr>
+          <p:cNvPr id="66" name="Shape 64"/>
+          <p:cNvSpPr/>
+          <p:nvPr/>
+        </p:nvSpPr>
+        <p:spPr>
+          <a:xfrm>
+            <a:off x="4608576" y="4078224"/>
+            <a:ext cx="45720" cy="164592"/>
+          </a:xfrm>
+          <a:prstGeom prst="rect">
+            <a:avLst/>
+          </a:prstGeom>
+          <a:solidFill>
+            <a:srgbClr val="7C8992"/>
+          </a:solidFill>
+          <a:ln/>
+        </p:spPr>
+      </p:sp>
+      <p:sp>
+        <p:nvSpPr>
+          <p:cNvPr id="67" name="Text 65"/>
+          <p:cNvSpPr txBox="1"/>
+          <p:nvPr/>
+        </p:nvSpPr>
+        <p:spPr>
+          <a:xfrm>
+            <a:off x="4718304" y="4059936"/>
+            <a:ext cx="1787652" cy="201168"/>
+          </a:xfrm>
+          <a:prstGeom prst="rect">
+            <a:avLst/>
+          </a:prstGeom>
+          <a:noFill/>
+          <a:ln/>
+        </p:spPr>
+        <p:txBody>
+          <a:bodyPr wrap="square" lIns="0" tIns="0" rIns="0" bIns="0" rtlCol="0" anchor="ctr"/>
+          <a:lstStyle/>
+          <a:p>
+            <a:pPr indent="0" marL="0">
+              <a:buNone/>
+            </a:pPr>
+            <a:r>
+              <a:rPr lang="en-US" sz="1050" b="1" dirty="0">
+                <a:solidFill>
+                  <a:schemeClr val="tx1"/>
+                </a:solidFill>
+              </a:rPr>
+              <a:t>LocalPV（OpenEBS）</a:t>
+            </a:r>
+            <a:endParaRPr lang="en-US" sz="1050" dirty="0"/>
+          </a:p>
+          <a:p>
+            <a:pPr indent="0" marL="0">
+              <a:buNone/>
+            </a:pPr>
+            <a:r>
+              <a:rPr lang="en-US" sz="850" dirty="0">
+                <a:solidFill>
+                  <a:srgbClr val="7C8992"/>
+                </a:solidFill>
+              </a:rPr>
+              <a:t>NVMe 給 ClickHouse／Kafka</a:t>
+            </a:r>
+            <a:endParaRPr lang="en-US" sz="1050" dirty="0"/>
+          </a:p>
+        </p:txBody>
+      </p:sp>
+      <p:sp>
+        <p:nvSpPr>
+          <p:cNvPr id="68" name="Shape 66"/>
+          <p:cNvSpPr/>
+          <p:nvPr/>
+        </p:nvSpPr>
+        <p:spPr>
+          <a:xfrm>
+            <a:off x="6615684" y="4023360"/>
+            <a:ext cx="1933956" cy="274320"/>
+          </a:xfrm>
+          <a:prstGeom prst="roundRect">
+            <a:avLst>
+              <a:gd name="adj" fmla="val 16667"/>
+            </a:avLst>
+          </a:prstGeom>
+          <a:solidFill>
+            <a:srgbClr val="E9F0FD"/>
+          </a:solidFill>
+          <a:ln w="9525">
+            <a:solidFill>
+              <a:srgbClr val="7C8992"/>
+            </a:solidFill>
+            <a:prstDash val="solid"/>
+          </a:ln>
+        </p:spPr>
+      </p:sp>
+      <p:sp>
+        <p:nvSpPr>
+          <p:cNvPr id="69" name="Shape 67"/>
+          <p:cNvSpPr/>
+          <p:nvPr/>
+        </p:nvSpPr>
+        <p:spPr>
+          <a:xfrm>
+            <a:off x="6615684" y="4078224"/>
+            <a:ext cx="45720" cy="164592"/>
+          </a:xfrm>
+          <a:prstGeom prst="rect">
+            <a:avLst/>
+          </a:prstGeom>
+          <a:solidFill>
+            <a:srgbClr val="7C8992"/>
+          </a:solidFill>
+          <a:ln/>
+        </p:spPr>
+      </p:sp>
+      <p:sp>
+        <p:nvSpPr>
+          <p:cNvPr id="70" name="Text 68"/>
+          <p:cNvSpPr txBox="1"/>
+          <p:nvPr/>
+        </p:nvSpPr>
+        <p:spPr>
+          <a:xfrm>
+            <a:off x="6725412" y="4059936"/>
+            <a:ext cx="1787652" cy="201168"/>
+          </a:xfrm>
+          <a:prstGeom prst="rect">
+            <a:avLst/>
+          </a:prstGeom>
+          <a:noFill/>
+          <a:ln/>
+        </p:spPr>
+        <p:txBody>
+          <a:bodyPr wrap="square" lIns="0" tIns="0" rIns="0" bIns="0" rtlCol="0" anchor="ctr"/>
+          <a:lstStyle/>
+          <a:p>
+            <a:pPr indent="0" marL="0">
+              <a:buNone/>
+            </a:pPr>
+            <a:r>
+              <a:rPr lang="en-US" sz="1050" b="1" dirty="0">
+                <a:solidFill>
+                  <a:schemeClr val="tx1"/>
+                </a:solidFill>
+              </a:rPr>
+              <a:t>RHEL 9／Rocky 9</a:t>
+            </a:r>
+            <a:endParaRPr lang="en-US" sz="1050" dirty="0"/>
+          </a:p>
+          <a:p>
+            <a:pPr indent="0" marL="0">
+              <a:buNone/>
+            </a:pPr>
+            <a:r>
+              <a:rPr lang="en-US" sz="850" dirty="0">
+                <a:solidFill>
+                  <a:srgbClr val="7C8992"/>
+                </a:solidFill>
+              </a:rPr>
+              <a:t>SELinux；容器無 root、唯讀</a:t>
+            </a:r>
+            <a:endParaRPr lang="en-US" sz="1050" dirty="0"/>
+          </a:p>
+        </p:txBody>
+      </p:sp>
+      <p:sp>
+        <p:nvSpPr>
+          <p:cNvPr id="71" name="Text 69"/>
+          <p:cNvSpPr txBox="1"/>
+          <p:nvPr/>
+        </p:nvSpPr>
+        <p:spPr>
+          <a:xfrm>
+            <a:off x="457200" y="4407408"/>
+            <a:ext cx="8229600" cy="329184"/>
+          </a:xfrm>
+          <a:prstGeom prst="rect">
+            <a:avLst/>
+          </a:prstGeom>
+          <a:noFill/>
+          <a:ln/>
+        </p:spPr>
+        <p:txBody>
+          <a:bodyPr wrap="square" lIns="0" tIns="0" rIns="0" bIns="0" rtlCol="0" anchor="t"/>
+          <a:lstStyle/>
+          <a:p>
+            <a:pPr indent="0" marL="0">
+              <a:buNone/>
+            </a:pPr>
+            <a:r>
+              <a:rPr lang="en-US" sz="900" dirty="0">
+                <a:solidFill>
+                  <a:schemeClr val="tx1"/>
+                </a:solidFill>
+              </a:rPr>
+              <a:t>備份：ClickHouse BACKUP TO S3、PostgreSQL WAL；HA：ClickHouse 雙副本、PostgreSQL 主從、Kafka／Keeper 三節點。對照 2025/07 舊棧約 20 個元件（Hadoop／Hive／HBase／RocketMQ／MySQL 5.7…）：有狀態服務降到 5 個，沒有 EOL 版本、沒有改寫版。</a:t>
+            </a:r>
+            <a:endParaRPr lang="en-US" sz="900" dirty="0"/>
           </a:p>
         </p:txBody>
       </p:sp>
@@ -7136,8 +9375,8 @@
         </p:nvSpPr>
         <p:spPr>
           <a:xfrm>
-            <a:off x="548640" y="1737360"/>
-            <a:ext cx="8046720" cy="914400"/>
+            <a:off x="457200" y="274320"/>
+            <a:ext cx="8229600" cy="868680"/>
           </a:xfrm>
           <a:prstGeom prst="rect">
             <a:avLst/>
@@ -7146,36 +9385,1645 @@
           <a:ln/>
         </p:spPr>
         <p:txBody>
-          <a:bodyPr wrap="square" rtlCol="0" anchor="b"/>
+          <a:bodyPr wrap="square" lIns="0" tIns="0" rIns="0" bIns="0" rtlCol="0" anchor="t"/>
           <a:lstStyle/>
           <a:p>
             <a:pPr algn="l" indent="0" marL="0">
               <a:buNone/>
             </a:pPr>
             <a:r>
-              <a:rPr lang="en-US" sz="3200" b="1" dirty="0">
+              <a:rPr lang="en-US" sz="2400" b="1" dirty="0">
                 <a:solidFill>
-                  <a:schemeClr val="bg1"/>
+                  <a:schemeClr val="tx1"/>
                 </a:solidFill>
               </a:rPr>
-              <a:t>報價初版（未稅）</a:t>
+              <a:t>開源元件（一）資料與計算：全部上游 LTS、OSI 授權、有 Operator</a:t>
             </a:r>
-            <a:endParaRPr lang="en-US" sz="3200" dirty="0"/>
+            <a:endParaRPr lang="en-US" sz="2400" dirty="0"/>
           </a:p>
         </p:txBody>
       </p:sp>
-      <p:sp>
-        <p:nvSpPr>
-          <p:cNvPr id="3" name="Text 0"/>
-          <p:cNvSpPr/>
+      <p:graphicFrame>
+        <p:nvGraphicFramePr>
+          <p:cNvPr id="17" name="Table 0"/>
+          <p:cNvGraphicFramePr>
+            <a:graphicFrameLocks noGrp="1"/>
+          </p:cNvGraphicFramePr>
           <p:nvPr>
-            <p:ph idx="101" type="body" hasCustomPrompt="1"/>
+            <p:extLst>
+              <p:ext uri="{D42A27DB-BD31-4B8C-83A1-F6EECF244321}">
+                <p14:modId xmlns:p14="http://schemas.microsoft.com/office/powerpoint/2010/main" val="1579011935"/>
+              </p:ext>
+            </p:extLst>
           </p:nvPr>
-        </p:nvSpPr>
-        <p:spPr>
-          <a:xfrm>
-            <a:off x="548640" y="2743200"/>
-            <a:ext cx="8046720" cy="822960"/>
+        </p:nvGraphicFramePr>
+        <p:xfrm>
+          <a:off x="457200" y="1280160"/>
+          <a:ext cx="8229600" cy="914400"/>
+        </p:xfrm>
+        <a:graphic>
+          <a:graphicData uri="http://schemas.openxmlformats.org/drawingml/2006/table">
+            <a:tbl>
+              <a:tblPr/>
+              <a:tblGrid>
+                <a:gridCol w="777240"/>
+                <a:gridCol w="2514600"/>
+                <a:gridCol w="914400"/>
+                <a:gridCol w="868680"/>
+                <a:gridCol w="3154680"/>
+              </a:tblGrid>
+              <a:tr h="301752">
+                <a:tc>
+                  <a:txBody>
+                    <a:bodyPr/>
+                    <a:lstStyle/>
+                    <a:p>
+                      <a:pPr algn="l" indent="0" marL="0">
+                        <a:buNone/>
+                      </a:pPr>
+                      <a:r>
+                        <a:rPr lang="en-US" sz="950" b="1" dirty="0">
+                          <a:solidFill>
+                            <a:schemeClr val="tx1"/>
+                          </a:solidFill>
+                        </a:rPr>
+                        <a:t>類別</a:t>
+                      </a:r>
+                      <a:endParaRPr lang="en-US" sz="950" dirty="0"/>
+                    </a:p>
+                  </a:txBody>
+                  <a:tcPr marL="76200" marR="76200" marT="38100" marB="38100" anchor="ctr">
+                    <a:lnL w="0" cap="flat" cmpd="sng" algn="ctr">
+                      <a:noFill/>
+                    </a:lnL>
+                    <a:lnR w="0" cap="flat" cmpd="sng" algn="ctr">
+                      <a:noFill/>
+                    </a:lnR>
+                    <a:lnT w="0" cap="flat" cmpd="sng" algn="ctr">
+                      <a:noFill/>
+                    </a:lnT>
+                    <a:lnB w="15875" cap="flat" cmpd="sng" algn="ctr">
+                      <a:solidFill>
+                        <a:srgbClr val="C9D2D8"/>
+                      </a:solidFill>
+                      <a:prstDash val="solid"/>
+                      <a:round/>
+                      <a:headEnd type="none" w="med" len="med"/>
+                      <a:tailEnd type="none" w="med" len="med"/>
+                    </a:lnB>
+                  </a:tcPr>
+                </a:tc>
+                <a:tc>
+                  <a:txBody>
+                    <a:bodyPr/>
+                    <a:lstStyle/>
+                    <a:p>
+                      <a:pPr algn="l" indent="0" marL="0">
+                        <a:buNone/>
+                      </a:pPr>
+                      <a:r>
+                        <a:rPr lang="en-US" sz="950" b="1" dirty="0">
+                          <a:solidFill>
+                            <a:schemeClr val="tx1"/>
+                          </a:solidFill>
+                        </a:rPr>
+                        <a:t>元件</a:t>
+                      </a:r>
+                      <a:endParaRPr lang="en-US" sz="950" dirty="0"/>
+                    </a:p>
+                  </a:txBody>
+                  <a:tcPr marL="76200" marR="76200" marT="38100" marB="38100" anchor="ctr">
+                    <a:lnL w="0" cap="flat" cmpd="sng" algn="ctr">
+                      <a:noFill/>
+                    </a:lnL>
+                    <a:lnR w="0" cap="flat" cmpd="sng" algn="ctr">
+                      <a:noFill/>
+                    </a:lnR>
+                    <a:lnT w="0" cap="flat" cmpd="sng" algn="ctr">
+                      <a:noFill/>
+                    </a:lnT>
+                    <a:lnB w="15875" cap="flat" cmpd="sng" algn="ctr">
+                      <a:solidFill>
+                        <a:srgbClr val="C9D2D8"/>
+                      </a:solidFill>
+                      <a:prstDash val="solid"/>
+                      <a:round/>
+                      <a:headEnd type="none" w="med" len="med"/>
+                      <a:tailEnd type="none" w="med" len="med"/>
+                    </a:lnB>
+                  </a:tcPr>
+                </a:tc>
+                <a:tc>
+                  <a:txBody>
+                    <a:bodyPr/>
+                    <a:lstStyle/>
+                    <a:p>
+                      <a:pPr algn="l" indent="0" marL="0">
+                        <a:buNone/>
+                      </a:pPr>
+                      <a:r>
+                        <a:rPr lang="en-US" sz="950" b="1" dirty="0">
+                          <a:solidFill>
+                            <a:schemeClr val="tx1"/>
+                          </a:solidFill>
+                        </a:rPr>
+                        <a:t>版本</a:t>
+                      </a:r>
+                      <a:endParaRPr lang="en-US" sz="950" dirty="0"/>
+                    </a:p>
+                  </a:txBody>
+                  <a:tcPr marL="76200" marR="76200" marT="38100" marB="38100" anchor="ctr">
+                    <a:lnL w="0" cap="flat" cmpd="sng" algn="ctr">
+                      <a:noFill/>
+                    </a:lnL>
+                    <a:lnR w="0" cap="flat" cmpd="sng" algn="ctr">
+                      <a:noFill/>
+                    </a:lnR>
+                    <a:lnT w="0" cap="flat" cmpd="sng" algn="ctr">
+                      <a:noFill/>
+                    </a:lnT>
+                    <a:lnB w="15875" cap="flat" cmpd="sng" algn="ctr">
+                      <a:solidFill>
+                        <a:srgbClr val="C9D2D8"/>
+                      </a:solidFill>
+                      <a:prstDash val="solid"/>
+                      <a:round/>
+                      <a:headEnd type="none" w="med" len="med"/>
+                      <a:tailEnd type="none" w="med" len="med"/>
+                    </a:lnB>
+                  </a:tcPr>
+                </a:tc>
+                <a:tc>
+                  <a:txBody>
+                    <a:bodyPr/>
+                    <a:lstStyle/>
+                    <a:p>
+                      <a:pPr algn="l" indent="0" marL="0">
+                        <a:buNone/>
+                      </a:pPr>
+                      <a:r>
+                        <a:rPr lang="en-US" sz="950" b="1" dirty="0">
+                          <a:solidFill>
+                            <a:schemeClr val="tx1"/>
+                          </a:solidFill>
+                        </a:rPr>
+                        <a:t>授權</a:t>
+                      </a:r>
+                      <a:endParaRPr lang="en-US" sz="950" dirty="0"/>
+                    </a:p>
+                  </a:txBody>
+                  <a:tcPr marL="76200" marR="76200" marT="38100" marB="38100" anchor="ctr">
+                    <a:lnL w="0" cap="flat" cmpd="sng" algn="ctr">
+                      <a:noFill/>
+                    </a:lnL>
+                    <a:lnR w="0" cap="flat" cmpd="sng" algn="ctr">
+                      <a:noFill/>
+                    </a:lnR>
+                    <a:lnT w="0" cap="flat" cmpd="sng" algn="ctr">
+                      <a:noFill/>
+                    </a:lnT>
+                    <a:lnB w="15875" cap="flat" cmpd="sng" algn="ctr">
+                      <a:solidFill>
+                        <a:srgbClr val="C9D2D8"/>
+                      </a:solidFill>
+                      <a:prstDash val="solid"/>
+                      <a:round/>
+                      <a:headEnd type="none" w="med" len="med"/>
+                      <a:tailEnd type="none" w="med" len="med"/>
+                    </a:lnB>
+                  </a:tcPr>
+                </a:tc>
+                <a:tc>
+                  <a:txBody>
+                    <a:bodyPr/>
+                    <a:lstStyle/>
+                    <a:p>
+                      <a:pPr algn="l" indent="0" marL="0">
+                        <a:buNone/>
+                      </a:pPr>
+                      <a:r>
+                        <a:rPr lang="en-US" sz="950" b="1" dirty="0">
+                          <a:solidFill>
+                            <a:schemeClr val="tx1"/>
+                          </a:solidFill>
+                        </a:rPr>
+                        <a:t>功能</a:t>
+                      </a:r>
+                      <a:endParaRPr lang="en-US" sz="950" dirty="0"/>
+                    </a:p>
+                  </a:txBody>
+                  <a:tcPr marL="76200" marR="76200" marT="38100" marB="38100" anchor="ctr">
+                    <a:lnL w="0" cap="flat" cmpd="sng" algn="ctr">
+                      <a:noFill/>
+                    </a:lnL>
+                    <a:lnR w="0" cap="flat" cmpd="sng" algn="ctr">
+                      <a:noFill/>
+                    </a:lnR>
+                    <a:lnT w="0" cap="flat" cmpd="sng" algn="ctr">
+                      <a:noFill/>
+                    </a:lnT>
+                    <a:lnB w="15875" cap="flat" cmpd="sng" algn="ctr">
+                      <a:solidFill>
+                        <a:srgbClr val="C9D2D8"/>
+                      </a:solidFill>
+                      <a:prstDash val="solid"/>
+                      <a:round/>
+                      <a:headEnd type="none" w="med" len="med"/>
+                      <a:tailEnd type="none" w="med" len="med"/>
+                    </a:lnB>
+                  </a:tcPr>
+                </a:tc>
+              </a:tr>
+              <a:tr h="301752">
+                <a:tc>
+                  <a:txBody>
+                    <a:bodyPr/>
+                    <a:lstStyle/>
+                    <a:p>
+                      <a:pPr algn="l" indent="0" marL="0">
+                        <a:buNone/>
+                      </a:pPr>
+                      <a:r>
+                        <a:rPr lang="en-US" sz="950" b="1" dirty="0">
+                          <a:solidFill>
+                            <a:schemeClr val="tx1"/>
+                          </a:solidFill>
+                        </a:rPr>
+                        <a:t>分析存儲</a:t>
+                      </a:r>
+                      <a:endParaRPr lang="en-US" sz="950" dirty="0"/>
+                    </a:p>
+                  </a:txBody>
+                  <a:tcPr marL="76200" marR="76200" marT="38100" marB="38100" anchor="ctr">
+                    <a:lnL w="0" cap="flat" cmpd="sng" algn="ctr">
+                      <a:noFill/>
+                    </a:lnL>
+                    <a:lnR w="0" cap="flat" cmpd="sng" algn="ctr">
+                      <a:noFill/>
+                    </a:lnR>
+                    <a:lnT w="0" cap="flat" cmpd="sng" algn="ctr">
+                      <a:noFill/>
+                    </a:lnT>
+                    <a:lnB w="0" cap="flat" cmpd="sng" algn="ctr">
+                      <a:noFill/>
+                    </a:lnB>
+                  </a:tcPr>
+                </a:tc>
+                <a:tc>
+                  <a:txBody>
+                    <a:bodyPr/>
+                    <a:lstStyle/>
+                    <a:p>
+                      <a:pPr algn="l" indent="0" marL="0">
+                        <a:buNone/>
+                      </a:pPr>
+                      <a:r>
+                        <a:rPr lang="en-US" sz="950" dirty="0">
+                          <a:solidFill>
+                            <a:schemeClr val="tx1"/>
+                          </a:solidFill>
+                        </a:rPr>
+                        <a:t>ClickHouse ＋ Keeper（Altinity operator）</a:t>
+                      </a:r>
+                      <a:endParaRPr lang="en-US" sz="950" dirty="0"/>
+                    </a:p>
+                  </a:txBody>
+                  <a:tcPr marL="76200" marR="76200" marT="38100" marB="38100" anchor="ctr">
+                    <a:lnL w="0" cap="flat" cmpd="sng" algn="ctr">
+                      <a:noFill/>
+                    </a:lnL>
+                    <a:lnR w="0" cap="flat" cmpd="sng" algn="ctr">
+                      <a:noFill/>
+                    </a:lnR>
+                    <a:lnT w="0" cap="flat" cmpd="sng" algn="ctr">
+                      <a:noFill/>
+                    </a:lnT>
+                    <a:lnB w="0" cap="flat" cmpd="sng" algn="ctr">
+                      <a:noFill/>
+                    </a:lnB>
+                  </a:tcPr>
+                </a:tc>
+                <a:tc>
+                  <a:txBody>
+                    <a:bodyPr/>
+                    <a:lstStyle/>
+                    <a:p>
+                      <a:pPr algn="l" indent="0" marL="0">
+                        <a:buNone/>
+                      </a:pPr>
+                      <a:r>
+                        <a:rPr lang="en-US" sz="950" dirty="0">
+                          <a:solidFill>
+                            <a:schemeClr val="tx1"/>
+                          </a:solidFill>
+                        </a:rPr>
+                        <a:t>25.8 LTS</a:t>
+                      </a:r>
+                      <a:endParaRPr lang="en-US" sz="950" dirty="0"/>
+                    </a:p>
+                  </a:txBody>
+                  <a:tcPr marL="76200" marR="76200" marT="38100" marB="38100" anchor="ctr">
+                    <a:lnL w="0" cap="flat" cmpd="sng" algn="ctr">
+                      <a:noFill/>
+                    </a:lnL>
+                    <a:lnR w="0" cap="flat" cmpd="sng" algn="ctr">
+                      <a:noFill/>
+                    </a:lnR>
+                    <a:lnT w="0" cap="flat" cmpd="sng" algn="ctr">
+                      <a:noFill/>
+                    </a:lnT>
+                    <a:lnB w="0" cap="flat" cmpd="sng" algn="ctr">
+                      <a:noFill/>
+                    </a:lnB>
+                  </a:tcPr>
+                </a:tc>
+                <a:tc>
+                  <a:txBody>
+                    <a:bodyPr/>
+                    <a:lstStyle/>
+                    <a:p>
+                      <a:pPr algn="l" indent="0" marL="0">
+                        <a:buNone/>
+                      </a:pPr>
+                      <a:r>
+                        <a:rPr lang="en-US" sz="950" dirty="0">
+                          <a:solidFill>
+                            <a:schemeClr val="tx1"/>
+                          </a:solidFill>
+                        </a:rPr>
+                        <a:t>Apache-2.0</a:t>
+                      </a:r>
+                      <a:endParaRPr lang="en-US" sz="950" dirty="0"/>
+                    </a:p>
+                  </a:txBody>
+                  <a:tcPr marL="76200" marR="76200" marT="38100" marB="38100" anchor="ctr">
+                    <a:lnL w="0" cap="flat" cmpd="sng" algn="ctr">
+                      <a:noFill/>
+                    </a:lnL>
+                    <a:lnR w="0" cap="flat" cmpd="sng" algn="ctr">
+                      <a:noFill/>
+                    </a:lnR>
+                    <a:lnT w="0" cap="flat" cmpd="sng" algn="ctr">
+                      <a:noFill/>
+                    </a:lnT>
+                    <a:lnB w="0" cap="flat" cmpd="sng" algn="ctr">
+                      <a:noFill/>
+                    </a:lnB>
+                  </a:tcPr>
+                </a:tc>
+                <a:tc>
+                  <a:txBody>
+                    <a:bodyPr/>
+                    <a:lstStyle/>
+                    <a:p>
+                      <a:pPr algn="l" indent="0" marL="0">
+                        <a:buNone/>
+                      </a:pPr>
+                      <a:r>
+                        <a:rPr lang="en-US" sz="950" dirty="0">
+                          <a:solidFill>
+                            <a:schemeClr val="tx1"/>
+                          </a:solidFill>
+                        </a:rPr>
+                        <a:t>事件倉、MV 聚合層、Bitmap、用戶檔案字典</a:t>
+                      </a:r>
+                      <a:endParaRPr lang="en-US" sz="950" dirty="0"/>
+                    </a:p>
+                  </a:txBody>
+                  <a:tcPr marL="76200" marR="76200" marT="38100" marB="38100" anchor="ctr">
+                    <a:lnL w="0" cap="flat" cmpd="sng" algn="ctr">
+                      <a:noFill/>
+                    </a:lnL>
+                    <a:lnR w="0" cap="flat" cmpd="sng" algn="ctr">
+                      <a:noFill/>
+                    </a:lnR>
+                    <a:lnT w="0" cap="flat" cmpd="sng" algn="ctr">
+                      <a:noFill/>
+                    </a:lnT>
+                    <a:lnB w="0" cap="flat" cmpd="sng" algn="ctr">
+                      <a:noFill/>
+                    </a:lnB>
+                  </a:tcPr>
+                </a:tc>
+              </a:tr>
+              <a:tr h="301752">
+                <a:tc>
+                  <a:txBody>
+                    <a:bodyPr/>
+                    <a:lstStyle/>
+                    <a:p>
+                      <a:pPr algn="l" indent="0" marL="0">
+                        <a:buNone/>
+                      </a:pPr>
+                      <a:r>
+                        <a:rPr lang="en-US" sz="950" b="1" dirty="0">
+                          <a:solidFill>
+                            <a:schemeClr val="tx1"/>
+                          </a:solidFill>
+                        </a:rPr>
+                        <a:t>分析存儲</a:t>
+                      </a:r>
+                      <a:endParaRPr lang="en-US" sz="950" dirty="0"/>
+                    </a:p>
+                  </a:txBody>
+                  <a:tcPr marL="76200" marR="76200" marT="38100" marB="38100" anchor="ctr">
+                    <a:lnL w="0" cap="flat" cmpd="sng" algn="ctr">
+                      <a:noFill/>
+                    </a:lnL>
+                    <a:lnR w="0" cap="flat" cmpd="sng" algn="ctr">
+                      <a:noFill/>
+                    </a:lnR>
+                    <a:lnT w="0" cap="flat" cmpd="sng" algn="ctr">
+                      <a:noFill/>
+                    </a:lnT>
+                    <a:lnB w="0" cap="flat" cmpd="sng" algn="ctr">
+                      <a:noFill/>
+                    </a:lnB>
+                  </a:tcPr>
+                </a:tc>
+                <a:tc>
+                  <a:txBody>
+                    <a:bodyPr/>
+                    <a:lstStyle/>
+                    <a:p>
+                      <a:pPr algn="l" indent="0" marL="0">
+                        <a:buNone/>
+                      </a:pPr>
+                      <a:r>
+                        <a:rPr lang="en-US" sz="950" dirty="0">
+                          <a:solidFill>
+                            <a:schemeClr val="tx1"/>
+                          </a:solidFill>
+                        </a:rPr>
+                        <a:t>SeaweedFS（機房）／GCS</a:t>
+                      </a:r>
+                      <a:endParaRPr lang="en-US" sz="950" dirty="0"/>
+                    </a:p>
+                  </a:txBody>
+                  <a:tcPr marL="76200" marR="76200" marT="38100" marB="38100" anchor="ctr">
+                    <a:lnL w="0" cap="flat" cmpd="sng" algn="ctr">
+                      <a:noFill/>
+                    </a:lnL>
+                    <a:lnR w="0" cap="flat" cmpd="sng" algn="ctr">
+                      <a:noFill/>
+                    </a:lnR>
+                    <a:lnT w="0" cap="flat" cmpd="sng" algn="ctr">
+                      <a:noFill/>
+                    </a:lnT>
+                    <a:lnB w="0" cap="flat" cmpd="sng" algn="ctr">
+                      <a:noFill/>
+                    </a:lnB>
+                  </a:tcPr>
+                </a:tc>
+                <a:tc>
+                  <a:txBody>
+                    <a:bodyPr/>
+                    <a:lstStyle/>
+                    <a:p>
+                      <a:pPr algn="l" indent="0" marL="0">
+                        <a:buNone/>
+                      </a:pPr>
+                      <a:r>
+                        <a:rPr lang="en-US" sz="950" dirty="0">
+                          <a:solidFill>
+                            <a:schemeClr val="tx1"/>
+                          </a:solidFill>
+                        </a:rPr>
+                        <a:t>3.x</a:t>
+                      </a:r>
+                      <a:endParaRPr lang="en-US" sz="950" dirty="0"/>
+                    </a:p>
+                  </a:txBody>
+                  <a:tcPr marL="76200" marR="76200" marT="38100" marB="38100" anchor="ctr">
+                    <a:lnL w="0" cap="flat" cmpd="sng" algn="ctr">
+                      <a:noFill/>
+                    </a:lnL>
+                    <a:lnR w="0" cap="flat" cmpd="sng" algn="ctr">
+                      <a:noFill/>
+                    </a:lnR>
+                    <a:lnT w="0" cap="flat" cmpd="sng" algn="ctr">
+                      <a:noFill/>
+                    </a:lnT>
+                    <a:lnB w="0" cap="flat" cmpd="sng" algn="ctr">
+                      <a:noFill/>
+                    </a:lnB>
+                  </a:tcPr>
+                </a:tc>
+                <a:tc>
+                  <a:txBody>
+                    <a:bodyPr/>
+                    <a:lstStyle/>
+                    <a:p>
+                      <a:pPr algn="l" indent="0" marL="0">
+                        <a:buNone/>
+                      </a:pPr>
+                      <a:r>
+                        <a:rPr lang="en-US" sz="950" dirty="0">
+                          <a:solidFill>
+                            <a:schemeClr val="tx1"/>
+                          </a:solidFill>
+                        </a:rPr>
+                        <a:t>Apache-2.0</a:t>
+                      </a:r>
+                      <a:endParaRPr lang="en-US" sz="950" dirty="0"/>
+                    </a:p>
+                  </a:txBody>
+                  <a:tcPr marL="76200" marR="76200" marT="38100" marB="38100" anchor="ctr">
+                    <a:lnL w="0" cap="flat" cmpd="sng" algn="ctr">
+                      <a:noFill/>
+                    </a:lnL>
+                    <a:lnR w="0" cap="flat" cmpd="sng" algn="ctr">
+                      <a:noFill/>
+                    </a:lnR>
+                    <a:lnT w="0" cap="flat" cmpd="sng" algn="ctr">
+                      <a:noFill/>
+                    </a:lnT>
+                    <a:lnB w="0" cap="flat" cmpd="sng" algn="ctr">
+                      <a:noFill/>
+                    </a:lnB>
+                  </a:tcPr>
+                </a:tc>
+                <a:tc>
+                  <a:txBody>
+                    <a:bodyPr/>
+                    <a:lstStyle/>
+                    <a:p>
+                      <a:pPr algn="l" indent="0" marL="0">
+                        <a:buNone/>
+                      </a:pPr>
+                      <a:r>
+                        <a:rPr lang="en-US" sz="950" dirty="0">
+                          <a:solidFill>
+                            <a:schemeClr val="tx1"/>
+                          </a:solidFill>
+                        </a:rPr>
+                        <a:t>S3：冷層、原始事件、備份、同步輸出</a:t>
+                      </a:r>
+                      <a:endParaRPr lang="en-US" sz="950" dirty="0"/>
+                    </a:p>
+                  </a:txBody>
+                  <a:tcPr marL="76200" marR="76200" marT="38100" marB="38100" anchor="ctr">
+                    <a:lnL w="0" cap="flat" cmpd="sng" algn="ctr">
+                      <a:noFill/>
+                    </a:lnL>
+                    <a:lnR w="0" cap="flat" cmpd="sng" algn="ctr">
+                      <a:noFill/>
+                    </a:lnR>
+                    <a:lnT w="0" cap="flat" cmpd="sng" algn="ctr">
+                      <a:noFill/>
+                    </a:lnT>
+                    <a:lnB w="0" cap="flat" cmpd="sng" algn="ctr">
+                      <a:noFill/>
+                    </a:lnB>
+                  </a:tcPr>
+                </a:tc>
+              </a:tr>
+              <a:tr h="301752">
+                <a:tc>
+                  <a:txBody>
+                    <a:bodyPr/>
+                    <a:lstStyle/>
+                    <a:p>
+                      <a:pPr algn="l" indent="0" marL="0">
+                        <a:buNone/>
+                      </a:pPr>
+                      <a:r>
+                        <a:rPr lang="en-US" sz="950" b="1" dirty="0">
+                          <a:solidFill>
+                            <a:schemeClr val="tx1"/>
+                          </a:solidFill>
+                        </a:rPr>
+                        <a:t>線上存儲</a:t>
+                      </a:r>
+                      <a:endParaRPr lang="en-US" sz="950" dirty="0"/>
+                    </a:p>
+                  </a:txBody>
+                  <a:tcPr marL="76200" marR="76200" marT="38100" marB="38100" anchor="ctr">
+                    <a:lnL w="0" cap="flat" cmpd="sng" algn="ctr">
+                      <a:noFill/>
+                    </a:lnL>
+                    <a:lnR w="0" cap="flat" cmpd="sng" algn="ctr">
+                      <a:noFill/>
+                    </a:lnR>
+                    <a:lnT w="0" cap="flat" cmpd="sng" algn="ctr">
+                      <a:noFill/>
+                    </a:lnT>
+                    <a:lnB w="0" cap="flat" cmpd="sng" algn="ctr">
+                      <a:noFill/>
+                    </a:lnB>
+                  </a:tcPr>
+                </a:tc>
+                <a:tc>
+                  <a:txBody>
+                    <a:bodyPr/>
+                    <a:lstStyle/>
+                    <a:p>
+                      <a:pPr algn="l" indent="0" marL="0">
+                        <a:buNone/>
+                      </a:pPr>
+                      <a:r>
+                        <a:rPr lang="en-US" sz="950" dirty="0">
+                          <a:solidFill>
+                            <a:schemeClr val="tx1"/>
+                          </a:solidFill>
+                        </a:rPr>
+                        <a:t>PostgreSQL ＋ pgvector（CloudNativePG）</a:t>
+                      </a:r>
+                      <a:endParaRPr lang="en-US" sz="950" dirty="0"/>
+                    </a:p>
+                  </a:txBody>
+                  <a:tcPr marL="76200" marR="76200" marT="38100" marB="38100" anchor="ctr">
+                    <a:lnL w="0" cap="flat" cmpd="sng" algn="ctr">
+                      <a:noFill/>
+                    </a:lnL>
+                    <a:lnR w="0" cap="flat" cmpd="sng" algn="ctr">
+                      <a:noFill/>
+                    </a:lnR>
+                    <a:lnT w="0" cap="flat" cmpd="sng" algn="ctr">
+                      <a:noFill/>
+                    </a:lnT>
+                    <a:lnB w="0" cap="flat" cmpd="sng" algn="ctr">
+                      <a:noFill/>
+                    </a:lnB>
+                  </a:tcPr>
+                </a:tc>
+                <a:tc>
+                  <a:txBody>
+                    <a:bodyPr/>
+                    <a:lstStyle/>
+                    <a:p>
+                      <a:pPr algn="l" indent="0" marL="0">
+                        <a:buNone/>
+                      </a:pPr>
+                      <a:r>
+                        <a:rPr lang="en-US" sz="950" dirty="0">
+                          <a:solidFill>
+                            <a:schemeClr val="tx1"/>
+                          </a:solidFill>
+                        </a:rPr>
+                        <a:t>16</a:t>
+                      </a:r>
+                      <a:endParaRPr lang="en-US" sz="950" dirty="0"/>
+                    </a:p>
+                  </a:txBody>
+                  <a:tcPr marL="76200" marR="76200" marT="38100" marB="38100" anchor="ctr">
+                    <a:lnL w="0" cap="flat" cmpd="sng" algn="ctr">
+                      <a:noFill/>
+                    </a:lnL>
+                    <a:lnR w="0" cap="flat" cmpd="sng" algn="ctr">
+                      <a:noFill/>
+                    </a:lnR>
+                    <a:lnT w="0" cap="flat" cmpd="sng" algn="ctr">
+                      <a:noFill/>
+                    </a:lnT>
+                    <a:lnB w="0" cap="flat" cmpd="sng" algn="ctr">
+                      <a:noFill/>
+                    </a:lnB>
+                  </a:tcPr>
+                </a:tc>
+                <a:tc>
+                  <a:txBody>
+                    <a:bodyPr/>
+                    <a:lstStyle/>
+                    <a:p>
+                      <a:pPr algn="l" indent="0" marL="0">
+                        <a:buNone/>
+                      </a:pPr>
+                      <a:r>
+                        <a:rPr lang="en-US" sz="950" dirty="0">
+                          <a:solidFill>
+                            <a:schemeClr val="tx1"/>
+                          </a:solidFill>
+                        </a:rPr>
+                        <a:t>PostgreSQL</a:t>
+                      </a:r>
+                      <a:endParaRPr lang="en-US" sz="950" dirty="0"/>
+                    </a:p>
+                  </a:txBody>
+                  <a:tcPr marL="76200" marR="76200" marT="38100" marB="38100" anchor="ctr">
+                    <a:lnL w="0" cap="flat" cmpd="sng" algn="ctr">
+                      <a:noFill/>
+                    </a:lnL>
+                    <a:lnR w="0" cap="flat" cmpd="sng" algn="ctr">
+                      <a:noFill/>
+                    </a:lnR>
+                    <a:lnT w="0" cap="flat" cmpd="sng" algn="ctr">
+                      <a:noFill/>
+                    </a:lnT>
+                    <a:lnB w="0" cap="flat" cmpd="sng" algn="ctr">
+                      <a:noFill/>
+                    </a:lnB>
+                  </a:tcPr>
+                </a:tc>
+                <a:tc>
+                  <a:txBody>
+                    <a:bodyPr/>
+                    <a:lstStyle/>
+                    <a:p>
+                      <a:pPr algn="l" indent="0" marL="0">
+                        <a:buNone/>
+                      </a:pPr>
+                      <a:r>
+                        <a:rPr lang="en-US" sz="950" dirty="0">
+                          <a:solidFill>
+                            <a:schemeClr val="tx1"/>
+                          </a:solidFill>
+                        </a:rPr>
+                        <a:t>控制面：看板、分群、審批、審計索引</a:t>
+                      </a:r>
+                      <a:endParaRPr lang="en-US" sz="950" dirty="0"/>
+                    </a:p>
+                  </a:txBody>
+                  <a:tcPr marL="76200" marR="76200" marT="38100" marB="38100" anchor="ctr">
+                    <a:lnL w="0" cap="flat" cmpd="sng" algn="ctr">
+                      <a:noFill/>
+                    </a:lnL>
+                    <a:lnR w="0" cap="flat" cmpd="sng" algn="ctr">
+                      <a:noFill/>
+                    </a:lnR>
+                    <a:lnT w="0" cap="flat" cmpd="sng" algn="ctr">
+                      <a:noFill/>
+                    </a:lnT>
+                    <a:lnB w="0" cap="flat" cmpd="sng" algn="ctr">
+                      <a:noFill/>
+                    </a:lnB>
+                  </a:tcPr>
+                </a:tc>
+              </a:tr>
+              <a:tr h="301752">
+                <a:tc>
+                  <a:txBody>
+                    <a:bodyPr/>
+                    <a:lstStyle/>
+                    <a:p>
+                      <a:pPr algn="l" indent="0" marL="0">
+                        <a:buNone/>
+                      </a:pPr>
+                      <a:r>
+                        <a:rPr lang="en-US" sz="950" b="1" dirty="0">
+                          <a:solidFill>
+                            <a:schemeClr val="tx1"/>
+                          </a:solidFill>
+                        </a:rPr>
+                        <a:t>線上存儲</a:t>
+                      </a:r>
+                      <a:endParaRPr lang="en-US" sz="950" dirty="0"/>
+                    </a:p>
+                  </a:txBody>
+                  <a:tcPr marL="76200" marR="76200" marT="38100" marB="38100" anchor="ctr">
+                    <a:lnL w="0" cap="flat" cmpd="sng" algn="ctr">
+                      <a:noFill/>
+                    </a:lnL>
+                    <a:lnR w="0" cap="flat" cmpd="sng" algn="ctr">
+                      <a:noFill/>
+                    </a:lnR>
+                    <a:lnT w="0" cap="flat" cmpd="sng" algn="ctr">
+                      <a:noFill/>
+                    </a:lnT>
+                    <a:lnB w="0" cap="flat" cmpd="sng" algn="ctr">
+                      <a:noFill/>
+                    </a:lnB>
+                  </a:tcPr>
+                </a:tc>
+                <a:tc>
+                  <a:txBody>
+                    <a:bodyPr/>
+                    <a:lstStyle/>
+                    <a:p>
+                      <a:pPr algn="l" indent="0" marL="0">
+                        <a:buNone/>
+                      </a:pPr>
+                      <a:r>
+                        <a:rPr lang="en-US" sz="950" dirty="0">
+                          <a:solidFill>
+                            <a:schemeClr val="tx1"/>
+                          </a:solidFill>
+                        </a:rPr>
+                        <a:t>Valkey</a:t>
+                      </a:r>
+                      <a:endParaRPr lang="en-US" sz="950" dirty="0"/>
+                    </a:p>
+                  </a:txBody>
+                  <a:tcPr marL="76200" marR="76200" marT="38100" marB="38100" anchor="ctr">
+                    <a:lnL w="0" cap="flat" cmpd="sng" algn="ctr">
+                      <a:noFill/>
+                    </a:lnL>
+                    <a:lnR w="0" cap="flat" cmpd="sng" algn="ctr">
+                      <a:noFill/>
+                    </a:lnR>
+                    <a:lnT w="0" cap="flat" cmpd="sng" algn="ctr">
+                      <a:noFill/>
+                    </a:lnT>
+                    <a:lnB w="0" cap="flat" cmpd="sng" algn="ctr">
+                      <a:noFill/>
+                    </a:lnB>
+                  </a:tcPr>
+                </a:tc>
+                <a:tc>
+                  <a:txBody>
+                    <a:bodyPr/>
+                    <a:lstStyle/>
+                    <a:p>
+                      <a:pPr algn="l" indent="0" marL="0">
+                        <a:buNone/>
+                      </a:pPr>
+                      <a:r>
+                        <a:rPr lang="en-US" sz="950" dirty="0">
+                          <a:solidFill>
+                            <a:schemeClr val="tx1"/>
+                          </a:solidFill>
+                        </a:rPr>
+                        <a:t>8</a:t>
+                      </a:r>
+                      <a:endParaRPr lang="en-US" sz="950" dirty="0"/>
+                    </a:p>
+                  </a:txBody>
+                  <a:tcPr marL="76200" marR="76200" marT="38100" marB="38100" anchor="ctr">
+                    <a:lnL w="0" cap="flat" cmpd="sng" algn="ctr">
+                      <a:noFill/>
+                    </a:lnL>
+                    <a:lnR w="0" cap="flat" cmpd="sng" algn="ctr">
+                      <a:noFill/>
+                    </a:lnR>
+                    <a:lnT w="0" cap="flat" cmpd="sng" algn="ctr">
+                      <a:noFill/>
+                    </a:lnT>
+                    <a:lnB w="0" cap="flat" cmpd="sng" algn="ctr">
+                      <a:noFill/>
+                    </a:lnB>
+                  </a:tcPr>
+                </a:tc>
+                <a:tc>
+                  <a:txBody>
+                    <a:bodyPr/>
+                    <a:lstStyle/>
+                    <a:p>
+                      <a:pPr algn="l" indent="0" marL="0">
+                        <a:buNone/>
+                      </a:pPr>
+                      <a:r>
+                        <a:rPr lang="en-US" sz="950" dirty="0">
+                          <a:solidFill>
+                            <a:schemeClr val="tx1"/>
+                          </a:solidFill>
+                        </a:rPr>
+                        <a:t>BSD-3</a:t>
+                      </a:r>
+                      <a:endParaRPr lang="en-US" sz="950" dirty="0"/>
+                    </a:p>
+                  </a:txBody>
+                  <a:tcPr marL="76200" marR="76200" marT="38100" marB="38100" anchor="ctr">
+                    <a:lnL w="0" cap="flat" cmpd="sng" algn="ctr">
+                      <a:noFill/>
+                    </a:lnL>
+                    <a:lnR w="0" cap="flat" cmpd="sng" algn="ctr">
+                      <a:noFill/>
+                    </a:lnR>
+                    <a:lnT w="0" cap="flat" cmpd="sng" algn="ctr">
+                      <a:noFill/>
+                    </a:lnT>
+                    <a:lnB w="0" cap="flat" cmpd="sng" algn="ctr">
+                      <a:noFill/>
+                    </a:lnB>
+                  </a:tcPr>
+                </a:tc>
+                <a:tc>
+                  <a:txBody>
+                    <a:bodyPr/>
+                    <a:lstStyle/>
+                    <a:p>
+                      <a:pPr algn="l" indent="0" marL="0">
+                        <a:buNone/>
+                      </a:pPr>
+                      <a:r>
+                        <a:rPr lang="en-US" sz="950" dirty="0">
+                          <a:solidFill>
+                            <a:schemeClr val="tx1"/>
+                          </a:solidFill>
+                        </a:rPr>
+                        <a:t>快取、工作佇列、即時標籤（第二階段）</a:t>
+                      </a:r>
+                      <a:endParaRPr lang="en-US" sz="950" dirty="0"/>
+                    </a:p>
+                  </a:txBody>
+                  <a:tcPr marL="76200" marR="76200" marT="38100" marB="38100" anchor="ctr">
+                    <a:lnL w="0" cap="flat" cmpd="sng" algn="ctr">
+                      <a:noFill/>
+                    </a:lnL>
+                    <a:lnR w="0" cap="flat" cmpd="sng" algn="ctr">
+                      <a:noFill/>
+                    </a:lnR>
+                    <a:lnT w="0" cap="flat" cmpd="sng" algn="ctr">
+                      <a:noFill/>
+                    </a:lnT>
+                    <a:lnB w="0" cap="flat" cmpd="sng" algn="ctr">
+                      <a:noFill/>
+                    </a:lnB>
+                  </a:tcPr>
+                </a:tc>
+              </a:tr>
+              <a:tr h="301752">
+                <a:tc>
+                  <a:txBody>
+                    <a:bodyPr/>
+                    <a:lstStyle/>
+                    <a:p>
+                      <a:pPr algn="l" indent="0" marL="0">
+                        <a:buNone/>
+                      </a:pPr>
+                      <a:r>
+                        <a:rPr lang="en-US" sz="950" b="1" dirty="0">
+                          <a:solidFill>
+                            <a:schemeClr val="tx1"/>
+                          </a:solidFill>
+                        </a:rPr>
+                        <a:t>訊息</a:t>
+                      </a:r>
+                      <a:endParaRPr lang="en-US" sz="950" dirty="0"/>
+                    </a:p>
+                  </a:txBody>
+                  <a:tcPr marL="76200" marR="76200" marT="38100" marB="38100" anchor="ctr">
+                    <a:lnL w="0" cap="flat" cmpd="sng" algn="ctr">
+                      <a:noFill/>
+                    </a:lnL>
+                    <a:lnR w="0" cap="flat" cmpd="sng" algn="ctr">
+                      <a:noFill/>
+                    </a:lnR>
+                    <a:lnT w="0" cap="flat" cmpd="sng" algn="ctr">
+                      <a:noFill/>
+                    </a:lnT>
+                    <a:lnB w="0" cap="flat" cmpd="sng" algn="ctr">
+                      <a:noFill/>
+                    </a:lnB>
+                  </a:tcPr>
+                </a:tc>
+                <a:tc>
+                  <a:txBody>
+                    <a:bodyPr/>
+                    <a:lstStyle/>
+                    <a:p>
+                      <a:pPr algn="l" indent="0" marL="0">
+                        <a:buNone/>
+                      </a:pPr>
+                      <a:r>
+                        <a:rPr lang="en-US" sz="950" dirty="0">
+                          <a:solidFill>
+                            <a:schemeClr val="tx1"/>
+                          </a:solidFill>
+                        </a:rPr>
+                        <a:t>Apache Kafka（KRaft，Strimzi）</a:t>
+                      </a:r>
+                      <a:endParaRPr lang="en-US" sz="950" dirty="0"/>
+                    </a:p>
+                  </a:txBody>
+                  <a:tcPr marL="76200" marR="76200" marT="38100" marB="38100" anchor="ctr">
+                    <a:lnL w="0" cap="flat" cmpd="sng" algn="ctr">
+                      <a:noFill/>
+                    </a:lnL>
+                    <a:lnR w="0" cap="flat" cmpd="sng" algn="ctr">
+                      <a:noFill/>
+                    </a:lnR>
+                    <a:lnT w="0" cap="flat" cmpd="sng" algn="ctr">
+                      <a:noFill/>
+                    </a:lnT>
+                    <a:lnB w="0" cap="flat" cmpd="sng" algn="ctr">
+                      <a:noFill/>
+                    </a:lnB>
+                  </a:tcPr>
+                </a:tc>
+                <a:tc>
+                  <a:txBody>
+                    <a:bodyPr/>
+                    <a:lstStyle/>
+                    <a:p>
+                      <a:pPr algn="l" indent="0" marL="0">
+                        <a:buNone/>
+                      </a:pPr>
+                      <a:r>
+                        <a:rPr lang="en-US" sz="950" dirty="0">
+                          <a:solidFill>
+                            <a:schemeClr val="tx1"/>
+                          </a:solidFill>
+                        </a:rPr>
+                        <a:t>3.8</a:t>
+                      </a:r>
+                      <a:endParaRPr lang="en-US" sz="950" dirty="0"/>
+                    </a:p>
+                  </a:txBody>
+                  <a:tcPr marL="76200" marR="76200" marT="38100" marB="38100" anchor="ctr">
+                    <a:lnL w="0" cap="flat" cmpd="sng" algn="ctr">
+                      <a:noFill/>
+                    </a:lnL>
+                    <a:lnR w="0" cap="flat" cmpd="sng" algn="ctr">
+                      <a:noFill/>
+                    </a:lnR>
+                    <a:lnT w="0" cap="flat" cmpd="sng" algn="ctr">
+                      <a:noFill/>
+                    </a:lnT>
+                    <a:lnB w="0" cap="flat" cmpd="sng" algn="ctr">
+                      <a:noFill/>
+                    </a:lnB>
+                  </a:tcPr>
+                </a:tc>
+                <a:tc>
+                  <a:txBody>
+                    <a:bodyPr/>
+                    <a:lstStyle/>
+                    <a:p>
+                      <a:pPr algn="l" indent="0" marL="0">
+                        <a:buNone/>
+                      </a:pPr>
+                      <a:r>
+                        <a:rPr lang="en-US" sz="950" dirty="0">
+                          <a:solidFill>
+                            <a:schemeClr val="tx1"/>
+                          </a:solidFill>
+                        </a:rPr>
+                        <a:t>Apache-2.0</a:t>
+                      </a:r>
+                      <a:endParaRPr lang="en-US" sz="950" dirty="0"/>
+                    </a:p>
+                  </a:txBody>
+                  <a:tcPr marL="76200" marR="76200" marT="38100" marB="38100" anchor="ctr">
+                    <a:lnL w="0" cap="flat" cmpd="sng" algn="ctr">
+                      <a:noFill/>
+                    </a:lnL>
+                    <a:lnR w="0" cap="flat" cmpd="sng" algn="ctr">
+                      <a:noFill/>
+                    </a:lnR>
+                    <a:lnT w="0" cap="flat" cmpd="sng" algn="ctr">
+                      <a:noFill/>
+                    </a:lnT>
+                    <a:lnB w="0" cap="flat" cmpd="sng" algn="ctr">
+                      <a:noFill/>
+                    </a:lnB>
+                  </a:tcPr>
+                </a:tc>
+                <a:tc>
+                  <a:txBody>
+                    <a:bodyPr/>
+                    <a:lstStyle/>
+                    <a:p>
+                      <a:pPr algn="l" indent="0" marL="0">
+                        <a:buNone/>
+                      </a:pPr>
+                      <a:r>
+                        <a:rPr lang="en-US" sz="950" dirty="0">
+                          <a:solidFill>
+                            <a:schemeClr val="tx1"/>
+                          </a:solidFill>
+                        </a:rPr>
+                        <a:t>推送更新、原始事件落地；二階段即時觸發</a:t>
+                      </a:r>
+                      <a:endParaRPr lang="en-US" sz="950" dirty="0"/>
+                    </a:p>
+                  </a:txBody>
+                  <a:tcPr marL="76200" marR="76200" marT="38100" marB="38100" anchor="ctr">
+                    <a:lnL w="0" cap="flat" cmpd="sng" algn="ctr">
+                      <a:noFill/>
+                    </a:lnL>
+                    <a:lnR w="0" cap="flat" cmpd="sng" algn="ctr">
+                      <a:noFill/>
+                    </a:lnR>
+                    <a:lnT w="0" cap="flat" cmpd="sng" algn="ctr">
+                      <a:noFill/>
+                    </a:lnT>
+                    <a:lnB w="0" cap="flat" cmpd="sng" algn="ctr">
+                      <a:noFill/>
+                    </a:lnB>
+                  </a:tcPr>
+                </a:tc>
+              </a:tr>
+              <a:tr h="301752">
+                <a:tc>
+                  <a:txBody>
+                    <a:bodyPr/>
+                    <a:lstStyle/>
+                    <a:p>
+                      <a:pPr algn="l" indent="0" marL="0">
+                        <a:buNone/>
+                      </a:pPr>
+                      <a:r>
+                        <a:rPr lang="en-US" sz="950" b="1" dirty="0">
+                          <a:solidFill>
+                            <a:schemeClr val="tx1"/>
+                          </a:solidFill>
+                        </a:rPr>
+                        <a:t>計算</a:t>
+                      </a:r>
+                      <a:endParaRPr lang="en-US" sz="950" dirty="0"/>
+                    </a:p>
+                  </a:txBody>
+                  <a:tcPr marL="76200" marR="76200" marT="38100" marB="38100" anchor="ctr">
+                    <a:lnL w="0" cap="flat" cmpd="sng" algn="ctr">
+                      <a:noFill/>
+                    </a:lnL>
+                    <a:lnR w="0" cap="flat" cmpd="sng" algn="ctr">
+                      <a:noFill/>
+                    </a:lnR>
+                    <a:lnT w="0" cap="flat" cmpd="sng" algn="ctr">
+                      <a:noFill/>
+                    </a:lnT>
+                    <a:lnB w="0" cap="flat" cmpd="sng" algn="ctr">
+                      <a:noFill/>
+                    </a:lnB>
+                  </a:tcPr>
+                </a:tc>
+                <a:tc>
+                  <a:txBody>
+                    <a:bodyPr/>
+                    <a:lstStyle/>
+                    <a:p>
+                      <a:pPr algn="l" indent="0" marL="0">
+                        <a:buNone/>
+                      </a:pPr>
+                      <a:r>
+                        <a:rPr lang="en-US" sz="950" dirty="0">
+                          <a:solidFill>
+                            <a:schemeClr val="tx1"/>
+                          </a:solidFill>
+                        </a:rPr>
+                        <a:t>Apache Airflow ＋ dbt-core</a:t>
+                      </a:r>
+                      <a:endParaRPr lang="en-US" sz="950" dirty="0"/>
+                    </a:p>
+                  </a:txBody>
+                  <a:tcPr marL="76200" marR="76200" marT="38100" marB="38100" anchor="ctr">
+                    <a:lnL w="0" cap="flat" cmpd="sng" algn="ctr">
+                      <a:noFill/>
+                    </a:lnL>
+                    <a:lnR w="0" cap="flat" cmpd="sng" algn="ctr">
+                      <a:noFill/>
+                    </a:lnR>
+                    <a:lnT w="0" cap="flat" cmpd="sng" algn="ctr">
+                      <a:noFill/>
+                    </a:lnT>
+                    <a:lnB w="0" cap="flat" cmpd="sng" algn="ctr">
+                      <a:noFill/>
+                    </a:lnB>
+                  </a:tcPr>
+                </a:tc>
+                <a:tc>
+                  <a:txBody>
+                    <a:bodyPr/>
+                    <a:lstStyle/>
+                    <a:p>
+                      <a:pPr algn="l" indent="0" marL="0">
+                        <a:buNone/>
+                      </a:pPr>
+                      <a:r>
+                        <a:rPr lang="en-US" sz="950" dirty="0">
+                          <a:solidFill>
+                            <a:schemeClr val="tx1"/>
+                          </a:solidFill>
+                        </a:rPr>
+                        <a:t>2.10</a:t>
+                      </a:r>
+                      <a:endParaRPr lang="en-US" sz="950" dirty="0"/>
+                    </a:p>
+                  </a:txBody>
+                  <a:tcPr marL="76200" marR="76200" marT="38100" marB="38100" anchor="ctr">
+                    <a:lnL w="0" cap="flat" cmpd="sng" algn="ctr">
+                      <a:noFill/>
+                    </a:lnL>
+                    <a:lnR w="0" cap="flat" cmpd="sng" algn="ctr">
+                      <a:noFill/>
+                    </a:lnR>
+                    <a:lnT w="0" cap="flat" cmpd="sng" algn="ctr">
+                      <a:noFill/>
+                    </a:lnT>
+                    <a:lnB w="0" cap="flat" cmpd="sng" algn="ctr">
+                      <a:noFill/>
+                    </a:lnB>
+                  </a:tcPr>
+                </a:tc>
+                <a:tc>
+                  <a:txBody>
+                    <a:bodyPr/>
+                    <a:lstStyle/>
+                    <a:p>
+                      <a:pPr algn="l" indent="0" marL="0">
+                        <a:buNone/>
+                      </a:pPr>
+                      <a:r>
+                        <a:rPr lang="en-US" sz="950" dirty="0">
+                          <a:solidFill>
+                            <a:schemeClr val="tx1"/>
+                          </a:solidFill>
+                        </a:rPr>
+                        <a:t>Apache-2.0</a:t>
+                      </a:r>
+                      <a:endParaRPr lang="en-US" sz="950" dirty="0"/>
+                    </a:p>
+                  </a:txBody>
+                  <a:tcPr marL="76200" marR="76200" marT="38100" marB="38100" anchor="ctr">
+                    <a:lnL w="0" cap="flat" cmpd="sng" algn="ctr">
+                      <a:noFill/>
+                    </a:lnL>
+                    <a:lnR w="0" cap="flat" cmpd="sng" algn="ctr">
+                      <a:noFill/>
+                    </a:lnR>
+                    <a:lnT w="0" cap="flat" cmpd="sng" algn="ctr">
+                      <a:noFill/>
+                    </a:lnT>
+                    <a:lnB w="0" cap="flat" cmpd="sng" algn="ctr">
+                      <a:noFill/>
+                    </a:lnB>
+                  </a:tcPr>
+                </a:tc>
+                <a:tc>
+                  <a:txBody>
+                    <a:bodyPr/>
+                    <a:lstStyle/>
+                    <a:p>
+                      <a:pPr algn="l" indent="0" marL="0">
+                        <a:buNone/>
+                      </a:pPr>
+                      <a:r>
+                        <a:rPr lang="en-US" sz="950" dirty="0">
+                          <a:solidFill>
+                            <a:schemeClr val="tx1"/>
+                          </a:solidFill>
+                        </a:rPr>
+                        <a:t>日批排程與 SQL 轉換</a:t>
+                      </a:r>
+                      <a:endParaRPr lang="en-US" sz="950" dirty="0"/>
+                    </a:p>
+                  </a:txBody>
+                  <a:tcPr marL="76200" marR="76200" marT="38100" marB="38100" anchor="ctr">
+                    <a:lnL w="0" cap="flat" cmpd="sng" algn="ctr">
+                      <a:noFill/>
+                    </a:lnL>
+                    <a:lnR w="0" cap="flat" cmpd="sng" algn="ctr">
+                      <a:noFill/>
+                    </a:lnR>
+                    <a:lnT w="0" cap="flat" cmpd="sng" algn="ctr">
+                      <a:noFill/>
+                    </a:lnT>
+                    <a:lnB w="0" cap="flat" cmpd="sng" algn="ctr">
+                      <a:noFill/>
+                    </a:lnB>
+                  </a:tcPr>
+                </a:tc>
+              </a:tr>
+              <a:tr h="301752">
+                <a:tc>
+                  <a:txBody>
+                    <a:bodyPr/>
+                    <a:lstStyle/>
+                    <a:p>
+                      <a:pPr algn="l" indent="0" marL="0">
+                        <a:buNone/>
+                      </a:pPr>
+                      <a:r>
+                        <a:rPr lang="en-US" sz="950" b="1" dirty="0">
+                          <a:solidFill>
+                            <a:schemeClr val="tx1"/>
+                          </a:solidFill>
+                        </a:rPr>
+                        <a:t>計算</a:t>
+                      </a:r>
+                      <a:endParaRPr lang="en-US" sz="950" dirty="0"/>
+                    </a:p>
+                  </a:txBody>
+                  <a:tcPr marL="76200" marR="76200" marT="38100" marB="38100" anchor="ctr">
+                    <a:lnL w="0" cap="flat" cmpd="sng" algn="ctr">
+                      <a:noFill/>
+                    </a:lnL>
+                    <a:lnR w="0" cap="flat" cmpd="sng" algn="ctr">
+                      <a:noFill/>
+                    </a:lnR>
+                    <a:lnT w="0" cap="flat" cmpd="sng" algn="ctr">
+                      <a:noFill/>
+                    </a:lnT>
+                    <a:lnB w="0" cap="flat" cmpd="sng" algn="ctr">
+                      <a:noFill/>
+                    </a:lnB>
+                  </a:tcPr>
+                </a:tc>
+                <a:tc>
+                  <a:txBody>
+                    <a:bodyPr/>
+                    <a:lstStyle/>
+                    <a:p>
+                      <a:pPr algn="l" indent="0" marL="0">
+                        <a:buNone/>
+                      </a:pPr>
+                      <a:r>
+                        <a:rPr lang="en-US" sz="950" dirty="0">
+                          <a:solidFill>
+                            <a:schemeClr val="tx1"/>
+                          </a:solidFill>
+                        </a:rPr>
+                        <a:t>Apache Flink ＋ K8s Operator</a:t>
+                      </a:r>
+                      <a:endParaRPr lang="en-US" sz="950" dirty="0"/>
+                    </a:p>
+                  </a:txBody>
+                  <a:tcPr marL="76200" marR="76200" marT="38100" marB="38100" anchor="ctr">
+                    <a:lnL w="0" cap="flat" cmpd="sng" algn="ctr">
+                      <a:noFill/>
+                    </a:lnL>
+                    <a:lnR w="0" cap="flat" cmpd="sng" algn="ctr">
+                      <a:noFill/>
+                    </a:lnR>
+                    <a:lnT w="0" cap="flat" cmpd="sng" algn="ctr">
+                      <a:noFill/>
+                    </a:lnT>
+                    <a:lnB w="0" cap="flat" cmpd="sng" algn="ctr">
+                      <a:noFill/>
+                    </a:lnB>
+                  </a:tcPr>
+                </a:tc>
+                <a:tc>
+                  <a:txBody>
+                    <a:bodyPr/>
+                    <a:lstStyle/>
+                    <a:p>
+                      <a:pPr algn="l" indent="0" marL="0">
+                        <a:buNone/>
+                      </a:pPr>
+                      <a:r>
+                        <a:rPr lang="en-US" sz="950" dirty="0">
+                          <a:solidFill>
+                            <a:schemeClr val="tx1"/>
+                          </a:solidFill>
+                        </a:rPr>
+                        <a:t>1.20</a:t>
+                      </a:r>
+                      <a:endParaRPr lang="en-US" sz="950" dirty="0"/>
+                    </a:p>
+                  </a:txBody>
+                  <a:tcPr marL="76200" marR="76200" marT="38100" marB="38100" anchor="ctr">
+                    <a:lnL w="0" cap="flat" cmpd="sng" algn="ctr">
+                      <a:noFill/>
+                    </a:lnL>
+                    <a:lnR w="0" cap="flat" cmpd="sng" algn="ctr">
+                      <a:noFill/>
+                    </a:lnR>
+                    <a:lnT w="0" cap="flat" cmpd="sng" algn="ctr">
+                      <a:noFill/>
+                    </a:lnT>
+                    <a:lnB w="0" cap="flat" cmpd="sng" algn="ctr">
+                      <a:noFill/>
+                    </a:lnB>
+                  </a:tcPr>
+                </a:tc>
+                <a:tc>
+                  <a:txBody>
+                    <a:bodyPr/>
+                    <a:lstStyle/>
+                    <a:p>
+                      <a:pPr algn="l" indent="0" marL="0">
+                        <a:buNone/>
+                      </a:pPr>
+                      <a:r>
+                        <a:rPr lang="en-US" sz="950" dirty="0">
+                          <a:solidFill>
+                            <a:schemeClr val="tx1"/>
+                          </a:solidFill>
+                        </a:rPr>
+                        <a:t>Apache-2.0</a:t>
+                      </a:r>
+                      <a:endParaRPr lang="en-US" sz="950" dirty="0"/>
+                    </a:p>
+                  </a:txBody>
+                  <a:tcPr marL="76200" marR="76200" marT="38100" marB="38100" anchor="ctr">
+                    <a:lnL w="0" cap="flat" cmpd="sng" algn="ctr">
+                      <a:noFill/>
+                    </a:lnL>
+                    <a:lnR w="0" cap="flat" cmpd="sng" algn="ctr">
+                      <a:noFill/>
+                    </a:lnR>
+                    <a:lnT w="0" cap="flat" cmpd="sng" algn="ctr">
+                      <a:noFill/>
+                    </a:lnT>
+                    <a:lnB w="0" cap="flat" cmpd="sng" algn="ctr">
+                      <a:noFill/>
+                    </a:lnB>
+                  </a:tcPr>
+                </a:tc>
+                <a:tc>
+                  <a:txBody>
+                    <a:bodyPr/>
+                    <a:lstStyle/>
+                    <a:p>
+                      <a:pPr algn="l" indent="0" marL="0">
+                        <a:buNone/>
+                      </a:pPr>
+                      <a:r>
+                        <a:rPr lang="en-US" sz="950" dirty="0">
+                          <a:solidFill>
+                            <a:schemeClr val="tx1"/>
+                          </a:solidFill>
+                        </a:rPr>
+                        <a:t>二階段：即時觸發 CEP（套件含、未啟用）</a:t>
+                      </a:r>
+                      <a:endParaRPr lang="en-US" sz="950" dirty="0"/>
+                    </a:p>
+                  </a:txBody>
+                  <a:tcPr marL="76200" marR="76200" marT="38100" marB="38100" anchor="ctr">
+                    <a:lnL w="0" cap="flat" cmpd="sng" algn="ctr">
+                      <a:noFill/>
+                    </a:lnL>
+                    <a:lnR w="0" cap="flat" cmpd="sng" algn="ctr">
+                      <a:noFill/>
+                    </a:lnR>
+                    <a:lnT w="0" cap="flat" cmpd="sng" algn="ctr">
+                      <a:noFill/>
+                    </a:lnT>
+                    <a:lnB w="0" cap="flat" cmpd="sng" algn="ctr">
+                      <a:noFill/>
+                    </a:lnB>
+                  </a:tcPr>
+                </a:tc>
+              </a:tr>
+              <a:tr h="301752">
+                <a:tc>
+                  <a:txBody>
+                    <a:bodyPr/>
+                    <a:lstStyle/>
+                    <a:p>
+                      <a:pPr algn="l" indent="0" marL="0">
+                        <a:buNone/>
+                      </a:pPr>
+                      <a:r>
+                        <a:rPr lang="en-US" sz="950" b="1" dirty="0">
+                          <a:solidFill>
+                            <a:schemeClr val="tx1"/>
+                          </a:solidFill>
+                        </a:rPr>
+                        <a:t>計算</a:t>
+                      </a:r>
+                      <a:endParaRPr lang="en-US" sz="950" dirty="0"/>
+                    </a:p>
+                  </a:txBody>
+                  <a:tcPr marL="76200" marR="76200" marT="38100" marB="38100" anchor="ctr">
+                    <a:lnL w="0" cap="flat" cmpd="sng" algn="ctr">
+                      <a:noFill/>
+                    </a:lnL>
+                    <a:lnR w="0" cap="flat" cmpd="sng" algn="ctr">
+                      <a:noFill/>
+                    </a:lnR>
+                    <a:lnT w="0" cap="flat" cmpd="sng" algn="ctr">
+                      <a:noFill/>
+                    </a:lnT>
+                    <a:lnB w="0" cap="flat" cmpd="sng" algn="ctr">
+                      <a:noFill/>
+                    </a:lnB>
+                  </a:tcPr>
+                </a:tc>
+                <a:tc>
+                  <a:txBody>
+                    <a:bodyPr/>
+                    <a:lstStyle/>
+                    <a:p>
+                      <a:pPr algn="l" indent="0" marL="0">
+                        <a:buNone/>
+                      </a:pPr>
+                      <a:r>
+                        <a:rPr lang="en-US" sz="950" dirty="0">
+                          <a:solidFill>
+                            <a:schemeClr val="tx1"/>
+                          </a:solidFill>
+                        </a:rPr>
+                        <a:t>Apache Spark／Trino／Iceberg</a:t>
+                      </a:r>
+                      <a:endParaRPr lang="en-US" sz="950" dirty="0"/>
+                    </a:p>
+                  </a:txBody>
+                  <a:tcPr marL="76200" marR="76200" marT="38100" marB="38100" anchor="ctr">
+                    <a:lnL w="0" cap="flat" cmpd="sng" algn="ctr">
+                      <a:noFill/>
+                    </a:lnL>
+                    <a:lnR w="0" cap="flat" cmpd="sng" algn="ctr">
+                      <a:noFill/>
+                    </a:lnR>
+                    <a:lnT w="0" cap="flat" cmpd="sng" algn="ctr">
+                      <a:noFill/>
+                    </a:lnT>
+                    <a:lnB w="0" cap="flat" cmpd="sng" algn="ctr">
+                      <a:noFill/>
+                    </a:lnB>
+                  </a:tcPr>
+                </a:tc>
+                <a:tc>
+                  <a:txBody>
+                    <a:bodyPr/>
+                    <a:lstStyle/>
+                    <a:p>
+                      <a:pPr algn="l" indent="0" marL="0">
+                        <a:buNone/>
+                      </a:pPr>
+                      <a:r>
+                        <a:rPr lang="en-US" sz="950" dirty="0">
+                          <a:solidFill>
+                            <a:schemeClr val="tx1"/>
+                          </a:solidFill>
+                        </a:rPr>
+                        <a:t>3.5／4xx／1.6</a:t>
+                      </a:r>
+                      <a:endParaRPr lang="en-US" sz="950" dirty="0"/>
+                    </a:p>
+                  </a:txBody>
+                  <a:tcPr marL="76200" marR="76200" marT="38100" marB="38100" anchor="ctr">
+                    <a:lnL w="0" cap="flat" cmpd="sng" algn="ctr">
+                      <a:noFill/>
+                    </a:lnL>
+                    <a:lnR w="0" cap="flat" cmpd="sng" algn="ctr">
+                      <a:noFill/>
+                    </a:lnR>
+                    <a:lnT w="0" cap="flat" cmpd="sng" algn="ctr">
+                      <a:noFill/>
+                    </a:lnT>
+                    <a:lnB w="0" cap="flat" cmpd="sng" algn="ctr">
+                      <a:noFill/>
+                    </a:lnB>
+                  </a:tcPr>
+                </a:tc>
+                <a:tc>
+                  <a:txBody>
+                    <a:bodyPr/>
+                    <a:lstStyle/>
+                    <a:p>
+                      <a:pPr algn="l" indent="0" marL="0">
+                        <a:buNone/>
+                      </a:pPr>
+                      <a:r>
+                        <a:rPr lang="en-US" sz="950" dirty="0">
+                          <a:solidFill>
+                            <a:schemeClr val="tx1"/>
+                          </a:solidFill>
+                        </a:rPr>
+                        <a:t>Apache-2.0</a:t>
+                      </a:r>
+                      <a:endParaRPr lang="en-US" sz="950" dirty="0"/>
+                    </a:p>
+                  </a:txBody>
+                  <a:tcPr marL="76200" marR="76200" marT="38100" marB="38100" anchor="ctr">
+                    <a:lnL w="0" cap="flat" cmpd="sng" algn="ctr">
+                      <a:noFill/>
+                    </a:lnL>
+                    <a:lnR w="0" cap="flat" cmpd="sng" algn="ctr">
+                      <a:noFill/>
+                    </a:lnR>
+                    <a:lnT w="0" cap="flat" cmpd="sng" algn="ctr">
+                      <a:noFill/>
+                    </a:lnT>
+                    <a:lnB w="0" cap="flat" cmpd="sng" algn="ctr">
+                      <a:noFill/>
+                    </a:lnB>
+                  </a:tcPr>
+                </a:tc>
+                <a:tc>
+                  <a:txBody>
+                    <a:bodyPr/>
+                    <a:lstStyle/>
+                    <a:p>
+                      <a:pPr algn="l" indent="0" marL="0">
+                        <a:buNone/>
+                      </a:pPr>
+                      <a:r>
+                        <a:rPr lang="en-US" sz="950" dirty="0">
+                          <a:solidFill>
+                            <a:schemeClr val="tx1"/>
+                          </a:solidFill>
+                        </a:rPr>
+                        <a:t>二階段：70 億歷史重算、冷層查詢</a:t>
+                      </a:r>
+                      <a:endParaRPr lang="en-US" sz="950" dirty="0"/>
+                    </a:p>
+                  </a:txBody>
+                  <a:tcPr marL="76200" marR="76200" marT="38100" marB="38100" anchor="ctr">
+                    <a:lnL w="0" cap="flat" cmpd="sng" algn="ctr">
+                      <a:noFill/>
+                    </a:lnL>
+                    <a:lnR w="0" cap="flat" cmpd="sng" algn="ctr">
+                      <a:noFill/>
+                    </a:lnR>
+                    <a:lnT w="0" cap="flat" cmpd="sng" algn="ctr">
+                      <a:noFill/>
+                    </a:lnT>
+                    <a:lnB w="0" cap="flat" cmpd="sng" algn="ctr">
+                      <a:noFill/>
+                    </a:lnB>
+                  </a:tcPr>
+                </a:tc>
+              </a:tr>
+            </a:tbl>
+          </a:graphicData>
+        </a:graphic>
+      </p:graphicFrame>
+      <p:sp>
+        <p:nvSpPr>
+          <p:cNvPr id="4" name="Text 1"/>
+          <p:cNvSpPr txBox="1"/>
+          <p:nvPr/>
+        </p:nvSpPr>
+        <p:spPr>
+          <a:xfrm>
+            <a:off x="457200" y="4498848"/>
+            <a:ext cx="8229600" cy="228600"/>
           </a:xfrm>
           <a:prstGeom prst="rect">
             <a:avLst/>
@@ -7184,21 +11032,66 @@
           <a:ln/>
         </p:spPr>
         <p:txBody>
-          <a:bodyPr wrap="square" rtlCol="0" anchor="t"/>
+          <a:bodyPr wrap="square" lIns="0" tIns="0" rIns="0" bIns="0" rtlCol="0" anchor="t"/>
           <a:lstStyle/>
           <a:p>
-            <a:pPr algn="l" indent="0" marL="0">
+            <a:pPr indent="0" marL="0">
               <a:buNone/>
             </a:pPr>
             <a:r>
-              <a:rPr lang="en-US" sz="1600" dirty="0">
+              <a:rPr lang="en-US" sz="900" dirty="0">
                 <a:solidFill>
-                  <a:srgbClr val="C9D2D8"/>
+                  <a:srgbClr val="7C8992"/>
                 </a:solidFill>
               </a:rPr>
-              <a:t>依人員分工與人天單價直算，供內部定價討論；客戶版等週一與 Merkle 對完分工再出</a:t>
+              <a:t>版本為 2026-10 的 LTS，M1 開工時依當時 LTS 重釘；原則不變：上游版本、不改寫、OSI 授權、有 Operator 或託管版</a:t>
             </a:r>
-            <a:endParaRPr lang="en-US" sz="1600" dirty="0"/>
+            <a:endParaRPr lang="en-US" sz="900" dirty="0"/>
+          </a:p>
+        </p:txBody>
+      </p:sp>
+      <p:sp>
+        <p:nvSpPr>
+          <p:cNvPr id="25" name="Slide Number Placeholder 0"/>
+          <p:cNvSpPr>
+            <a:spLocks noGrp="1"/>
+          </p:cNvSpPr>
+          <p:nvPr>
+            <p:ph type="sldNum" sz="quarter" idx="4294967295"/>
+          </p:nvPr>
+        </p:nvSpPr>
+        <p:spPr>
+          <a:xfrm>
+            <a:off x="8412480" y="4754880"/>
+            <a:ext cx="457200" cy="274320"/>
+          </a:xfrm>
+          <a:prstGeom prst="rect">
+            <a:avLst/>
+          </a:prstGeom>
+          <a:extLst>
+            <a:ext uri="{C572A759-6A51-4108-AA02-DFA0A04FC94B}">
+              <ma14:wrappingTextBoxFlag xmlns:ma14="http://schemas.microsoft.com/office/mac/drawingml/2011/main" val="0"/>
+            </a:ext>
+          </a:extLst>
+        </p:spPr>
+        <p:txBody>
+          <a:bodyPr/>
+          <a:lstStyle>
+            <a:lvl1pPr>
+              <a:defRPr sz="1000">
+                <a:solidFill>
+                  <a:srgbClr val="7C8992"/>
+                </a:solidFill>
+              </a:defRPr>
+            </a:lvl1pPr>
+          </a:lstStyle>
+          <a:p>
+            <a:pPr algn="r"/>
+            <a:fld id="{F7021451-1387-4CA6-816F-3879F97B5CBC}" type="slidenum">
+              <a:rPr b="0" lang="en-US"/>
+              <a:t>16</a:t>
+            </a:fld>
+            <a:endParaRPr lang="en-US"/>
           </a:p>
         </p:txBody>
       </p:sp>
@@ -7259,6 +11152,2751 @@
                   <a:schemeClr val="tx1"/>
                 </a:solidFill>
               </a:rPr>
+              <a:t>開源元件（二）平台、身分、觀測與執行環境</a:t>
+            </a:r>
+            <a:endParaRPr lang="en-US" sz="2400" dirty="0"/>
+          </a:p>
+        </p:txBody>
+      </p:sp>
+      <p:graphicFrame>
+        <p:nvGraphicFramePr>
+          <p:cNvPr id="18" name="Table 0"/>
+          <p:cNvGraphicFramePr>
+            <a:graphicFrameLocks noGrp="1"/>
+          </p:cNvGraphicFramePr>
+          <p:nvPr>
+            <p:extLst>
+              <p:ext uri="{D42A27DB-BD31-4B8C-83A1-F6EECF244321}">
+                <p14:modId xmlns:p14="http://schemas.microsoft.com/office/powerpoint/2010/main" val="1579011935"/>
+              </p:ext>
+            </p:extLst>
+          </p:nvPr>
+        </p:nvGraphicFramePr>
+        <p:xfrm>
+          <a:off x="457200" y="1280160"/>
+          <a:ext cx="8229600" cy="914400"/>
+        </p:xfrm>
+        <a:graphic>
+          <a:graphicData uri="http://schemas.openxmlformats.org/drawingml/2006/table">
+            <a:tbl>
+              <a:tblPr/>
+              <a:tblGrid>
+                <a:gridCol w="777240"/>
+                <a:gridCol w="2651760"/>
+                <a:gridCol w="914400"/>
+                <a:gridCol w="1188720"/>
+                <a:gridCol w="2697480"/>
+              </a:tblGrid>
+              <a:tr h="301752">
+                <a:tc>
+                  <a:txBody>
+                    <a:bodyPr/>
+                    <a:lstStyle/>
+                    <a:p>
+                      <a:pPr algn="l" indent="0" marL="0">
+                        <a:buNone/>
+                      </a:pPr>
+                      <a:r>
+                        <a:rPr lang="en-US" sz="950" b="1" dirty="0">
+                          <a:solidFill>
+                            <a:schemeClr val="tx1"/>
+                          </a:solidFill>
+                        </a:rPr>
+                        <a:t>類別</a:t>
+                      </a:r>
+                      <a:endParaRPr lang="en-US" sz="950" dirty="0"/>
+                    </a:p>
+                  </a:txBody>
+                  <a:tcPr marL="76200" marR="76200" marT="38100" marB="38100" anchor="ctr">
+                    <a:lnL w="0" cap="flat" cmpd="sng" algn="ctr">
+                      <a:noFill/>
+                    </a:lnL>
+                    <a:lnR w="0" cap="flat" cmpd="sng" algn="ctr">
+                      <a:noFill/>
+                    </a:lnR>
+                    <a:lnT w="0" cap="flat" cmpd="sng" algn="ctr">
+                      <a:noFill/>
+                    </a:lnT>
+                    <a:lnB w="15875" cap="flat" cmpd="sng" algn="ctr">
+                      <a:solidFill>
+                        <a:srgbClr val="C9D2D8"/>
+                      </a:solidFill>
+                      <a:prstDash val="solid"/>
+                      <a:round/>
+                      <a:headEnd type="none" w="med" len="med"/>
+                      <a:tailEnd type="none" w="med" len="med"/>
+                    </a:lnB>
+                  </a:tcPr>
+                </a:tc>
+                <a:tc>
+                  <a:txBody>
+                    <a:bodyPr/>
+                    <a:lstStyle/>
+                    <a:p>
+                      <a:pPr algn="l" indent="0" marL="0">
+                        <a:buNone/>
+                      </a:pPr>
+                      <a:r>
+                        <a:rPr lang="en-US" sz="950" b="1" dirty="0">
+                          <a:solidFill>
+                            <a:schemeClr val="tx1"/>
+                          </a:solidFill>
+                        </a:rPr>
+                        <a:t>元件</a:t>
+                      </a:r>
+                      <a:endParaRPr lang="en-US" sz="950" dirty="0"/>
+                    </a:p>
+                  </a:txBody>
+                  <a:tcPr marL="76200" marR="76200" marT="38100" marB="38100" anchor="ctr">
+                    <a:lnL w="0" cap="flat" cmpd="sng" algn="ctr">
+                      <a:noFill/>
+                    </a:lnL>
+                    <a:lnR w="0" cap="flat" cmpd="sng" algn="ctr">
+                      <a:noFill/>
+                    </a:lnR>
+                    <a:lnT w="0" cap="flat" cmpd="sng" algn="ctr">
+                      <a:noFill/>
+                    </a:lnT>
+                    <a:lnB w="15875" cap="flat" cmpd="sng" algn="ctr">
+                      <a:solidFill>
+                        <a:srgbClr val="C9D2D8"/>
+                      </a:solidFill>
+                      <a:prstDash val="solid"/>
+                      <a:round/>
+                      <a:headEnd type="none" w="med" len="med"/>
+                      <a:tailEnd type="none" w="med" len="med"/>
+                    </a:lnB>
+                  </a:tcPr>
+                </a:tc>
+                <a:tc>
+                  <a:txBody>
+                    <a:bodyPr/>
+                    <a:lstStyle/>
+                    <a:p>
+                      <a:pPr algn="l" indent="0" marL="0">
+                        <a:buNone/>
+                      </a:pPr>
+                      <a:r>
+                        <a:rPr lang="en-US" sz="950" b="1" dirty="0">
+                          <a:solidFill>
+                            <a:schemeClr val="tx1"/>
+                          </a:solidFill>
+                        </a:rPr>
+                        <a:t>版本</a:t>
+                      </a:r>
+                      <a:endParaRPr lang="en-US" sz="950" dirty="0"/>
+                    </a:p>
+                  </a:txBody>
+                  <a:tcPr marL="76200" marR="76200" marT="38100" marB="38100" anchor="ctr">
+                    <a:lnL w="0" cap="flat" cmpd="sng" algn="ctr">
+                      <a:noFill/>
+                    </a:lnL>
+                    <a:lnR w="0" cap="flat" cmpd="sng" algn="ctr">
+                      <a:noFill/>
+                    </a:lnR>
+                    <a:lnT w="0" cap="flat" cmpd="sng" algn="ctr">
+                      <a:noFill/>
+                    </a:lnT>
+                    <a:lnB w="15875" cap="flat" cmpd="sng" algn="ctr">
+                      <a:solidFill>
+                        <a:srgbClr val="C9D2D8"/>
+                      </a:solidFill>
+                      <a:prstDash val="solid"/>
+                      <a:round/>
+                      <a:headEnd type="none" w="med" len="med"/>
+                      <a:tailEnd type="none" w="med" len="med"/>
+                    </a:lnB>
+                  </a:tcPr>
+                </a:tc>
+                <a:tc>
+                  <a:txBody>
+                    <a:bodyPr/>
+                    <a:lstStyle/>
+                    <a:p>
+                      <a:pPr algn="l" indent="0" marL="0">
+                        <a:buNone/>
+                      </a:pPr>
+                      <a:r>
+                        <a:rPr lang="en-US" sz="950" b="1" dirty="0">
+                          <a:solidFill>
+                            <a:schemeClr val="tx1"/>
+                          </a:solidFill>
+                        </a:rPr>
+                        <a:t>授權</a:t>
+                      </a:r>
+                      <a:endParaRPr lang="en-US" sz="950" dirty="0"/>
+                    </a:p>
+                  </a:txBody>
+                  <a:tcPr marL="76200" marR="76200" marT="38100" marB="38100" anchor="ctr">
+                    <a:lnL w="0" cap="flat" cmpd="sng" algn="ctr">
+                      <a:noFill/>
+                    </a:lnL>
+                    <a:lnR w="0" cap="flat" cmpd="sng" algn="ctr">
+                      <a:noFill/>
+                    </a:lnR>
+                    <a:lnT w="0" cap="flat" cmpd="sng" algn="ctr">
+                      <a:noFill/>
+                    </a:lnT>
+                    <a:lnB w="15875" cap="flat" cmpd="sng" algn="ctr">
+                      <a:solidFill>
+                        <a:srgbClr val="C9D2D8"/>
+                      </a:solidFill>
+                      <a:prstDash val="solid"/>
+                      <a:round/>
+                      <a:headEnd type="none" w="med" len="med"/>
+                      <a:tailEnd type="none" w="med" len="med"/>
+                    </a:lnB>
+                  </a:tcPr>
+                </a:tc>
+                <a:tc>
+                  <a:txBody>
+                    <a:bodyPr/>
+                    <a:lstStyle/>
+                    <a:p>
+                      <a:pPr algn="l" indent="0" marL="0">
+                        <a:buNone/>
+                      </a:pPr>
+                      <a:r>
+                        <a:rPr lang="en-US" sz="950" b="1" dirty="0">
+                          <a:solidFill>
+                            <a:schemeClr val="tx1"/>
+                          </a:solidFill>
+                        </a:rPr>
+                        <a:t>功能</a:t>
+                      </a:r>
+                      <a:endParaRPr lang="en-US" sz="950" dirty="0"/>
+                    </a:p>
+                  </a:txBody>
+                  <a:tcPr marL="76200" marR="76200" marT="38100" marB="38100" anchor="ctr">
+                    <a:lnL w="0" cap="flat" cmpd="sng" algn="ctr">
+                      <a:noFill/>
+                    </a:lnL>
+                    <a:lnR w="0" cap="flat" cmpd="sng" algn="ctr">
+                      <a:noFill/>
+                    </a:lnR>
+                    <a:lnT w="0" cap="flat" cmpd="sng" algn="ctr">
+                      <a:noFill/>
+                    </a:lnT>
+                    <a:lnB w="15875" cap="flat" cmpd="sng" algn="ctr">
+                      <a:solidFill>
+                        <a:srgbClr val="C9D2D8"/>
+                      </a:solidFill>
+                      <a:prstDash val="solid"/>
+                      <a:round/>
+                      <a:headEnd type="none" w="med" len="med"/>
+                      <a:tailEnd type="none" w="med" len="med"/>
+                    </a:lnB>
+                  </a:tcPr>
+                </a:tc>
+              </a:tr>
+              <a:tr h="301752">
+                <a:tc>
+                  <a:txBody>
+                    <a:bodyPr/>
+                    <a:lstStyle/>
+                    <a:p>
+                      <a:pPr algn="l" indent="0" marL="0">
+                        <a:buNone/>
+                      </a:pPr>
+                      <a:r>
+                        <a:rPr lang="en-US" sz="950" b="1" dirty="0">
+                          <a:solidFill>
+                            <a:schemeClr val="tx1"/>
+                          </a:solidFill>
+                        </a:rPr>
+                        <a:t>容器平台</a:t>
+                      </a:r>
+                      <a:endParaRPr lang="en-US" sz="950" dirty="0"/>
+                    </a:p>
+                  </a:txBody>
+                  <a:tcPr marL="76200" marR="76200" marT="38100" marB="38100" anchor="ctr">
+                    <a:lnL w="0" cap="flat" cmpd="sng" algn="ctr">
+                      <a:noFill/>
+                    </a:lnL>
+                    <a:lnR w="0" cap="flat" cmpd="sng" algn="ctr">
+                      <a:noFill/>
+                    </a:lnR>
+                    <a:lnT w="0" cap="flat" cmpd="sng" algn="ctr">
+                      <a:noFill/>
+                    </a:lnT>
+                    <a:lnB w="0" cap="flat" cmpd="sng" algn="ctr">
+                      <a:noFill/>
+                    </a:lnB>
+                  </a:tcPr>
+                </a:tc>
+                <a:tc>
+                  <a:txBody>
+                    <a:bodyPr/>
+                    <a:lstStyle/>
+                    <a:p>
+                      <a:pPr algn="l" indent="0" marL="0">
+                        <a:buNone/>
+                      </a:pPr>
+                      <a:r>
+                        <a:rPr lang="en-US" sz="950" dirty="0">
+                          <a:solidFill>
+                            <a:schemeClr val="tx1"/>
+                          </a:solidFill>
+                        </a:rPr>
+                        <a:t>Kubernetes（RKE2）／GKE</a:t>
+                      </a:r>
+                      <a:endParaRPr lang="en-US" sz="950" dirty="0"/>
+                    </a:p>
+                  </a:txBody>
+                  <a:tcPr marL="76200" marR="76200" marT="38100" marB="38100" anchor="ctr">
+                    <a:lnL w="0" cap="flat" cmpd="sng" algn="ctr">
+                      <a:noFill/>
+                    </a:lnL>
+                    <a:lnR w="0" cap="flat" cmpd="sng" algn="ctr">
+                      <a:noFill/>
+                    </a:lnR>
+                    <a:lnT w="0" cap="flat" cmpd="sng" algn="ctr">
+                      <a:noFill/>
+                    </a:lnT>
+                    <a:lnB w="0" cap="flat" cmpd="sng" algn="ctr">
+                      <a:noFill/>
+                    </a:lnB>
+                  </a:tcPr>
+                </a:tc>
+                <a:tc>
+                  <a:txBody>
+                    <a:bodyPr/>
+                    <a:lstStyle/>
+                    <a:p>
+                      <a:pPr algn="l" indent="0" marL="0">
+                        <a:buNone/>
+                      </a:pPr>
+                      <a:r>
+                        <a:rPr lang="en-US" sz="950" dirty="0">
+                          <a:solidFill>
+                            <a:schemeClr val="tx1"/>
+                          </a:solidFill>
+                        </a:rPr>
+                        <a:t>1.30+</a:t>
+                      </a:r>
+                      <a:endParaRPr lang="en-US" sz="950" dirty="0"/>
+                    </a:p>
+                  </a:txBody>
+                  <a:tcPr marL="76200" marR="76200" marT="38100" marB="38100" anchor="ctr">
+                    <a:lnL w="0" cap="flat" cmpd="sng" algn="ctr">
+                      <a:noFill/>
+                    </a:lnL>
+                    <a:lnR w="0" cap="flat" cmpd="sng" algn="ctr">
+                      <a:noFill/>
+                    </a:lnR>
+                    <a:lnT w="0" cap="flat" cmpd="sng" algn="ctr">
+                      <a:noFill/>
+                    </a:lnT>
+                    <a:lnB w="0" cap="flat" cmpd="sng" algn="ctr">
+                      <a:noFill/>
+                    </a:lnB>
+                  </a:tcPr>
+                </a:tc>
+                <a:tc>
+                  <a:txBody>
+                    <a:bodyPr/>
+                    <a:lstStyle/>
+                    <a:p>
+                      <a:pPr algn="l" indent="0" marL="0">
+                        <a:buNone/>
+                      </a:pPr>
+                      <a:r>
+                        <a:rPr lang="en-US" sz="950" dirty="0">
+                          <a:solidFill>
+                            <a:schemeClr val="tx1"/>
+                          </a:solidFill>
+                        </a:rPr>
+                        <a:t>Apache-2.0</a:t>
+                      </a:r>
+                      <a:endParaRPr lang="en-US" sz="950" dirty="0"/>
+                    </a:p>
+                  </a:txBody>
+                  <a:tcPr marL="76200" marR="76200" marT="38100" marB="38100" anchor="ctr">
+                    <a:lnL w="0" cap="flat" cmpd="sng" algn="ctr">
+                      <a:noFill/>
+                    </a:lnL>
+                    <a:lnR w="0" cap="flat" cmpd="sng" algn="ctr">
+                      <a:noFill/>
+                    </a:lnR>
+                    <a:lnT w="0" cap="flat" cmpd="sng" algn="ctr">
+                      <a:noFill/>
+                    </a:lnT>
+                    <a:lnB w="0" cap="flat" cmpd="sng" algn="ctr">
+                      <a:noFill/>
+                    </a:lnB>
+                  </a:tcPr>
+                </a:tc>
+                <a:tc>
+                  <a:txBody>
+                    <a:bodyPr/>
+                    <a:lstStyle/>
+                    <a:p>
+                      <a:pPr algn="l" indent="0" marL="0">
+                        <a:buNone/>
+                      </a:pPr>
+                      <a:r>
+                        <a:rPr lang="en-US" sz="950" dirty="0">
+                          <a:solidFill>
+                            <a:schemeClr val="tx1"/>
+                          </a:solidFill>
+                        </a:rPr>
+                        <a:t>容器編排；3 個 control-plane 與 worker 共存</a:t>
+                      </a:r>
+                      <a:endParaRPr lang="en-US" sz="950" dirty="0"/>
+                    </a:p>
+                  </a:txBody>
+                  <a:tcPr marL="76200" marR="76200" marT="38100" marB="38100" anchor="ctr">
+                    <a:lnL w="0" cap="flat" cmpd="sng" algn="ctr">
+                      <a:noFill/>
+                    </a:lnL>
+                    <a:lnR w="0" cap="flat" cmpd="sng" algn="ctr">
+                      <a:noFill/>
+                    </a:lnR>
+                    <a:lnT w="0" cap="flat" cmpd="sng" algn="ctr">
+                      <a:noFill/>
+                    </a:lnT>
+                    <a:lnB w="0" cap="flat" cmpd="sng" algn="ctr">
+                      <a:noFill/>
+                    </a:lnB>
+                  </a:tcPr>
+                </a:tc>
+              </a:tr>
+              <a:tr h="301752">
+                <a:tc>
+                  <a:txBody>
+                    <a:bodyPr/>
+                    <a:lstStyle/>
+                    <a:p>
+                      <a:pPr algn="l" indent="0" marL="0">
+                        <a:buNone/>
+                      </a:pPr>
+                      <a:r>
+                        <a:rPr lang="en-US" sz="950" b="1" dirty="0">
+                          <a:solidFill>
+                            <a:schemeClr val="tx1"/>
+                          </a:solidFill>
+                        </a:rPr>
+                        <a:t>容器平台</a:t>
+                      </a:r>
+                      <a:endParaRPr lang="en-US" sz="950" dirty="0"/>
+                    </a:p>
+                  </a:txBody>
+                  <a:tcPr marL="76200" marR="76200" marT="38100" marB="38100" anchor="ctr">
+                    <a:lnL w="0" cap="flat" cmpd="sng" algn="ctr">
+                      <a:noFill/>
+                    </a:lnL>
+                    <a:lnR w="0" cap="flat" cmpd="sng" algn="ctr">
+                      <a:noFill/>
+                    </a:lnR>
+                    <a:lnT w="0" cap="flat" cmpd="sng" algn="ctr">
+                      <a:noFill/>
+                    </a:lnT>
+                    <a:lnB w="0" cap="flat" cmpd="sng" algn="ctr">
+                      <a:noFill/>
+                    </a:lnB>
+                  </a:tcPr>
+                </a:tc>
+                <a:tc>
+                  <a:txBody>
+                    <a:bodyPr/>
+                    <a:lstStyle/>
+                    <a:p>
+                      <a:pPr algn="l" indent="0" marL="0">
+                        <a:buNone/>
+                      </a:pPr>
+                      <a:r>
+                        <a:rPr lang="en-US" sz="950" dirty="0">
+                          <a:solidFill>
+                            <a:schemeClr val="tx1"/>
+                          </a:solidFill>
+                        </a:rPr>
+                        <a:t>Helm、OpenTofu、Harbor</a:t>
+                      </a:r>
+                      <a:endParaRPr lang="en-US" sz="950" dirty="0"/>
+                    </a:p>
+                  </a:txBody>
+                  <a:tcPr marL="76200" marR="76200" marT="38100" marB="38100" anchor="ctr">
+                    <a:lnL w="0" cap="flat" cmpd="sng" algn="ctr">
+                      <a:noFill/>
+                    </a:lnL>
+                    <a:lnR w="0" cap="flat" cmpd="sng" algn="ctr">
+                      <a:noFill/>
+                    </a:lnR>
+                    <a:lnT w="0" cap="flat" cmpd="sng" algn="ctr">
+                      <a:noFill/>
+                    </a:lnT>
+                    <a:lnB w="0" cap="flat" cmpd="sng" algn="ctr">
+                      <a:noFill/>
+                    </a:lnB>
+                  </a:tcPr>
+                </a:tc>
+                <a:tc>
+                  <a:txBody>
+                    <a:bodyPr/>
+                    <a:lstStyle/>
+                    <a:p>
+                      <a:pPr algn="l" indent="0" marL="0">
+                        <a:buNone/>
+                      </a:pPr>
+                      <a:r>
+                        <a:rPr lang="en-US" sz="950" dirty="0">
+                          <a:solidFill>
+                            <a:schemeClr val="tx1"/>
+                          </a:solidFill>
+                        </a:rPr>
+                        <a:t>3／1.8／2.x</a:t>
+                      </a:r>
+                      <a:endParaRPr lang="en-US" sz="950" dirty="0"/>
+                    </a:p>
+                  </a:txBody>
+                  <a:tcPr marL="76200" marR="76200" marT="38100" marB="38100" anchor="ctr">
+                    <a:lnL w="0" cap="flat" cmpd="sng" algn="ctr">
+                      <a:noFill/>
+                    </a:lnL>
+                    <a:lnR w="0" cap="flat" cmpd="sng" algn="ctr">
+                      <a:noFill/>
+                    </a:lnR>
+                    <a:lnT w="0" cap="flat" cmpd="sng" algn="ctr">
+                      <a:noFill/>
+                    </a:lnT>
+                    <a:lnB w="0" cap="flat" cmpd="sng" algn="ctr">
+                      <a:noFill/>
+                    </a:lnB>
+                  </a:tcPr>
+                </a:tc>
+                <a:tc>
+                  <a:txBody>
+                    <a:bodyPr/>
+                    <a:lstStyle/>
+                    <a:p>
+                      <a:pPr algn="l" indent="0" marL="0">
+                        <a:buNone/>
+                      </a:pPr>
+                      <a:r>
+                        <a:rPr lang="en-US" sz="950" dirty="0">
+                          <a:solidFill>
+                            <a:schemeClr val="tx1"/>
+                          </a:solidFill>
+                        </a:rPr>
+                        <a:t>Apache-2.0／MPL-2.0</a:t>
+                      </a:r>
+                      <a:endParaRPr lang="en-US" sz="950" dirty="0"/>
+                    </a:p>
+                  </a:txBody>
+                  <a:tcPr marL="76200" marR="76200" marT="38100" marB="38100" anchor="ctr">
+                    <a:lnL w="0" cap="flat" cmpd="sng" algn="ctr">
+                      <a:noFill/>
+                    </a:lnL>
+                    <a:lnR w="0" cap="flat" cmpd="sng" algn="ctr">
+                      <a:noFill/>
+                    </a:lnR>
+                    <a:lnT w="0" cap="flat" cmpd="sng" algn="ctr">
+                      <a:noFill/>
+                    </a:lnT>
+                    <a:lnB w="0" cap="flat" cmpd="sng" algn="ctr">
+                      <a:noFill/>
+                    </a:lnB>
+                  </a:tcPr>
+                </a:tc>
+                <a:tc>
+                  <a:txBody>
+                    <a:bodyPr/>
+                    <a:lstStyle/>
+                    <a:p>
+                      <a:pPr algn="l" indent="0" marL="0">
+                        <a:buNone/>
+                      </a:pPr>
+                      <a:r>
+                        <a:rPr lang="en-US" sz="950" dirty="0">
+                          <a:solidFill>
+                            <a:schemeClr val="tx1"/>
+                          </a:solidFill>
+                        </a:rPr>
+                        <a:t>umbrella chart；IaC；離線映像倉 ＋ Trivy</a:t>
+                      </a:r>
+                      <a:endParaRPr lang="en-US" sz="950" dirty="0"/>
+                    </a:p>
+                  </a:txBody>
+                  <a:tcPr marL="76200" marR="76200" marT="38100" marB="38100" anchor="ctr">
+                    <a:lnL w="0" cap="flat" cmpd="sng" algn="ctr">
+                      <a:noFill/>
+                    </a:lnL>
+                    <a:lnR w="0" cap="flat" cmpd="sng" algn="ctr">
+                      <a:noFill/>
+                    </a:lnR>
+                    <a:lnT w="0" cap="flat" cmpd="sng" algn="ctr">
+                      <a:noFill/>
+                    </a:lnT>
+                    <a:lnB w="0" cap="flat" cmpd="sng" algn="ctr">
+                      <a:noFill/>
+                    </a:lnB>
+                  </a:tcPr>
+                </a:tc>
+              </a:tr>
+              <a:tr h="301752">
+                <a:tc>
+                  <a:txBody>
+                    <a:bodyPr/>
+                    <a:lstStyle/>
+                    <a:p>
+                      <a:pPr algn="l" indent="0" marL="0">
+                        <a:buNone/>
+                      </a:pPr>
+                      <a:r>
+                        <a:rPr lang="en-US" sz="950" b="1" dirty="0">
+                          <a:solidFill>
+                            <a:schemeClr val="tx1"/>
+                          </a:solidFill>
+                        </a:rPr>
+                        <a:t>身分與密鑰</a:t>
+                      </a:r>
+                      <a:endParaRPr lang="en-US" sz="950" dirty="0"/>
+                    </a:p>
+                  </a:txBody>
+                  <a:tcPr marL="76200" marR="76200" marT="38100" marB="38100" anchor="ctr">
+                    <a:lnL w="0" cap="flat" cmpd="sng" algn="ctr">
+                      <a:noFill/>
+                    </a:lnL>
+                    <a:lnR w="0" cap="flat" cmpd="sng" algn="ctr">
+                      <a:noFill/>
+                    </a:lnR>
+                    <a:lnT w="0" cap="flat" cmpd="sng" algn="ctr">
+                      <a:noFill/>
+                    </a:lnT>
+                    <a:lnB w="0" cap="flat" cmpd="sng" algn="ctr">
+                      <a:noFill/>
+                    </a:lnB>
+                  </a:tcPr>
+                </a:tc>
+                <a:tc>
+                  <a:txBody>
+                    <a:bodyPr/>
+                    <a:lstStyle/>
+                    <a:p>
+                      <a:pPr algn="l" indent="0" marL="0">
+                        <a:buNone/>
+                      </a:pPr>
+                      <a:r>
+                        <a:rPr lang="en-US" sz="950" dirty="0">
+                          <a:solidFill>
+                            <a:schemeClr val="tx1"/>
+                          </a:solidFill>
+                        </a:rPr>
+                        <a:t>Keycloak；OpenBao ＋ HSM（GCP：Secret Manager ＋ KMS）</a:t>
+                      </a:r>
+                      <a:endParaRPr lang="en-US" sz="950" dirty="0"/>
+                    </a:p>
+                  </a:txBody>
+                  <a:tcPr marL="76200" marR="76200" marT="38100" marB="38100" anchor="ctr">
+                    <a:lnL w="0" cap="flat" cmpd="sng" algn="ctr">
+                      <a:noFill/>
+                    </a:lnL>
+                    <a:lnR w="0" cap="flat" cmpd="sng" algn="ctr">
+                      <a:noFill/>
+                    </a:lnR>
+                    <a:lnT w="0" cap="flat" cmpd="sng" algn="ctr">
+                      <a:noFill/>
+                    </a:lnT>
+                    <a:lnB w="0" cap="flat" cmpd="sng" algn="ctr">
+                      <a:noFill/>
+                    </a:lnB>
+                  </a:tcPr>
+                </a:tc>
+                <a:tc>
+                  <a:txBody>
+                    <a:bodyPr/>
+                    <a:lstStyle/>
+                    <a:p>
+                      <a:pPr algn="l" indent="0" marL="0">
+                        <a:buNone/>
+                      </a:pPr>
+                      <a:r>
+                        <a:rPr lang="en-US" sz="950" dirty="0">
+                          <a:solidFill>
+                            <a:schemeClr val="tx1"/>
+                          </a:solidFill>
+                        </a:rPr>
+                        <a:t>25；2.x</a:t>
+                      </a:r>
+                      <a:endParaRPr lang="en-US" sz="950" dirty="0"/>
+                    </a:p>
+                  </a:txBody>
+                  <a:tcPr marL="76200" marR="76200" marT="38100" marB="38100" anchor="ctr">
+                    <a:lnL w="0" cap="flat" cmpd="sng" algn="ctr">
+                      <a:noFill/>
+                    </a:lnL>
+                    <a:lnR w="0" cap="flat" cmpd="sng" algn="ctr">
+                      <a:noFill/>
+                    </a:lnR>
+                    <a:lnT w="0" cap="flat" cmpd="sng" algn="ctr">
+                      <a:noFill/>
+                    </a:lnT>
+                    <a:lnB w="0" cap="flat" cmpd="sng" algn="ctr">
+                      <a:noFill/>
+                    </a:lnB>
+                  </a:tcPr>
+                </a:tc>
+                <a:tc>
+                  <a:txBody>
+                    <a:bodyPr/>
+                    <a:lstStyle/>
+                    <a:p>
+                      <a:pPr algn="l" indent="0" marL="0">
+                        <a:buNone/>
+                      </a:pPr>
+                      <a:r>
+                        <a:rPr lang="en-US" sz="950" dirty="0">
+                          <a:solidFill>
+                            <a:schemeClr val="tx1"/>
+                          </a:solidFill>
+                        </a:rPr>
+                        <a:t>Apache-2.0；MPL-2.0</a:t>
+                      </a:r>
+                      <a:endParaRPr lang="en-US" sz="950" dirty="0"/>
+                    </a:p>
+                  </a:txBody>
+                  <a:tcPr marL="76200" marR="76200" marT="38100" marB="38100" anchor="ctr">
+                    <a:lnL w="0" cap="flat" cmpd="sng" algn="ctr">
+                      <a:noFill/>
+                    </a:lnL>
+                    <a:lnR w="0" cap="flat" cmpd="sng" algn="ctr">
+                      <a:noFill/>
+                    </a:lnR>
+                    <a:lnT w="0" cap="flat" cmpd="sng" algn="ctr">
+                      <a:noFill/>
+                    </a:lnT>
+                    <a:lnB w="0" cap="flat" cmpd="sng" algn="ctr">
+                      <a:noFill/>
+                    </a:lnB>
+                  </a:tcPr>
+                </a:tc>
+                <a:tc>
+                  <a:txBody>
+                    <a:bodyPr/>
+                    <a:lstStyle/>
+                    <a:p>
+                      <a:pPr algn="l" indent="0" marL="0">
+                        <a:buNone/>
+                      </a:pPr>
+                      <a:r>
+                        <a:rPr lang="en-US" sz="950" dirty="0">
+                          <a:solidFill>
+                            <a:schemeClr val="tx1"/>
+                          </a:solidFill>
+                        </a:rPr>
+                        <a:t>SSO／OIDC；密鑰只存參照</a:t>
+                      </a:r>
+                      <a:endParaRPr lang="en-US" sz="950" dirty="0"/>
+                    </a:p>
+                  </a:txBody>
+                  <a:tcPr marL="76200" marR="76200" marT="38100" marB="38100" anchor="ctr">
+                    <a:lnL w="0" cap="flat" cmpd="sng" algn="ctr">
+                      <a:noFill/>
+                    </a:lnL>
+                    <a:lnR w="0" cap="flat" cmpd="sng" algn="ctr">
+                      <a:noFill/>
+                    </a:lnR>
+                    <a:lnT w="0" cap="flat" cmpd="sng" algn="ctr">
+                      <a:noFill/>
+                    </a:lnT>
+                    <a:lnB w="0" cap="flat" cmpd="sng" algn="ctr">
+                      <a:noFill/>
+                    </a:lnB>
+                  </a:tcPr>
+                </a:tc>
+              </a:tr>
+              <a:tr h="301752">
+                <a:tc>
+                  <a:txBody>
+                    <a:bodyPr/>
+                    <a:lstStyle/>
+                    <a:p>
+                      <a:pPr algn="l" indent="0" marL="0">
+                        <a:buNone/>
+                      </a:pPr>
+                      <a:r>
+                        <a:rPr lang="en-US" sz="950" b="1" dirty="0">
+                          <a:solidFill>
+                            <a:schemeClr val="tx1"/>
+                          </a:solidFill>
+                        </a:rPr>
+                        <a:t>觀測</a:t>
+                      </a:r>
+                      <a:endParaRPr lang="en-US" sz="950" dirty="0"/>
+                    </a:p>
+                  </a:txBody>
+                  <a:tcPr marL="76200" marR="76200" marT="38100" marB="38100" anchor="ctr">
+                    <a:lnL w="0" cap="flat" cmpd="sng" algn="ctr">
+                      <a:noFill/>
+                    </a:lnL>
+                    <a:lnR w="0" cap="flat" cmpd="sng" algn="ctr">
+                      <a:noFill/>
+                    </a:lnR>
+                    <a:lnT w="0" cap="flat" cmpd="sng" algn="ctr">
+                      <a:noFill/>
+                    </a:lnT>
+                    <a:lnB w="0" cap="flat" cmpd="sng" algn="ctr">
+                      <a:noFill/>
+                    </a:lnB>
+                  </a:tcPr>
+                </a:tc>
+                <a:tc>
+                  <a:txBody>
+                    <a:bodyPr/>
+                    <a:lstStyle/>
+                    <a:p>
+                      <a:pPr algn="l" indent="0" marL="0">
+                        <a:buNone/>
+                      </a:pPr>
+                      <a:r>
+                        <a:rPr lang="en-US" sz="950" dirty="0">
+                          <a:solidFill>
+                            <a:schemeClr val="tx1"/>
+                          </a:solidFill>
+                        </a:rPr>
+                        <a:t>Prometheus ＋ OTel Collector ＋ node-exporter</a:t>
+                      </a:r>
+                      <a:endParaRPr lang="en-US" sz="950" dirty="0"/>
+                    </a:p>
+                  </a:txBody>
+                  <a:tcPr marL="76200" marR="76200" marT="38100" marB="38100" anchor="ctr">
+                    <a:lnL w="0" cap="flat" cmpd="sng" algn="ctr">
+                      <a:noFill/>
+                    </a:lnL>
+                    <a:lnR w="0" cap="flat" cmpd="sng" algn="ctr">
+                      <a:noFill/>
+                    </a:lnR>
+                    <a:lnT w="0" cap="flat" cmpd="sng" algn="ctr">
+                      <a:noFill/>
+                    </a:lnT>
+                    <a:lnB w="0" cap="flat" cmpd="sng" algn="ctr">
+                      <a:noFill/>
+                    </a:lnB>
+                  </a:tcPr>
+                </a:tc>
+                <a:tc>
+                  <a:txBody>
+                    <a:bodyPr/>
+                    <a:lstStyle/>
+                    <a:p>
+                      <a:pPr algn="l" indent="0" marL="0">
+                        <a:buNone/>
+                      </a:pPr>
+                      <a:r>
+                        <a:rPr lang="en-US" sz="950" dirty="0">
+                          <a:solidFill>
+                            <a:schemeClr val="tx1"/>
+                          </a:solidFill>
+                        </a:rPr>
+                        <a:t>2.x／0.1x</a:t>
+                      </a:r>
+                      <a:endParaRPr lang="en-US" sz="950" dirty="0"/>
+                    </a:p>
+                  </a:txBody>
+                  <a:tcPr marL="76200" marR="76200" marT="38100" marB="38100" anchor="ctr">
+                    <a:lnL w="0" cap="flat" cmpd="sng" algn="ctr">
+                      <a:noFill/>
+                    </a:lnL>
+                    <a:lnR w="0" cap="flat" cmpd="sng" algn="ctr">
+                      <a:noFill/>
+                    </a:lnR>
+                    <a:lnT w="0" cap="flat" cmpd="sng" algn="ctr">
+                      <a:noFill/>
+                    </a:lnT>
+                    <a:lnB w="0" cap="flat" cmpd="sng" algn="ctr">
+                      <a:noFill/>
+                    </a:lnB>
+                  </a:tcPr>
+                </a:tc>
+                <a:tc>
+                  <a:txBody>
+                    <a:bodyPr/>
+                    <a:lstStyle/>
+                    <a:p>
+                      <a:pPr algn="l" indent="0" marL="0">
+                        <a:buNone/>
+                      </a:pPr>
+                      <a:r>
+                        <a:rPr lang="en-US" sz="950" dirty="0">
+                          <a:solidFill>
+                            <a:schemeClr val="tx1"/>
+                          </a:solidFill>
+                        </a:rPr>
+                        <a:t>Apache-2.0</a:t>
+                      </a:r>
+                      <a:endParaRPr lang="en-US" sz="950" dirty="0"/>
+                    </a:p>
+                  </a:txBody>
+                  <a:tcPr marL="76200" marR="76200" marT="38100" marB="38100" anchor="ctr">
+                    <a:lnL w="0" cap="flat" cmpd="sng" algn="ctr">
+                      <a:noFill/>
+                    </a:lnL>
+                    <a:lnR w="0" cap="flat" cmpd="sng" algn="ctr">
+                      <a:noFill/>
+                    </a:lnR>
+                    <a:lnT w="0" cap="flat" cmpd="sng" algn="ctr">
+                      <a:noFill/>
+                    </a:lnT>
+                    <a:lnB w="0" cap="flat" cmpd="sng" algn="ctr">
+                      <a:noFill/>
+                    </a:lnB>
+                  </a:tcPr>
+                </a:tc>
+                <a:tc>
+                  <a:txBody>
+                    <a:bodyPr/>
+                    <a:lstStyle/>
+                    <a:p>
+                      <a:pPr algn="l" indent="0" marL="0">
+                        <a:buNone/>
+                      </a:pPr>
+                      <a:r>
+                        <a:rPr lang="en-US" sz="950" dirty="0">
+                          <a:solidFill>
+                            <a:schemeClr val="tx1"/>
+                          </a:solidFill>
+                        </a:rPr>
+                        <a:t>指標與告警；平台「系統監控」頁同源</a:t>
+                      </a:r>
+                      <a:endParaRPr lang="en-US" sz="950" dirty="0"/>
+                    </a:p>
+                  </a:txBody>
+                  <a:tcPr marL="76200" marR="76200" marT="38100" marB="38100" anchor="ctr">
+                    <a:lnL w="0" cap="flat" cmpd="sng" algn="ctr">
+                      <a:noFill/>
+                    </a:lnL>
+                    <a:lnR w="0" cap="flat" cmpd="sng" algn="ctr">
+                      <a:noFill/>
+                    </a:lnR>
+                    <a:lnT w="0" cap="flat" cmpd="sng" algn="ctr">
+                      <a:noFill/>
+                    </a:lnT>
+                    <a:lnB w="0" cap="flat" cmpd="sng" algn="ctr">
+                      <a:noFill/>
+                    </a:lnB>
+                  </a:tcPr>
+                </a:tc>
+              </a:tr>
+              <a:tr h="301752">
+                <a:tc>
+                  <a:txBody>
+                    <a:bodyPr/>
+                    <a:lstStyle/>
+                    <a:p>
+                      <a:pPr algn="l" indent="0" marL="0">
+                        <a:buNone/>
+                      </a:pPr>
+                      <a:r>
+                        <a:rPr lang="en-US" sz="950" b="1" dirty="0">
+                          <a:solidFill>
+                            <a:schemeClr val="tx1"/>
+                          </a:solidFill>
+                        </a:rPr>
+                        <a:t>觀測</a:t>
+                      </a:r>
+                      <a:endParaRPr lang="en-US" sz="950" dirty="0"/>
+                    </a:p>
+                  </a:txBody>
+                  <a:tcPr marL="76200" marR="76200" marT="38100" marB="38100" anchor="ctr">
+                    <a:lnL w="0" cap="flat" cmpd="sng" algn="ctr">
+                      <a:noFill/>
+                    </a:lnL>
+                    <a:lnR w="0" cap="flat" cmpd="sng" algn="ctr">
+                      <a:noFill/>
+                    </a:lnR>
+                    <a:lnT w="0" cap="flat" cmpd="sng" algn="ctr">
+                      <a:noFill/>
+                    </a:lnT>
+                    <a:lnB w="0" cap="flat" cmpd="sng" algn="ctr">
+                      <a:noFill/>
+                    </a:lnB>
+                  </a:tcPr>
+                </a:tc>
+                <a:tc>
+                  <a:txBody>
+                    <a:bodyPr/>
+                    <a:lstStyle/>
+                    <a:p>
+                      <a:pPr algn="l" indent="0" marL="0">
+                        <a:buNone/>
+                      </a:pPr>
+                      <a:r>
+                        <a:rPr lang="en-US" sz="950" dirty="0">
+                          <a:solidFill>
+                            <a:schemeClr val="tx1"/>
+                          </a:solidFill>
+                        </a:rPr>
+                        <a:t>Grafana OSS</a:t>
+                      </a:r>
+                      <a:endParaRPr lang="en-US" sz="950" dirty="0"/>
+                    </a:p>
+                  </a:txBody>
+                  <a:tcPr marL="76200" marR="76200" marT="38100" marB="38100" anchor="ctr">
+                    <a:lnL w="0" cap="flat" cmpd="sng" algn="ctr">
+                      <a:noFill/>
+                    </a:lnL>
+                    <a:lnR w="0" cap="flat" cmpd="sng" algn="ctr">
+                      <a:noFill/>
+                    </a:lnR>
+                    <a:lnT w="0" cap="flat" cmpd="sng" algn="ctr">
+                      <a:noFill/>
+                    </a:lnT>
+                    <a:lnB w="0" cap="flat" cmpd="sng" algn="ctr">
+                      <a:noFill/>
+                    </a:lnB>
+                  </a:tcPr>
+                </a:tc>
+                <a:tc>
+                  <a:txBody>
+                    <a:bodyPr/>
+                    <a:lstStyle/>
+                    <a:p>
+                      <a:pPr algn="l" indent="0" marL="0">
+                        <a:buNone/>
+                      </a:pPr>
+                      <a:r>
+                        <a:rPr lang="en-US" sz="950" dirty="0">
+                          <a:solidFill>
+                            <a:schemeClr val="tx1"/>
+                          </a:solidFill>
+                        </a:rPr>
+                        <a:t>11.x</a:t>
+                      </a:r>
+                      <a:endParaRPr lang="en-US" sz="950" dirty="0"/>
+                    </a:p>
+                  </a:txBody>
+                  <a:tcPr marL="76200" marR="76200" marT="38100" marB="38100" anchor="ctr">
+                    <a:lnL w="0" cap="flat" cmpd="sng" algn="ctr">
+                      <a:noFill/>
+                    </a:lnL>
+                    <a:lnR w="0" cap="flat" cmpd="sng" algn="ctr">
+                      <a:noFill/>
+                    </a:lnR>
+                    <a:lnT w="0" cap="flat" cmpd="sng" algn="ctr">
+                      <a:noFill/>
+                    </a:lnT>
+                    <a:lnB w="0" cap="flat" cmpd="sng" algn="ctr">
+                      <a:noFill/>
+                    </a:lnB>
+                  </a:tcPr>
+                </a:tc>
+                <a:tc>
+                  <a:txBody>
+                    <a:bodyPr/>
+                    <a:lstStyle/>
+                    <a:p>
+                      <a:pPr algn="l" indent="0" marL="0">
+                        <a:buNone/>
+                      </a:pPr>
+                      <a:r>
+                        <a:rPr lang="en-US" sz="950" dirty="0">
+                          <a:solidFill>
+                            <a:schemeClr val="tx1"/>
+                          </a:solidFill>
+                        </a:rPr>
+                        <a:t>AGPL-3.0（內部使用）</a:t>
+                      </a:r>
+                      <a:endParaRPr lang="en-US" sz="950" dirty="0"/>
+                    </a:p>
+                  </a:txBody>
+                  <a:tcPr marL="76200" marR="76200" marT="38100" marB="38100" anchor="ctr">
+                    <a:lnL w="0" cap="flat" cmpd="sng" algn="ctr">
+                      <a:noFill/>
+                    </a:lnL>
+                    <a:lnR w="0" cap="flat" cmpd="sng" algn="ctr">
+                      <a:noFill/>
+                    </a:lnR>
+                    <a:lnT w="0" cap="flat" cmpd="sng" algn="ctr">
+                      <a:noFill/>
+                    </a:lnT>
+                    <a:lnB w="0" cap="flat" cmpd="sng" algn="ctr">
+                      <a:noFill/>
+                    </a:lnB>
+                  </a:tcPr>
+                </a:tc>
+                <a:tc>
+                  <a:txBody>
+                    <a:bodyPr/>
+                    <a:lstStyle/>
+                    <a:p>
+                      <a:pPr algn="l" indent="0" marL="0">
+                        <a:buNone/>
+                      </a:pPr>
+                      <a:r>
+                        <a:rPr lang="en-US" sz="950" dirty="0">
+                          <a:solidFill>
+                            <a:schemeClr val="tx1"/>
+                          </a:solidFill>
+                        </a:rPr>
+                        <a:t>監控看板；不修改、不散布</a:t>
+                      </a:r>
+                      <a:endParaRPr lang="en-US" sz="950" dirty="0"/>
+                    </a:p>
+                  </a:txBody>
+                  <a:tcPr marL="76200" marR="76200" marT="38100" marB="38100" anchor="ctr">
+                    <a:lnL w="0" cap="flat" cmpd="sng" algn="ctr">
+                      <a:noFill/>
+                    </a:lnL>
+                    <a:lnR w="0" cap="flat" cmpd="sng" algn="ctr">
+                      <a:noFill/>
+                    </a:lnR>
+                    <a:lnT w="0" cap="flat" cmpd="sng" algn="ctr">
+                      <a:noFill/>
+                    </a:lnT>
+                    <a:lnB w="0" cap="flat" cmpd="sng" algn="ctr">
+                      <a:noFill/>
+                    </a:lnB>
+                  </a:tcPr>
+                </a:tc>
+              </a:tr>
+              <a:tr h="301752">
+                <a:tc>
+                  <a:txBody>
+                    <a:bodyPr/>
+                    <a:lstStyle/>
+                    <a:p>
+                      <a:pPr algn="l" indent="0" marL="0">
+                        <a:buNone/>
+                      </a:pPr>
+                      <a:r>
+                        <a:rPr lang="en-US" sz="950" b="1" dirty="0">
+                          <a:solidFill>
+                            <a:schemeClr val="tx1"/>
+                          </a:solidFill>
+                        </a:rPr>
+                        <a:t>觀測</a:t>
+                      </a:r>
+                      <a:endParaRPr lang="en-US" sz="950" dirty="0"/>
+                    </a:p>
+                  </a:txBody>
+                  <a:tcPr marL="76200" marR="76200" marT="38100" marB="38100" anchor="ctr">
+                    <a:lnL w="0" cap="flat" cmpd="sng" algn="ctr">
+                      <a:noFill/>
+                    </a:lnL>
+                    <a:lnR w="0" cap="flat" cmpd="sng" algn="ctr">
+                      <a:noFill/>
+                    </a:lnR>
+                    <a:lnT w="0" cap="flat" cmpd="sng" algn="ctr">
+                      <a:noFill/>
+                    </a:lnT>
+                    <a:lnB w="0" cap="flat" cmpd="sng" algn="ctr">
+                      <a:noFill/>
+                    </a:lnB>
+                  </a:tcPr>
+                </a:tc>
+                <a:tc>
+                  <a:txBody>
+                    <a:bodyPr/>
+                    <a:lstStyle/>
+                    <a:p>
+                      <a:pPr algn="l" indent="0" marL="0">
+                        <a:buNone/>
+                      </a:pPr>
+                      <a:r>
+                        <a:rPr lang="en-US" sz="950" dirty="0">
+                          <a:solidFill>
+                            <a:schemeClr val="tx1"/>
+                          </a:solidFill>
+                        </a:rPr>
+                        <a:t>VictoriaLogs（或 OpenSearch）</a:t>
+                      </a:r>
+                      <a:endParaRPr lang="en-US" sz="950" dirty="0"/>
+                    </a:p>
+                  </a:txBody>
+                  <a:tcPr marL="76200" marR="76200" marT="38100" marB="38100" anchor="ctr">
+                    <a:lnL w="0" cap="flat" cmpd="sng" algn="ctr">
+                      <a:noFill/>
+                    </a:lnL>
+                    <a:lnR w="0" cap="flat" cmpd="sng" algn="ctr">
+                      <a:noFill/>
+                    </a:lnR>
+                    <a:lnT w="0" cap="flat" cmpd="sng" algn="ctr">
+                      <a:noFill/>
+                    </a:lnT>
+                    <a:lnB w="0" cap="flat" cmpd="sng" algn="ctr">
+                      <a:noFill/>
+                    </a:lnB>
+                  </a:tcPr>
+                </a:tc>
+                <a:tc>
+                  <a:txBody>
+                    <a:bodyPr/>
+                    <a:lstStyle/>
+                    <a:p>
+                      <a:pPr algn="l" indent="0" marL="0">
+                        <a:buNone/>
+                      </a:pPr>
+                      <a:r>
+                        <a:rPr lang="en-US" sz="950" dirty="0">
+                          <a:solidFill>
+                            <a:schemeClr val="tx1"/>
+                          </a:solidFill>
+                        </a:rPr>
+                        <a:t>1.x</a:t>
+                      </a:r>
+                      <a:endParaRPr lang="en-US" sz="950" dirty="0"/>
+                    </a:p>
+                  </a:txBody>
+                  <a:tcPr marL="76200" marR="76200" marT="38100" marB="38100" anchor="ctr">
+                    <a:lnL w="0" cap="flat" cmpd="sng" algn="ctr">
+                      <a:noFill/>
+                    </a:lnL>
+                    <a:lnR w="0" cap="flat" cmpd="sng" algn="ctr">
+                      <a:noFill/>
+                    </a:lnR>
+                    <a:lnT w="0" cap="flat" cmpd="sng" algn="ctr">
+                      <a:noFill/>
+                    </a:lnT>
+                    <a:lnB w="0" cap="flat" cmpd="sng" algn="ctr">
+                      <a:noFill/>
+                    </a:lnB>
+                  </a:tcPr>
+                </a:tc>
+                <a:tc>
+                  <a:txBody>
+                    <a:bodyPr/>
+                    <a:lstStyle/>
+                    <a:p>
+                      <a:pPr algn="l" indent="0" marL="0">
+                        <a:buNone/>
+                      </a:pPr>
+                      <a:r>
+                        <a:rPr lang="en-US" sz="950" dirty="0">
+                          <a:solidFill>
+                            <a:schemeClr val="tx1"/>
+                          </a:solidFill>
+                        </a:rPr>
+                        <a:t>Apache-2.0</a:t>
+                      </a:r>
+                      <a:endParaRPr lang="en-US" sz="950" dirty="0"/>
+                    </a:p>
+                  </a:txBody>
+                  <a:tcPr marL="76200" marR="76200" marT="38100" marB="38100" anchor="ctr">
+                    <a:lnL w="0" cap="flat" cmpd="sng" algn="ctr">
+                      <a:noFill/>
+                    </a:lnL>
+                    <a:lnR w="0" cap="flat" cmpd="sng" algn="ctr">
+                      <a:noFill/>
+                    </a:lnR>
+                    <a:lnT w="0" cap="flat" cmpd="sng" algn="ctr">
+                      <a:noFill/>
+                    </a:lnT>
+                    <a:lnB w="0" cap="flat" cmpd="sng" algn="ctr">
+                      <a:noFill/>
+                    </a:lnB>
+                  </a:tcPr>
+                </a:tc>
+                <a:tc>
+                  <a:txBody>
+                    <a:bodyPr/>
+                    <a:lstStyle/>
+                    <a:p>
+                      <a:pPr algn="l" indent="0" marL="0">
+                        <a:buNone/>
+                      </a:pPr>
+                      <a:r>
+                        <a:rPr lang="en-US" sz="950" dirty="0">
+                          <a:solidFill>
+                            <a:schemeClr val="tx1"/>
+                          </a:solidFill>
+                        </a:rPr>
+                        <a:t>日誌</a:t>
+                      </a:r>
+                      <a:endParaRPr lang="en-US" sz="950" dirty="0"/>
+                    </a:p>
+                  </a:txBody>
+                  <a:tcPr marL="76200" marR="76200" marT="38100" marB="38100" anchor="ctr">
+                    <a:lnL w="0" cap="flat" cmpd="sng" algn="ctr">
+                      <a:noFill/>
+                    </a:lnL>
+                    <a:lnR w="0" cap="flat" cmpd="sng" algn="ctr">
+                      <a:noFill/>
+                    </a:lnR>
+                    <a:lnT w="0" cap="flat" cmpd="sng" algn="ctr">
+                      <a:noFill/>
+                    </a:lnT>
+                    <a:lnB w="0" cap="flat" cmpd="sng" algn="ctr">
+                      <a:noFill/>
+                    </a:lnB>
+                  </a:tcPr>
+                </a:tc>
+              </a:tr>
+              <a:tr h="301752">
+                <a:tc>
+                  <a:txBody>
+                    <a:bodyPr/>
+                    <a:lstStyle/>
+                    <a:p>
+                      <a:pPr algn="l" indent="0" marL="0">
+                        <a:buNone/>
+                      </a:pPr>
+                      <a:r>
+                        <a:rPr lang="en-US" sz="950" b="1" dirty="0">
+                          <a:solidFill>
+                            <a:schemeClr val="tx1"/>
+                          </a:solidFill>
+                        </a:rPr>
+                        <a:t>執行環境</a:t>
+                      </a:r>
+                      <a:endParaRPr lang="en-US" sz="950" dirty="0"/>
+                    </a:p>
+                  </a:txBody>
+                  <a:tcPr marL="76200" marR="76200" marT="38100" marB="38100" anchor="ctr">
+                    <a:lnL w="0" cap="flat" cmpd="sng" algn="ctr">
+                      <a:noFill/>
+                    </a:lnL>
+                    <a:lnR w="0" cap="flat" cmpd="sng" algn="ctr">
+                      <a:noFill/>
+                    </a:lnR>
+                    <a:lnT w="0" cap="flat" cmpd="sng" algn="ctr">
+                      <a:noFill/>
+                    </a:lnT>
+                    <a:lnB w="0" cap="flat" cmpd="sng" algn="ctr">
+                      <a:noFill/>
+                    </a:lnB>
+                  </a:tcPr>
+                </a:tc>
+                <a:tc>
+                  <a:txBody>
+                    <a:bodyPr/>
+                    <a:lstStyle/>
+                    <a:p>
+                      <a:pPr algn="l" indent="0" marL="0">
+                        <a:buNone/>
+                      </a:pPr>
+                      <a:r>
+                        <a:rPr lang="en-US" sz="950" dirty="0">
+                          <a:solidFill>
+                            <a:schemeClr val="tx1"/>
+                          </a:solidFill>
+                        </a:rPr>
+                        <a:t>Python／Go／Node／Temurin JDK</a:t>
+                      </a:r>
+                      <a:endParaRPr lang="en-US" sz="950" dirty="0"/>
+                    </a:p>
+                  </a:txBody>
+                  <a:tcPr marL="76200" marR="76200" marT="38100" marB="38100" anchor="ctr">
+                    <a:lnL w="0" cap="flat" cmpd="sng" algn="ctr">
+                      <a:noFill/>
+                    </a:lnL>
+                    <a:lnR w="0" cap="flat" cmpd="sng" algn="ctr">
+                      <a:noFill/>
+                    </a:lnR>
+                    <a:lnT w="0" cap="flat" cmpd="sng" algn="ctr">
+                      <a:noFill/>
+                    </a:lnT>
+                    <a:lnB w="0" cap="flat" cmpd="sng" algn="ctr">
+                      <a:noFill/>
+                    </a:lnB>
+                  </a:tcPr>
+                </a:tc>
+                <a:tc>
+                  <a:txBody>
+                    <a:bodyPr/>
+                    <a:lstStyle/>
+                    <a:p>
+                      <a:pPr algn="l" indent="0" marL="0">
+                        <a:buNone/>
+                      </a:pPr>
+                      <a:r>
+                        <a:rPr lang="en-US" sz="950" dirty="0">
+                          <a:solidFill>
+                            <a:schemeClr val="tx1"/>
+                          </a:solidFill>
+                        </a:rPr>
+                        <a:t>3.12／1.23／22／17</a:t>
+                      </a:r>
+                      <a:endParaRPr lang="en-US" sz="950" dirty="0"/>
+                    </a:p>
+                  </a:txBody>
+                  <a:tcPr marL="76200" marR="76200" marT="38100" marB="38100" anchor="ctr">
+                    <a:lnL w="0" cap="flat" cmpd="sng" algn="ctr">
+                      <a:noFill/>
+                    </a:lnL>
+                    <a:lnR w="0" cap="flat" cmpd="sng" algn="ctr">
+                      <a:noFill/>
+                    </a:lnR>
+                    <a:lnT w="0" cap="flat" cmpd="sng" algn="ctr">
+                      <a:noFill/>
+                    </a:lnT>
+                    <a:lnB w="0" cap="flat" cmpd="sng" algn="ctr">
+                      <a:noFill/>
+                    </a:lnB>
+                  </a:tcPr>
+                </a:tc>
+                <a:tc>
+                  <a:txBody>
+                    <a:bodyPr/>
+                    <a:lstStyle/>
+                    <a:p>
+                      <a:pPr algn="l" indent="0" marL="0">
+                        <a:buNone/>
+                      </a:pPr>
+                      <a:r>
+                        <a:rPr lang="en-US" sz="950" dirty="0">
+                          <a:solidFill>
+                            <a:schemeClr val="tx1"/>
+                          </a:solidFill>
+                        </a:rPr>
+                        <a:t>PSF／BSD／MIT／GPL+CE</a:t>
+                      </a:r>
+                      <a:endParaRPr lang="en-US" sz="950" dirty="0"/>
+                    </a:p>
+                  </a:txBody>
+                  <a:tcPr marL="76200" marR="76200" marT="38100" marB="38100" anchor="ctr">
+                    <a:lnL w="0" cap="flat" cmpd="sng" algn="ctr">
+                      <a:noFill/>
+                    </a:lnL>
+                    <a:lnR w="0" cap="flat" cmpd="sng" algn="ctr">
+                      <a:noFill/>
+                    </a:lnR>
+                    <a:lnT w="0" cap="flat" cmpd="sng" algn="ctr">
+                      <a:noFill/>
+                    </a:lnT>
+                    <a:lnB w="0" cap="flat" cmpd="sng" algn="ctr">
+                      <a:noFill/>
+                    </a:lnB>
+                  </a:tcPr>
+                </a:tc>
+                <a:tc>
+                  <a:txBody>
+                    <a:bodyPr/>
+                    <a:lstStyle/>
+                    <a:p>
+                      <a:pPr algn="l" indent="0" marL="0">
+                        <a:buNone/>
+                      </a:pPr>
+                      <a:r>
+                        <a:rPr lang="en-US" sz="950" dirty="0">
+                          <a:solidFill>
+                            <a:schemeClr val="tx1"/>
+                          </a:solidFill>
+                        </a:rPr>
+                        <a:t>core／ingest／web／Flink</a:t>
+                      </a:r>
+                      <a:endParaRPr lang="en-US" sz="950" dirty="0"/>
+                    </a:p>
+                  </a:txBody>
+                  <a:tcPr marL="76200" marR="76200" marT="38100" marB="38100" anchor="ctr">
+                    <a:lnL w="0" cap="flat" cmpd="sng" algn="ctr">
+                      <a:noFill/>
+                    </a:lnL>
+                    <a:lnR w="0" cap="flat" cmpd="sng" algn="ctr">
+                      <a:noFill/>
+                    </a:lnR>
+                    <a:lnT w="0" cap="flat" cmpd="sng" algn="ctr">
+                      <a:noFill/>
+                    </a:lnT>
+                    <a:lnB w="0" cap="flat" cmpd="sng" algn="ctr">
+                      <a:noFill/>
+                    </a:lnB>
+                  </a:tcPr>
+                </a:tc>
+              </a:tr>
+              <a:tr h="301752">
+                <a:tc>
+                  <a:txBody>
+                    <a:bodyPr/>
+                    <a:lstStyle/>
+                    <a:p>
+                      <a:pPr algn="l" indent="0" marL="0">
+                        <a:buNone/>
+                      </a:pPr>
+                      <a:r>
+                        <a:rPr lang="en-US" sz="950" b="1" dirty="0">
+                          <a:solidFill>
+                            <a:schemeClr val="tx1"/>
+                          </a:solidFill>
+                        </a:rPr>
+                        <a:t>作業系統</a:t>
+                      </a:r>
+                      <a:endParaRPr lang="en-US" sz="950" dirty="0"/>
+                    </a:p>
+                  </a:txBody>
+                  <a:tcPr marL="76200" marR="76200" marT="38100" marB="38100" anchor="ctr">
+                    <a:lnL w="0" cap="flat" cmpd="sng" algn="ctr">
+                      <a:noFill/>
+                    </a:lnL>
+                    <a:lnR w="0" cap="flat" cmpd="sng" algn="ctr">
+                      <a:noFill/>
+                    </a:lnR>
+                    <a:lnT w="0" cap="flat" cmpd="sng" algn="ctr">
+                      <a:noFill/>
+                    </a:lnT>
+                    <a:lnB w="0" cap="flat" cmpd="sng" algn="ctr">
+                      <a:noFill/>
+                    </a:lnB>
+                  </a:tcPr>
+                </a:tc>
+                <a:tc>
+                  <a:txBody>
+                    <a:bodyPr/>
+                    <a:lstStyle/>
+                    <a:p>
+                      <a:pPr algn="l" indent="0" marL="0">
+                        <a:buNone/>
+                      </a:pPr>
+                      <a:r>
+                        <a:rPr lang="en-US" sz="950" dirty="0">
+                          <a:solidFill>
+                            <a:schemeClr val="tx1"/>
+                          </a:solidFill>
+                        </a:rPr>
+                        <a:t>RHEL 9／Rocky 9；UBI 9 minimal 映像</a:t>
+                      </a:r>
+                      <a:endParaRPr lang="en-US" sz="950" dirty="0"/>
+                    </a:p>
+                  </a:txBody>
+                  <a:tcPr marL="76200" marR="76200" marT="38100" marB="38100" anchor="ctr">
+                    <a:lnL w="0" cap="flat" cmpd="sng" algn="ctr">
+                      <a:noFill/>
+                    </a:lnL>
+                    <a:lnR w="0" cap="flat" cmpd="sng" algn="ctr">
+                      <a:noFill/>
+                    </a:lnR>
+                    <a:lnT w="0" cap="flat" cmpd="sng" algn="ctr">
+                      <a:noFill/>
+                    </a:lnT>
+                    <a:lnB w="0" cap="flat" cmpd="sng" algn="ctr">
+                      <a:noFill/>
+                    </a:lnB>
+                  </a:tcPr>
+                </a:tc>
+                <a:tc>
+                  <a:txBody>
+                    <a:bodyPr/>
+                    <a:lstStyle/>
+                    <a:p>
+                      <a:pPr algn="l" indent="0" marL="0">
+                        <a:buNone/>
+                      </a:pPr>
+                      <a:r>
+                        <a:rPr lang="en-US" sz="950" dirty="0">
+                          <a:solidFill>
+                            <a:schemeClr val="tx1"/>
+                          </a:solidFill>
+                        </a:rPr>
+                        <a:t>9.4+</a:t>
+                      </a:r>
+                      <a:endParaRPr lang="en-US" sz="950" dirty="0"/>
+                    </a:p>
+                  </a:txBody>
+                  <a:tcPr marL="76200" marR="76200" marT="38100" marB="38100" anchor="ctr">
+                    <a:lnL w="0" cap="flat" cmpd="sng" algn="ctr">
+                      <a:noFill/>
+                    </a:lnL>
+                    <a:lnR w="0" cap="flat" cmpd="sng" algn="ctr">
+                      <a:noFill/>
+                    </a:lnR>
+                    <a:lnT w="0" cap="flat" cmpd="sng" algn="ctr">
+                      <a:noFill/>
+                    </a:lnT>
+                    <a:lnB w="0" cap="flat" cmpd="sng" algn="ctr">
+                      <a:noFill/>
+                    </a:lnB>
+                  </a:tcPr>
+                </a:tc>
+                <a:tc>
+                  <a:txBody>
+                    <a:bodyPr/>
+                    <a:lstStyle/>
+                    <a:p>
+                      <a:pPr algn="l" indent="0" marL="0">
+                        <a:buNone/>
+                      </a:pPr>
+                      <a:r>
+                        <a:rPr lang="en-US" sz="950" dirty="0">
+                          <a:solidFill>
+                            <a:schemeClr val="tx1"/>
+                          </a:solidFill>
+                        </a:rPr>
+                        <a:t>—</a:t>
+                      </a:r>
+                      <a:endParaRPr lang="en-US" sz="950" dirty="0"/>
+                    </a:p>
+                  </a:txBody>
+                  <a:tcPr marL="76200" marR="76200" marT="38100" marB="38100" anchor="ctr">
+                    <a:lnL w="0" cap="flat" cmpd="sng" algn="ctr">
+                      <a:noFill/>
+                    </a:lnL>
+                    <a:lnR w="0" cap="flat" cmpd="sng" algn="ctr">
+                      <a:noFill/>
+                    </a:lnR>
+                    <a:lnT w="0" cap="flat" cmpd="sng" algn="ctr">
+                      <a:noFill/>
+                    </a:lnT>
+                    <a:lnB w="0" cap="flat" cmpd="sng" algn="ctr">
+                      <a:noFill/>
+                    </a:lnB>
+                  </a:tcPr>
+                </a:tc>
+                <a:tc>
+                  <a:txBody>
+                    <a:bodyPr/>
+                    <a:lstStyle/>
+                    <a:p>
+                      <a:pPr algn="l" indent="0" marL="0">
+                        <a:buNone/>
+                      </a:pPr>
+                      <a:r>
+                        <a:rPr lang="en-US" sz="950" dirty="0">
+                          <a:solidFill>
+                            <a:schemeClr val="tx1"/>
+                          </a:solidFill>
+                        </a:rPr>
+                        <a:t>SELinux；容器無 root、唯讀</a:t>
+                      </a:r>
+                      <a:endParaRPr lang="en-US" sz="950" dirty="0"/>
+                    </a:p>
+                  </a:txBody>
+                  <a:tcPr marL="76200" marR="76200" marT="38100" marB="38100" anchor="ctr">
+                    <a:lnL w="0" cap="flat" cmpd="sng" algn="ctr">
+                      <a:noFill/>
+                    </a:lnL>
+                    <a:lnR w="0" cap="flat" cmpd="sng" algn="ctr">
+                      <a:noFill/>
+                    </a:lnR>
+                    <a:lnT w="0" cap="flat" cmpd="sng" algn="ctr">
+                      <a:noFill/>
+                    </a:lnT>
+                    <a:lnB w="0" cap="flat" cmpd="sng" algn="ctr">
+                      <a:noFill/>
+                    </a:lnB>
+                  </a:tcPr>
+                </a:tc>
+              </a:tr>
+            </a:tbl>
+          </a:graphicData>
+        </a:graphic>
+      </p:graphicFrame>
+      <p:sp>
+        <p:nvSpPr>
+          <p:cNvPr id="4" name="Text 1"/>
+          <p:cNvSpPr txBox="1"/>
+          <p:nvPr/>
+        </p:nvSpPr>
+        <p:spPr>
+          <a:xfrm>
+            <a:off x="457200" y="4498848"/>
+            <a:ext cx="8229600" cy="228600"/>
+          </a:xfrm>
+          <a:prstGeom prst="rect">
+            <a:avLst/>
+          </a:prstGeom>
+          <a:noFill/>
+          <a:ln/>
+        </p:spPr>
+        <p:txBody>
+          <a:bodyPr wrap="square" lIns="0" tIns="0" rIns="0" bIns="0" rtlCol="0" anchor="t"/>
+          <a:lstStyle/>
+          <a:p>
+            <a:pPr indent="0" marL="0">
+              <a:buNone/>
+            </a:pPr>
+            <a:r>
+              <a:rPr lang="en-US" sz="900" dirty="0">
+                <a:solidFill>
+                  <a:srgbClr val="7C8992"/>
+                </a:solidFill>
+              </a:rPr>
+              <a:t>必付授權 0；copyleft 只有 Grafana OSS（內部使用）。刻意不用：Redis ≥ 7.4、MinIO、Elasticsearch（SSPL／AGPL）、Vault／Terraform（BSL）、Confluent 社群授權元件</a:t>
+            </a:r>
+            <a:endParaRPr lang="en-US" sz="900" dirty="0"/>
+          </a:p>
+        </p:txBody>
+      </p:sp>
+      <p:sp>
+        <p:nvSpPr>
+          <p:cNvPr id="25" name="Slide Number Placeholder 0"/>
+          <p:cNvSpPr>
+            <a:spLocks noGrp="1"/>
+          </p:cNvSpPr>
+          <p:nvPr>
+            <p:ph type="sldNum" sz="quarter" idx="4294967295"/>
+          </p:nvPr>
+        </p:nvSpPr>
+        <p:spPr>
+          <a:xfrm>
+            <a:off x="8412480" y="4754880"/>
+            <a:ext cx="457200" cy="274320"/>
+          </a:xfrm>
+          <a:prstGeom prst="rect">
+            <a:avLst/>
+          </a:prstGeom>
+          <a:extLst>
+            <a:ext uri="{C572A759-6A51-4108-AA02-DFA0A04FC94B}">
+              <ma14:wrappingTextBoxFlag xmlns:ma14="http://schemas.microsoft.com/office/mac/drawingml/2011/main" val="0"/>
+            </a:ext>
+          </a:extLst>
+        </p:spPr>
+        <p:txBody>
+          <a:bodyPr/>
+          <a:lstStyle>
+            <a:lvl1pPr>
+              <a:defRPr sz="1000">
+                <a:solidFill>
+                  <a:srgbClr val="7C8992"/>
+                </a:solidFill>
+              </a:defRPr>
+            </a:lvl1pPr>
+          </a:lstStyle>
+          <a:p>
+            <a:pPr algn="r"/>
+            <a:fld id="{F7021451-1387-4CA6-816F-3879F97B5CBC}" type="slidenum">
+              <a:rPr b="0" lang="en-US"/>
+              <a:t>17</a:t>
+            </a:fld>
+            <a:endParaRPr lang="en-US"/>
+          </a:p>
+        </p:txBody>
+      </p:sp>
+    </p:spTree>
+  </p:cSld>
+  <p:clrMapOvr>
+    <a:masterClrMapping/>
+  </p:clrMapOvr>
+</p:sld>
+</file>
+
+<file path=ppt/slides/slide18.xml><?xml version="1.0" encoding="utf-8"?>
+<p:sld xmlns:a="http://schemas.openxmlformats.org/drawingml/2006/main" xmlns:r="http://schemas.openxmlformats.org/officeDocument/2006/relationships" xmlns:p="http://schemas.openxmlformats.org/presentationml/2006/main">
+  <p:cSld name="Slide 18">
+    <p:spTree>
+      <p:nvGrpSpPr>
+        <p:cNvPr id="1" name=""/>
+        <p:cNvGrpSpPr/>
+        <p:nvPr/>
+      </p:nvGrpSpPr>
+      <p:grpSpPr>
+        <a:xfrm>
+          <a:off x="0" y="0"/>
+          <a:ext cx="0" cy="0"/>
+          <a:chOff x="0" y="0"/>
+          <a:chExt cx="0" cy="0"/>
+        </a:xfrm>
+      </p:grpSpPr>
+      <p:sp>
+        <p:nvSpPr>
+          <p:cNvPr id="2" name="Text 0"/>
+          <p:cNvSpPr/>
+          <p:nvPr>
+            <p:ph idx="100" type="title" hasCustomPrompt="1"/>
+          </p:nvPr>
+        </p:nvSpPr>
+        <p:spPr>
+          <a:xfrm>
+            <a:off x="457200" y="274320"/>
+            <a:ext cx="8229600" cy="868680"/>
+          </a:xfrm>
+          <a:prstGeom prst="rect">
+            <a:avLst/>
+          </a:prstGeom>
+          <a:noFill/>
+          <a:ln/>
+        </p:spPr>
+        <p:txBody>
+          <a:bodyPr wrap="square" lIns="0" tIns="0" rIns="0" bIns="0" rtlCol="0" anchor="t"/>
+          <a:lstStyle/>
+          <a:p>
+            <a:pPr algn="l" indent="0" marL="0">
+              <a:buNone/>
+            </a:pPr>
+            <a:r>
+              <a:rPr lang="en-US" sz="2400" b="1" dirty="0">
+                <a:solidFill>
+                  <a:schemeClr val="tx1"/>
+                </a:solidFill>
+              </a:rPr>
+              <a:t>M0 要客戶拍板十項，11-13 前決定</a:t>
+            </a:r>
+            <a:endParaRPr lang="en-US" sz="2400" dirty="0"/>
+          </a:p>
+        </p:txBody>
+      </p:sp>
+      <p:sp>
+        <p:nvSpPr>
+          <p:cNvPr id="3" name="s15_col0"/>
+          <p:cNvSpPr/>
+          <p:nvPr/>
+        </p:nvSpPr>
+        <p:spPr>
+          <a:xfrm>
+            <a:off x="457200" y="1280160"/>
+            <a:ext cx="4023360" cy="3246120"/>
+          </a:xfrm>
+          <a:prstGeom prst="roundRect">
+            <a:avLst>
+              <a:gd name="adj" fmla="val 2254"/>
+            </a:avLst>
+          </a:prstGeom>
+          <a:solidFill>
+            <a:schemeClr val="bg1"/>
+          </a:solidFill>
+          <a:ln w="9525">
+            <a:solidFill>
+              <a:srgbClr val="E2E8EC"/>
+            </a:solidFill>
+            <a:prstDash val="solid"/>
+          </a:ln>
+        </p:spPr>
+      </p:sp>
+      <p:sp>
+        <p:nvSpPr>
+          <p:cNvPr id="4" name="Text 2"/>
+          <p:cNvSpPr txBox="1"/>
+          <p:nvPr/>
+        </p:nvSpPr>
+        <p:spPr>
+          <a:xfrm>
+            <a:off x="685800" y="1463040"/>
+            <a:ext cx="3611880" cy="2926080"/>
+          </a:xfrm>
+          <a:prstGeom prst="rect">
+            <a:avLst/>
+          </a:prstGeom>
+          <a:noFill/>
+          <a:ln/>
+        </p:spPr>
+        <p:txBody>
+          <a:bodyPr wrap="square" lIns="0" tIns="0" rIns="0" bIns="0" rtlCol="0" anchor="t"/>
+          <a:lstStyle/>
+          <a:p>
+            <a:pPr indent="0" marL="0">
+              <a:spcAft>
+                <a:spcPts val="1000"/>
+              </a:spcAft>
+              <a:buNone/>
+            </a:pPr>
+            <a:r>
+              <a:rPr lang="en-US" sz="1400" dirty="0">
+                <a:solidFill>
+                  <a:schemeClr val="tx1"/>
+                </a:solidFill>
+              </a:rPr>
+              <a:t>1. 部署環境：GCP 或機房、機器檔位</a:t>
+            </a:r>
+            <a:endParaRPr lang="en-US" sz="1400" dirty="0"/>
+          </a:p>
+          <a:p>
+            <a:pPr indent="0" marL="0">
+              <a:spcAft>
+                <a:spcPts val="1000"/>
+              </a:spcAft>
+              <a:buNone/>
+            </a:pPr>
+            <a:r>
+              <a:rPr lang="en-US" sz="1400" dirty="0">
+                <a:solidFill>
+                  <a:schemeClr val="tx1"/>
+                </a:solidFill>
+              </a:rPr>
+              <a:t>2. 交易資料提供方式：批次或 Kafka</a:t>
+            </a:r>
+            <a:endParaRPr lang="en-US" sz="1400" dirty="0"/>
+          </a:p>
+          <a:p>
+            <a:pPr indent="0" marL="0">
+              <a:spcAft>
+                <a:spcPts val="1000"/>
+              </a:spcAft>
+              <a:buNone/>
+            </a:pPr>
+            <a:r>
+              <a:rPr lang="en-US" sz="1400" dirty="0">
+                <a:solidFill>
+                  <a:schemeClr val="tx1"/>
+                </a:solidFill>
+              </a:rPr>
+              <a:t>3. 身分：Entra ID／AD／Keycloak 與角色對照</a:t>
+            </a:r>
+            <a:endParaRPr lang="en-US" sz="1400" dirty="0"/>
+          </a:p>
+          <a:p>
+            <a:pPr indent="0" marL="0">
+              <a:spcAft>
+                <a:spcPts val="1000"/>
+              </a:spcAft>
+              <a:buNone/>
+            </a:pPr>
+            <a:r>
+              <a:rPr lang="en-US" sz="1400" dirty="0">
+                <a:solidFill>
+                  <a:schemeClr val="tx1"/>
+                </a:solidFill>
+              </a:rPr>
+              <a:t>4. 舊平台歷史導出方式與並行期長度</a:t>
+            </a:r>
+            <a:endParaRPr lang="en-US" sz="1400" dirty="0"/>
+          </a:p>
+          <a:p>
+            <a:pPr indent="0" marL="0">
+              <a:spcAft>
+                <a:spcPts val="1000"/>
+              </a:spcAft>
+              <a:buNone/>
+            </a:pPr>
+            <a:r>
+              <a:rPr lang="en-US" sz="1400" dirty="0">
+                <a:solidFill>
+                  <a:schemeClr val="tx1"/>
+                </a:solidFill>
+              </a:rPr>
+              <a:t>5. 隱私門檻：K 值、匯出上限、審計保存年限</a:t>
+            </a:r>
+            <a:endParaRPr lang="en-US" sz="1400" dirty="0"/>
+          </a:p>
+        </p:txBody>
+      </p:sp>
+      <p:sp>
+        <p:nvSpPr>
+          <p:cNvPr id="5" name="s15_col1"/>
+          <p:cNvSpPr/>
+          <p:nvPr/>
+        </p:nvSpPr>
+        <p:spPr>
+          <a:xfrm>
+            <a:off x="4663440" y="1280160"/>
+            <a:ext cx="4023360" cy="3246120"/>
+          </a:xfrm>
+          <a:prstGeom prst="roundRect">
+            <a:avLst>
+              <a:gd name="adj" fmla="val 2254"/>
+            </a:avLst>
+          </a:prstGeom>
+          <a:solidFill>
+            <a:schemeClr val="bg1"/>
+          </a:solidFill>
+          <a:ln w="9525">
+            <a:solidFill>
+              <a:srgbClr val="E2E8EC"/>
+            </a:solidFill>
+            <a:prstDash val="solid"/>
+          </a:ln>
+        </p:spPr>
+      </p:sp>
+      <p:sp>
+        <p:nvSpPr>
+          <p:cNvPr id="6" name="Text 4"/>
+          <p:cNvSpPr txBox="1"/>
+          <p:nvPr/>
+        </p:nvSpPr>
+        <p:spPr>
+          <a:xfrm>
+            <a:off x="4892040" y="1463040"/>
+            <a:ext cx="3611880" cy="2926080"/>
+          </a:xfrm>
+          <a:prstGeom prst="rect">
+            <a:avLst/>
+          </a:prstGeom>
+          <a:noFill/>
+          <a:ln/>
+        </p:spPr>
+        <p:txBody>
+          <a:bodyPr wrap="square" lIns="0" tIns="0" rIns="0" bIns="0" rtlCol="0" anchor="t"/>
+          <a:lstStyle/>
+          <a:p>
+            <a:pPr indent="0" marL="0">
+              <a:spcAft>
+                <a:spcPts val="1000"/>
+              </a:spcAft>
+              <a:buNone/>
+            </a:pPr>
+            <a:r>
+              <a:rPr lang="en-US" sz="1400" dirty="0">
+                <a:solidFill>
+                  <a:schemeClr val="tx1"/>
+                </a:solidFill>
+              </a:rPr>
+              <a:t>6. 推送接收端規格與增量延遲</a:t>
+            </a:r>
+            <a:endParaRPr lang="en-US" sz="1400" dirty="0"/>
+          </a:p>
+          <a:p>
+            <a:pPr indent="0" marL="0">
+              <a:spcAft>
+                <a:spcPts val="1000"/>
+              </a:spcAft>
+              <a:buNone/>
+            </a:pPr>
+            <a:r>
+              <a:rPr lang="en-US" sz="1400" dirty="0">
+                <a:solidFill>
+                  <a:schemeClr val="tx1"/>
+                </a:solidFill>
+              </a:rPr>
+              <a:t>7. 自定義 SQL 開放對象與下載上限</a:t>
+            </a:r>
+            <a:endParaRPr lang="en-US" sz="1400" dirty="0"/>
+          </a:p>
+          <a:p>
+            <a:pPr indent="0" marL="0">
+              <a:spcAft>
+                <a:spcPts val="1000"/>
+              </a:spcAft>
+              <a:buNone/>
+            </a:pPr>
+            <a:r>
+              <a:rPr lang="en-US" sz="1400" dirty="0">
+                <a:solidFill>
+                  <a:schemeClr val="tx1"/>
+                </a:solidFill>
+              </a:rPr>
+              <a:t>8. AI 洞察的 LLM 供應方式與預算（二期）</a:t>
+            </a:r>
+            <a:endParaRPr lang="en-US" sz="1400" dirty="0"/>
+          </a:p>
+          <a:p>
+            <a:pPr indent="0" marL="0">
+              <a:spcAft>
+                <a:spcPts val="1000"/>
+              </a:spcAft>
+              <a:buNone/>
+            </a:pPr>
+            <a:r>
+              <a:rPr lang="en-US" sz="1400" dirty="0">
+                <a:solidFill>
+                  <a:schemeClr val="tx1"/>
+                </a:solidFill>
+              </a:rPr>
+              <a:t>9. 效能 SLA 在客戶規模實測</a:t>
+            </a:r>
+            <a:endParaRPr lang="en-US" sz="1400" dirty="0"/>
+          </a:p>
+          <a:p>
+            <a:pPr indent="0" marL="0">
+              <a:spcAft>
+                <a:spcPts val="1000"/>
+              </a:spcAft>
+              <a:buNone/>
+            </a:pPr>
+            <a:r>
+              <a:rPr lang="en-US" sz="1400" dirty="0">
+                <a:solidFill>
+                  <a:schemeClr val="tx1"/>
+                </a:solidFill>
+              </a:rPr>
+              <a:t>10. GA360 BigQuery 匯出區域與費用</a:t>
+            </a:r>
+            <a:endParaRPr lang="en-US" sz="1400" dirty="0"/>
+          </a:p>
+        </p:txBody>
+      </p:sp>
+      <p:sp>
+        <p:nvSpPr>
+          <p:cNvPr id="25" name="Slide Number Placeholder 0"/>
+          <p:cNvSpPr>
+            <a:spLocks noGrp="1"/>
+          </p:cNvSpPr>
+          <p:nvPr>
+            <p:ph type="sldNum" sz="quarter" idx="4294967295"/>
+          </p:nvPr>
+        </p:nvSpPr>
+        <p:spPr>
+          <a:xfrm>
+            <a:off x="8412480" y="4754880"/>
+            <a:ext cx="457200" cy="274320"/>
+          </a:xfrm>
+          <a:prstGeom prst="rect">
+            <a:avLst/>
+          </a:prstGeom>
+          <a:extLst>
+            <a:ext uri="{C572A759-6A51-4108-AA02-DFA0A04FC94B}">
+              <ma14:wrappingTextBoxFlag xmlns:ma14="http://schemas.microsoft.com/office/mac/drawingml/2011/main" val="0"/>
+            </a:ext>
+          </a:extLst>
+        </p:spPr>
+        <p:txBody>
+          <a:bodyPr/>
+          <a:lstStyle>
+            <a:lvl1pPr>
+              <a:defRPr sz="1000">
+                <a:solidFill>
+                  <a:srgbClr val="7C8992"/>
+                </a:solidFill>
+              </a:defRPr>
+            </a:lvl1pPr>
+          </a:lstStyle>
+          <a:p>
+            <a:pPr algn="r"/>
+            <a:fld id="{F7021451-1387-4CA6-816F-3879F97B5CBC}" type="slidenum">
+              <a:rPr b="0" lang="en-US"/>
+              <a:t>18</a:t>
+            </a:fld>
+            <a:endParaRPr lang="en-US"/>
+          </a:p>
+        </p:txBody>
+      </p:sp>
+    </p:spTree>
+  </p:cSld>
+  <p:clrMapOvr>
+    <a:masterClrMapping/>
+  </p:clrMapOvr>
+</p:sld>
+</file>
+
+<file path=ppt/slides/slide19.xml><?xml version="1.0" encoding="utf-8"?>
+<p:sld xmlns:a="http://schemas.openxmlformats.org/drawingml/2006/main" xmlns:r="http://schemas.openxmlformats.org/officeDocument/2006/relationships" xmlns:p="http://schemas.openxmlformats.org/presentationml/2006/main">
+  <p:cSld name="Slide 19">
+    <p:spTree>
+      <p:nvGrpSpPr>
+        <p:cNvPr id="1" name=""/>
+        <p:cNvGrpSpPr/>
+        <p:nvPr/>
+      </p:nvGrpSpPr>
+      <p:grpSpPr>
+        <a:xfrm>
+          <a:off x="0" y="0"/>
+          <a:ext cx="0" cy="0"/>
+          <a:chOff x="0" y="0"/>
+          <a:chExt cx="0" cy="0"/>
+        </a:xfrm>
+      </p:grpSpPr>
+      <p:sp>
+        <p:nvSpPr>
+          <p:cNvPr id="2" name="Text 0"/>
+          <p:cNvSpPr/>
+          <p:nvPr>
+            <p:ph idx="100" type="title" hasCustomPrompt="1"/>
+          </p:nvPr>
+        </p:nvSpPr>
+        <p:spPr>
+          <a:xfrm>
+            <a:off x="548640" y="1737360"/>
+            <a:ext cx="8046720" cy="914400"/>
+          </a:xfrm>
+          <a:prstGeom prst="rect">
+            <a:avLst/>
+          </a:prstGeom>
+          <a:noFill/>
+          <a:ln/>
+        </p:spPr>
+        <p:txBody>
+          <a:bodyPr wrap="square" rtlCol="0" anchor="b"/>
+          <a:lstStyle/>
+          <a:p>
+            <a:pPr algn="l" indent="0" marL="0">
+              <a:buNone/>
+            </a:pPr>
+            <a:r>
+              <a:rPr lang="en-US" sz="3200" b="1" dirty="0">
+                <a:solidFill>
+                  <a:schemeClr val="bg1"/>
+                </a:solidFill>
+              </a:rPr>
+              <a:t>報價初版（未稅）</a:t>
+            </a:r>
+            <a:endParaRPr lang="en-US" sz="3200" dirty="0"/>
+          </a:p>
+        </p:txBody>
+      </p:sp>
+      <p:sp>
+        <p:nvSpPr>
+          <p:cNvPr id="3" name="Text 0"/>
+          <p:cNvSpPr/>
+          <p:nvPr>
+            <p:ph idx="101" type="body" hasCustomPrompt="1"/>
+          </p:nvPr>
+        </p:nvSpPr>
+        <p:spPr>
+          <a:xfrm>
+            <a:off x="548640" y="2743200"/>
+            <a:ext cx="8046720" cy="822960"/>
+          </a:xfrm>
+          <a:prstGeom prst="rect">
+            <a:avLst/>
+          </a:prstGeom>
+          <a:noFill/>
+          <a:ln/>
+        </p:spPr>
+        <p:txBody>
+          <a:bodyPr wrap="square" rtlCol="0" anchor="t"/>
+          <a:lstStyle/>
+          <a:p>
+            <a:pPr algn="l" indent="0" marL="0">
+              <a:buNone/>
+            </a:pPr>
+            <a:r>
+              <a:rPr lang="en-US" sz="1600" dirty="0">
+                <a:solidFill>
+                  <a:srgbClr val="C9D2D8"/>
+                </a:solidFill>
+              </a:rPr>
+              <a:t>依人員分工與人天單價直算，供內部定價討論；客戶版等週一與 Merkle 對完分工再出</a:t>
+            </a:r>
+            <a:endParaRPr lang="en-US" sz="1600" dirty="0"/>
+          </a:p>
+        </p:txBody>
+      </p:sp>
+    </p:spTree>
+  </p:cSld>
+  <p:clrMapOvr>
+    <a:masterClrMapping/>
+  </p:clrMapOvr>
+</p:sld>
+</file>
+
+<file path=ppt/slides/slide2.xml><?xml version="1.0" encoding="utf-8"?>
+<p:sld xmlns:a="http://schemas.openxmlformats.org/drawingml/2006/main" xmlns:r="http://schemas.openxmlformats.org/officeDocument/2006/relationships" xmlns:p="http://schemas.openxmlformats.org/presentationml/2006/main">
+  <p:cSld name="Slide 2">
+    <p:spTree>
+      <p:nvGrpSpPr>
+        <p:cNvPr id="1" name=""/>
+        <p:cNvGrpSpPr/>
+        <p:nvPr/>
+      </p:nvGrpSpPr>
+      <p:grpSpPr>
+        <a:xfrm>
+          <a:off x="0" y="0"/>
+          <a:ext cx="0" cy="0"/>
+          <a:chOff x="0" y="0"/>
+          <a:chExt cx="0" cy="0"/>
+        </a:xfrm>
+      </p:grpSpPr>
+      <p:sp>
+        <p:nvSpPr>
+          <p:cNvPr id="2" name="Text 0"/>
+          <p:cNvSpPr/>
+          <p:nvPr>
+            <p:ph idx="100" type="title" hasCustomPrompt="1"/>
+          </p:nvPr>
+        </p:nvSpPr>
+        <p:spPr>
+          <a:xfrm>
+            <a:off x="457200" y="274320"/>
+            <a:ext cx="8229600" cy="868680"/>
+          </a:xfrm>
+          <a:prstGeom prst="rect">
+            <a:avLst/>
+          </a:prstGeom>
+          <a:noFill/>
+          <a:ln/>
+        </p:spPr>
+        <p:txBody>
+          <a:bodyPr wrap="square" lIns="0" tIns="0" rIns="0" bIns="0" rtlCol="0" anchor="t"/>
+          <a:lstStyle/>
+          <a:p>
+            <a:pPr algn="l" indent="0" marL="0">
+              <a:buNone/>
+            </a:pPr>
+            <a:r>
+              <a:rPr lang="en-US" sz="2400" b="1" dirty="0">
+                <a:solidFill>
+                  <a:schemeClr val="tx1"/>
+                </a:solidFill>
+              </a:rPr>
+              <a:t>今天要決定的事</a:t>
+            </a:r>
+            <a:endParaRPr lang="en-US" sz="2400" dirty="0"/>
+          </a:p>
+        </p:txBody>
+      </p:sp>
+      <p:sp>
+        <p:nvSpPr>
+          <p:cNvPr id="3" name="s2_card0"/>
+          <p:cNvSpPr/>
+          <p:nvPr/>
+        </p:nvSpPr>
+        <p:spPr>
+          <a:xfrm>
+            <a:off x="457200" y="1325880"/>
+            <a:ext cx="2560320" cy="3063240"/>
+          </a:xfrm>
+          <a:prstGeom prst="roundRect">
+            <a:avLst>
+              <a:gd name="adj" fmla="val 2857"/>
+            </a:avLst>
+          </a:prstGeom>
+          <a:solidFill>
+            <a:schemeClr val="bg1"/>
+          </a:solidFill>
+          <a:ln w="9525">
+            <a:solidFill>
+              <a:srgbClr val="E2E8EC"/>
+            </a:solidFill>
+            <a:prstDash val="solid"/>
+          </a:ln>
+        </p:spPr>
+      </p:sp>
+      <p:sp>
+        <p:nvSpPr>
+          <p:cNvPr id="4" name="Text 2"/>
+          <p:cNvSpPr txBox="1"/>
+          <p:nvPr/>
+        </p:nvSpPr>
+        <p:spPr>
+          <a:xfrm>
+            <a:off x="685800" y="1554480"/>
+            <a:ext cx="2103120" cy="548640"/>
+          </a:xfrm>
+          <a:prstGeom prst="rect">
+            <a:avLst/>
+          </a:prstGeom>
+          <a:noFill/>
+          <a:ln/>
+        </p:spPr>
+        <p:txBody>
+          <a:bodyPr wrap="square" lIns="0" tIns="0" rIns="0" bIns="0" rtlCol="0" anchor="t"/>
+          <a:lstStyle/>
+          <a:p>
+            <a:pPr indent="0" marL="0">
+              <a:buNone/>
+            </a:pPr>
+            <a:r>
+              <a:rPr lang="en-US" sz="3000" b="1" dirty="0">
+                <a:solidFill>
+                  <a:schemeClr val="accent1"/>
+                </a:solidFill>
+              </a:rPr>
+              <a:t>01</a:t>
+            </a:r>
+            <a:endParaRPr lang="en-US" sz="3000" dirty="0"/>
+          </a:p>
+        </p:txBody>
+      </p:sp>
+      <p:sp>
+        <p:nvSpPr>
+          <p:cNvPr id="5" name="Text 3"/>
+          <p:cNvSpPr txBox="1"/>
+          <p:nvPr/>
+        </p:nvSpPr>
+        <p:spPr>
+          <a:xfrm>
+            <a:off x="685800" y="2194560"/>
+            <a:ext cx="2103120" cy="777240"/>
+          </a:xfrm>
+          <a:prstGeom prst="rect">
+            <a:avLst/>
+          </a:prstGeom>
+          <a:noFill/>
+          <a:ln/>
+        </p:spPr>
+        <p:txBody>
+          <a:bodyPr wrap="square" lIns="0" tIns="0" rIns="0" bIns="0" rtlCol="0" anchor="t"/>
+          <a:lstStyle/>
+          <a:p>
+            <a:pPr indent="0" marL="0">
+              <a:buNone/>
+            </a:pPr>
+            <a:r>
+              <a:rPr lang="en-US" sz="1700" b="1" dirty="0">
+                <a:solidFill>
+                  <a:schemeClr val="tx1"/>
+                </a:solidFill>
+              </a:rPr>
+              <a:t>舊平台到期前可以安全換掉</a:t>
+            </a:r>
+            <a:endParaRPr lang="en-US" sz="1700" dirty="0"/>
+          </a:p>
+        </p:txBody>
+      </p:sp>
+      <p:sp>
+        <p:nvSpPr>
+          <p:cNvPr id="6" name="Text 4"/>
+          <p:cNvSpPr txBox="1"/>
+          <p:nvPr/>
+        </p:nvSpPr>
+        <p:spPr>
+          <a:xfrm>
+            <a:off x="685800" y="3017520"/>
+            <a:ext cx="2103120" cy="1234440"/>
+          </a:xfrm>
+          <a:prstGeom prst="rect">
+            <a:avLst/>
+          </a:prstGeom>
+          <a:noFill/>
+          <a:ln/>
+        </p:spPr>
+        <p:txBody>
+          <a:bodyPr wrap="square" lIns="0" tIns="0" rIns="0" bIns="0" rtlCol="0" anchor="t"/>
+          <a:lstStyle/>
+          <a:p>
+            <a:pPr indent="0" marL="0">
+              <a:buNone/>
+            </a:pPr>
+            <a:r>
+              <a:rPr lang="en-US" sz="1400" dirty="0">
+                <a:solidFill>
+                  <a:schemeClr val="tx1"/>
+                </a:solidFill>
+              </a:rPr>
+              <a:t>高階主管點頭：GA360 接埋點、DMP 接分析與營運；錢與人力都在表上</a:t>
+            </a:r>
+            <a:endParaRPr lang="en-US" sz="1400" dirty="0"/>
+          </a:p>
+        </p:txBody>
+      </p:sp>
+      <p:sp>
+        <p:nvSpPr>
+          <p:cNvPr id="7" name="s2_card1"/>
+          <p:cNvSpPr/>
+          <p:nvPr/>
+        </p:nvSpPr>
+        <p:spPr>
+          <a:xfrm>
+            <a:off x="3291840" y="1325880"/>
+            <a:ext cx="2560320" cy="3063240"/>
+          </a:xfrm>
+          <a:prstGeom prst="roundRect">
+            <a:avLst>
+              <a:gd name="adj" fmla="val 2857"/>
+            </a:avLst>
+          </a:prstGeom>
+          <a:solidFill>
+            <a:schemeClr val="bg1"/>
+          </a:solidFill>
+          <a:ln w="9525">
+            <a:solidFill>
+              <a:srgbClr val="E2E8EC"/>
+            </a:solidFill>
+            <a:prstDash val="solid"/>
+          </a:ln>
+        </p:spPr>
+      </p:sp>
+      <p:sp>
+        <p:nvSpPr>
+          <p:cNvPr id="8" name="Text 6"/>
+          <p:cNvSpPr txBox="1"/>
+          <p:nvPr/>
+        </p:nvSpPr>
+        <p:spPr>
+          <a:xfrm>
+            <a:off x="3520440" y="1554480"/>
+            <a:ext cx="2103120" cy="548640"/>
+          </a:xfrm>
+          <a:prstGeom prst="rect">
+            <a:avLst/>
+          </a:prstGeom>
+          <a:noFill/>
+          <a:ln/>
+        </p:spPr>
+        <p:txBody>
+          <a:bodyPr wrap="square" lIns="0" tIns="0" rIns="0" bIns="0" rtlCol="0" anchor="t"/>
+          <a:lstStyle/>
+          <a:p>
+            <a:pPr indent="0" marL="0">
+              <a:buNone/>
+            </a:pPr>
+            <a:r>
+              <a:rPr lang="en-US" sz="3000" b="1" dirty="0">
+                <a:solidFill>
+                  <a:schemeClr val="accent1"/>
+                </a:solidFill>
+              </a:rPr>
+              <a:t>02</a:t>
+            </a:r>
+            <a:endParaRPr lang="en-US" sz="3000" dirty="0"/>
+          </a:p>
+        </p:txBody>
+      </p:sp>
+      <p:sp>
+        <p:nvSpPr>
+          <p:cNvPr id="9" name="Text 7"/>
+          <p:cNvSpPr txBox="1"/>
+          <p:nvPr/>
+        </p:nvSpPr>
+        <p:spPr>
+          <a:xfrm>
+            <a:off x="3520440" y="2194560"/>
+            <a:ext cx="2103120" cy="777240"/>
+          </a:xfrm>
+          <a:prstGeom prst="rect">
+            <a:avLst/>
+          </a:prstGeom>
+          <a:noFill/>
+          <a:ln/>
+        </p:spPr>
+        <p:txBody>
+          <a:bodyPr wrap="square" lIns="0" tIns="0" rIns="0" bIns="0" rtlCol="0" anchor="t"/>
+          <a:lstStyle/>
+          <a:p>
+            <a:pPr indent="0" marL="0">
+              <a:buNone/>
+            </a:pPr>
+            <a:r>
+              <a:rPr lang="en-US" sz="1700" b="1" dirty="0">
+                <a:solidFill>
+                  <a:schemeClr val="tx1"/>
+                </a:solidFill>
+              </a:rPr>
+              <a:t>時程 v2.1 與 M0 十項待確認</a:t>
+            </a:r>
+            <a:endParaRPr lang="en-US" sz="1700" dirty="0"/>
+          </a:p>
+        </p:txBody>
+      </p:sp>
+      <p:sp>
+        <p:nvSpPr>
+          <p:cNvPr id="10" name="Text 8"/>
+          <p:cNvSpPr txBox="1"/>
+          <p:nvPr/>
+        </p:nvSpPr>
+        <p:spPr>
+          <a:xfrm>
+            <a:off x="3520440" y="3017520"/>
+            <a:ext cx="2103120" cy="1234440"/>
+          </a:xfrm>
+          <a:prstGeom prst="rect">
+            <a:avLst/>
+          </a:prstGeom>
+          <a:noFill/>
+          <a:ln/>
+        </p:spPr>
+        <p:txBody>
+          <a:bodyPr wrap="square" lIns="0" tIns="0" rIns="0" bIns="0" rtlCol="0" anchor="t"/>
+          <a:lstStyle/>
+          <a:p>
+            <a:pPr indent="0" marL="0">
+              <a:buNone/>
+            </a:pPr>
+            <a:r>
+              <a:rPr lang="en-US" sz="1400" dirty="0">
+                <a:solidFill>
+                  <a:schemeClr val="tx1"/>
+                </a:solidFill>
+              </a:rPr>
+              <a:t>專案負責人同意時程，11-02 kick-off 排得出來</a:t>
+            </a:r>
+            <a:endParaRPr lang="en-US" sz="1400" dirty="0"/>
+          </a:p>
+        </p:txBody>
+      </p:sp>
+      <p:sp>
+        <p:nvSpPr>
+          <p:cNvPr id="11" name="s2_card2"/>
+          <p:cNvSpPr/>
+          <p:nvPr/>
+        </p:nvSpPr>
+        <p:spPr>
+          <a:xfrm>
+            <a:off x="6126480" y="1325880"/>
+            <a:ext cx="2560320" cy="3063240"/>
+          </a:xfrm>
+          <a:prstGeom prst="roundRect">
+            <a:avLst>
+              <a:gd name="adj" fmla="val 2857"/>
+            </a:avLst>
+          </a:prstGeom>
+          <a:solidFill>
+            <a:schemeClr val="bg1"/>
+          </a:solidFill>
+          <a:ln w="9525">
+            <a:solidFill>
+              <a:srgbClr val="E2E8EC"/>
+            </a:solidFill>
+            <a:prstDash val="solid"/>
+          </a:ln>
+        </p:spPr>
+      </p:sp>
+      <p:sp>
+        <p:nvSpPr>
+          <p:cNvPr id="12" name="Text 10"/>
+          <p:cNvSpPr txBox="1"/>
+          <p:nvPr/>
+        </p:nvSpPr>
+        <p:spPr>
+          <a:xfrm>
+            <a:off x="6355080" y="1554480"/>
+            <a:ext cx="2103120" cy="548640"/>
+          </a:xfrm>
+          <a:prstGeom prst="rect">
+            <a:avLst/>
+          </a:prstGeom>
+          <a:noFill/>
+          <a:ln/>
+        </p:spPr>
+        <p:txBody>
+          <a:bodyPr wrap="square" lIns="0" tIns="0" rIns="0" bIns="0" rtlCol="0" anchor="t"/>
+          <a:lstStyle/>
+          <a:p>
+            <a:pPr indent="0" marL="0">
+              <a:buNone/>
+            </a:pPr>
+            <a:r>
+              <a:rPr lang="en-US" sz="3000" b="1" dirty="0">
+                <a:solidFill>
+                  <a:schemeClr val="accent1"/>
+                </a:solidFill>
+              </a:rPr>
+              <a:t>03</a:t>
+            </a:r>
+            <a:endParaRPr lang="en-US" sz="3000" dirty="0"/>
+          </a:p>
+        </p:txBody>
+      </p:sp>
+      <p:sp>
+        <p:nvSpPr>
+          <p:cNvPr id="13" name="Text 11"/>
+          <p:cNvSpPr txBox="1"/>
+          <p:nvPr/>
+        </p:nvSpPr>
+        <p:spPr>
+          <a:xfrm>
+            <a:off x="6355080" y="2194560"/>
+            <a:ext cx="2103120" cy="777240"/>
+          </a:xfrm>
+          <a:prstGeom prst="rect">
+            <a:avLst/>
+          </a:prstGeom>
+          <a:noFill/>
+          <a:ln/>
+        </p:spPr>
+        <p:txBody>
+          <a:bodyPr wrap="square" lIns="0" tIns="0" rIns="0" bIns="0" rtlCol="0" anchor="t"/>
+          <a:lstStyle/>
+          <a:p>
+            <a:pPr indent="0" marL="0">
+              <a:buNone/>
+            </a:pPr>
+            <a:r>
+              <a:rPr lang="en-US" sz="1700" b="1" dirty="0">
+                <a:solidFill>
+                  <a:schemeClr val="tx1"/>
+                </a:solidFill>
+              </a:rPr>
+              <a:t>Merkle 與我們講同一張圖</a:t>
+            </a:r>
+            <a:endParaRPr lang="en-US" sz="1700" dirty="0"/>
+          </a:p>
+        </p:txBody>
+      </p:sp>
+      <p:sp>
+        <p:nvSpPr>
+          <p:cNvPr id="14" name="Text 12"/>
+          <p:cNvSpPr txBox="1"/>
+          <p:nvPr/>
+        </p:nvSpPr>
+        <p:spPr>
+          <a:xfrm>
+            <a:off x="6355080" y="3017520"/>
+            <a:ext cx="2103120" cy="1234440"/>
+          </a:xfrm>
+          <a:prstGeom prst="rect">
+            <a:avLst/>
+          </a:prstGeom>
+          <a:noFill/>
+          <a:ln/>
+        </p:spPr>
+        <p:txBody>
+          <a:bodyPr wrap="square" lIns="0" tIns="0" rIns="0" bIns="0" rtlCol="0" anchor="t"/>
+          <a:lstStyle/>
+          <a:p>
+            <a:pPr indent="0" marL="0">
+              <a:buNone/>
+            </a:pPr>
+            <a:r>
+              <a:rPr lang="en-US" sz="1400" dirty="0">
+                <a:solidFill>
+                  <a:schemeClr val="tx1"/>
+                </a:solidFill>
+              </a:rPr>
+              <a:t>交接點是 BigQuery 匯出與橋接表，客戶面前一個說法</a:t>
+            </a:r>
+            <a:endParaRPr lang="en-US" sz="1400" dirty="0"/>
+          </a:p>
+        </p:txBody>
+      </p:sp>
+      <p:sp>
+        <p:nvSpPr>
+          <p:cNvPr id="25" name="Slide Number Placeholder 0"/>
+          <p:cNvSpPr>
+            <a:spLocks noGrp="1"/>
+          </p:cNvSpPr>
+          <p:nvPr>
+            <p:ph type="sldNum" sz="quarter" idx="4294967295"/>
+          </p:nvPr>
+        </p:nvSpPr>
+        <p:spPr>
+          <a:xfrm>
+            <a:off x="8412480" y="4754880"/>
+            <a:ext cx="457200" cy="274320"/>
+          </a:xfrm>
+          <a:prstGeom prst="rect">
+            <a:avLst/>
+          </a:prstGeom>
+          <a:extLst>
+            <a:ext uri="{C572A759-6A51-4108-AA02-DFA0A04FC94B}">
+              <ma14:wrappingTextBoxFlag xmlns:ma14="http://schemas.microsoft.com/office/mac/drawingml/2011/main" val="0"/>
+            </a:ext>
+          </a:extLst>
+        </p:spPr>
+        <p:txBody>
+          <a:bodyPr/>
+          <a:lstStyle>
+            <a:lvl1pPr>
+              <a:defRPr sz="1000">
+                <a:solidFill>
+                  <a:srgbClr val="7C8992"/>
+                </a:solidFill>
+              </a:defRPr>
+            </a:lvl1pPr>
+          </a:lstStyle>
+          <a:p>
+            <a:pPr algn="r"/>
+            <a:fld id="{F7021451-1387-4CA6-816F-3879F97B5CBC}" type="slidenum">
+              <a:rPr b="0" lang="en-US"/>
+              <a:t>2</a:t>
+            </a:fld>
+            <a:endParaRPr lang="en-US"/>
+          </a:p>
+        </p:txBody>
+      </p:sp>
+    </p:spTree>
+  </p:cSld>
+  <p:clrMapOvr>
+    <a:masterClrMapping/>
+  </p:clrMapOvr>
+</p:sld>
+</file>
+
+<file path=ppt/slides/slide20.xml><?xml version="1.0" encoding="utf-8"?>
+<p:sld xmlns:a="http://schemas.openxmlformats.org/drawingml/2006/main" xmlns:r="http://schemas.openxmlformats.org/officeDocument/2006/relationships" xmlns:p="http://schemas.openxmlformats.org/presentationml/2006/main">
+  <p:cSld name="Slide 20">
+    <p:spTree>
+      <p:nvGrpSpPr>
+        <p:cNvPr id="1" name=""/>
+        <p:cNvGrpSpPr/>
+        <p:nvPr/>
+      </p:nvGrpSpPr>
+      <p:grpSpPr>
+        <a:xfrm>
+          <a:off x="0" y="0"/>
+          <a:ext cx="0" cy="0"/>
+          <a:chOff x="0" y="0"/>
+          <a:chExt cx="0" cy="0"/>
+        </a:xfrm>
+      </p:grpSpPr>
+      <p:sp>
+        <p:nvSpPr>
+          <p:cNvPr id="2" name="Text 0"/>
+          <p:cNvSpPr/>
+          <p:nvPr>
+            <p:ph idx="100" type="title" hasCustomPrompt="1"/>
+          </p:nvPr>
+        </p:nvSpPr>
+        <p:spPr>
+          <a:xfrm>
+            <a:off x="457200" y="274320"/>
+            <a:ext cx="8229600" cy="868680"/>
+          </a:xfrm>
+          <a:prstGeom prst="rect">
+            <a:avLst/>
+          </a:prstGeom>
+          <a:noFill/>
+          <a:ln/>
+        </p:spPr>
+        <p:txBody>
+          <a:bodyPr wrap="square" lIns="0" tIns="0" rIns="0" bIns="0" rtlCol="0" anchor="t"/>
+          <a:lstStyle/>
+          <a:p>
+            <a:pPr algn="l" indent="0" marL="0">
+              <a:buNone/>
+            </a:pPr>
+            <a:r>
+              <a:rPr lang="en-US" sz="2400" b="1" dirty="0">
+                <a:solidFill>
+                  <a:schemeClr val="tx1"/>
+                </a:solidFill>
+              </a:rPr>
               <a:t>人天單價：產品與研發 25,000，分析師與 CSM 16,000</a:t>
             </a:r>
             <a:endParaRPr lang="en-US" sz="2400" dirty="0"/>
@@ -7267,7 +13905,7 @@
       </p:sp>
       <p:graphicFrame>
         <p:nvGraphicFramePr>
-          <p:cNvPr id="18" name="Table 0"/>
+          <p:cNvPr id="21" name="Table 0"/>
           <p:cNvGraphicFramePr>
             <a:graphicFrameLocks noGrp="1"/>
           </p:cNvGraphicFramePr>
@@ -8221,7 +14859,7 @@
             <a:pPr algn="r"/>
             <a:fld id="{F7021451-1387-4CA6-816F-3879F97B5CBC}" type="slidenum">
               <a:rPr b="0" lang="en-US"/>
-              <a:t>17</a:t>
+              <a:t>20</a:t>
             </a:fld>
             <a:endParaRPr lang="en-US"/>
           </a:p>
@@ -8235,9 +14873,9 @@
 </p:sld>
 </file>
 
-<file path=ppt/slides/slide18.xml><?xml version="1.0" encoding="utf-8"?>
+<file path=ppt/slides/slide21.xml><?xml version="1.0" encoding="utf-8"?>
 <p:sld xmlns:a="http://schemas.openxmlformats.org/drawingml/2006/main" xmlns:r="http://schemas.openxmlformats.org/officeDocument/2006/relationships" xmlns:p="http://schemas.openxmlformats.org/presentationml/2006/main">
-  <p:cSld name="Slide 18">
+  <p:cSld name="Slide 21">
     <p:spTree>
       <p:nvGrpSpPr>
         <p:cNvPr id="1" name=""/>
@@ -8585,7 +15223,7 @@
             <a:pPr algn="r"/>
             <a:fld id="{F7021451-1387-4CA6-816F-3879F97B5CBC}" type="slidenum">
               <a:rPr b="0" lang="en-US"/>
-              <a:t>18</a:t>
+              <a:t>21</a:t>
             </a:fld>
             <a:endParaRPr lang="en-US"/>
           </a:p>
@@ -8599,9 +15237,9 @@
 </p:sld>
 </file>
 
-<file path=ppt/slides/slide19.xml><?xml version="1.0" encoding="utf-8"?>
+<file path=ppt/slides/slide22.xml><?xml version="1.0" encoding="utf-8"?>
 <p:sld xmlns:a="http://schemas.openxmlformats.org/drawingml/2006/main" xmlns:r="http://schemas.openxmlformats.org/officeDocument/2006/relationships" xmlns:p="http://schemas.openxmlformats.org/presentationml/2006/main">
-  <p:cSld name="Slide 19">
+  <p:cSld name="Slide 22">
     <p:spTree>
       <p:nvGrpSpPr>
         <p:cNvPr id="1" name=""/>
@@ -8656,7 +15294,7 @@
       </p:sp>
       <p:graphicFrame>
         <p:nvGraphicFramePr>
-          <p:cNvPr id="20" name="Table 0"/>
+          <p:cNvPr id="23" name="Table 0"/>
           <p:cNvGraphicFramePr>
             <a:graphicFrameLocks noGrp="1"/>
           </p:cNvGraphicFramePr>
@@ -10031,7 +16669,7 @@
             <a:pPr algn="r"/>
             <a:fld id="{F7021451-1387-4CA6-816F-3879F97B5CBC}" type="slidenum">
               <a:rPr b="0" lang="en-US"/>
-              <a:t>19</a:t>
+              <a:t>22</a:t>
             </a:fld>
             <a:endParaRPr lang="en-US"/>
           </a:p>
@@ -10045,9 +16683,9 @@
 </p:sld>
 </file>
 
-<file path=ppt/slides/slide2.xml><?xml version="1.0" encoding="utf-8"?>
+<file path=ppt/slides/slide23.xml><?xml version="1.0" encoding="utf-8"?>
 <p:sld xmlns:a="http://schemas.openxmlformats.org/drawingml/2006/main" xmlns:r="http://schemas.openxmlformats.org/officeDocument/2006/relationships" xmlns:p="http://schemas.openxmlformats.org/presentationml/2006/main">
-  <p:cSld name="Slide 2">
+  <p:cSld name="Slide 23">
     <p:spTree>
       <p:nvGrpSpPr>
         <p:cNvPr id="1" name=""/>
@@ -10094,519 +16732,6 @@
                   <a:schemeClr val="tx1"/>
                 </a:solidFill>
               </a:rPr>
-              <a:t>今天要決定的事</a:t>
-            </a:r>
-            <a:endParaRPr lang="en-US" sz="2400" dirty="0"/>
-          </a:p>
-        </p:txBody>
-      </p:sp>
-      <p:sp>
-        <p:nvSpPr>
-          <p:cNvPr id="3" name="s2_card0"/>
-          <p:cNvSpPr/>
-          <p:nvPr/>
-        </p:nvSpPr>
-        <p:spPr>
-          <a:xfrm>
-            <a:off x="457200" y="1325880"/>
-            <a:ext cx="2560320" cy="3063240"/>
-          </a:xfrm>
-          <a:prstGeom prst="roundRect">
-            <a:avLst>
-              <a:gd name="adj" fmla="val 2857"/>
-            </a:avLst>
-          </a:prstGeom>
-          <a:solidFill>
-            <a:schemeClr val="bg1"/>
-          </a:solidFill>
-          <a:ln w="9525">
-            <a:solidFill>
-              <a:srgbClr val="E2E8EC"/>
-            </a:solidFill>
-            <a:prstDash val="solid"/>
-          </a:ln>
-        </p:spPr>
-      </p:sp>
-      <p:sp>
-        <p:nvSpPr>
-          <p:cNvPr id="4" name="Text 2"/>
-          <p:cNvSpPr txBox="1"/>
-          <p:nvPr/>
-        </p:nvSpPr>
-        <p:spPr>
-          <a:xfrm>
-            <a:off x="685800" y="1554480"/>
-            <a:ext cx="2103120" cy="548640"/>
-          </a:xfrm>
-          <a:prstGeom prst="rect">
-            <a:avLst/>
-          </a:prstGeom>
-          <a:noFill/>
-          <a:ln/>
-        </p:spPr>
-        <p:txBody>
-          <a:bodyPr wrap="square" lIns="0" tIns="0" rIns="0" bIns="0" rtlCol="0" anchor="t"/>
-          <a:lstStyle/>
-          <a:p>
-            <a:pPr indent="0" marL="0">
-              <a:buNone/>
-            </a:pPr>
-            <a:r>
-              <a:rPr lang="en-US" sz="3000" b="1" dirty="0">
-                <a:solidFill>
-                  <a:schemeClr val="accent1"/>
-                </a:solidFill>
-              </a:rPr>
-              <a:t>01</a:t>
-            </a:r>
-            <a:endParaRPr lang="en-US" sz="3000" dirty="0"/>
-          </a:p>
-        </p:txBody>
-      </p:sp>
-      <p:sp>
-        <p:nvSpPr>
-          <p:cNvPr id="5" name="Text 3"/>
-          <p:cNvSpPr txBox="1"/>
-          <p:nvPr/>
-        </p:nvSpPr>
-        <p:spPr>
-          <a:xfrm>
-            <a:off x="685800" y="2194560"/>
-            <a:ext cx="2103120" cy="777240"/>
-          </a:xfrm>
-          <a:prstGeom prst="rect">
-            <a:avLst/>
-          </a:prstGeom>
-          <a:noFill/>
-          <a:ln/>
-        </p:spPr>
-        <p:txBody>
-          <a:bodyPr wrap="square" lIns="0" tIns="0" rIns="0" bIns="0" rtlCol="0" anchor="t"/>
-          <a:lstStyle/>
-          <a:p>
-            <a:pPr indent="0" marL="0">
-              <a:buNone/>
-            </a:pPr>
-            <a:r>
-              <a:rPr lang="en-US" sz="1700" b="1" dirty="0">
-                <a:solidFill>
-                  <a:schemeClr val="tx1"/>
-                </a:solidFill>
-              </a:rPr>
-              <a:t>舊平台到期前可以安全換掉</a:t>
-            </a:r>
-            <a:endParaRPr lang="en-US" sz="1700" dirty="0"/>
-          </a:p>
-        </p:txBody>
-      </p:sp>
-      <p:sp>
-        <p:nvSpPr>
-          <p:cNvPr id="6" name="Text 4"/>
-          <p:cNvSpPr txBox="1"/>
-          <p:nvPr/>
-        </p:nvSpPr>
-        <p:spPr>
-          <a:xfrm>
-            <a:off x="685800" y="3017520"/>
-            <a:ext cx="2103120" cy="1234440"/>
-          </a:xfrm>
-          <a:prstGeom prst="rect">
-            <a:avLst/>
-          </a:prstGeom>
-          <a:noFill/>
-          <a:ln/>
-        </p:spPr>
-        <p:txBody>
-          <a:bodyPr wrap="square" lIns="0" tIns="0" rIns="0" bIns="0" rtlCol="0" anchor="t"/>
-          <a:lstStyle/>
-          <a:p>
-            <a:pPr indent="0" marL="0">
-              <a:buNone/>
-            </a:pPr>
-            <a:r>
-              <a:rPr lang="en-US" sz="1400" dirty="0">
-                <a:solidFill>
-                  <a:schemeClr val="tx1"/>
-                </a:solidFill>
-              </a:rPr>
-              <a:t>高階主管點頭：GA360 接埋點、DMP 接分析與營運；錢與人力都在表上</a:t>
-            </a:r>
-            <a:endParaRPr lang="en-US" sz="1400" dirty="0"/>
-          </a:p>
-        </p:txBody>
-      </p:sp>
-      <p:sp>
-        <p:nvSpPr>
-          <p:cNvPr id="7" name="s2_card1"/>
-          <p:cNvSpPr/>
-          <p:nvPr/>
-        </p:nvSpPr>
-        <p:spPr>
-          <a:xfrm>
-            <a:off x="3291840" y="1325880"/>
-            <a:ext cx="2560320" cy="3063240"/>
-          </a:xfrm>
-          <a:prstGeom prst="roundRect">
-            <a:avLst>
-              <a:gd name="adj" fmla="val 2857"/>
-            </a:avLst>
-          </a:prstGeom>
-          <a:solidFill>
-            <a:schemeClr val="bg1"/>
-          </a:solidFill>
-          <a:ln w="9525">
-            <a:solidFill>
-              <a:srgbClr val="E2E8EC"/>
-            </a:solidFill>
-            <a:prstDash val="solid"/>
-          </a:ln>
-        </p:spPr>
-      </p:sp>
-      <p:sp>
-        <p:nvSpPr>
-          <p:cNvPr id="8" name="Text 6"/>
-          <p:cNvSpPr txBox="1"/>
-          <p:nvPr/>
-        </p:nvSpPr>
-        <p:spPr>
-          <a:xfrm>
-            <a:off x="3520440" y="1554480"/>
-            <a:ext cx="2103120" cy="548640"/>
-          </a:xfrm>
-          <a:prstGeom prst="rect">
-            <a:avLst/>
-          </a:prstGeom>
-          <a:noFill/>
-          <a:ln/>
-        </p:spPr>
-        <p:txBody>
-          <a:bodyPr wrap="square" lIns="0" tIns="0" rIns="0" bIns="0" rtlCol="0" anchor="t"/>
-          <a:lstStyle/>
-          <a:p>
-            <a:pPr indent="0" marL="0">
-              <a:buNone/>
-            </a:pPr>
-            <a:r>
-              <a:rPr lang="en-US" sz="3000" b="1" dirty="0">
-                <a:solidFill>
-                  <a:schemeClr val="accent1"/>
-                </a:solidFill>
-              </a:rPr>
-              <a:t>02</a:t>
-            </a:r>
-            <a:endParaRPr lang="en-US" sz="3000" dirty="0"/>
-          </a:p>
-        </p:txBody>
-      </p:sp>
-      <p:sp>
-        <p:nvSpPr>
-          <p:cNvPr id="9" name="Text 7"/>
-          <p:cNvSpPr txBox="1"/>
-          <p:nvPr/>
-        </p:nvSpPr>
-        <p:spPr>
-          <a:xfrm>
-            <a:off x="3520440" y="2194560"/>
-            <a:ext cx="2103120" cy="777240"/>
-          </a:xfrm>
-          <a:prstGeom prst="rect">
-            <a:avLst/>
-          </a:prstGeom>
-          <a:noFill/>
-          <a:ln/>
-        </p:spPr>
-        <p:txBody>
-          <a:bodyPr wrap="square" lIns="0" tIns="0" rIns="0" bIns="0" rtlCol="0" anchor="t"/>
-          <a:lstStyle/>
-          <a:p>
-            <a:pPr indent="0" marL="0">
-              <a:buNone/>
-            </a:pPr>
-            <a:r>
-              <a:rPr lang="en-US" sz="1700" b="1" dirty="0">
-                <a:solidFill>
-                  <a:schemeClr val="tx1"/>
-                </a:solidFill>
-              </a:rPr>
-              <a:t>時程 v2.1 與 M0 十項待確認</a:t>
-            </a:r>
-            <a:endParaRPr lang="en-US" sz="1700" dirty="0"/>
-          </a:p>
-        </p:txBody>
-      </p:sp>
-      <p:sp>
-        <p:nvSpPr>
-          <p:cNvPr id="10" name="Text 8"/>
-          <p:cNvSpPr txBox="1"/>
-          <p:nvPr/>
-        </p:nvSpPr>
-        <p:spPr>
-          <a:xfrm>
-            <a:off x="3520440" y="3017520"/>
-            <a:ext cx="2103120" cy="1234440"/>
-          </a:xfrm>
-          <a:prstGeom prst="rect">
-            <a:avLst/>
-          </a:prstGeom>
-          <a:noFill/>
-          <a:ln/>
-        </p:spPr>
-        <p:txBody>
-          <a:bodyPr wrap="square" lIns="0" tIns="0" rIns="0" bIns="0" rtlCol="0" anchor="t"/>
-          <a:lstStyle/>
-          <a:p>
-            <a:pPr indent="0" marL="0">
-              <a:buNone/>
-            </a:pPr>
-            <a:r>
-              <a:rPr lang="en-US" sz="1400" dirty="0">
-                <a:solidFill>
-                  <a:schemeClr val="tx1"/>
-                </a:solidFill>
-              </a:rPr>
-              <a:t>專案負責人同意時程，11-02 kick-off 排得出來</a:t>
-            </a:r>
-            <a:endParaRPr lang="en-US" sz="1400" dirty="0"/>
-          </a:p>
-        </p:txBody>
-      </p:sp>
-      <p:sp>
-        <p:nvSpPr>
-          <p:cNvPr id="11" name="s2_card2"/>
-          <p:cNvSpPr/>
-          <p:nvPr/>
-        </p:nvSpPr>
-        <p:spPr>
-          <a:xfrm>
-            <a:off x="6126480" y="1325880"/>
-            <a:ext cx="2560320" cy="3063240"/>
-          </a:xfrm>
-          <a:prstGeom prst="roundRect">
-            <a:avLst>
-              <a:gd name="adj" fmla="val 2857"/>
-            </a:avLst>
-          </a:prstGeom>
-          <a:solidFill>
-            <a:schemeClr val="bg1"/>
-          </a:solidFill>
-          <a:ln w="9525">
-            <a:solidFill>
-              <a:srgbClr val="E2E8EC"/>
-            </a:solidFill>
-            <a:prstDash val="solid"/>
-          </a:ln>
-        </p:spPr>
-      </p:sp>
-      <p:sp>
-        <p:nvSpPr>
-          <p:cNvPr id="12" name="Text 10"/>
-          <p:cNvSpPr txBox="1"/>
-          <p:nvPr/>
-        </p:nvSpPr>
-        <p:spPr>
-          <a:xfrm>
-            <a:off x="6355080" y="1554480"/>
-            <a:ext cx="2103120" cy="548640"/>
-          </a:xfrm>
-          <a:prstGeom prst="rect">
-            <a:avLst/>
-          </a:prstGeom>
-          <a:noFill/>
-          <a:ln/>
-        </p:spPr>
-        <p:txBody>
-          <a:bodyPr wrap="square" lIns="0" tIns="0" rIns="0" bIns="0" rtlCol="0" anchor="t"/>
-          <a:lstStyle/>
-          <a:p>
-            <a:pPr indent="0" marL="0">
-              <a:buNone/>
-            </a:pPr>
-            <a:r>
-              <a:rPr lang="en-US" sz="3000" b="1" dirty="0">
-                <a:solidFill>
-                  <a:schemeClr val="accent1"/>
-                </a:solidFill>
-              </a:rPr>
-              <a:t>03</a:t>
-            </a:r>
-            <a:endParaRPr lang="en-US" sz="3000" dirty="0"/>
-          </a:p>
-        </p:txBody>
-      </p:sp>
-      <p:sp>
-        <p:nvSpPr>
-          <p:cNvPr id="13" name="Text 11"/>
-          <p:cNvSpPr txBox="1"/>
-          <p:nvPr/>
-        </p:nvSpPr>
-        <p:spPr>
-          <a:xfrm>
-            <a:off x="6355080" y="2194560"/>
-            <a:ext cx="2103120" cy="777240"/>
-          </a:xfrm>
-          <a:prstGeom prst="rect">
-            <a:avLst/>
-          </a:prstGeom>
-          <a:noFill/>
-          <a:ln/>
-        </p:spPr>
-        <p:txBody>
-          <a:bodyPr wrap="square" lIns="0" tIns="0" rIns="0" bIns="0" rtlCol="0" anchor="t"/>
-          <a:lstStyle/>
-          <a:p>
-            <a:pPr indent="0" marL="0">
-              <a:buNone/>
-            </a:pPr>
-            <a:r>
-              <a:rPr lang="en-US" sz="1700" b="1" dirty="0">
-                <a:solidFill>
-                  <a:schemeClr val="tx1"/>
-                </a:solidFill>
-              </a:rPr>
-              <a:t>Merkle 與我們講同一張圖</a:t>
-            </a:r>
-            <a:endParaRPr lang="en-US" sz="1700" dirty="0"/>
-          </a:p>
-        </p:txBody>
-      </p:sp>
-      <p:sp>
-        <p:nvSpPr>
-          <p:cNvPr id="14" name="Text 12"/>
-          <p:cNvSpPr txBox="1"/>
-          <p:nvPr/>
-        </p:nvSpPr>
-        <p:spPr>
-          <a:xfrm>
-            <a:off x="6355080" y="3017520"/>
-            <a:ext cx="2103120" cy="1234440"/>
-          </a:xfrm>
-          <a:prstGeom prst="rect">
-            <a:avLst/>
-          </a:prstGeom>
-          <a:noFill/>
-          <a:ln/>
-        </p:spPr>
-        <p:txBody>
-          <a:bodyPr wrap="square" lIns="0" tIns="0" rIns="0" bIns="0" rtlCol="0" anchor="t"/>
-          <a:lstStyle/>
-          <a:p>
-            <a:pPr indent="0" marL="0">
-              <a:buNone/>
-            </a:pPr>
-            <a:r>
-              <a:rPr lang="en-US" sz="1400" dirty="0">
-                <a:solidFill>
-                  <a:schemeClr val="tx1"/>
-                </a:solidFill>
-              </a:rPr>
-              <a:t>交接點是 BigQuery 匯出與橋接表，客戶面前一個說法</a:t>
-            </a:r>
-            <a:endParaRPr lang="en-US" sz="1400" dirty="0"/>
-          </a:p>
-        </p:txBody>
-      </p:sp>
-      <p:sp>
-        <p:nvSpPr>
-          <p:cNvPr id="25" name="Slide Number Placeholder 0"/>
-          <p:cNvSpPr>
-            <a:spLocks noGrp="1"/>
-          </p:cNvSpPr>
-          <p:nvPr>
-            <p:ph type="sldNum" sz="quarter" idx="4294967295"/>
-          </p:nvPr>
-        </p:nvSpPr>
-        <p:spPr>
-          <a:xfrm>
-            <a:off x="8412480" y="4754880"/>
-            <a:ext cx="457200" cy="274320"/>
-          </a:xfrm>
-          <a:prstGeom prst="rect">
-            <a:avLst/>
-          </a:prstGeom>
-          <a:extLst>
-            <a:ext uri="{C572A759-6A51-4108-AA02-DFA0A04FC94B}">
-              <ma14:wrappingTextBoxFlag xmlns:ma14="http://schemas.microsoft.com/office/mac/drawingml/2011/main" val="0"/>
-            </a:ext>
-          </a:extLst>
-        </p:spPr>
-        <p:txBody>
-          <a:bodyPr/>
-          <a:lstStyle>
-            <a:lvl1pPr>
-              <a:defRPr sz="1000">
-                <a:solidFill>
-                  <a:srgbClr val="7C8992"/>
-                </a:solidFill>
-              </a:defRPr>
-            </a:lvl1pPr>
-          </a:lstStyle>
-          <a:p>
-            <a:pPr algn="r"/>
-            <a:fld id="{F7021451-1387-4CA6-816F-3879F97B5CBC}" type="slidenum">
-              <a:rPr b="0" lang="en-US"/>
-              <a:t>2</a:t>
-            </a:fld>
-            <a:endParaRPr lang="en-US"/>
-          </a:p>
-        </p:txBody>
-      </p:sp>
-    </p:spTree>
-  </p:cSld>
-  <p:clrMapOvr>
-    <a:masterClrMapping/>
-  </p:clrMapOvr>
-</p:sld>
-</file>
-
-<file path=ppt/slides/slide20.xml><?xml version="1.0" encoding="utf-8"?>
-<p:sld xmlns:a="http://schemas.openxmlformats.org/drawingml/2006/main" xmlns:r="http://schemas.openxmlformats.org/officeDocument/2006/relationships" xmlns:p="http://schemas.openxmlformats.org/presentationml/2006/main">
-  <p:cSld name="Slide 20">
-    <p:spTree>
-      <p:nvGrpSpPr>
-        <p:cNvPr id="1" name=""/>
-        <p:cNvGrpSpPr/>
-        <p:nvPr/>
-      </p:nvGrpSpPr>
-      <p:grpSpPr>
-        <a:xfrm>
-          <a:off x="0" y="0"/>
-          <a:ext cx="0" cy="0"/>
-          <a:chOff x="0" y="0"/>
-          <a:chExt cx="0" cy="0"/>
-        </a:xfrm>
-      </p:grpSpPr>
-      <p:sp>
-        <p:nvSpPr>
-          <p:cNvPr id="2" name="Text 0"/>
-          <p:cNvSpPr/>
-          <p:nvPr>
-            <p:ph idx="100" type="title" hasCustomPrompt="1"/>
-          </p:nvPr>
-        </p:nvSpPr>
-        <p:spPr>
-          <a:xfrm>
-            <a:off x="457200" y="274320"/>
-            <a:ext cx="8229600" cy="868680"/>
-          </a:xfrm>
-          <a:prstGeom prst="rect">
-            <a:avLst/>
-          </a:prstGeom>
-          <a:noFill/>
-          <a:ln/>
-        </p:spPr>
-        <p:txBody>
-          <a:bodyPr wrap="square" lIns="0" tIns="0" rIns="0" bIns="0" rtlCol="0" anchor="t"/>
-          <a:lstStyle/>
-          <a:p>
-            <a:pPr algn="l" indent="0" marL="0">
-              <a:buNone/>
-            </a:pPr>
-            <a:r>
-              <a:rPr lang="en-US" sz="2400" b="1" dirty="0">
-                <a:solidFill>
-                  <a:schemeClr val="tx1"/>
-                </a:solidFill>
-              </a:rPr>
               <a:t>規格外的放後續模組，需要時再加</a:t>
             </a:r>
             <a:endParaRPr lang="en-US" sz="2400" dirty="0"/>
@@ -10615,7 +16740,7 @@
       </p:sp>
       <p:graphicFrame>
         <p:nvGraphicFramePr>
-          <p:cNvPr id="21" name="Table 0"/>
+          <p:cNvPr id="24" name="Table 0"/>
           <p:cNvGraphicFramePr>
             <a:graphicFrameLocks noGrp="1"/>
           </p:cNvGraphicFramePr>
@@ -11579,7 +17704,7 @@
             <a:pPr algn="r"/>
             <a:fld id="{F7021451-1387-4CA6-816F-3879F97B5CBC}" type="slidenum">
               <a:rPr b="0" lang="en-US"/>
-              <a:t>20</a:t>
+              <a:t>23</a:t>
             </a:fld>
             <a:endParaRPr lang="en-US"/>
           </a:p>
@@ -11593,9 +17718,9 @@
 </p:sld>
 </file>
 
-<file path=ppt/slides/slide21.xml><?xml version="1.0" encoding="utf-8"?>
+<file path=ppt/slides/slide24.xml><?xml version="1.0" encoding="utf-8"?>
 <p:sld xmlns:a="http://schemas.openxmlformats.org/drawingml/2006/main" xmlns:r="http://schemas.openxmlformats.org/officeDocument/2006/relationships" xmlns:p="http://schemas.openxmlformats.org/presentationml/2006/main">
-  <p:cSld name="Slide 21">
+  <p:cSld name="Slide 24">
     <p:spTree>
       <p:nvGrpSpPr>
         <p:cNvPr id="1" name=""/>
@@ -11650,7 +17775,7 @@
       </p:sp>
       <p:graphicFrame>
         <p:nvGraphicFramePr>
-          <p:cNvPr id="22" name="Table 0"/>
+          <p:cNvPr id="25" name="Table 0"/>
           <p:cNvGraphicFramePr>
             <a:graphicFrameLocks noGrp="1"/>
           </p:cNvGraphicFramePr>
@@ -12776,7 +18901,7 @@
             <a:pPr algn="r"/>
             <a:fld id="{F7021451-1387-4CA6-816F-3879F97B5CBC}" type="slidenum">
               <a:rPr b="0" lang="en-US"/>
-              <a:t>21</a:t>
+              <a:t>24</a:t>
             </a:fld>
             <a:endParaRPr lang="en-US"/>
           </a:p>
@@ -12790,9 +18915,9 @@
 </p:sld>
 </file>
 
-<file path=ppt/slides/slide22.xml><?xml version="1.0" encoding="utf-8"?>
+<file path=ppt/slides/slide25.xml><?xml version="1.0" encoding="utf-8"?>
 <p:sld xmlns:a="http://schemas.openxmlformats.org/drawingml/2006/main" xmlns:r="http://schemas.openxmlformats.org/officeDocument/2006/relationships" xmlns:p="http://schemas.openxmlformats.org/presentationml/2006/main">
-  <p:cSld name="Slide 22">
+  <p:cSld name="Slide 25">
     <p:spTree>
       <p:nvGrpSpPr>
         <p:cNvPr id="1" name=""/>
@@ -13424,7 +19549,7 @@
             <a:pPr algn="r"/>
             <a:fld id="{F7021451-1387-4CA6-816F-3879F97B5CBC}" type="slidenum">
               <a:rPr b="0" lang="en-US"/>
-              <a:t>22</a:t>
+              <a:t>25</a:t>
             </a:fld>
             <a:endParaRPr lang="en-US"/>
           </a:p>

--- a/docs/decks/sinopac-dmp-proposal-v0.1.pptx
+++ b/docs/decks/sinopac-dmp-proposal-v0.1.pptx
@@ -131,7 +131,7 @@
   <p:extLst>
     <p:ext uri="{521415D9-36F7-43E2-AB2F-B90AF26B5E84}">
       <p14:sectionLst xmlns:p14="http://schemas.microsoft.com/office/powerpoint/2010/main">
-        <p14:section name="提案簡報初稿" id="{875d0275-aac5-7ff3-29e7-ca33bcaaed98}">
+        <p14:section name="提案簡報初稿" id="{1fd9de67-9777-e3be-cfa1-49278100f71b}">
           <p14:sldIdLst>
             <p14:sldId id="256"/>
             <p14:sldId id="257"/>
@@ -153,7 +153,7 @@
             <p14:sldId id="273"/>
           </p14:sldIdLst>
         </p14:section>
-        <p14:section name="報價初版（未稅）" id="{c0eeae4c-f458-840e-fce3-e597662e6506}">
+        <p14:section name="報價初版（未稅）" id="{0ad616b5-1501-1f39-9dbe-dc08ed201753}">
           <p14:sldIdLst>
             <p14:sldId id="274"/>
             <p14:sldId id="275"/>
@@ -162,7 +162,7 @@
             <p14:sldId id="278"/>
           </p14:sldIdLst>
         </p14:section>
-        <p14:section name="週一會前會" id="{965c5e05-f6f4-c9ac-32de-010c0d4163a2}">
+        <p14:section name="週一會前會" id="{80bcdd97-03ea-0c8c-3bef-76bf705b4cec}">
           <p14:sldIdLst>
             <p14:sldId id="279"/>
             <p14:sldId id="280"/>
@@ -22090,7 +22090,7 @@
                   <a:schemeClr val="tx1"/>
                 </a:solidFill>
               </a:rPr>
-              <a:t>示範站：altatech-dmp-demo.vercel.app（合成資料，不含客戶資料）</a:t>
+              <a:t>示範站：altatech-dmp.vercel.app（合成資料，不含客戶資料）</a:t>
             </a:r>
             <a:endParaRPr lang="en-US" sz="1500" dirty="0"/>
           </a:p>
